--- a/demos/Boardman_Arc_Hackathon.pptx
+++ b/demos/Boardman_Arc_Hackathon.pptx
@@ -1506,7 +1506,7 @@
             <a:avLst/>
           </a:prstGeom>
           <a:solidFill>
-            <a:srgbClr val="0B0B12"/>
+            <a:srgbClr val="07070C"/>
           </a:solidFill>
           <a:ln/>
         </p:spPr>
@@ -1520,13 +1520,13 @@
         <p:spPr>
           <a:xfrm>
             <a:off x="0" y="0"/>
-            <a:ext cx="164592" cy="6858000"/>
+            <a:ext cx="128016" cy="6858000"/>
           </a:xfrm>
           <a:prstGeom prst="rect">
             <a:avLst/>
           </a:prstGeom>
           <a:solidFill>
-            <a:srgbClr val="7C3AED"/>
+            <a:srgbClr val="8B5CF6"/>
           </a:solidFill>
           <a:ln/>
         </p:spPr>
@@ -1539,26 +1539,26 @@
         </p:nvSpPr>
         <p:spPr>
           <a:xfrm>
-            <a:off x="731520" y="1828800"/>
-            <a:ext cx="10058400" cy="822960"/>
-          </a:xfrm>
-          <a:prstGeom prst="rect">
-            <a:avLst/>
-          </a:prstGeom>
-          <a:noFill/>
-          <a:ln/>
-        </p:spPr>
-        <p:txBody>
-          <a:bodyPr wrap="square" rtlCol="0" anchor="ctr"/>
-          <a:lstStyle/>
-          <a:p>
-            <a:pPr indent="0" marL="0">
-              <a:buNone/>
-            </a:pPr>
-            <a:r>
-              <a:rPr lang="en-US" sz="4800" b="1" dirty="0">
-                <a:solidFill>
-                  <a:srgbClr val="F4F4F5"/>
+            <a:off x="822960" y="1737360"/>
+            <a:ext cx="10515600" cy="777240"/>
+          </a:xfrm>
+          <a:prstGeom prst="rect">
+            <a:avLst/>
+          </a:prstGeom>
+          <a:noFill/>
+          <a:ln/>
+        </p:spPr>
+        <p:txBody>
+          <a:bodyPr wrap="square" rtlCol="0" anchor="ctr"/>
+          <a:lstStyle/>
+          <a:p>
+            <a:pPr indent="0" marL="0">
+              <a:buNone/>
+            </a:pPr>
+            <a:r>
+              <a:rPr lang="en-US" sz="5200" b="1" dirty="0">
+                <a:solidFill>
+                  <a:srgbClr val="FAFAFA"/>
                 </a:solidFill>
                 <a:latin typeface="Arial" pitchFamily="34" charset="0"/>
                 <a:ea typeface="Arial" pitchFamily="34" charset="-122"/>
@@ -1566,7 +1566,7 @@
               </a:rPr>
               <a:t>BOARDMAN</a:t>
             </a:r>
-            <a:endParaRPr lang="en-US" sz="4800" dirty="0"/>
+            <a:endParaRPr lang="en-US" sz="5200" dirty="0"/>
           </a:p>
         </p:txBody>
       </p:sp>
@@ -1578,8 +1578,8 @@
         </p:nvSpPr>
         <p:spPr>
           <a:xfrm>
-            <a:off x="731520" y="2743200"/>
-            <a:ext cx="10058400" cy="1097280"/>
+            <a:off x="822960" y="2606040"/>
+            <a:ext cx="10515600" cy="457200"/>
           </a:xfrm>
           <a:prstGeom prst="rect">
             <a:avLst/>
@@ -1597,22 +1597,61 @@
             <a:r>
               <a:rPr lang="en-US" sz="2200" dirty="0">
                 <a:solidFill>
+                  <a:srgbClr val="8B5CF6"/>
+                </a:solidFill>
+                <a:latin typeface="Arial" pitchFamily="34" charset="0"/>
+                <a:ea typeface="Arial" pitchFamily="34" charset="-122"/>
+                <a:cs typeface="Arial" pitchFamily="34" charset="-120"/>
+              </a:rPr>
+              <a:t>Programmable USDC skill settlement on Arc</a:t>
+            </a:r>
+            <a:endParaRPr lang="en-US" sz="2200" dirty="0"/>
+          </a:p>
+        </p:txBody>
+      </p:sp>
+      <p:sp>
+        <p:nvSpPr>
+          <p:cNvPr id="6" name="Text 4"/>
+          <p:cNvSpPr/>
+          <p:nvPr/>
+        </p:nvSpPr>
+        <p:spPr>
+          <a:xfrm>
+            <a:off x="822960" y="3246120"/>
+            <a:ext cx="10058400" cy="1005840"/>
+          </a:xfrm>
+          <a:prstGeom prst="rect">
+            <a:avLst/>
+          </a:prstGeom>
+          <a:noFill/>
+          <a:ln/>
+        </p:spPr>
+        <p:txBody>
+          <a:bodyPr wrap="square" rtlCol="0" anchor="ctr"/>
+          <a:lstStyle/>
+          <a:p>
+            <a:pPr indent="0" marL="0">
+              <a:buNone/>
+            </a:pPr>
+            <a:r>
+              <a:rPr lang="en-US" sz="1600" dirty="0">
+                <a:solidFill>
                   <a:srgbClr val="A1A1AA"/>
                 </a:solidFill>
                 <a:latin typeface="Arial" pitchFamily="34" charset="0"/>
                 <a:ea typeface="Arial" pitchFamily="34" charset="-122"/>
                 <a:cs typeface="Arial" pitchFamily="34" charset="-120"/>
               </a:rPr>
-              <a:t>Programmable USDC skill settlement on Arc</a:t>
-            </a:r>
-            <a:endParaRPr lang="en-US" sz="2200" dirty="0"/>
-          </a:p>
-          <a:p>
-            <a:pPr indent="0" marL="0">
-              <a:buNone/>
-            </a:pPr>
-            <a:r>
-              <a:rPr lang="en-US" sz="2200" dirty="0">
+              <a:t>Humans dual-lock stakes. Agents play at grandmaster strength.</a:t>
+            </a:r>
+            <a:endParaRPr lang="en-US" sz="1600" dirty="0"/>
+          </a:p>
+          <a:p>
+            <a:pPr indent="0" marL="0">
+              <a:buNone/>
+            </a:pPr>
+            <a:r>
+              <a:rPr lang="en-US" sz="1600" dirty="0">
                 <a:solidFill>
                   <a:srgbClr val="A1A1AA"/>
                 </a:solidFill>
@@ -1620,48 +1659,109 @@
                 <a:ea typeface="Arial" pitchFamily="34" charset="-122"/>
                 <a:cs typeface="Arial" pitchFamily="34" charset="-120"/>
               </a:rPr>
-              <a:t>Humans · Agents · Spectators · LPs</a:t>
-            </a:r>
-            <a:endParaRPr lang="en-US" sz="2200" dirty="0"/>
-          </a:p>
-        </p:txBody>
-      </p:sp>
-      <p:sp>
-        <p:nvSpPr>
-          <p:cNvPr id="6" name="Text 4"/>
-          <p:cNvSpPr/>
-          <p:nvPr/>
-        </p:nvSpPr>
-        <p:spPr>
-          <a:xfrm>
-            <a:off x="731520" y="5943600"/>
-            <a:ext cx="10058400" cy="365760"/>
-          </a:xfrm>
-          <a:prstGeom prst="rect">
-            <a:avLst/>
-          </a:prstGeom>
-          <a:noFill/>
-          <a:ln/>
-        </p:spPr>
-        <p:txBody>
-          <a:bodyPr wrap="square" rtlCol="0" anchor="ctr"/>
-          <a:lstStyle/>
-          <a:p>
-            <a:pPr indent="0" marL="0">
-              <a:buNone/>
-            </a:pPr>
-            <a:r>
-              <a:rPr lang="en-US" sz="1400" dirty="0">
-                <a:solidFill>
-                  <a:srgbClr val="7C3AED"/>
-                </a:solidFill>
-                <a:latin typeface="Arial" pitchFamily="34" charset="0"/>
-                <a:ea typeface="Arial" pitchFamily="34" charset="-122"/>
-                <a:cs typeface="Arial" pitchFamily="34" charset="-120"/>
-              </a:rPr>
-              <a:t>Arc Programmable Money Hackathon  ·  DeFi + Agentic Economy  ·  sideQuest</a:t>
+              <a:t>Spectators stake any amount up to pot room. LPs fund bankrolls.</a:t>
+            </a:r>
+            <a:endParaRPr lang="en-US" sz="1600" dirty="0"/>
+          </a:p>
+        </p:txBody>
+      </p:sp>
+      <p:sp>
+        <p:nvSpPr>
+          <p:cNvPr id="7" name="Shape 5"/>
+          <p:cNvSpPr/>
+          <p:nvPr/>
+        </p:nvSpPr>
+        <p:spPr>
+          <a:xfrm>
+            <a:off x="822960" y="4663440"/>
+            <a:ext cx="3840480" cy="502920"/>
+          </a:xfrm>
+          <a:prstGeom prst="roundRect">
+            <a:avLst>
+              <a:gd name="adj" fmla="val 14545"/>
+            </a:avLst>
+          </a:prstGeom>
+          <a:solidFill>
+            <a:srgbClr val="8B5CF6"/>
+          </a:solidFill>
+          <a:ln/>
+        </p:spPr>
+      </p:sp>
+      <p:sp>
+        <p:nvSpPr>
+          <p:cNvPr id="8" name="Text 6"/>
+          <p:cNvSpPr/>
+          <p:nvPr/>
+        </p:nvSpPr>
+        <p:spPr>
+          <a:xfrm>
+            <a:off x="822960" y="4736592"/>
+            <a:ext cx="3840480" cy="365760"/>
+          </a:xfrm>
+          <a:prstGeom prst="rect">
+            <a:avLst/>
+          </a:prstGeom>
+          <a:noFill/>
+          <a:ln/>
+        </p:spPr>
+        <p:txBody>
+          <a:bodyPr wrap="square" rtlCol="0" anchor="ctr"/>
+          <a:lstStyle/>
+          <a:p>
+            <a:pPr algn="ctr" indent="0" marL="0">
+              <a:buNone/>
+            </a:pPr>
+            <a:r>
+              <a:rPr lang="en-US" sz="1400" b="1" dirty="0">
+                <a:solidFill>
+                  <a:srgbClr val="FFFFFF"/>
+                </a:solidFill>
+                <a:latin typeface="Arial" pitchFamily="34" charset="0"/>
+                <a:ea typeface="Arial" pitchFamily="34" charset="-122"/>
+                <a:cs typeface="Arial" pitchFamily="34" charset="-120"/>
+              </a:rPr>
+              <a:t>DeFi  +  Agentic Economy</a:t>
             </a:r>
             <a:endParaRPr lang="en-US" sz="1400" dirty="0"/>
+          </a:p>
+        </p:txBody>
+      </p:sp>
+      <p:sp>
+        <p:nvSpPr>
+          <p:cNvPr id="9" name="Text 7"/>
+          <p:cNvSpPr/>
+          <p:nvPr/>
+        </p:nvSpPr>
+        <p:spPr>
+          <a:xfrm>
+            <a:off x="640080" y="6446520"/>
+            <a:ext cx="10972800" cy="274320"/>
+          </a:xfrm>
+          <a:prstGeom prst="rect">
+            <a:avLst/>
+          </a:prstGeom>
+          <a:noFill/>
+          <a:ln/>
+        </p:spPr>
+        <p:txBody>
+          <a:bodyPr wrap="square" rtlCol="0" anchor="ctr"/>
+          <a:lstStyle/>
+          <a:p>
+            <a:pPr indent="0" marL="0">
+              <a:buNone/>
+            </a:pPr>
+            <a:r>
+              <a:rPr lang="en-US" sz="1100" dirty="0">
+                <a:solidFill>
+                  <a:srgbClr val="A1A1AA"/>
+                </a:solidFill>
+                <a:latin typeface="Arial" pitchFamily="34" charset="0"/>
+                <a:ea typeface="Arial" pitchFamily="34" charset="-122"/>
+                <a:cs typeface="Arial" pitchFamily="34" charset="-120"/>
+              </a:rPr>
+              <a:t>Late submission · Encode Club · Arc Programmable Money</a:t>
+            </a:r>
+            <a:endParaRPr lang="en-US" sz="1100" dirty="0"/>
           </a:p>
         </p:txBody>
       </p:sp>
@@ -1705,39 +1805,59 @@
             <a:avLst/>
           </a:prstGeom>
           <a:solidFill>
-            <a:srgbClr val="0B0B12"/>
+            <a:srgbClr val="07070C"/>
           </a:solidFill>
           <a:ln/>
         </p:spPr>
       </p:sp>
       <p:sp>
         <p:nvSpPr>
-          <p:cNvPr id="3" name="Text 1"/>
-          <p:cNvSpPr/>
-          <p:nvPr/>
-        </p:nvSpPr>
-        <p:spPr>
-          <a:xfrm>
-            <a:off x="640080" y="457200"/>
-            <a:ext cx="10972800" cy="548640"/>
-          </a:xfrm>
-          <a:prstGeom prst="rect">
-            <a:avLst/>
-          </a:prstGeom>
-          <a:noFill/>
-          <a:ln/>
-        </p:spPr>
-        <p:txBody>
-          <a:bodyPr wrap="square" rtlCol="0" anchor="ctr"/>
-          <a:lstStyle/>
-          <a:p>
-            <a:pPr indent="0" marL="0">
-              <a:buNone/>
-            </a:pPr>
-            <a:r>
-              <a:rPr lang="en-US" sz="3200" b="1" dirty="0">
-                <a:solidFill>
-                  <a:srgbClr val="F4F4F5"/>
+          <p:cNvPr id="3" name="Shape 1"/>
+          <p:cNvSpPr/>
+          <p:nvPr/>
+        </p:nvSpPr>
+        <p:spPr>
+          <a:xfrm>
+            <a:off x="0" y="0"/>
+            <a:ext cx="128016" cy="6858000"/>
+          </a:xfrm>
+          <a:prstGeom prst="rect">
+            <a:avLst/>
+          </a:prstGeom>
+          <a:solidFill>
+            <a:srgbClr val="8B5CF6"/>
+          </a:solidFill>
+          <a:ln/>
+        </p:spPr>
+      </p:sp>
+      <p:sp>
+        <p:nvSpPr>
+          <p:cNvPr id="4" name="Text 2"/>
+          <p:cNvSpPr/>
+          <p:nvPr/>
+        </p:nvSpPr>
+        <p:spPr>
+          <a:xfrm>
+            <a:off x="731520" y="411480"/>
+            <a:ext cx="10058400" cy="502920"/>
+          </a:xfrm>
+          <a:prstGeom prst="rect">
+            <a:avLst/>
+          </a:prstGeom>
+          <a:noFill/>
+          <a:ln/>
+        </p:spPr>
+        <p:txBody>
+          <a:bodyPr wrap="square" rtlCol="0" anchor="ctr"/>
+          <a:lstStyle/>
+          <a:p>
+            <a:pPr indent="0" marL="0">
+              <a:buNone/>
+            </a:pPr>
+            <a:r>
+              <a:rPr lang="en-US" sz="3000" b="1" dirty="0">
+                <a:solidFill>
+                  <a:srgbClr val="FAFAFA"/>
                 </a:solidFill>
                 <a:latin typeface="Arial" pitchFamily="34" charset="0"/>
                 <a:ea typeface="Arial" pitchFamily="34" charset="-122"/>
@@ -1745,70 +1865,38 @@
               </a:rPr>
               <a:t>The problem</a:t>
             </a:r>
-            <a:endParaRPr lang="en-US" sz="3200" dirty="0"/>
-          </a:p>
-        </p:txBody>
-      </p:sp>
-      <p:sp>
-        <p:nvSpPr>
-          <p:cNvPr id="4" name="Shape 2"/>
-          <p:cNvSpPr/>
-          <p:nvPr/>
-        </p:nvSpPr>
-        <p:spPr>
-          <a:xfrm>
-            <a:off x="640080" y="1463040"/>
-            <a:ext cx="3566160" cy="3840480"/>
+            <a:endParaRPr lang="en-US" sz="3000" dirty="0"/>
+          </a:p>
+        </p:txBody>
+      </p:sp>
+      <p:sp>
+        <p:nvSpPr>
+          <p:cNvPr id="5" name="Shape 3"/>
+          <p:cNvSpPr/>
+          <p:nvPr/>
+        </p:nvSpPr>
+        <p:spPr>
+          <a:xfrm>
+            <a:off x="731520" y="1234440"/>
+            <a:ext cx="10698480" cy="1371600"/>
           </a:xfrm>
           <a:prstGeom prst="roundRect">
             <a:avLst>
-              <a:gd name="adj" fmla="val 3846"/>
+              <a:gd name="adj" fmla="val 8000"/>
             </a:avLst>
           </a:prstGeom>
           <a:solidFill>
-            <a:srgbClr val="14141F"/>
+            <a:srgbClr val="12121C"/>
           </a:solidFill>
           <a:ln/>
-        </p:spPr>
-      </p:sp>
-      <p:sp>
-        <p:nvSpPr>
-          <p:cNvPr id="5" name="Text 3"/>
-          <p:cNvSpPr/>
-          <p:nvPr/>
-        </p:nvSpPr>
-        <p:spPr>
-          <a:xfrm>
-            <a:off x="868680" y="1828800"/>
-            <a:ext cx="3108960" cy="640080"/>
-          </a:xfrm>
-          <a:prstGeom prst="rect">
-            <a:avLst/>
-          </a:prstGeom>
-          <a:noFill/>
-          <a:ln/>
-        </p:spPr>
-        <p:txBody>
-          <a:bodyPr wrap="square" rtlCol="0" anchor="ctr"/>
-          <a:lstStyle/>
-          <a:p>
-            <a:pPr indent="0" marL="0">
-              <a:buNone/>
-            </a:pPr>
-            <a:r>
-              <a:rPr lang="en-US" sz="2000" b="1" dirty="0">
-                <a:solidFill>
-                  <a:srgbClr val="7C3AED"/>
-                </a:solidFill>
-                <a:latin typeface="Arial" pitchFamily="34" charset="0"/>
-                <a:ea typeface="Arial" pitchFamily="34" charset="-122"/>
-                <a:cs typeface="Arial" pitchFamily="34" charset="-120"/>
-              </a:rPr>
-              <a:t>Informal stakes</a:t>
-            </a:r>
-            <a:endParaRPr lang="en-US" sz="2000" dirty="0"/>
-          </a:p>
-        </p:txBody>
+          <a:effectLst>
+            <a:outerShdw sx="100000" sy="100000" kx="0" ky="0" algn="bl" rotWithShape="0" blurRad="152400" dist="38100" dir="16200000">
+              <a:srgbClr val="000000">
+                <a:alpha val="35000"/>
+              </a:srgbClr>
+            </a:outerShdw>
+          </a:effectLst>
+        </p:spPr>
       </p:sp>
       <p:sp>
         <p:nvSpPr>
@@ -1818,24 +1906,102 @@
         </p:nvSpPr>
         <p:spPr>
           <a:xfrm>
-            <a:off x="868680" y="2651760"/>
-            <a:ext cx="3108960" cy="2194560"/>
-          </a:xfrm>
-          <a:prstGeom prst="rect">
-            <a:avLst/>
-          </a:prstGeom>
-          <a:noFill/>
-          <a:ln/>
-        </p:spPr>
-        <p:txBody>
-          <a:bodyPr wrap="square" rtlCol="0" anchor="ctr"/>
-          <a:lstStyle/>
-          <a:p>
-            <a:pPr indent="0" marL="0">
-              <a:buNone/>
-            </a:pPr>
-            <a:r>
-              <a:rPr lang="en-US" sz="1600" dirty="0">
+            <a:off x="960120" y="1554480"/>
+            <a:ext cx="822960" cy="640080"/>
+          </a:xfrm>
+          <a:prstGeom prst="rect">
+            <a:avLst/>
+          </a:prstGeom>
+          <a:noFill/>
+          <a:ln/>
+        </p:spPr>
+        <p:txBody>
+          <a:bodyPr wrap="square" rtlCol="0" anchor="ctr"/>
+          <a:lstStyle/>
+          <a:p>
+            <a:pPr indent="0" marL="0">
+              <a:buNone/>
+            </a:pPr>
+            <a:r>
+              <a:rPr lang="en-US" sz="2800" b="1" dirty="0">
+                <a:solidFill>
+                  <a:srgbClr val="8B5CF6"/>
+                </a:solidFill>
+                <a:latin typeface="Arial" pitchFamily="34" charset="0"/>
+                <a:ea typeface="Arial" pitchFamily="34" charset="-122"/>
+                <a:cs typeface="Arial" pitchFamily="34" charset="-120"/>
+              </a:rPr>
+              <a:t>01</a:t>
+            </a:r>
+            <a:endParaRPr lang="en-US" sz="2800" dirty="0"/>
+          </a:p>
+        </p:txBody>
+      </p:sp>
+      <p:sp>
+        <p:nvSpPr>
+          <p:cNvPr id="7" name="Text 5"/>
+          <p:cNvSpPr/>
+          <p:nvPr/>
+        </p:nvSpPr>
+        <p:spPr>
+          <a:xfrm>
+            <a:off x="1920240" y="1508760"/>
+            <a:ext cx="9144000" cy="365760"/>
+          </a:xfrm>
+          <a:prstGeom prst="rect">
+            <a:avLst/>
+          </a:prstGeom>
+          <a:noFill/>
+          <a:ln/>
+        </p:spPr>
+        <p:txBody>
+          <a:bodyPr wrap="square" rtlCol="0" anchor="ctr"/>
+          <a:lstStyle/>
+          <a:p>
+            <a:pPr indent="0" marL="0">
+              <a:buNone/>
+            </a:pPr>
+            <a:r>
+              <a:rPr lang="en-US" sz="1800" b="1" dirty="0">
+                <a:solidFill>
+                  <a:srgbClr val="FAFAFA"/>
+                </a:solidFill>
+                <a:latin typeface="Arial" pitchFamily="34" charset="0"/>
+                <a:ea typeface="Arial" pitchFamily="34" charset="-122"/>
+                <a:cs typeface="Arial" pitchFamily="34" charset="-120"/>
+              </a:rPr>
+              <a:t>Informal skill stakes</a:t>
+            </a:r>
+            <a:endParaRPr lang="en-US" sz="1800" dirty="0"/>
+          </a:p>
+        </p:txBody>
+      </p:sp>
+      <p:sp>
+        <p:nvSpPr>
+          <p:cNvPr id="8" name="Text 6"/>
+          <p:cNvSpPr/>
+          <p:nvPr/>
+        </p:nvSpPr>
+        <p:spPr>
+          <a:xfrm>
+            <a:off x="1920240" y="1920240"/>
+            <a:ext cx="9144000" cy="457200"/>
+          </a:xfrm>
+          <a:prstGeom prst="rect">
+            <a:avLst/>
+          </a:prstGeom>
+          <a:noFill/>
+          <a:ln/>
+        </p:spPr>
+        <p:txBody>
+          <a:bodyPr wrap="square" rtlCol="0" anchor="ctr"/>
+          <a:lstStyle/>
+          <a:p>
+            <a:pPr indent="0" marL="0">
+              <a:buNone/>
+            </a:pPr>
+            <a:r>
+              <a:rPr lang="en-US" sz="1400" dirty="0">
                 <a:solidFill>
                   <a:srgbClr val="A1A1AA"/>
                 </a:solidFill>
@@ -1843,99 +2009,145 @@
                 <a:ea typeface="Arial" pitchFamily="34" charset="-122"/>
                 <a:cs typeface="Arial" pitchFamily="34" charset="-120"/>
               </a:rPr>
-              <a:t>Friends &amp; game centers put money on skill — settlement is trust-based and offline.</a:t>
-            </a:r>
-            <a:endParaRPr lang="en-US" sz="1600" dirty="0"/>
-          </a:p>
-        </p:txBody>
-      </p:sp>
-      <p:sp>
-        <p:nvSpPr>
-          <p:cNvPr id="7" name="Shape 5"/>
-          <p:cNvSpPr/>
-          <p:nvPr/>
-        </p:nvSpPr>
-        <p:spPr>
-          <a:xfrm>
-            <a:off x="4389120" y="1463040"/>
-            <a:ext cx="3566160" cy="3840480"/>
+              <a:t>Friends and game centers already put money on skill — settlement is trust and cash.</a:t>
+            </a:r>
+            <a:endParaRPr lang="en-US" sz="1400" dirty="0"/>
+          </a:p>
+        </p:txBody>
+      </p:sp>
+      <p:sp>
+        <p:nvSpPr>
+          <p:cNvPr id="9" name="Shape 7"/>
+          <p:cNvSpPr/>
+          <p:nvPr/>
+        </p:nvSpPr>
+        <p:spPr>
+          <a:xfrm>
+            <a:off x="731520" y="2788920"/>
+            <a:ext cx="10698480" cy="1371600"/>
           </a:xfrm>
           <a:prstGeom prst="roundRect">
             <a:avLst>
-              <a:gd name="adj" fmla="val 3846"/>
+              <a:gd name="adj" fmla="val 8000"/>
             </a:avLst>
           </a:prstGeom>
           <a:solidFill>
-            <a:srgbClr val="14141F"/>
+            <a:srgbClr val="12121C"/>
           </a:solidFill>
           <a:ln/>
-        </p:spPr>
-      </p:sp>
-      <p:sp>
-        <p:nvSpPr>
-          <p:cNvPr id="8" name="Text 6"/>
-          <p:cNvSpPr/>
-          <p:nvPr/>
-        </p:nvSpPr>
-        <p:spPr>
-          <a:xfrm>
-            <a:off x="4617720" y="1828800"/>
-            <a:ext cx="3108960" cy="640080"/>
-          </a:xfrm>
-          <a:prstGeom prst="rect">
-            <a:avLst/>
-          </a:prstGeom>
-          <a:noFill/>
-          <a:ln/>
-        </p:spPr>
-        <p:txBody>
-          <a:bodyPr wrap="square" rtlCol="0" anchor="ctr"/>
-          <a:lstStyle/>
-          <a:p>
-            <a:pPr indent="0" marL="0">
-              <a:buNone/>
-            </a:pPr>
-            <a:r>
-              <a:rPr lang="en-US" sz="2000" b="1" dirty="0">
-                <a:solidFill>
-                  <a:srgbClr val="7C3AED"/>
-                </a:solidFill>
-                <a:latin typeface="Arial" pitchFamily="34" charset="0"/>
-                <a:ea typeface="Arial" pitchFamily="34" charset="-122"/>
-                <a:cs typeface="Arial" pitchFamily="34" charset="-120"/>
-              </a:rPr>
-              <a:t>Agents have no rails</a:t>
-            </a:r>
-            <a:endParaRPr lang="en-US" sz="2000" dirty="0"/>
-          </a:p>
-        </p:txBody>
-      </p:sp>
-      <p:sp>
-        <p:nvSpPr>
-          <p:cNvPr id="9" name="Text 7"/>
-          <p:cNvSpPr/>
-          <p:nvPr/>
-        </p:nvSpPr>
-        <p:spPr>
-          <a:xfrm>
-            <a:off x="4617720" y="2651760"/>
-            <a:ext cx="3108960" cy="2194560"/>
-          </a:xfrm>
-          <a:prstGeom prst="rect">
-            <a:avLst/>
-          </a:prstGeom>
-          <a:noFill/>
-          <a:ln/>
-        </p:spPr>
-        <p:txBody>
-          <a:bodyPr wrap="square" rtlCol="0" anchor="ctr"/>
-          <a:lstStyle/>
-          <a:p>
-            <a:pPr indent="0" marL="0">
-              <a:buNone/>
-            </a:pPr>
-            <a:r>
-              <a:rPr lang="en-US" sz="1600" dirty="0">
+          <a:effectLst>
+            <a:outerShdw sx="100000" sy="100000" kx="0" ky="0" algn="bl" rotWithShape="0" blurRad="152400" dist="38100" dir="16200000">
+              <a:srgbClr val="000000">
+                <a:alpha val="35000"/>
+              </a:srgbClr>
+            </a:outerShdw>
+          </a:effectLst>
+        </p:spPr>
+      </p:sp>
+      <p:sp>
+        <p:nvSpPr>
+          <p:cNvPr id="10" name="Text 8"/>
+          <p:cNvSpPr/>
+          <p:nvPr/>
+        </p:nvSpPr>
+        <p:spPr>
+          <a:xfrm>
+            <a:off x="960120" y="3108960"/>
+            <a:ext cx="822960" cy="640080"/>
+          </a:xfrm>
+          <a:prstGeom prst="rect">
+            <a:avLst/>
+          </a:prstGeom>
+          <a:noFill/>
+          <a:ln/>
+        </p:spPr>
+        <p:txBody>
+          <a:bodyPr wrap="square" rtlCol="0" anchor="ctr"/>
+          <a:lstStyle/>
+          <a:p>
+            <a:pPr indent="0" marL="0">
+              <a:buNone/>
+            </a:pPr>
+            <a:r>
+              <a:rPr lang="en-US" sz="2800" b="1" dirty="0">
+                <a:solidFill>
+                  <a:srgbClr val="8B5CF6"/>
+                </a:solidFill>
+                <a:latin typeface="Arial" pitchFamily="34" charset="0"/>
+                <a:ea typeface="Arial" pitchFamily="34" charset="-122"/>
+                <a:cs typeface="Arial" pitchFamily="34" charset="-120"/>
+              </a:rPr>
+              <a:t>02</a:t>
+            </a:r>
+            <a:endParaRPr lang="en-US" sz="2800" dirty="0"/>
+          </a:p>
+        </p:txBody>
+      </p:sp>
+      <p:sp>
+        <p:nvSpPr>
+          <p:cNvPr id="11" name="Text 9"/>
+          <p:cNvSpPr/>
+          <p:nvPr/>
+        </p:nvSpPr>
+        <p:spPr>
+          <a:xfrm>
+            <a:off x="1920240" y="3063240"/>
+            <a:ext cx="9144000" cy="365760"/>
+          </a:xfrm>
+          <a:prstGeom prst="rect">
+            <a:avLst/>
+          </a:prstGeom>
+          <a:noFill/>
+          <a:ln/>
+        </p:spPr>
+        <p:txBody>
+          <a:bodyPr wrap="square" rtlCol="0" anchor="ctr"/>
+          <a:lstStyle/>
+          <a:p>
+            <a:pPr indent="0" marL="0">
+              <a:buNone/>
+            </a:pPr>
+            <a:r>
+              <a:rPr lang="en-US" sz="1800" b="1" dirty="0">
+                <a:solidFill>
+                  <a:srgbClr val="FAFAFA"/>
+                </a:solidFill>
+                <a:latin typeface="Arial" pitchFamily="34" charset="0"/>
+                <a:ea typeface="Arial" pitchFamily="34" charset="-122"/>
+                <a:cs typeface="Arial" pitchFamily="34" charset="-120"/>
+              </a:rPr>
+              <a:t>Agents have no money rails</a:t>
+            </a:r>
+            <a:endParaRPr lang="en-US" sz="1800" dirty="0"/>
+          </a:p>
+        </p:txBody>
+      </p:sp>
+      <p:sp>
+        <p:nvSpPr>
+          <p:cNvPr id="12" name="Text 10"/>
+          <p:cNvSpPr/>
+          <p:nvPr/>
+        </p:nvSpPr>
+        <p:spPr>
+          <a:xfrm>
+            <a:off x="1920240" y="3474720"/>
+            <a:ext cx="9144000" cy="457200"/>
+          </a:xfrm>
+          <a:prstGeom prst="rect">
+            <a:avLst/>
+          </a:prstGeom>
+          <a:noFill/>
+          <a:ln/>
+        </p:spPr>
+        <p:txBody>
+          <a:bodyPr wrap="square" rtlCol="0" anchor="ctr"/>
+          <a:lstStyle/>
+          <a:p>
+            <a:pPr indent="0" marL="0">
+              <a:buNone/>
+            </a:pPr>
+            <a:r>
+              <a:rPr lang="en-US" sz="1400" dirty="0">
                 <a:solidFill>
                   <a:srgbClr val="A1A1AA"/>
                 </a:solidFill>
@@ -1943,99 +2155,145 @@
                 <a:ea typeface="Arial" pitchFamily="34" charset="-122"/>
                 <a:cs typeface="Arial" pitchFamily="34" charset="-120"/>
               </a:rPr>
-              <a:t>AI agents can play, but lack wallets, equal stakes, fees, and a public market.</a:t>
-            </a:r>
-            <a:endParaRPr lang="en-US" sz="1600" dirty="0"/>
-          </a:p>
-        </p:txBody>
-      </p:sp>
-      <p:sp>
-        <p:nvSpPr>
-          <p:cNvPr id="10" name="Shape 8"/>
-          <p:cNvSpPr/>
-          <p:nvPr/>
-        </p:nvSpPr>
-        <p:spPr>
-          <a:xfrm>
-            <a:off x="8138160" y="1463040"/>
-            <a:ext cx="3566160" cy="3840480"/>
+              <a:t>AI can play chess, but lacks bankrolls, equal stakes, fees, and a public market.</a:t>
+            </a:r>
+            <a:endParaRPr lang="en-US" sz="1400" dirty="0"/>
+          </a:p>
+        </p:txBody>
+      </p:sp>
+      <p:sp>
+        <p:nvSpPr>
+          <p:cNvPr id="13" name="Shape 11"/>
+          <p:cNvSpPr/>
+          <p:nvPr/>
+        </p:nvSpPr>
+        <p:spPr>
+          <a:xfrm>
+            <a:off x="731520" y="4343400"/>
+            <a:ext cx="10698480" cy="1371600"/>
           </a:xfrm>
           <a:prstGeom prst="roundRect">
             <a:avLst>
-              <a:gd name="adj" fmla="val 3846"/>
+              <a:gd name="adj" fmla="val 8000"/>
             </a:avLst>
           </a:prstGeom>
           <a:solidFill>
-            <a:srgbClr val="14141F"/>
+            <a:srgbClr val="12121C"/>
           </a:solidFill>
           <a:ln/>
-        </p:spPr>
-      </p:sp>
-      <p:sp>
-        <p:nvSpPr>
-          <p:cNvPr id="11" name="Text 9"/>
-          <p:cNvSpPr/>
-          <p:nvPr/>
-        </p:nvSpPr>
-        <p:spPr>
-          <a:xfrm>
-            <a:off x="8366760" y="1828800"/>
-            <a:ext cx="3108960" cy="640080"/>
-          </a:xfrm>
-          <a:prstGeom prst="rect">
-            <a:avLst/>
-          </a:prstGeom>
-          <a:noFill/>
-          <a:ln/>
-        </p:spPr>
-        <p:txBody>
-          <a:bodyPr wrap="square" rtlCol="0" anchor="ctr"/>
-          <a:lstStyle/>
-          <a:p>
-            <a:pPr indent="0" marL="0">
-              <a:buNone/>
-            </a:pPr>
-            <a:r>
-              <a:rPr lang="en-US" sz="2000" b="1" dirty="0">
-                <a:solidFill>
-                  <a:srgbClr val="7C3AED"/>
-                </a:solidFill>
-                <a:latin typeface="Arial" pitchFamily="34" charset="0"/>
-                <a:ea typeface="Arial" pitchFamily="34" charset="-122"/>
-                <a:cs typeface="Arial" pitchFamily="34" charset="-120"/>
-              </a:rPr>
-              <a:t>Gas friction</a:t>
-            </a:r>
-            <a:endParaRPr lang="en-US" sz="2000" dirty="0"/>
-          </a:p>
-        </p:txBody>
-      </p:sp>
-      <p:sp>
-        <p:nvSpPr>
-          <p:cNvPr id="12" name="Text 10"/>
-          <p:cNvSpPr/>
-          <p:nvPr/>
-        </p:nvSpPr>
-        <p:spPr>
-          <a:xfrm>
-            <a:off x="8366760" y="2651760"/>
-            <a:ext cx="3108960" cy="2194560"/>
-          </a:xfrm>
-          <a:prstGeom prst="rect">
-            <a:avLst/>
-          </a:prstGeom>
-          <a:noFill/>
-          <a:ln/>
-        </p:spPr>
-        <p:txBody>
-          <a:bodyPr wrap="square" rtlCol="0" anchor="ctr"/>
-          <a:lstStyle/>
-          <a:p>
-            <a:pPr indent="0" marL="0">
-              <a:buNone/>
-            </a:pPr>
-            <a:r>
-              <a:rPr lang="en-US" sz="1600" dirty="0">
+          <a:effectLst>
+            <a:outerShdw sx="100000" sy="100000" kx="0" ky="0" algn="bl" rotWithShape="0" blurRad="152400" dist="38100" dir="16200000">
+              <a:srgbClr val="000000">
+                <a:alpha val="35000"/>
+              </a:srgbClr>
+            </a:outerShdw>
+          </a:effectLst>
+        </p:spPr>
+      </p:sp>
+      <p:sp>
+        <p:nvSpPr>
+          <p:cNvPr id="14" name="Text 12"/>
+          <p:cNvSpPr/>
+          <p:nvPr/>
+        </p:nvSpPr>
+        <p:spPr>
+          <a:xfrm>
+            <a:off x="960120" y="4663440"/>
+            <a:ext cx="822960" cy="640080"/>
+          </a:xfrm>
+          <a:prstGeom prst="rect">
+            <a:avLst/>
+          </a:prstGeom>
+          <a:noFill/>
+          <a:ln/>
+        </p:spPr>
+        <p:txBody>
+          <a:bodyPr wrap="square" rtlCol="0" anchor="ctr"/>
+          <a:lstStyle/>
+          <a:p>
+            <a:pPr indent="0" marL="0">
+              <a:buNone/>
+            </a:pPr>
+            <a:r>
+              <a:rPr lang="en-US" sz="2800" b="1" dirty="0">
+                <a:solidFill>
+                  <a:srgbClr val="8B5CF6"/>
+                </a:solidFill>
+                <a:latin typeface="Arial" pitchFamily="34" charset="0"/>
+                <a:ea typeface="Arial" pitchFamily="34" charset="-122"/>
+                <a:cs typeface="Arial" pitchFamily="34" charset="-120"/>
+              </a:rPr>
+              <a:t>03</a:t>
+            </a:r>
+            <a:endParaRPr lang="en-US" sz="2800" dirty="0"/>
+          </a:p>
+        </p:txBody>
+      </p:sp>
+      <p:sp>
+        <p:nvSpPr>
+          <p:cNvPr id="15" name="Text 13"/>
+          <p:cNvSpPr/>
+          <p:nvPr/>
+        </p:nvSpPr>
+        <p:spPr>
+          <a:xfrm>
+            <a:off x="1920240" y="4617720"/>
+            <a:ext cx="9144000" cy="365760"/>
+          </a:xfrm>
+          <a:prstGeom prst="rect">
+            <a:avLst/>
+          </a:prstGeom>
+          <a:noFill/>
+          <a:ln/>
+        </p:spPr>
+        <p:txBody>
+          <a:bodyPr wrap="square" rtlCol="0" anchor="ctr"/>
+          <a:lstStyle/>
+          <a:p>
+            <a:pPr indent="0" marL="0">
+              <a:buNone/>
+            </a:pPr>
+            <a:r>
+              <a:rPr lang="en-US" sz="1800" b="1" dirty="0">
+                <a:solidFill>
+                  <a:srgbClr val="FAFAFA"/>
+                </a:solidFill>
+                <a:latin typeface="Arial" pitchFamily="34" charset="0"/>
+                <a:ea typeface="Arial" pitchFamily="34" charset="-122"/>
+                <a:cs typeface="Arial" pitchFamily="34" charset="-120"/>
+              </a:rPr>
+              <a:t>Gas friction kills UX</a:t>
+            </a:r>
+            <a:endParaRPr lang="en-US" sz="1800" dirty="0"/>
+          </a:p>
+        </p:txBody>
+      </p:sp>
+      <p:sp>
+        <p:nvSpPr>
+          <p:cNvPr id="16" name="Text 14"/>
+          <p:cNvSpPr/>
+          <p:nvPr/>
+        </p:nvSpPr>
+        <p:spPr>
+          <a:xfrm>
+            <a:off x="1920240" y="5029200"/>
+            <a:ext cx="9144000" cy="457200"/>
+          </a:xfrm>
+          <a:prstGeom prst="rect">
+            <a:avLst/>
+          </a:prstGeom>
+          <a:noFill/>
+          <a:ln/>
+        </p:spPr>
+        <p:txBody>
+          <a:bodyPr wrap="square" rtlCol="0" anchor="ctr"/>
+          <a:lstStyle/>
+          <a:p>
+            <a:pPr indent="0" marL="0">
+              <a:buNone/>
+            </a:pPr>
+            <a:r>
+              <a:rPr lang="en-US" sz="1400" dirty="0">
                 <a:solidFill>
                   <a:srgbClr val="A1A1AA"/>
                 </a:solidFill>
@@ -2043,9 +2301,48 @@
                 <a:ea typeface="Arial" pitchFamily="34" charset="-122"/>
                 <a:cs typeface="Arial" pitchFamily="34" charset="-120"/>
               </a:rPr>
-              <a:t>Emerging-market players shouldn't hunt for gas tokens to settle $5 USDC matches.</a:t>
-            </a:r>
-            <a:endParaRPr lang="en-US" sz="1600" dirty="0"/>
+              <a:t>Emerging-market players shouldn’t hunt gas tokens to settle a $5 USDC match.</a:t>
+            </a:r>
+            <a:endParaRPr lang="en-US" sz="1400" dirty="0"/>
+          </a:p>
+        </p:txBody>
+      </p:sp>
+      <p:sp>
+        <p:nvSpPr>
+          <p:cNvPr id="17" name="Text 15"/>
+          <p:cNvSpPr/>
+          <p:nvPr/>
+        </p:nvSpPr>
+        <p:spPr>
+          <a:xfrm>
+            <a:off x="640080" y="6446520"/>
+            <a:ext cx="10972800" cy="274320"/>
+          </a:xfrm>
+          <a:prstGeom prst="rect">
+            <a:avLst/>
+          </a:prstGeom>
+          <a:noFill/>
+          <a:ln/>
+        </p:spPr>
+        <p:txBody>
+          <a:bodyPr wrap="square" rtlCol="0" anchor="ctr"/>
+          <a:lstStyle/>
+          <a:p>
+            <a:pPr indent="0" marL="0">
+              <a:buNone/>
+            </a:pPr>
+            <a:r>
+              <a:rPr lang="en-US" sz="1100" dirty="0">
+                <a:solidFill>
+                  <a:srgbClr val="A1A1AA"/>
+                </a:solidFill>
+                <a:latin typeface="Arial" pitchFamily="34" charset="0"/>
+                <a:ea typeface="Arial" pitchFamily="34" charset="-122"/>
+                <a:cs typeface="Arial" pitchFamily="34" charset="-120"/>
+              </a:rPr>
+              <a:t>Boardman · sideQuest · Arc Programmable Money Hackathon</a:t>
+            </a:r>
+            <a:endParaRPr lang="en-US" sz="1100" dirty="0"/>
           </a:p>
         </p:txBody>
       </p:sp>
@@ -2089,49 +2386,30 @@
             <a:avLst/>
           </a:prstGeom>
           <a:solidFill>
-            <a:srgbClr val="0B0B12"/>
+            <a:srgbClr val="07070C"/>
           </a:solidFill>
           <a:ln/>
         </p:spPr>
       </p:sp>
       <p:sp>
         <p:nvSpPr>
-          <p:cNvPr id="3" name="Text 1"/>
-          <p:cNvSpPr/>
-          <p:nvPr/>
-        </p:nvSpPr>
-        <p:spPr>
-          <a:xfrm>
-            <a:off x="640080" y="457200"/>
-            <a:ext cx="10972800" cy="548640"/>
-          </a:xfrm>
-          <a:prstGeom prst="rect">
-            <a:avLst/>
-          </a:prstGeom>
-          <a:noFill/>
-          <a:ln/>
-        </p:spPr>
-        <p:txBody>
-          <a:bodyPr wrap="square" rtlCol="0" anchor="ctr"/>
-          <a:lstStyle/>
-          <a:p>
-            <a:pPr indent="0" marL="0">
-              <a:buNone/>
-            </a:pPr>
-            <a:r>
-              <a:rPr lang="en-US" sz="3200" b="1" dirty="0">
-                <a:solidFill>
-                  <a:srgbClr val="F4F4F5"/>
-                </a:solidFill>
-                <a:latin typeface="Arial" pitchFamily="34" charset="0"/>
-                <a:ea typeface="Arial" pitchFamily="34" charset="-122"/>
-                <a:cs typeface="Arial" pitchFamily="34" charset="-120"/>
-              </a:rPr>
-              <a:t>The solution: Boardman</a:t>
-            </a:r>
-            <a:endParaRPr lang="en-US" sz="3200" dirty="0"/>
-          </a:p>
-        </p:txBody>
+          <p:cNvPr id="3" name="Shape 1"/>
+          <p:cNvSpPr/>
+          <p:nvPr/>
+        </p:nvSpPr>
+        <p:spPr>
+          <a:xfrm>
+            <a:off x="0" y="0"/>
+            <a:ext cx="128016" cy="6858000"/>
+          </a:xfrm>
+          <a:prstGeom prst="rect">
+            <a:avLst/>
+          </a:prstGeom>
+          <a:solidFill>
+            <a:srgbClr val="8B5CF6"/>
+          </a:solidFill>
+          <a:ln/>
+        </p:spPr>
       </p:sp>
       <p:sp>
         <p:nvSpPr>
@@ -2141,24 +2419,63 @@
         </p:nvSpPr>
         <p:spPr>
           <a:xfrm>
-            <a:off x="640080" y="1097280"/>
-            <a:ext cx="10972800" cy="365760"/>
-          </a:xfrm>
-          <a:prstGeom prst="rect">
-            <a:avLst/>
-          </a:prstGeom>
-          <a:noFill/>
-          <a:ln/>
-        </p:spPr>
-        <p:txBody>
-          <a:bodyPr wrap="square" rtlCol="0" anchor="ctr"/>
-          <a:lstStyle/>
-          <a:p>
-            <a:pPr indent="0" marL="0">
-              <a:buNone/>
-            </a:pPr>
-            <a:r>
-              <a:rPr lang="en-US" sz="1800" dirty="0">
+            <a:off x="731520" y="411480"/>
+            <a:ext cx="10058400" cy="502920"/>
+          </a:xfrm>
+          <a:prstGeom prst="rect">
+            <a:avLst/>
+          </a:prstGeom>
+          <a:noFill/>
+          <a:ln/>
+        </p:spPr>
+        <p:txBody>
+          <a:bodyPr wrap="square" rtlCol="0" anchor="ctr"/>
+          <a:lstStyle/>
+          <a:p>
+            <a:pPr indent="0" marL="0">
+              <a:buNone/>
+            </a:pPr>
+            <a:r>
+              <a:rPr lang="en-US" sz="3000" b="1" dirty="0">
+                <a:solidFill>
+                  <a:srgbClr val="FAFAFA"/>
+                </a:solidFill>
+                <a:latin typeface="Arial" pitchFamily="34" charset="0"/>
+                <a:ea typeface="Arial" pitchFamily="34" charset="-122"/>
+                <a:cs typeface="Arial" pitchFamily="34" charset="-120"/>
+              </a:rPr>
+              <a:t>One stack. Two layers.</a:t>
+            </a:r>
+            <a:endParaRPr lang="en-US" sz="3000" dirty="0"/>
+          </a:p>
+        </p:txBody>
+      </p:sp>
+      <p:sp>
+        <p:nvSpPr>
+          <p:cNvPr id="5" name="Text 3"/>
+          <p:cNvSpPr/>
+          <p:nvPr/>
+        </p:nvSpPr>
+        <p:spPr>
+          <a:xfrm>
+            <a:off x="731520" y="960120"/>
+            <a:ext cx="10058400" cy="320040"/>
+          </a:xfrm>
+          <a:prstGeom prst="rect">
+            <a:avLst/>
+          </a:prstGeom>
+          <a:noFill/>
+          <a:ln/>
+        </p:spPr>
+        <p:txBody>
+          <a:bodyPr wrap="square" rtlCol="0" anchor="ctr"/>
+          <a:lstStyle/>
+          <a:p>
+            <a:pPr indent="0" marL="0">
+              <a:buNone/>
+            </a:pPr>
+            <a:r>
+              <a:rPr lang="en-US" sz="1500" dirty="0">
                 <a:solidFill>
                   <a:srgbClr val="A1A1AA"/>
                 </a:solidFill>
@@ -2166,44 +2483,51 @@
                 <a:ea typeface="Arial" pitchFamily="34" charset="-122"/>
                 <a:cs typeface="Arial" pitchFamily="34" charset="-120"/>
               </a:rPr>
-              <a:t>One stack. Two layers. Shared Arc / USDC rails.</a:t>
-            </a:r>
-            <a:endParaRPr lang="en-US" sz="1800" dirty="0"/>
-          </a:p>
-        </p:txBody>
-      </p:sp>
-      <p:sp>
-        <p:nvSpPr>
-          <p:cNvPr id="5" name="Shape 3"/>
-          <p:cNvSpPr/>
-          <p:nvPr/>
-        </p:nvSpPr>
-        <p:spPr>
-          <a:xfrm>
-            <a:off x="640080" y="1737360"/>
-            <a:ext cx="10972800" cy="914400"/>
+              <a:t>Same Arc / USDC rails for humans and agents.</a:t>
+            </a:r>
+            <a:endParaRPr lang="en-US" sz="1500" dirty="0"/>
+          </a:p>
+        </p:txBody>
+      </p:sp>
+      <p:sp>
+        <p:nvSpPr>
+          <p:cNvPr id="6" name="Shape 4"/>
+          <p:cNvSpPr/>
+          <p:nvPr/>
+        </p:nvSpPr>
+        <p:spPr>
+          <a:xfrm>
+            <a:off x="502920" y="1463040"/>
+            <a:ext cx="2788920" cy="4389120"/>
           </a:xfrm>
           <a:prstGeom prst="roundRect">
             <a:avLst>
-              <a:gd name="adj" fmla="val 10000"/>
+              <a:gd name="adj" fmla="val 3934"/>
             </a:avLst>
           </a:prstGeom>
           <a:solidFill>
-            <a:srgbClr val="14141F"/>
+            <a:srgbClr val="12121C"/>
           </a:solidFill>
           <a:ln/>
-        </p:spPr>
-      </p:sp>
-      <p:sp>
-        <p:nvSpPr>
-          <p:cNvPr id="6" name="Text 4"/>
-          <p:cNvSpPr/>
-          <p:nvPr/>
-        </p:nvSpPr>
-        <p:spPr>
-          <a:xfrm>
-            <a:off x="914400" y="1965960"/>
-            <a:ext cx="2286000" cy="457200"/>
+          <a:effectLst>
+            <a:outerShdw sx="100000" sy="100000" kx="0" ky="0" algn="bl" rotWithShape="0" blurRad="152400" dist="38100" dir="16200000">
+              <a:srgbClr val="000000">
+                <a:alpha val="35000"/>
+              </a:srgbClr>
+            </a:outerShdw>
+          </a:effectLst>
+        </p:spPr>
+      </p:sp>
+      <p:sp>
+        <p:nvSpPr>
+          <p:cNvPr id="7" name="Text 5"/>
+          <p:cNvSpPr/>
+          <p:nvPr/>
+        </p:nvSpPr>
+        <p:spPr>
+          <a:xfrm>
+            <a:off x="685800" y="1691640"/>
+            <a:ext cx="2423160" cy="411480"/>
           </a:xfrm>
           <a:prstGeom prst="rect">
             <a:avLst/>
@@ -2235,75 +2559,199 @@
       </p:sp>
       <p:sp>
         <p:nvSpPr>
-          <p:cNvPr id="7" name="Text 5"/>
-          <p:cNvSpPr/>
-          <p:nvPr/>
-        </p:nvSpPr>
-        <p:spPr>
-          <a:xfrm>
-            <a:off x="3291840" y="1965960"/>
-            <a:ext cx="8046720" cy="457200"/>
-          </a:xfrm>
-          <a:prstGeom prst="rect">
-            <a:avLst/>
-          </a:prstGeom>
-          <a:noFill/>
-          <a:ln/>
-        </p:spPr>
-        <p:txBody>
-          <a:bodyPr wrap="square" rtlCol="0" anchor="ctr"/>
-          <a:lstStyle/>
-          <a:p>
-            <a:pPr indent="0" marL="0">
-              <a:buNone/>
-            </a:pPr>
-            <a:r>
-              <a:rPr lang="en-US" sz="1600" dirty="0">
-                <a:solidFill>
-                  <a:srgbClr val="F4F4F5"/>
-                </a:solidFill>
-                <a:latin typeface="Arial" pitchFamily="34" charset="0"/>
-                <a:ea typeface="Arial" pitchFamily="34" charset="-122"/>
-                <a:cs typeface="Arial" pitchFamily="34" charset="-120"/>
-              </a:rPr>
-              <a:t>Telegram 1v1 · dual-lock escrow · AI screenshot settle</a:t>
-            </a:r>
-            <a:endParaRPr lang="en-US" sz="1600" dirty="0"/>
-          </a:p>
-        </p:txBody>
-      </p:sp>
-      <p:sp>
-        <p:nvSpPr>
-          <p:cNvPr id="8" name="Shape 6"/>
-          <p:cNvSpPr/>
-          <p:nvPr/>
-        </p:nvSpPr>
-        <p:spPr>
-          <a:xfrm>
-            <a:off x="640080" y="2788920"/>
-            <a:ext cx="10972800" cy="914400"/>
+          <p:cNvPr id="8" name="Text 6"/>
+          <p:cNvSpPr/>
+          <p:nvPr/>
+        </p:nvSpPr>
+        <p:spPr>
+          <a:xfrm>
+            <a:off x="685800" y="2331720"/>
+            <a:ext cx="2423160" cy="502920"/>
+          </a:xfrm>
+          <a:prstGeom prst="rect">
+            <a:avLst/>
+          </a:prstGeom>
+          <a:noFill/>
+          <a:ln/>
+        </p:spPr>
+        <p:txBody>
+          <a:bodyPr wrap="square" rtlCol="0" anchor="ctr"/>
+          <a:lstStyle/>
+          <a:p>
+            <a:pPr indent="0" marL="0">
+              <a:buNone/>
+            </a:pPr>
+            <a:r>
+              <a:rPr lang="en-US" sz="1300" dirty="0">
+                <a:solidFill>
+                  <a:srgbClr val="A1A1AA"/>
+                </a:solidFill>
+                <a:latin typeface="Arial" pitchFamily="34" charset="0"/>
+                <a:ea typeface="Arial" pitchFamily="34" charset="-122"/>
+                <a:cs typeface="Arial" pitchFamily="34" charset="-120"/>
+              </a:rPr>
+              <a:t>•  Telegram 1v1</a:t>
+            </a:r>
+            <a:endParaRPr lang="en-US" sz="1300" dirty="0"/>
+          </a:p>
+        </p:txBody>
+      </p:sp>
+      <p:sp>
+        <p:nvSpPr>
+          <p:cNvPr id="9" name="Text 7"/>
+          <p:cNvSpPr/>
+          <p:nvPr/>
+        </p:nvSpPr>
+        <p:spPr>
+          <a:xfrm>
+            <a:off x="685800" y="2971800"/>
+            <a:ext cx="2423160" cy="502920"/>
+          </a:xfrm>
+          <a:prstGeom prst="rect">
+            <a:avLst/>
+          </a:prstGeom>
+          <a:noFill/>
+          <a:ln/>
+        </p:spPr>
+        <p:txBody>
+          <a:bodyPr wrap="square" rtlCol="0" anchor="ctr"/>
+          <a:lstStyle/>
+          <a:p>
+            <a:pPr indent="0" marL="0">
+              <a:buNone/>
+            </a:pPr>
+            <a:r>
+              <a:rPr lang="en-US" sz="1300" dirty="0">
+                <a:solidFill>
+                  <a:srgbClr val="A1A1AA"/>
+                </a:solidFill>
+                <a:latin typeface="Arial" pitchFamily="34" charset="0"/>
+                <a:ea typeface="Arial" pitchFamily="34" charset="-122"/>
+                <a:cs typeface="Arial" pitchFamily="34" charset="-120"/>
+              </a:rPr>
+              <a:t>•  Dual-lock escrow</a:t>
+            </a:r>
+            <a:endParaRPr lang="en-US" sz="1300" dirty="0"/>
+          </a:p>
+        </p:txBody>
+      </p:sp>
+      <p:sp>
+        <p:nvSpPr>
+          <p:cNvPr id="10" name="Text 8"/>
+          <p:cNvSpPr/>
+          <p:nvPr/>
+        </p:nvSpPr>
+        <p:spPr>
+          <a:xfrm>
+            <a:off x="685800" y="3611880"/>
+            <a:ext cx="2423160" cy="502920"/>
+          </a:xfrm>
+          <a:prstGeom prst="rect">
+            <a:avLst/>
+          </a:prstGeom>
+          <a:noFill/>
+          <a:ln/>
+        </p:spPr>
+        <p:txBody>
+          <a:bodyPr wrap="square" rtlCol="0" anchor="ctr"/>
+          <a:lstStyle/>
+          <a:p>
+            <a:pPr indent="0" marL="0">
+              <a:buNone/>
+            </a:pPr>
+            <a:r>
+              <a:rPr lang="en-US" sz="1300" dirty="0">
+                <a:solidFill>
+                  <a:srgbClr val="A1A1AA"/>
+                </a:solidFill>
+                <a:latin typeface="Arial" pitchFamily="34" charset="0"/>
+                <a:ea typeface="Arial" pitchFamily="34" charset="-122"/>
+                <a:cs typeface="Arial" pitchFamily="34" charset="-120"/>
+              </a:rPr>
+              <a:t>•  AI screenshot settle</a:t>
+            </a:r>
+            <a:endParaRPr lang="en-US" sz="1300" dirty="0"/>
+          </a:p>
+        </p:txBody>
+      </p:sp>
+      <p:sp>
+        <p:nvSpPr>
+          <p:cNvPr id="11" name="Text 9"/>
+          <p:cNvSpPr/>
+          <p:nvPr/>
+        </p:nvSpPr>
+        <p:spPr>
+          <a:xfrm>
+            <a:off x="685800" y="4251960"/>
+            <a:ext cx="2423160" cy="502920"/>
+          </a:xfrm>
+          <a:prstGeom prst="rect">
+            <a:avLst/>
+          </a:prstGeom>
+          <a:noFill/>
+          <a:ln/>
+        </p:spPr>
+        <p:txBody>
+          <a:bodyPr wrap="square" rtlCol="0" anchor="ctr"/>
+          <a:lstStyle/>
+          <a:p>
+            <a:pPr indent="0" marL="0">
+              <a:buNone/>
+            </a:pPr>
+            <a:r>
+              <a:rPr lang="en-US" sz="1300" dirty="0">
+                <a:solidFill>
+                  <a:srgbClr val="A1A1AA"/>
+                </a:solidFill>
+                <a:latin typeface="Arial" pitchFamily="34" charset="0"/>
+                <a:ea typeface="Arial" pitchFamily="34" charset="-122"/>
+                <a:cs typeface="Arial" pitchFamily="34" charset="-120"/>
+              </a:rPr>
+              <a:t>•  BoardmanEscrow on Arc</a:t>
+            </a:r>
+            <a:endParaRPr lang="en-US" sz="1300" dirty="0"/>
+          </a:p>
+        </p:txBody>
+      </p:sp>
+      <p:sp>
+        <p:nvSpPr>
+          <p:cNvPr id="12" name="Shape 10"/>
+          <p:cNvSpPr/>
+          <p:nvPr/>
+        </p:nvSpPr>
+        <p:spPr>
+          <a:xfrm>
+            <a:off x="3429000" y="1463040"/>
+            <a:ext cx="2788920" cy="4389120"/>
           </a:xfrm>
           <a:prstGeom prst="roundRect">
             <a:avLst>
-              <a:gd name="adj" fmla="val 10000"/>
+              <a:gd name="adj" fmla="val 3934"/>
             </a:avLst>
           </a:prstGeom>
           <a:solidFill>
-            <a:srgbClr val="14141F"/>
+            <a:srgbClr val="12121C"/>
           </a:solidFill>
           <a:ln/>
-        </p:spPr>
-      </p:sp>
-      <p:sp>
-        <p:nvSpPr>
-          <p:cNvPr id="9" name="Text 7"/>
-          <p:cNvSpPr/>
-          <p:nvPr/>
-        </p:nvSpPr>
-        <p:spPr>
-          <a:xfrm>
-            <a:off x="914400" y="3017520"/>
-            <a:ext cx="2286000" cy="457200"/>
+          <a:effectLst>
+            <a:outerShdw sx="100000" sy="100000" kx="0" ky="0" algn="bl" rotWithShape="0" blurRad="152400" dist="38100" dir="16200000">
+              <a:srgbClr val="000000">
+                <a:alpha val="35000"/>
+              </a:srgbClr>
+            </a:outerShdw>
+          </a:effectLst>
+        </p:spPr>
+      </p:sp>
+      <p:sp>
+        <p:nvSpPr>
+          <p:cNvPr id="13" name="Text 11"/>
+          <p:cNvSpPr/>
+          <p:nvPr/>
+        </p:nvSpPr>
+        <p:spPr>
+          <a:xfrm>
+            <a:off x="3611880" y="1691640"/>
+            <a:ext cx="2423160" cy="411480"/>
           </a:xfrm>
           <a:prstGeom prst="rect">
             <a:avLst/>
@@ -2321,7 +2769,7 @@
             <a:r>
               <a:rPr lang="en-US" sz="1800" b="1" dirty="0">
                 <a:solidFill>
-                  <a:srgbClr val="34D399"/>
+                  <a:srgbClr val="8B5CF6"/>
                 </a:solidFill>
                 <a:latin typeface="Arial" pitchFamily="34" charset="0"/>
                 <a:ea typeface="Arial" pitchFamily="34" charset="-122"/>
@@ -2335,75 +2783,199 @@
       </p:sp>
       <p:sp>
         <p:nvSpPr>
-          <p:cNvPr id="10" name="Text 8"/>
-          <p:cNvSpPr/>
-          <p:nvPr/>
-        </p:nvSpPr>
-        <p:spPr>
-          <a:xfrm>
-            <a:off x="3291840" y="3017520"/>
-            <a:ext cx="8046720" cy="457200"/>
-          </a:xfrm>
-          <a:prstGeom prst="rect">
-            <a:avLst/>
-          </a:prstGeom>
-          <a:noFill/>
-          <a:ln/>
-        </p:spPr>
-        <p:txBody>
-          <a:bodyPr wrap="square" rtlCol="0" anchor="ctr"/>
-          <a:lstStyle/>
-          <a:p>
-            <a:pPr indent="0" marL="0">
-              <a:buNone/>
-            </a:pPr>
-            <a:r>
-              <a:rPr lang="en-US" sz="1600" dirty="0">
-                <a:solidFill>
-                  <a:srgbClr val="F4F4F5"/>
-                </a:solidFill>
-                <a:latin typeface="Arial" pitchFamily="34" charset="0"/>
-                <a:ea typeface="Arial" pitchFamily="34" charset="-122"/>
-                <a:cs typeface="Arial" pitchFamily="34" charset="-120"/>
-              </a:rPr>
-              <a:t>Raja vs Nero (and more) · bankrolls · creator fees · webhooks</a:t>
-            </a:r>
-            <a:endParaRPr lang="en-US" sz="1600" dirty="0"/>
-          </a:p>
-        </p:txBody>
-      </p:sp>
-      <p:sp>
-        <p:nvSpPr>
-          <p:cNvPr id="11" name="Shape 9"/>
-          <p:cNvSpPr/>
-          <p:nvPr/>
-        </p:nvSpPr>
-        <p:spPr>
-          <a:xfrm>
-            <a:off x="640080" y="3840480"/>
-            <a:ext cx="10972800" cy="914400"/>
+          <p:cNvPr id="14" name="Text 12"/>
+          <p:cNvSpPr/>
+          <p:nvPr/>
+        </p:nvSpPr>
+        <p:spPr>
+          <a:xfrm>
+            <a:off x="3611880" y="2331720"/>
+            <a:ext cx="2423160" cy="502920"/>
+          </a:xfrm>
+          <a:prstGeom prst="rect">
+            <a:avLst/>
+          </a:prstGeom>
+          <a:noFill/>
+          <a:ln/>
+        </p:spPr>
+        <p:txBody>
+          <a:bodyPr wrap="square" rtlCol="0" anchor="ctr"/>
+          <a:lstStyle/>
+          <a:p>
+            <a:pPr indent="0" marL="0">
+              <a:buNone/>
+            </a:pPr>
+            <a:r>
+              <a:rPr lang="en-US" sz="1300" dirty="0">
+                <a:solidFill>
+                  <a:srgbClr val="A1A1AA"/>
+                </a:solidFill>
+                <a:latin typeface="Arial" pitchFamily="34" charset="0"/>
+                <a:ea typeface="Arial" pitchFamily="34" charset="-122"/>
+                <a:cs typeface="Arial" pitchFamily="34" charset="-120"/>
+              </a:rPr>
+              <a:t>•  Raja &amp; Nero (GM Stockfish)</a:t>
+            </a:r>
+            <a:endParaRPr lang="en-US" sz="1300" dirty="0"/>
+          </a:p>
+        </p:txBody>
+      </p:sp>
+      <p:sp>
+        <p:nvSpPr>
+          <p:cNvPr id="15" name="Text 13"/>
+          <p:cNvSpPr/>
+          <p:nvPr/>
+        </p:nvSpPr>
+        <p:spPr>
+          <a:xfrm>
+            <a:off x="3611880" y="2971800"/>
+            <a:ext cx="2423160" cy="502920"/>
+          </a:xfrm>
+          <a:prstGeom prst="rect">
+            <a:avLst/>
+          </a:prstGeom>
+          <a:noFill/>
+          <a:ln/>
+        </p:spPr>
+        <p:txBody>
+          <a:bodyPr wrap="square" rtlCol="0" anchor="ctr"/>
+          <a:lstStyle/>
+          <a:p>
+            <a:pPr indent="0" marL="0">
+              <a:buNone/>
+            </a:pPr>
+            <a:r>
+              <a:rPr lang="en-US" sz="1300" dirty="0">
+                <a:solidFill>
+                  <a:srgbClr val="A1A1AA"/>
+                </a:solidFill>
+                <a:latin typeface="Arial" pitchFamily="34" charset="0"/>
+                <a:ea typeface="Arial" pitchFamily="34" charset="-122"/>
+                <a:cs typeface="Arial" pitchFamily="34" charset="-120"/>
+              </a:rPr>
+              <a:t>•  Bankrolls + policies</a:t>
+            </a:r>
+            <a:endParaRPr lang="en-US" sz="1300" dirty="0"/>
+          </a:p>
+        </p:txBody>
+      </p:sp>
+      <p:sp>
+        <p:nvSpPr>
+          <p:cNvPr id="16" name="Text 14"/>
+          <p:cNvSpPr/>
+          <p:nvPr/>
+        </p:nvSpPr>
+        <p:spPr>
+          <a:xfrm>
+            <a:off x="3611880" y="3611880"/>
+            <a:ext cx="2423160" cy="502920"/>
+          </a:xfrm>
+          <a:prstGeom prst="rect">
+            <a:avLst/>
+          </a:prstGeom>
+          <a:noFill/>
+          <a:ln/>
+        </p:spPr>
+        <p:txBody>
+          <a:bodyPr wrap="square" rtlCol="0" anchor="ctr"/>
+          <a:lstStyle/>
+          <a:p>
+            <a:pPr indent="0" marL="0">
+              <a:buNone/>
+            </a:pPr>
+            <a:r>
+              <a:rPr lang="en-US" sz="1300" dirty="0">
+                <a:solidFill>
+                  <a:srgbClr val="A1A1AA"/>
+                </a:solidFill>
+                <a:latin typeface="Arial" pitchFamily="34" charset="0"/>
+                <a:ea typeface="Arial" pitchFamily="34" charset="-122"/>
+                <a:cs typeface="Arial" pitchFamily="34" charset="-120"/>
+              </a:rPr>
+              <a:t>•  Creator fees on wins</a:t>
+            </a:r>
+            <a:endParaRPr lang="en-US" sz="1300" dirty="0"/>
+          </a:p>
+        </p:txBody>
+      </p:sp>
+      <p:sp>
+        <p:nvSpPr>
+          <p:cNvPr id="17" name="Text 15"/>
+          <p:cNvSpPr/>
+          <p:nvPr/>
+        </p:nvSpPr>
+        <p:spPr>
+          <a:xfrm>
+            <a:off x="3611880" y="4251960"/>
+            <a:ext cx="2423160" cy="502920"/>
+          </a:xfrm>
+          <a:prstGeom prst="rect">
+            <a:avLst/>
+          </a:prstGeom>
+          <a:noFill/>
+          <a:ln/>
+        </p:spPr>
+        <p:txBody>
+          <a:bodyPr wrap="square" rtlCol="0" anchor="ctr"/>
+          <a:lstStyle/>
+          <a:p>
+            <a:pPr indent="0" marL="0">
+              <a:buNone/>
+            </a:pPr>
+            <a:r>
+              <a:rPr lang="en-US" sz="1300" dirty="0">
+                <a:solidFill>
+                  <a:srgbClr val="A1A1AA"/>
+                </a:solidFill>
+                <a:latin typeface="Arial" pitchFamily="34" charset="0"/>
+                <a:ea typeface="Arial" pitchFamily="34" charset="-122"/>
+                <a:cs typeface="Arial" pitchFamily="34" charset="-120"/>
+              </a:rPr>
+              <a:t>•  Webhook BYO agents</a:t>
+            </a:r>
+            <a:endParaRPr lang="en-US" sz="1300" dirty="0"/>
+          </a:p>
+        </p:txBody>
+      </p:sp>
+      <p:sp>
+        <p:nvSpPr>
+          <p:cNvPr id="18" name="Shape 16"/>
+          <p:cNvSpPr/>
+          <p:nvPr/>
+        </p:nvSpPr>
+        <p:spPr>
+          <a:xfrm>
+            <a:off x="6355080" y="1463040"/>
+            <a:ext cx="2788920" cy="4389120"/>
           </a:xfrm>
           <a:prstGeom prst="roundRect">
             <a:avLst>
-              <a:gd name="adj" fmla="val 10000"/>
+              <a:gd name="adj" fmla="val 3934"/>
             </a:avLst>
           </a:prstGeom>
           <a:solidFill>
-            <a:srgbClr val="14141F"/>
+            <a:srgbClr val="12121C"/>
           </a:solidFill>
           <a:ln/>
-        </p:spPr>
-      </p:sp>
-      <p:sp>
-        <p:nvSpPr>
-          <p:cNvPr id="12" name="Text 10"/>
-          <p:cNvSpPr/>
-          <p:nvPr/>
-        </p:nvSpPr>
-        <p:spPr>
-          <a:xfrm>
-            <a:off x="914400" y="4069080"/>
-            <a:ext cx="2286000" cy="457200"/>
+          <a:effectLst>
+            <a:outerShdw sx="100000" sy="100000" kx="0" ky="0" algn="bl" rotWithShape="0" blurRad="152400" dist="38100" dir="16200000">
+              <a:srgbClr val="000000">
+                <a:alpha val="35000"/>
+              </a:srgbClr>
+            </a:outerShdw>
+          </a:effectLst>
+        </p:spPr>
+      </p:sp>
+      <p:sp>
+        <p:nvSpPr>
+          <p:cNvPr id="19" name="Text 17"/>
+          <p:cNvSpPr/>
+          <p:nvPr/>
+        </p:nvSpPr>
+        <p:spPr>
+          <a:xfrm>
+            <a:off x="6537960" y="1691640"/>
+            <a:ext cx="2423160" cy="411480"/>
           </a:xfrm>
           <a:prstGeom prst="rect">
             <a:avLst/>
@@ -2421,7 +2993,7 @@
             <a:r>
               <a:rPr lang="en-US" sz="1800" b="1" dirty="0">
                 <a:solidFill>
-                  <a:srgbClr val="34D399"/>
+                  <a:srgbClr val="FBBF24"/>
                 </a:solidFill>
                 <a:latin typeface="Arial" pitchFamily="34" charset="0"/>
                 <a:ea typeface="Arial" pitchFamily="34" charset="-122"/>
@@ -2435,75 +3007,199 @@
       </p:sp>
       <p:sp>
         <p:nvSpPr>
-          <p:cNvPr id="13" name="Text 11"/>
-          <p:cNvSpPr/>
-          <p:nvPr/>
-        </p:nvSpPr>
-        <p:spPr>
-          <a:xfrm>
-            <a:off x="3291840" y="4069080"/>
-            <a:ext cx="8046720" cy="457200"/>
-          </a:xfrm>
-          <a:prstGeom prst="rect">
-            <a:avLst/>
-          </a:prstGeom>
-          <a:noFill/>
-          <a:ln/>
-        </p:spPr>
-        <p:txBody>
-          <a:bodyPr wrap="square" rtlCol="0" anchor="ctr"/>
-          <a:lstStyle/>
-          <a:p>
-            <a:pPr indent="0" marL="0">
-              <a:buNone/>
-            </a:pPr>
-            <a:r>
-              <a:rPr lang="en-US" sz="1600" dirty="0">
-                <a:solidFill>
-                  <a:srgbClr val="F4F4F5"/>
-                </a:solidFill>
-                <a:latin typeface="Arial" pitchFamily="34" charset="0"/>
-                <a:ea typeface="Arial" pitchFamily="34" charset="-122"/>
-                <a:cs typeface="Arial" pitchFamily="34" charset="-120"/>
-              </a:rPr>
-              <a:t>Side pot · odds (form × pool × eval) · pot cap · mid-game freeze</a:t>
-            </a:r>
-            <a:endParaRPr lang="en-US" sz="1600" dirty="0"/>
-          </a:p>
-        </p:txBody>
-      </p:sp>
-      <p:sp>
-        <p:nvSpPr>
-          <p:cNvPr id="14" name="Shape 12"/>
-          <p:cNvSpPr/>
-          <p:nvPr/>
-        </p:nvSpPr>
-        <p:spPr>
-          <a:xfrm>
-            <a:off x="640080" y="4892040"/>
-            <a:ext cx="10972800" cy="914400"/>
+          <p:cNvPr id="20" name="Text 18"/>
+          <p:cNvSpPr/>
+          <p:nvPr/>
+        </p:nvSpPr>
+        <p:spPr>
+          <a:xfrm>
+            <a:off x="6537960" y="2331720"/>
+            <a:ext cx="2423160" cy="502920"/>
+          </a:xfrm>
+          <a:prstGeom prst="rect">
+            <a:avLst/>
+          </a:prstGeom>
+          <a:noFill/>
+          <a:ln/>
+        </p:spPr>
+        <p:txBody>
+          <a:bodyPr wrap="square" rtlCol="0" anchor="ctr"/>
+          <a:lstStyle/>
+          <a:p>
+            <a:pPr indent="0" marL="0">
+              <a:buNone/>
+            </a:pPr>
+            <a:r>
+              <a:rPr lang="en-US" sz="1300" dirty="0">
+                <a:solidFill>
+                  <a:srgbClr val="A1A1AA"/>
+                </a:solidFill>
+                <a:latin typeface="Arial" pitchFamily="34" charset="0"/>
+                <a:ea typeface="Arial" pitchFamily="34" charset="-122"/>
+                <a:cs typeface="Arial" pitchFamily="34" charset="-120"/>
+              </a:rPr>
+              <a:t>•  Any stake ≤ pot room</a:t>
+            </a:r>
+            <a:endParaRPr lang="en-US" sz="1300" dirty="0"/>
+          </a:p>
+        </p:txBody>
+      </p:sp>
+      <p:sp>
+        <p:nvSpPr>
+          <p:cNvPr id="21" name="Text 19"/>
+          <p:cNvSpPr/>
+          <p:nvPr/>
+        </p:nvSpPr>
+        <p:spPr>
+          <a:xfrm>
+            <a:off x="6537960" y="2971800"/>
+            <a:ext cx="2423160" cy="502920"/>
+          </a:xfrm>
+          <a:prstGeom prst="rect">
+            <a:avLst/>
+          </a:prstGeom>
+          <a:noFill/>
+          <a:ln/>
+        </p:spPr>
+        <p:txBody>
+          <a:bodyPr wrap="square" rtlCol="0" anchor="ctr"/>
+          <a:lstStyle/>
+          <a:p>
+            <a:pPr indent="0" marL="0">
+              <a:buNone/>
+            </a:pPr>
+            <a:r>
+              <a:rPr lang="en-US" sz="1300" dirty="0">
+                <a:solidFill>
+                  <a:srgbClr val="A1A1AA"/>
+                </a:solidFill>
+                <a:latin typeface="Arial" pitchFamily="34" charset="0"/>
+                <a:ea typeface="Arial" pitchFamily="34" charset="-122"/>
+                <a:cs typeface="Arial" pitchFamily="34" charset="-120"/>
+              </a:rPr>
+              <a:t>•  Slider + custom amount</a:t>
+            </a:r>
+            <a:endParaRPr lang="en-US" sz="1300" dirty="0"/>
+          </a:p>
+        </p:txBody>
+      </p:sp>
+      <p:sp>
+        <p:nvSpPr>
+          <p:cNvPr id="22" name="Text 20"/>
+          <p:cNvSpPr/>
+          <p:nvPr/>
+        </p:nvSpPr>
+        <p:spPr>
+          <a:xfrm>
+            <a:off x="6537960" y="3611880"/>
+            <a:ext cx="2423160" cy="502920"/>
+          </a:xfrm>
+          <a:prstGeom prst="rect">
+            <a:avLst/>
+          </a:prstGeom>
+          <a:noFill/>
+          <a:ln/>
+        </p:spPr>
+        <p:txBody>
+          <a:bodyPr wrap="square" rtlCol="0" anchor="ctr"/>
+          <a:lstStyle/>
+          <a:p>
+            <a:pPr indent="0" marL="0">
+              <a:buNone/>
+            </a:pPr>
+            <a:r>
+              <a:rPr lang="en-US" sz="1300" dirty="0">
+                <a:solidFill>
+                  <a:srgbClr val="A1A1AA"/>
+                </a:solidFill>
+                <a:latin typeface="Arial" pitchFamily="34" charset="0"/>
+                <a:ea typeface="Arial" pitchFamily="34" charset="-122"/>
+                <a:cs typeface="Arial" pitchFamily="34" charset="-120"/>
+              </a:rPr>
+              <a:t>•  Live odds (form×pool×eval)</a:t>
+            </a:r>
+            <a:endParaRPr lang="en-US" sz="1300" dirty="0"/>
+          </a:p>
+        </p:txBody>
+      </p:sp>
+      <p:sp>
+        <p:nvSpPr>
+          <p:cNvPr id="23" name="Text 21"/>
+          <p:cNvSpPr/>
+          <p:nvPr/>
+        </p:nvSpPr>
+        <p:spPr>
+          <a:xfrm>
+            <a:off x="6537960" y="4251960"/>
+            <a:ext cx="2423160" cy="502920"/>
+          </a:xfrm>
+          <a:prstGeom prst="rect">
+            <a:avLst/>
+          </a:prstGeom>
+          <a:noFill/>
+          <a:ln/>
+        </p:spPr>
+        <p:txBody>
+          <a:bodyPr wrap="square" rtlCol="0" anchor="ctr"/>
+          <a:lstStyle/>
+          <a:p>
+            <a:pPr indent="0" marL="0">
+              <a:buNone/>
+            </a:pPr>
+            <a:r>
+              <a:rPr lang="en-US" sz="1300" dirty="0">
+                <a:solidFill>
+                  <a:srgbClr val="A1A1AA"/>
+                </a:solidFill>
+                <a:latin typeface="Arial" pitchFamily="34" charset="0"/>
+                <a:ea typeface="Arial" pitchFamily="34" charset="-122"/>
+                <a:cs typeface="Arial" pitchFamily="34" charset="-120"/>
+              </a:rPr>
+              <a:t>•  Cap freezes market</a:t>
+            </a:r>
+            <a:endParaRPr lang="en-US" sz="1300" dirty="0"/>
+          </a:p>
+        </p:txBody>
+      </p:sp>
+      <p:sp>
+        <p:nvSpPr>
+          <p:cNvPr id="24" name="Shape 22"/>
+          <p:cNvSpPr/>
+          <p:nvPr/>
+        </p:nvSpPr>
+        <p:spPr>
+          <a:xfrm>
+            <a:off x="9281160" y="1463040"/>
+            <a:ext cx="2788920" cy="4389120"/>
           </a:xfrm>
           <a:prstGeom prst="roundRect">
             <a:avLst>
-              <a:gd name="adj" fmla="val 10000"/>
+              <a:gd name="adj" fmla="val 3934"/>
             </a:avLst>
           </a:prstGeom>
           <a:solidFill>
-            <a:srgbClr val="14141F"/>
+            <a:srgbClr val="12121C"/>
           </a:solidFill>
           <a:ln/>
-        </p:spPr>
-      </p:sp>
-      <p:sp>
-        <p:nvSpPr>
-          <p:cNvPr id="15" name="Text 13"/>
-          <p:cNvSpPr/>
-          <p:nvPr/>
-        </p:nvSpPr>
-        <p:spPr>
-          <a:xfrm>
-            <a:off x="914400" y="5120640"/>
-            <a:ext cx="2286000" cy="457200"/>
+          <a:effectLst>
+            <a:outerShdw sx="100000" sy="100000" kx="0" ky="0" algn="bl" rotWithShape="0" blurRad="152400" dist="38100" dir="16200000">
+              <a:srgbClr val="000000">
+                <a:alpha val="35000"/>
+              </a:srgbClr>
+            </a:outerShdw>
+          </a:effectLst>
+        </p:spPr>
+      </p:sp>
+      <p:sp>
+        <p:nvSpPr>
+          <p:cNvPr id="25" name="Text 23"/>
+          <p:cNvSpPr/>
+          <p:nvPr/>
+        </p:nvSpPr>
+        <p:spPr>
+          <a:xfrm>
+            <a:off x="9464040" y="1691640"/>
+            <a:ext cx="2423160" cy="411480"/>
           </a:xfrm>
           <a:prstGeom prst="rect">
             <a:avLst/>
@@ -2521,7 +3217,7 @@
             <a:r>
               <a:rPr lang="en-US" sz="1800" b="1" dirty="0">
                 <a:solidFill>
-                  <a:srgbClr val="34D399"/>
+                  <a:srgbClr val="60A5FA"/>
                 </a:solidFill>
                 <a:latin typeface="Arial" pitchFamily="34" charset="0"/>
                 <a:ea typeface="Arial" pitchFamily="34" charset="-122"/>
@@ -2535,40 +3231,196 @@
       </p:sp>
       <p:sp>
         <p:nvSpPr>
-          <p:cNvPr id="16" name="Text 14"/>
-          <p:cNvSpPr/>
-          <p:nvPr/>
-        </p:nvSpPr>
-        <p:spPr>
-          <a:xfrm>
-            <a:off x="3291840" y="5120640"/>
-            <a:ext cx="8046720" cy="457200"/>
-          </a:xfrm>
-          <a:prstGeom prst="rect">
-            <a:avLst/>
-          </a:prstGeom>
-          <a:noFill/>
-          <a:ln/>
-        </p:spPr>
-        <p:txBody>
-          <a:bodyPr wrap="square" rtlCol="0" anchor="ctr"/>
-          <a:lstStyle/>
-          <a:p>
-            <a:pPr indent="0" marL="0">
-              <a:buNone/>
-            </a:pPr>
-            <a:r>
-              <a:rPr lang="en-US" sz="1600" dirty="0">
-                <a:solidFill>
-                  <a:srgbClr val="F4F4F5"/>
-                </a:solidFill>
-                <a:latin typeface="Arial" pitchFamily="34" charset="0"/>
-                <a:ea typeface="Arial" pitchFamily="34" charset="-122"/>
-                <a:cs typeface="Arial" pitchFamily="34" charset="-120"/>
-              </a:rPr>
-              <a:t>Top up agent bankroll · share of net skill profit · haircut on losses</a:t>
-            </a:r>
-            <a:endParaRPr lang="en-US" sz="1600" dirty="0"/>
+          <p:cNvPr id="26" name="Text 24"/>
+          <p:cNvSpPr/>
+          <p:nvPr/>
+        </p:nvSpPr>
+        <p:spPr>
+          <a:xfrm>
+            <a:off x="9464040" y="2331720"/>
+            <a:ext cx="2423160" cy="502920"/>
+          </a:xfrm>
+          <a:prstGeom prst="rect">
+            <a:avLst/>
+          </a:prstGeom>
+          <a:noFill/>
+          <a:ln/>
+        </p:spPr>
+        <p:txBody>
+          <a:bodyPr wrap="square" rtlCol="0" anchor="ctr"/>
+          <a:lstStyle/>
+          <a:p>
+            <a:pPr indent="0" marL="0">
+              <a:buNone/>
+            </a:pPr>
+            <a:r>
+              <a:rPr lang="en-US" sz="1300" dirty="0">
+                <a:solidFill>
+                  <a:srgbClr val="A1A1AA"/>
+                </a:solidFill>
+                <a:latin typeface="Arial" pitchFamily="34" charset="0"/>
+                <a:ea typeface="Arial" pitchFamily="34" charset="-122"/>
+                <a:cs typeface="Arial" pitchFamily="34" charset="-120"/>
+              </a:rPr>
+              <a:t>•  Top up agent bankroll</a:t>
+            </a:r>
+            <a:endParaRPr lang="en-US" sz="1300" dirty="0"/>
+          </a:p>
+        </p:txBody>
+      </p:sp>
+      <p:sp>
+        <p:nvSpPr>
+          <p:cNvPr id="27" name="Text 25"/>
+          <p:cNvSpPr/>
+          <p:nvPr/>
+        </p:nvSpPr>
+        <p:spPr>
+          <a:xfrm>
+            <a:off x="9464040" y="2971800"/>
+            <a:ext cx="2423160" cy="502920"/>
+          </a:xfrm>
+          <a:prstGeom prst="rect">
+            <a:avLst/>
+          </a:prstGeom>
+          <a:noFill/>
+          <a:ln/>
+        </p:spPr>
+        <p:txBody>
+          <a:bodyPr wrap="square" rtlCol="0" anchor="ctr"/>
+          <a:lstStyle/>
+          <a:p>
+            <a:pPr indent="0" marL="0">
+              <a:buNone/>
+            </a:pPr>
+            <a:r>
+              <a:rPr lang="en-US" sz="1300" dirty="0">
+                <a:solidFill>
+                  <a:srgbClr val="A1A1AA"/>
+                </a:solidFill>
+                <a:latin typeface="Arial" pitchFamily="34" charset="0"/>
+                <a:ea typeface="Arial" pitchFamily="34" charset="-122"/>
+                <a:cs typeface="Arial" pitchFamily="34" charset="-120"/>
+              </a:rPr>
+              <a:t>•  Share of skill profit</a:t>
+            </a:r>
+            <a:endParaRPr lang="en-US" sz="1300" dirty="0"/>
+          </a:p>
+        </p:txBody>
+      </p:sp>
+      <p:sp>
+        <p:nvSpPr>
+          <p:cNvPr id="28" name="Text 26"/>
+          <p:cNvSpPr/>
+          <p:nvPr/>
+        </p:nvSpPr>
+        <p:spPr>
+          <a:xfrm>
+            <a:off x="9464040" y="3611880"/>
+            <a:ext cx="2423160" cy="502920"/>
+          </a:xfrm>
+          <a:prstGeom prst="rect">
+            <a:avLst/>
+          </a:prstGeom>
+          <a:noFill/>
+          <a:ln/>
+        </p:spPr>
+        <p:txBody>
+          <a:bodyPr wrap="square" rtlCol="0" anchor="ctr"/>
+          <a:lstStyle/>
+          <a:p>
+            <a:pPr indent="0" marL="0">
+              <a:buNone/>
+            </a:pPr>
+            <a:r>
+              <a:rPr lang="en-US" sz="1300" dirty="0">
+                <a:solidFill>
+                  <a:srgbClr val="A1A1AA"/>
+                </a:solidFill>
+                <a:latin typeface="Arial" pitchFamily="34" charset="0"/>
+                <a:ea typeface="Arial" pitchFamily="34" charset="-122"/>
+                <a:cs typeface="Arial" pitchFamily="34" charset="-120"/>
+              </a:rPr>
+              <a:t>•  Haircut on losses</a:t>
+            </a:r>
+            <a:endParaRPr lang="en-US" sz="1300" dirty="0"/>
+          </a:p>
+        </p:txBody>
+      </p:sp>
+      <p:sp>
+        <p:nvSpPr>
+          <p:cNvPr id="29" name="Text 27"/>
+          <p:cNvSpPr/>
+          <p:nvPr/>
+        </p:nvSpPr>
+        <p:spPr>
+          <a:xfrm>
+            <a:off x="9464040" y="4251960"/>
+            <a:ext cx="2423160" cy="502920"/>
+          </a:xfrm>
+          <a:prstGeom prst="rect">
+            <a:avLst/>
+          </a:prstGeom>
+          <a:noFill/>
+          <a:ln/>
+        </p:spPr>
+        <p:txBody>
+          <a:bodyPr wrap="square" rtlCol="0" anchor="ctr"/>
+          <a:lstStyle/>
+          <a:p>
+            <a:pPr indent="0" marL="0">
+              <a:buNone/>
+            </a:pPr>
+            <a:r>
+              <a:rPr lang="en-US" sz="1300" dirty="0">
+                <a:solidFill>
+                  <a:srgbClr val="A1A1AA"/>
+                </a:solidFill>
+                <a:latin typeface="Arial" pitchFamily="34" charset="0"/>
+                <a:ea typeface="Arial" pitchFamily="34" charset="-122"/>
+                <a:cs typeface="Arial" pitchFamily="34" charset="-120"/>
+              </a:rPr>
+              <a:t>•  Not the bet pot</a:t>
+            </a:r>
+            <a:endParaRPr lang="en-US" sz="1300" dirty="0"/>
+          </a:p>
+        </p:txBody>
+      </p:sp>
+      <p:sp>
+        <p:nvSpPr>
+          <p:cNvPr id="30" name="Text 28"/>
+          <p:cNvSpPr/>
+          <p:nvPr/>
+        </p:nvSpPr>
+        <p:spPr>
+          <a:xfrm>
+            <a:off x="640080" y="6446520"/>
+            <a:ext cx="10972800" cy="274320"/>
+          </a:xfrm>
+          <a:prstGeom prst="rect">
+            <a:avLst/>
+          </a:prstGeom>
+          <a:noFill/>
+          <a:ln/>
+        </p:spPr>
+        <p:txBody>
+          <a:bodyPr wrap="square" rtlCol="0" anchor="ctr"/>
+          <a:lstStyle/>
+          <a:p>
+            <a:pPr indent="0" marL="0">
+              <a:buNone/>
+            </a:pPr>
+            <a:r>
+              <a:rPr lang="en-US" sz="1100" dirty="0">
+                <a:solidFill>
+                  <a:srgbClr val="A1A1AA"/>
+                </a:solidFill>
+                <a:latin typeface="Arial" pitchFamily="34" charset="0"/>
+                <a:ea typeface="Arial" pitchFamily="34" charset="-122"/>
+                <a:cs typeface="Arial" pitchFamily="34" charset="-120"/>
+              </a:rPr>
+              <a:t>Boardman · sideQuest · Arc Programmable Money Hackathon</a:t>
+            </a:r>
+            <a:endParaRPr lang="en-US" sz="1100" dirty="0"/>
           </a:p>
         </p:txBody>
       </p:sp>
@@ -2612,21 +3464,41 @@
             <a:avLst/>
           </a:prstGeom>
           <a:solidFill>
-            <a:srgbClr val="0B0B12"/>
+            <a:srgbClr val="07070C"/>
           </a:solidFill>
           <a:ln/>
         </p:spPr>
       </p:sp>
       <p:sp>
         <p:nvSpPr>
-          <p:cNvPr id="3" name="Text 1"/>
-          <p:cNvSpPr/>
-          <p:nvPr/>
-        </p:nvSpPr>
-        <p:spPr>
-          <a:xfrm>
-            <a:off x="640080" y="411480"/>
-            <a:ext cx="10972800" cy="502920"/>
+          <p:cNvPr id="3" name="Shape 1"/>
+          <p:cNvSpPr/>
+          <p:nvPr/>
+        </p:nvSpPr>
+        <p:spPr>
+          <a:xfrm>
+            <a:off x="0" y="0"/>
+            <a:ext cx="128016" cy="6858000"/>
+          </a:xfrm>
+          <a:prstGeom prst="rect">
+            <a:avLst/>
+          </a:prstGeom>
+          <a:solidFill>
+            <a:srgbClr val="8B5CF6"/>
+          </a:solidFill>
+          <a:ln/>
+        </p:spPr>
+      </p:sp>
+      <p:sp>
+        <p:nvSpPr>
+          <p:cNvPr id="4" name="Text 2"/>
+          <p:cNvSpPr/>
+          <p:nvPr/>
+        </p:nvSpPr>
+        <p:spPr>
+          <a:xfrm>
+            <a:off x="731520" y="411480"/>
+            <a:ext cx="10058400" cy="502920"/>
           </a:xfrm>
           <a:prstGeom prst="rect">
             <a:avLst/>
@@ -2644,13 +3516,13 @@
             <a:r>
               <a:rPr lang="en-US" sz="3000" b="1" dirty="0">
                 <a:solidFill>
-                  <a:srgbClr val="F4F4F5"/>
-                </a:solidFill>
-                <a:latin typeface="Arial" pitchFamily="34" charset="0"/>
-                <a:ea typeface="Arial" pitchFamily="34" charset="-122"/>
-                <a:cs typeface="Arial" pitchFamily="34" charset="-120"/>
-              </a:rPr>
-              <a:t>Money flows (never mixed)</a:t>
+                  <a:srgbClr val="FAFAFA"/>
+                </a:solidFill>
+                <a:latin typeface="Arial" pitchFamily="34" charset="0"/>
+                <a:ea typeface="Arial" pitchFamily="34" charset="-122"/>
+                <a:cs typeface="Arial" pitchFamily="34" charset="-120"/>
+              </a:rPr>
+              <a:t>Money never mixes</a:t>
             </a:r>
             <a:endParaRPr lang="en-US" sz="3000" dirty="0"/>
           </a:p>
@@ -2658,30 +3530,59 @@
       </p:sp>
       <p:sp>
         <p:nvSpPr>
-          <p:cNvPr id="4" name="Text 2"/>
-          <p:cNvSpPr/>
-          <p:nvPr/>
-        </p:nvSpPr>
-        <p:spPr>
-          <a:xfrm>
-            <a:off x="640080" y="1188720"/>
-            <a:ext cx="10972800" cy="5029200"/>
-          </a:xfrm>
-          <a:prstGeom prst="rect">
-            <a:avLst/>
-          </a:prstGeom>
-          <a:noFill/>
-          <a:ln/>
-        </p:spPr>
-        <p:txBody>
-          <a:bodyPr wrap="square" rtlCol="0" anchor="ctr"/>
-          <a:lstStyle/>
-          <a:p>
-            <a:pPr indent="0" marL="0">
-              <a:buNone/>
-            </a:pPr>
-            <a:r>
-              <a:rPr lang="en-US" sz="1600" dirty="0">
+          <p:cNvPr id="5" name="Shape 3"/>
+          <p:cNvSpPr/>
+          <p:nvPr/>
+        </p:nvSpPr>
+        <p:spPr>
+          <a:xfrm>
+            <a:off x="731520" y="1188720"/>
+            <a:ext cx="10698480" cy="4754880"/>
+          </a:xfrm>
+          <a:prstGeom prst="roundRect">
+            <a:avLst>
+              <a:gd name="adj" fmla="val 2308"/>
+            </a:avLst>
+          </a:prstGeom>
+          <a:solidFill>
+            <a:srgbClr val="12121C"/>
+          </a:solidFill>
+          <a:ln/>
+          <a:effectLst>
+            <a:outerShdw sx="100000" sy="100000" kx="0" ky="0" algn="bl" rotWithShape="0" blurRad="152400" dist="38100" dir="16200000">
+              <a:srgbClr val="000000">
+                <a:alpha val="35000"/>
+              </a:srgbClr>
+            </a:outerShdw>
+          </a:effectLst>
+        </p:spPr>
+      </p:sp>
+      <p:sp>
+        <p:nvSpPr>
+          <p:cNvPr id="6" name="Text 4"/>
+          <p:cNvSpPr/>
+          <p:nvPr/>
+        </p:nvSpPr>
+        <p:spPr>
+          <a:xfrm>
+            <a:off x="1051560" y="1463040"/>
+            <a:ext cx="10058400" cy="4206240"/>
+          </a:xfrm>
+          <a:prstGeom prst="rect">
+            <a:avLst/>
+          </a:prstGeom>
+          <a:noFill/>
+          <a:ln/>
+        </p:spPr>
+        <p:txBody>
+          <a:bodyPr wrap="square" rtlCol="0" anchor="ctr"/>
+          <a:lstStyle/>
+          <a:p>
+            <a:pPr indent="0" marL="0">
+              <a:buNone/>
+            </a:pPr>
+            <a:r>
+              <a:rPr lang="en-US" sz="1500" dirty="0">
                 <a:solidFill>
                   <a:srgbClr val="A1A1AA"/>
                 </a:solidFill>
@@ -2689,16 +3590,16 @@
                 <a:ea typeface="Courier New" pitchFamily="34" charset="-122"/>
                 <a:cs typeface="Courier New" pitchFamily="34" charset="-120"/>
               </a:rPr>
-              <a:t>Owner / LPs fund bankroll</a:t>
-            </a:r>
-            <a:endParaRPr lang="en-US" sz="1600" dirty="0"/>
-          </a:p>
-          <a:p>
-            <a:pPr indent="0" marL="0">
-              <a:buNone/>
-            </a:pPr>
-            <a:r>
-              <a:rPr lang="en-US" sz="1600" dirty="0">
+              <a:t>Owner / LPs fund agent bankroll</a:t>
+            </a:r>
+            <a:endParaRPr lang="en-US" sz="1500" dirty="0"/>
+          </a:p>
+          <a:p>
+            <a:pPr indent="0" marL="0">
+              <a:buNone/>
+            </a:pPr>
+            <a:r>
+              <a:rPr lang="en-US" sz="1500" dirty="0">
                 <a:solidFill>
                   <a:srgbClr val="A1A1AA"/>
                 </a:solidFill>
@@ -2708,14 +3609,14 @@
               </a:rPr>
               <a:t>        │</a:t>
             </a:r>
-            <a:endParaRPr lang="en-US" sz="1600" dirty="0"/>
-          </a:p>
-          <a:p>
-            <a:pPr indent="0" marL="0">
-              <a:buNone/>
-            </a:pPr>
-            <a:r>
-              <a:rPr lang="en-US" sz="1600" dirty="0">
+            <a:endParaRPr lang="en-US" sz="1500" dirty="0"/>
+          </a:p>
+          <a:p>
+            <a:pPr indent="0" marL="0">
+              <a:buNone/>
+            </a:pPr>
+            <a:r>
+              <a:rPr lang="en-US" sz="1500" dirty="0">
                 <a:solidFill>
                   <a:srgbClr val="A1A1AA"/>
                 </a:solidFill>
@@ -2723,16 +3624,16 @@
                 <a:ea typeface="Courier New" pitchFamily="34" charset="-122"/>
                 <a:cs typeface="Courier New" pitchFamily="34" charset="-120"/>
               </a:rPr>
-              <a:t>        ├── Skill stake (equal, negotiated) ──► dual-lock escrow ──► platform 3% · creator · bankroll</a:t>
-            </a:r>
-            <a:endParaRPr lang="en-US" sz="1600" dirty="0"/>
-          </a:p>
-          <a:p>
-            <a:pPr indent="0" marL="0">
-              <a:buNone/>
-            </a:pPr>
-            <a:r>
-              <a:rPr lang="en-US" sz="1600" dirty="0">
+              <a:t>        ├── Equal skill stake (negotiated free capital)</a:t>
+            </a:r>
+            <a:endParaRPr lang="en-US" sz="1500" dirty="0"/>
+          </a:p>
+          <a:p>
+            <a:pPr indent="0" marL="0">
+              <a:buNone/>
+            </a:pPr>
+            <a:r>
+              <a:rPr lang="en-US" sz="1500" dirty="0">
                 <a:solidFill>
                   <a:srgbClr val="A1A1AA"/>
                 </a:solidFill>
@@ -2740,16 +3641,16 @@
                 <a:ea typeface="Courier New" pitchFamily="34" charset="-122"/>
                 <a:cs typeface="Courier New" pitchFamily="34" charset="-120"/>
               </a:rPr>
-              <a:t>        │</a:t>
-            </a:r>
-            <a:endParaRPr lang="en-US" sz="1600" dirty="0"/>
-          </a:p>
-          <a:p>
-            <a:pPr indent="0" marL="0">
-              <a:buNone/>
-            </a:pPr>
-            <a:r>
-              <a:rPr lang="en-US" sz="1600" dirty="0">
+              <a:t>        │         → dual-lock escrow → platform 3% · creator · bankroll</a:t>
+            </a:r>
+            <a:endParaRPr lang="en-US" sz="1500" dirty="0"/>
+          </a:p>
+          <a:p>
+            <a:pPr indent="0" marL="0">
+              <a:buNone/>
+            </a:pPr>
+            <a:r>
+              <a:rPr lang="en-US" sz="1500" dirty="0">
                 <a:solidFill>
                   <a:srgbClr val="A1A1AA"/>
                 </a:solidFill>
@@ -2757,22 +3658,16 @@
                 <a:ea typeface="Courier New" pitchFamily="34" charset="-122"/>
                 <a:cs typeface="Courier New" pitchFamily="34" charset="-120"/>
               </a:rPr>
-              <a:t>        └── Seed (% of stake only) ──► spectator pot ◄── fan bets ──► take 5% · winners paid</a:t>
-            </a:r>
-            <a:endParaRPr lang="en-US" sz="1600" dirty="0"/>
-          </a:p>
-          <a:p>
-            <a:pPr indent="0" marL="0">
-              <a:buNone/>
-            </a:pPr>
-            <a:endParaRPr lang="en-US" sz="1600" dirty="0"/>
-          </a:p>
-          <a:p>
-            <a:pPr indent="0" marL="0">
-              <a:buNone/>
-            </a:pPr>
-            <a:r>
-              <a:rPr lang="en-US" sz="1600" dirty="0">
+              <a:t>        │</a:t>
+            </a:r>
+            <a:endParaRPr lang="en-US" sz="1500" dirty="0"/>
+          </a:p>
+          <a:p>
+            <a:pPr indent="0" marL="0">
+              <a:buNone/>
+            </a:pPr>
+            <a:r>
+              <a:rPr lang="en-US" sz="1500" dirty="0">
                 <a:solidFill>
                   <a:srgbClr val="A1A1AA"/>
                 </a:solidFill>
@@ -2780,16 +3675,16 @@
                 <a:ea typeface="Courier New" pitchFamily="34" charset="-122"/>
                 <a:cs typeface="Courier New" pitchFamily="34" charset="-120"/>
               </a:rPr>
-              <a:t>Matched stake = min(free_A, free_B, policy max). Whale cannot force lean agent.</a:t>
-            </a:r>
-            <a:endParaRPr lang="en-US" sz="1600" dirty="0"/>
-          </a:p>
-          <a:p>
-            <a:pPr indent="0" marL="0">
-              <a:buNone/>
-            </a:pPr>
-            <a:r>
-              <a:rPr lang="en-US" sz="1600" dirty="0">
+              <a:t>        └── Seed = small % of stake only</a:t>
+            </a:r>
+            <a:endParaRPr lang="en-US" sz="1500" dirty="0"/>
+          </a:p>
+          <a:p>
+            <a:pPr indent="0" marL="0">
+              <a:buNone/>
+            </a:pPr>
+            <a:r>
+              <a:rPr lang="en-US" sz="1500" dirty="0">
                 <a:solidFill>
                   <a:srgbClr val="A1A1AA"/>
                 </a:solidFill>
@@ -2797,9 +3692,105 @@
                 <a:ea typeface="Courier New" pitchFamily="34" charset="-122"/>
                 <a:cs typeface="Courier New" pitchFamily="34" charset="-120"/>
               </a:rPr>
-              <a:t>Checkmate only when the board is mated — no fake finishes.</a:t>
-            </a:r>
-            <a:endParaRPr lang="en-US" sz="1600" dirty="0"/>
+              <a:t>                  → spectator pot ◄── fans stake any $ ≤ room left</a:t>
+            </a:r>
+            <a:endParaRPr lang="en-US" sz="1500" dirty="0"/>
+          </a:p>
+          <a:p>
+            <a:pPr indent="0" marL="0">
+              <a:buNone/>
+            </a:pPr>
+            <a:r>
+              <a:rPr lang="en-US" sz="1500" dirty="0">
+                <a:solidFill>
+                  <a:srgbClr val="A1A1AA"/>
+                </a:solidFill>
+                <a:latin typeface="Courier New" pitchFamily="34" charset="0"/>
+                <a:ea typeface="Courier New" pitchFamily="34" charset="-122"/>
+                <a:cs typeface="Courier New" pitchFamily="34" charset="-120"/>
+              </a:rPr>
+              <a:t>                  → take ~5% · winning bettors paid</a:t>
+            </a:r>
+            <a:endParaRPr lang="en-US" sz="1500" dirty="0"/>
+          </a:p>
+          <a:p>
+            <a:pPr indent="0" marL="0">
+              <a:buNone/>
+            </a:pPr>
+            <a:endParaRPr lang="en-US" sz="1500" dirty="0"/>
+          </a:p>
+          <a:p>
+            <a:pPr indent="0" marL="0">
+              <a:buNone/>
+            </a:pPr>
+            <a:r>
+              <a:rPr lang="en-US" sz="1500" dirty="0">
+                <a:solidFill>
+                  <a:srgbClr val="A1A1AA"/>
+                </a:solidFill>
+                <a:latin typeface="Courier New" pitchFamily="34" charset="0"/>
+                <a:ea typeface="Courier New" pitchFamily="34" charset="-122"/>
+                <a:cs typeface="Courier New" pitchFamily="34" charset="-120"/>
+              </a:rPr>
+              <a:t>Matched stake = min(free_A, free_B, max policy). Whale cannot force lean agent.</a:t>
+            </a:r>
+            <a:endParaRPr lang="en-US" sz="1500" dirty="0"/>
+          </a:p>
+          <a:p>
+            <a:pPr indent="0" marL="0">
+              <a:buNone/>
+            </a:pPr>
+            <a:r>
+              <a:rPr lang="en-US" sz="1500" dirty="0">
+                <a:solidFill>
+                  <a:srgbClr val="A1A1AA"/>
+                </a:solidFill>
+                <a:latin typeface="Courier New" pitchFamily="34" charset="0"/>
+                <a:ea typeface="Courier New" pitchFamily="34" charset="-122"/>
+                <a:cs typeface="Courier New" pitchFamily="34" charset="-120"/>
+              </a:rPr>
+              <a:t>Checkmate only when the board is mated. Agents play pure Stockfish GM depth.</a:t>
+            </a:r>
+            <a:endParaRPr lang="en-US" sz="1500" dirty="0"/>
+          </a:p>
+        </p:txBody>
+      </p:sp>
+      <p:sp>
+        <p:nvSpPr>
+          <p:cNvPr id="7" name="Text 5"/>
+          <p:cNvSpPr/>
+          <p:nvPr/>
+        </p:nvSpPr>
+        <p:spPr>
+          <a:xfrm>
+            <a:off x="640080" y="6446520"/>
+            <a:ext cx="10972800" cy="274320"/>
+          </a:xfrm>
+          <a:prstGeom prst="rect">
+            <a:avLst/>
+          </a:prstGeom>
+          <a:noFill/>
+          <a:ln/>
+        </p:spPr>
+        <p:txBody>
+          <a:bodyPr wrap="square" rtlCol="0" anchor="ctr"/>
+          <a:lstStyle/>
+          <a:p>
+            <a:pPr indent="0" marL="0">
+              <a:buNone/>
+            </a:pPr>
+            <a:r>
+              <a:rPr lang="en-US" sz="1100" dirty="0">
+                <a:solidFill>
+                  <a:srgbClr val="A1A1AA"/>
+                </a:solidFill>
+                <a:latin typeface="Arial" pitchFamily="34" charset="0"/>
+                <a:ea typeface="Arial" pitchFamily="34" charset="-122"/>
+                <a:cs typeface="Arial" pitchFamily="34" charset="-120"/>
+              </a:rPr>
+              <a:t>Boardman · sideQuest · Arc Programmable Money Hackathon</a:t>
+            </a:r>
+            <a:endParaRPr lang="en-US" sz="1100" dirty="0"/>
           </a:p>
         </p:txBody>
       </p:sp>
@@ -2843,39 +3834,59 @@
             <a:avLst/>
           </a:prstGeom>
           <a:solidFill>
-            <a:srgbClr val="0B0B12"/>
+            <a:srgbClr val="07070C"/>
           </a:solidFill>
           <a:ln/>
         </p:spPr>
       </p:sp>
       <p:sp>
         <p:nvSpPr>
-          <p:cNvPr id="3" name="Text 1"/>
-          <p:cNvSpPr/>
-          <p:nvPr/>
-        </p:nvSpPr>
-        <p:spPr>
-          <a:xfrm>
-            <a:off x="640080" y="457200"/>
-            <a:ext cx="10972800" cy="548640"/>
-          </a:xfrm>
-          <a:prstGeom prst="rect">
-            <a:avLst/>
-          </a:prstGeom>
-          <a:noFill/>
-          <a:ln/>
-        </p:spPr>
-        <p:txBody>
-          <a:bodyPr wrap="square" rtlCol="0" anchor="ctr"/>
-          <a:lstStyle/>
-          <a:p>
-            <a:pPr indent="0" marL="0">
-              <a:buNone/>
-            </a:pPr>
-            <a:r>
-              <a:rPr lang="en-US" sz="3200" b="1" dirty="0">
-                <a:solidFill>
-                  <a:srgbClr val="F4F4F5"/>
+          <p:cNvPr id="3" name="Shape 1"/>
+          <p:cNvSpPr/>
+          <p:nvPr/>
+        </p:nvSpPr>
+        <p:spPr>
+          <a:xfrm>
+            <a:off x="0" y="0"/>
+            <a:ext cx="128016" cy="6858000"/>
+          </a:xfrm>
+          <a:prstGeom prst="rect">
+            <a:avLst/>
+          </a:prstGeom>
+          <a:solidFill>
+            <a:srgbClr val="8B5CF6"/>
+          </a:solidFill>
+          <a:ln/>
+        </p:spPr>
+      </p:sp>
+      <p:sp>
+        <p:nvSpPr>
+          <p:cNvPr id="4" name="Text 2"/>
+          <p:cNvSpPr/>
+          <p:nvPr/>
+        </p:nvSpPr>
+        <p:spPr>
+          <a:xfrm>
+            <a:off x="731520" y="411480"/>
+            <a:ext cx="10058400" cy="502920"/>
+          </a:xfrm>
+          <a:prstGeom prst="rect">
+            <a:avLst/>
+          </a:prstGeom>
+          <a:noFill/>
+          <a:ln/>
+        </p:spPr>
+        <p:txBody>
+          <a:bodyPr wrap="square" rtlCol="0" anchor="ctr"/>
+          <a:lstStyle/>
+          <a:p>
+            <a:pPr indent="0" marL="0">
+              <a:buNone/>
+            </a:pPr>
+            <a:r>
+              <a:rPr lang="en-US" sz="3000" b="1" dirty="0">
+                <a:solidFill>
+                  <a:srgbClr val="FAFAFA"/>
                 </a:solidFill>
                 <a:latin typeface="Arial" pitchFamily="34" charset="0"/>
                 <a:ea typeface="Arial" pitchFamily="34" charset="-122"/>
@@ -2883,119 +3894,251 @@
               </a:rPr>
               <a:t>Why Arc</a:t>
             </a:r>
-            <a:endParaRPr lang="en-US" sz="3200" dirty="0"/>
-          </a:p>
-        </p:txBody>
-      </p:sp>
-      <p:sp>
-        <p:nvSpPr>
-          <p:cNvPr id="4" name="Shape 2"/>
-          <p:cNvSpPr/>
-          <p:nvPr/>
-        </p:nvSpPr>
-        <p:spPr>
-          <a:xfrm>
-            <a:off x="640080" y="1371600"/>
-            <a:ext cx="10972800" cy="1005840"/>
+            <a:endParaRPr lang="en-US" sz="3000" dirty="0"/>
+          </a:p>
+        </p:txBody>
+      </p:sp>
+      <p:sp>
+        <p:nvSpPr>
+          <p:cNvPr id="5" name="Shape 3"/>
+          <p:cNvSpPr/>
+          <p:nvPr/>
+        </p:nvSpPr>
+        <p:spPr>
+          <a:xfrm>
+            <a:off x="731520" y="1143000"/>
+            <a:ext cx="10698480" cy="1051560"/>
           </a:xfrm>
           <a:prstGeom prst="roundRect">
             <a:avLst>
-              <a:gd name="adj" fmla="val 9091"/>
+              <a:gd name="adj" fmla="val 10435"/>
             </a:avLst>
           </a:prstGeom>
           <a:solidFill>
-            <a:srgbClr val="14141F"/>
+            <a:srgbClr val="12121C"/>
           </a:solidFill>
           <a:ln/>
-        </p:spPr>
-      </p:sp>
-      <p:sp>
-        <p:nvSpPr>
-          <p:cNvPr id="5" name="Shape 3"/>
-          <p:cNvSpPr/>
-          <p:nvPr/>
-        </p:nvSpPr>
-        <p:spPr>
-          <a:xfrm>
-            <a:off x="640080" y="1371600"/>
-            <a:ext cx="137160" cy="1005840"/>
+          <a:effectLst>
+            <a:outerShdw sx="100000" sy="100000" kx="0" ky="0" algn="bl" rotWithShape="0" blurRad="152400" dist="38100" dir="16200000">
+              <a:srgbClr val="000000">
+                <a:alpha val="35000"/>
+              </a:srgbClr>
+            </a:outerShdw>
+          </a:effectLst>
+        </p:spPr>
+      </p:sp>
+      <p:sp>
+        <p:nvSpPr>
+          <p:cNvPr id="6" name="Shape 4"/>
+          <p:cNvSpPr/>
+          <p:nvPr/>
+        </p:nvSpPr>
+        <p:spPr>
+          <a:xfrm>
+            <a:off x="731520" y="1143000"/>
+            <a:ext cx="109728" cy="1051560"/>
+          </a:xfrm>
+          <a:prstGeom prst="rect">
+            <a:avLst/>
+          </a:prstGeom>
+          <a:solidFill>
+            <a:srgbClr val="8B5CF6"/>
+          </a:solidFill>
+          <a:ln/>
+        </p:spPr>
+      </p:sp>
+      <p:sp>
+        <p:nvSpPr>
+          <p:cNvPr id="7" name="Text 5"/>
+          <p:cNvSpPr/>
+          <p:nvPr/>
+        </p:nvSpPr>
+        <p:spPr>
+          <a:xfrm>
+            <a:off x="1143000" y="1325880"/>
+            <a:ext cx="9875520" cy="320040"/>
+          </a:xfrm>
+          <a:prstGeom prst="rect">
+            <a:avLst/>
+          </a:prstGeom>
+          <a:noFill/>
+          <a:ln/>
+        </p:spPr>
+        <p:txBody>
+          <a:bodyPr wrap="square" rtlCol="0" anchor="ctr"/>
+          <a:lstStyle/>
+          <a:p>
+            <a:pPr indent="0" marL="0">
+              <a:buNone/>
+            </a:pPr>
+            <a:r>
+              <a:rPr lang="en-US" sz="1700" b="1" dirty="0">
+                <a:solidFill>
+                  <a:srgbClr val="FAFAFA"/>
+                </a:solidFill>
+                <a:latin typeface="Arial" pitchFamily="34" charset="0"/>
+                <a:ea typeface="Arial" pitchFamily="34" charset="-122"/>
+                <a:cs typeface="Arial" pitchFamily="34" charset="-120"/>
+              </a:rPr>
+              <a:t>USDC-native settlement story</a:t>
+            </a:r>
+            <a:endParaRPr lang="en-US" sz="1700" dirty="0"/>
+          </a:p>
+        </p:txBody>
+      </p:sp>
+      <p:sp>
+        <p:nvSpPr>
+          <p:cNvPr id="8" name="Text 6"/>
+          <p:cNvSpPr/>
+          <p:nvPr/>
+        </p:nvSpPr>
+        <p:spPr>
+          <a:xfrm>
+            <a:off x="1143000" y="1691640"/>
+            <a:ext cx="9875520" cy="320040"/>
+          </a:xfrm>
+          <a:prstGeom prst="rect">
+            <a:avLst/>
+          </a:prstGeom>
+          <a:noFill/>
+          <a:ln/>
+        </p:spPr>
+        <p:txBody>
+          <a:bodyPr wrap="square" rtlCol="0" anchor="ctr"/>
+          <a:lstStyle/>
+          <a:p>
+            <a:pPr indent="0" marL="0">
+              <a:buNone/>
+            </a:pPr>
+            <a:r>
+              <a:rPr lang="en-US" sz="1400" dirty="0">
+                <a:solidFill>
+                  <a:srgbClr val="A1A1AA"/>
+                </a:solidFill>
+                <a:latin typeface="Arial" pitchFamily="34" charset="0"/>
+                <a:ea typeface="Arial" pitchFamily="34" charset="-122"/>
+                <a:cs typeface="Arial" pitchFamily="34" charset="-120"/>
+              </a:rPr>
+              <a:t>Stakes, seeds, spectator pots, LP claims — all stable value.</a:t>
+            </a:r>
+            <a:endParaRPr lang="en-US" sz="1400" dirty="0"/>
+          </a:p>
+        </p:txBody>
+      </p:sp>
+      <p:sp>
+        <p:nvSpPr>
+          <p:cNvPr id="9" name="Shape 7"/>
+          <p:cNvSpPr/>
+          <p:nvPr/>
+        </p:nvSpPr>
+        <p:spPr>
+          <a:xfrm>
+            <a:off x="731520" y="2331720"/>
+            <a:ext cx="10698480" cy="1051560"/>
           </a:xfrm>
           <a:prstGeom prst="roundRect">
             <a:avLst>
-              <a:gd name="adj" fmla="val 33333"/>
+              <a:gd name="adj" fmla="val 10435"/>
             </a:avLst>
           </a:prstGeom>
           <a:solidFill>
-            <a:srgbClr val="7C3AED"/>
+            <a:srgbClr val="12121C"/>
           </a:solidFill>
           <a:ln/>
-        </p:spPr>
-      </p:sp>
-      <p:sp>
-        <p:nvSpPr>
-          <p:cNvPr id="6" name="Text 4"/>
-          <p:cNvSpPr/>
-          <p:nvPr/>
-        </p:nvSpPr>
-        <p:spPr>
-          <a:xfrm>
-            <a:off x="1097280" y="1508760"/>
-            <a:ext cx="10058400" cy="365760"/>
-          </a:xfrm>
-          <a:prstGeom prst="rect">
-            <a:avLst/>
-          </a:prstGeom>
-          <a:noFill/>
-          <a:ln/>
-        </p:spPr>
-        <p:txBody>
-          <a:bodyPr wrap="square" rtlCol="0" anchor="ctr"/>
-          <a:lstStyle/>
-          <a:p>
-            <a:pPr indent="0" marL="0">
-              <a:buNone/>
-            </a:pPr>
-            <a:r>
-              <a:rPr lang="en-US" sz="1800" b="1" dirty="0">
-                <a:solidFill>
-                  <a:srgbClr val="F4F4F5"/>
-                </a:solidFill>
-                <a:latin typeface="Arial" pitchFamily="34" charset="0"/>
-                <a:ea typeface="Arial" pitchFamily="34" charset="-122"/>
-                <a:cs typeface="Arial" pitchFamily="34" charset="-120"/>
-              </a:rPr>
-              <a:t>USDC-native settlement story</a:t>
-            </a:r>
-            <a:endParaRPr lang="en-US" sz="1800" dirty="0"/>
-          </a:p>
-        </p:txBody>
-      </p:sp>
-      <p:sp>
-        <p:nvSpPr>
-          <p:cNvPr id="7" name="Text 5"/>
-          <p:cNvSpPr/>
-          <p:nvPr/>
-        </p:nvSpPr>
-        <p:spPr>
-          <a:xfrm>
-            <a:off x="1097280" y="1874520"/>
-            <a:ext cx="10058400" cy="320040"/>
-          </a:xfrm>
-          <a:prstGeom prst="rect">
-            <a:avLst/>
-          </a:prstGeom>
-          <a:noFill/>
-          <a:ln/>
-        </p:spPr>
-        <p:txBody>
-          <a:bodyPr wrap="square" rtlCol="0" anchor="ctr"/>
-          <a:lstStyle/>
-          <a:p>
-            <a:pPr indent="0" marL="0">
-              <a:buNone/>
-            </a:pPr>
-            <a:r>
-              <a:rPr lang="en-US" sz="1500" dirty="0">
+          <a:effectLst>
+            <a:outerShdw sx="100000" sy="100000" kx="0" ky="0" algn="bl" rotWithShape="0" blurRad="152400" dist="38100" dir="16200000">
+              <a:srgbClr val="000000">
+                <a:alpha val="35000"/>
+              </a:srgbClr>
+            </a:outerShdw>
+          </a:effectLst>
+        </p:spPr>
+      </p:sp>
+      <p:sp>
+        <p:nvSpPr>
+          <p:cNvPr id="10" name="Shape 8"/>
+          <p:cNvSpPr/>
+          <p:nvPr/>
+        </p:nvSpPr>
+        <p:spPr>
+          <a:xfrm>
+            <a:off x="731520" y="2331720"/>
+            <a:ext cx="109728" cy="1051560"/>
+          </a:xfrm>
+          <a:prstGeom prst="rect">
+            <a:avLst/>
+          </a:prstGeom>
+          <a:solidFill>
+            <a:srgbClr val="8B5CF6"/>
+          </a:solidFill>
+          <a:ln/>
+        </p:spPr>
+      </p:sp>
+      <p:sp>
+        <p:nvSpPr>
+          <p:cNvPr id="11" name="Text 9"/>
+          <p:cNvSpPr/>
+          <p:nvPr/>
+        </p:nvSpPr>
+        <p:spPr>
+          <a:xfrm>
+            <a:off x="1143000" y="2514600"/>
+            <a:ext cx="9875520" cy="320040"/>
+          </a:xfrm>
+          <a:prstGeom prst="rect">
+            <a:avLst/>
+          </a:prstGeom>
+          <a:noFill/>
+          <a:ln/>
+        </p:spPr>
+        <p:txBody>
+          <a:bodyPr wrap="square" rtlCol="0" anchor="ctr"/>
+          <a:lstStyle/>
+          <a:p>
+            <a:pPr indent="0" marL="0">
+              <a:buNone/>
+            </a:pPr>
+            <a:r>
+              <a:rPr lang="en-US" sz="1700" b="1" dirty="0">
+                <a:solidFill>
+                  <a:srgbClr val="FAFAFA"/>
+                </a:solidFill>
+                <a:latin typeface="Arial" pitchFamily="34" charset="0"/>
+                <a:ea typeface="Arial" pitchFamily="34" charset="-122"/>
+                <a:cs typeface="Arial" pitchFamily="34" charset="-120"/>
+              </a:rPr>
+              <a:t>One escrow primitive</a:t>
+            </a:r>
+            <a:endParaRPr lang="en-US" sz="1700" dirty="0"/>
+          </a:p>
+        </p:txBody>
+      </p:sp>
+      <p:sp>
+        <p:nvSpPr>
+          <p:cNvPr id="12" name="Text 10"/>
+          <p:cNvSpPr/>
+          <p:nvPr/>
+        </p:nvSpPr>
+        <p:spPr>
+          <a:xfrm>
+            <a:off x="1143000" y="2880360"/>
+            <a:ext cx="9875520" cy="320040"/>
+          </a:xfrm>
+          <a:prstGeom prst="rect">
+            <a:avLst/>
+          </a:prstGeom>
+          <a:noFill/>
+          <a:ln/>
+        </p:spPr>
+        <p:txBody>
+          <a:bodyPr wrap="square" rtlCol="0" anchor="ctr"/>
+          <a:lstStyle/>
+          <a:p>
+            <a:pPr indent="0" marL="0">
+              <a:buNone/>
+            </a:pPr>
+            <a:r>
+              <a:rPr lang="en-US" sz="1400" dirty="0">
                 <a:solidFill>
                   <a:srgbClr val="A1A1AA"/>
                 </a:solidFill>
@@ -3003,121 +4146,253 @@
                 <a:ea typeface="Arial" pitchFamily="34" charset="-122"/>
                 <a:cs typeface="Arial" pitchFamily="34" charset="-120"/>
               </a:rPr>
-              <a:t>Stakes, seeds, fees, pots — all stable value.</a:t>
-            </a:r>
-            <a:endParaRPr lang="en-US" sz="1500" dirty="0"/>
-          </a:p>
-        </p:txBody>
-      </p:sp>
-      <p:sp>
-        <p:nvSpPr>
-          <p:cNvPr id="8" name="Shape 6"/>
-          <p:cNvSpPr/>
-          <p:nvPr/>
-        </p:nvSpPr>
-        <p:spPr>
-          <a:xfrm>
-            <a:off x="640080" y="2514600"/>
-            <a:ext cx="10972800" cy="1005840"/>
+              <a:t>Humans and agents dual-lock the same way on Arc testnet.</a:t>
+            </a:r>
+            <a:endParaRPr lang="en-US" sz="1400" dirty="0"/>
+          </a:p>
+        </p:txBody>
+      </p:sp>
+      <p:sp>
+        <p:nvSpPr>
+          <p:cNvPr id="13" name="Shape 11"/>
+          <p:cNvSpPr/>
+          <p:nvPr/>
+        </p:nvSpPr>
+        <p:spPr>
+          <a:xfrm>
+            <a:off x="731520" y="3520440"/>
+            <a:ext cx="10698480" cy="1051560"/>
           </a:xfrm>
           <a:prstGeom prst="roundRect">
             <a:avLst>
-              <a:gd name="adj" fmla="val 9091"/>
+              <a:gd name="adj" fmla="val 10435"/>
             </a:avLst>
           </a:prstGeom>
           <a:solidFill>
-            <a:srgbClr val="14141F"/>
+            <a:srgbClr val="12121C"/>
           </a:solidFill>
           <a:ln/>
-        </p:spPr>
-      </p:sp>
-      <p:sp>
-        <p:nvSpPr>
-          <p:cNvPr id="9" name="Shape 7"/>
-          <p:cNvSpPr/>
-          <p:nvPr/>
-        </p:nvSpPr>
-        <p:spPr>
-          <a:xfrm>
-            <a:off x="640080" y="2514600"/>
-            <a:ext cx="137160" cy="1005840"/>
+          <a:effectLst>
+            <a:outerShdw sx="100000" sy="100000" kx="0" ky="0" algn="bl" rotWithShape="0" blurRad="152400" dist="38100" dir="16200000">
+              <a:srgbClr val="000000">
+                <a:alpha val="35000"/>
+              </a:srgbClr>
+            </a:outerShdw>
+          </a:effectLst>
+        </p:spPr>
+      </p:sp>
+      <p:sp>
+        <p:nvSpPr>
+          <p:cNvPr id="14" name="Shape 12"/>
+          <p:cNvSpPr/>
+          <p:nvPr/>
+        </p:nvSpPr>
+        <p:spPr>
+          <a:xfrm>
+            <a:off x="731520" y="3520440"/>
+            <a:ext cx="109728" cy="1051560"/>
+          </a:xfrm>
+          <a:prstGeom prst="rect">
+            <a:avLst/>
+          </a:prstGeom>
+          <a:solidFill>
+            <a:srgbClr val="8B5CF6"/>
+          </a:solidFill>
+          <a:ln/>
+        </p:spPr>
+      </p:sp>
+      <p:sp>
+        <p:nvSpPr>
+          <p:cNvPr id="15" name="Text 13"/>
+          <p:cNvSpPr/>
+          <p:nvPr/>
+        </p:nvSpPr>
+        <p:spPr>
+          <a:xfrm>
+            <a:off x="1143000" y="3703320"/>
+            <a:ext cx="9875520" cy="320040"/>
+          </a:xfrm>
+          <a:prstGeom prst="rect">
+            <a:avLst/>
+          </a:prstGeom>
+          <a:noFill/>
+          <a:ln/>
+        </p:spPr>
+        <p:txBody>
+          <a:bodyPr wrap="square" rtlCol="0" anchor="ctr"/>
+          <a:lstStyle/>
+          <a:p>
+            <a:pPr indent="0" marL="0">
+              <a:buNone/>
+            </a:pPr>
+            <a:r>
+              <a:rPr lang="en-US" sz="1700" b="1" dirty="0">
+                <a:solidFill>
+                  <a:srgbClr val="FAFAFA"/>
+                </a:solidFill>
+                <a:latin typeface="Arial" pitchFamily="34" charset="0"/>
+                <a:ea typeface="Arial" pitchFamily="34" charset="-122"/>
+                <a:cs typeface="Arial" pitchFamily="34" charset="-120"/>
+              </a:rPr>
+              <a:t>High-frequency small stakes</a:t>
+            </a:r>
+            <a:endParaRPr lang="en-US" sz="1700" dirty="0"/>
+          </a:p>
+        </p:txBody>
+      </p:sp>
+      <p:sp>
+        <p:nvSpPr>
+          <p:cNvPr id="16" name="Text 14"/>
+          <p:cNvSpPr/>
+          <p:nvPr/>
+        </p:nvSpPr>
+        <p:spPr>
+          <a:xfrm>
+            <a:off x="1143000" y="4069080"/>
+            <a:ext cx="9875520" cy="320040"/>
+          </a:xfrm>
+          <a:prstGeom prst="rect">
+            <a:avLst/>
+          </a:prstGeom>
+          <a:noFill/>
+          <a:ln/>
+        </p:spPr>
+        <p:txBody>
+          <a:bodyPr wrap="square" rtlCol="0" anchor="ctr"/>
+          <a:lstStyle/>
+          <a:p>
+            <a:pPr indent="0" marL="0">
+              <a:buNone/>
+            </a:pPr>
+            <a:r>
+              <a:rPr lang="en-US" sz="1400" dirty="0">
+                <a:solidFill>
+                  <a:srgbClr val="A1A1AA"/>
+                </a:solidFill>
+                <a:latin typeface="Arial" pitchFamily="34" charset="0"/>
+                <a:ea typeface="Arial" pitchFamily="34" charset="-122"/>
+                <a:cs typeface="Arial" pitchFamily="34" charset="-120"/>
+              </a:rPr>
+              <a:t>Agent loops + skill matches need cheap, predictable settlement.</a:t>
+            </a:r>
+            <a:endParaRPr lang="en-US" sz="1400" dirty="0"/>
+          </a:p>
+        </p:txBody>
+      </p:sp>
+      <p:sp>
+        <p:nvSpPr>
+          <p:cNvPr id="17" name="Shape 15"/>
+          <p:cNvSpPr/>
+          <p:nvPr/>
+        </p:nvSpPr>
+        <p:spPr>
+          <a:xfrm>
+            <a:off x="731520" y="4709160"/>
+            <a:ext cx="10698480" cy="1051560"/>
           </a:xfrm>
           <a:prstGeom prst="roundRect">
             <a:avLst>
-              <a:gd name="adj" fmla="val 33333"/>
+              <a:gd name="adj" fmla="val 10435"/>
             </a:avLst>
           </a:prstGeom>
           <a:solidFill>
-            <a:srgbClr val="7C3AED"/>
+            <a:srgbClr val="12121C"/>
           </a:solidFill>
           <a:ln/>
-        </p:spPr>
-      </p:sp>
-      <p:sp>
-        <p:nvSpPr>
-          <p:cNvPr id="10" name="Text 8"/>
-          <p:cNvSpPr/>
-          <p:nvPr/>
-        </p:nvSpPr>
-        <p:spPr>
-          <a:xfrm>
-            <a:off x="1097280" y="2651760"/>
-            <a:ext cx="10058400" cy="365760"/>
-          </a:xfrm>
-          <a:prstGeom prst="rect">
-            <a:avLst/>
-          </a:prstGeom>
-          <a:noFill/>
-          <a:ln/>
-        </p:spPr>
-        <p:txBody>
-          <a:bodyPr wrap="square" rtlCol="0" anchor="ctr"/>
-          <a:lstStyle/>
-          <a:p>
-            <a:pPr indent="0" marL="0">
-              <a:buNone/>
-            </a:pPr>
-            <a:r>
-              <a:rPr lang="en-US" sz="1800" b="1" dirty="0">
-                <a:solidFill>
-                  <a:srgbClr val="F4F4F5"/>
-                </a:solidFill>
-                <a:latin typeface="Arial" pitchFamily="34" charset="0"/>
-                <a:ea typeface="Arial" pitchFamily="34" charset="-122"/>
-                <a:cs typeface="Arial" pitchFamily="34" charset="-120"/>
-              </a:rPr>
-              <a:t>BoardmanEscrow dual-lock</a:t>
-            </a:r>
-            <a:endParaRPr lang="en-US" sz="1800" dirty="0"/>
-          </a:p>
-        </p:txBody>
-      </p:sp>
-      <p:sp>
-        <p:nvSpPr>
-          <p:cNvPr id="11" name="Text 9"/>
-          <p:cNvSpPr/>
-          <p:nvPr/>
-        </p:nvSpPr>
-        <p:spPr>
-          <a:xfrm>
-            <a:off x="1097280" y="3017520"/>
-            <a:ext cx="10058400" cy="320040"/>
-          </a:xfrm>
-          <a:prstGeom prst="rect">
-            <a:avLst/>
-          </a:prstGeom>
-          <a:noFill/>
-          <a:ln/>
-        </p:spPr>
-        <p:txBody>
-          <a:bodyPr wrap="square" rtlCol="0" anchor="ctr"/>
-          <a:lstStyle/>
-          <a:p>
-            <a:pPr indent="0" marL="0">
-              <a:buNone/>
-            </a:pPr>
-            <a:r>
-              <a:rPr lang="en-US" sz="1500" dirty="0">
+          <a:effectLst>
+            <a:outerShdw sx="100000" sy="100000" kx="0" ky="0" algn="bl" rotWithShape="0" blurRad="152400" dist="38100" dir="16200000">
+              <a:srgbClr val="000000">
+                <a:alpha val="35000"/>
+              </a:srgbClr>
+            </a:outerShdw>
+          </a:effectLst>
+        </p:spPr>
+      </p:sp>
+      <p:sp>
+        <p:nvSpPr>
+          <p:cNvPr id="18" name="Shape 16"/>
+          <p:cNvSpPr/>
+          <p:nvPr/>
+        </p:nvSpPr>
+        <p:spPr>
+          <a:xfrm>
+            <a:off x="731520" y="4709160"/>
+            <a:ext cx="109728" cy="1051560"/>
+          </a:xfrm>
+          <a:prstGeom prst="rect">
+            <a:avLst/>
+          </a:prstGeom>
+          <a:solidFill>
+            <a:srgbClr val="8B5CF6"/>
+          </a:solidFill>
+          <a:ln/>
+        </p:spPr>
+      </p:sp>
+      <p:sp>
+        <p:nvSpPr>
+          <p:cNvPr id="19" name="Text 17"/>
+          <p:cNvSpPr/>
+          <p:nvPr/>
+        </p:nvSpPr>
+        <p:spPr>
+          <a:xfrm>
+            <a:off x="1143000" y="4892040"/>
+            <a:ext cx="9875520" cy="320040"/>
+          </a:xfrm>
+          <a:prstGeom prst="rect">
+            <a:avLst/>
+          </a:prstGeom>
+          <a:noFill/>
+          <a:ln/>
+        </p:spPr>
+        <p:txBody>
+          <a:bodyPr wrap="square" rtlCol="0" anchor="ctr"/>
+          <a:lstStyle/>
+          <a:p>
+            <a:pPr indent="0" marL="0">
+              <a:buNone/>
+            </a:pPr>
+            <a:r>
+              <a:rPr lang="en-US" sz="1700" b="1" dirty="0">
+                <a:solidFill>
+                  <a:srgbClr val="FAFAFA"/>
+                </a:solidFill>
+                <a:latin typeface="Arial" pitchFamily="34" charset="0"/>
+                <a:ea typeface="Arial" pitchFamily="34" charset="-122"/>
+                <a:cs typeface="Arial" pitchFamily="34" charset="-120"/>
+              </a:rPr>
+              <a:t>Programmable policy</a:t>
+            </a:r>
+            <a:endParaRPr lang="en-US" sz="1700" dirty="0"/>
+          </a:p>
+        </p:txBody>
+      </p:sp>
+      <p:sp>
+        <p:nvSpPr>
+          <p:cNvPr id="20" name="Text 18"/>
+          <p:cNvSpPr/>
+          <p:nvPr/>
+        </p:nvSpPr>
+        <p:spPr>
+          <a:xfrm>
+            <a:off x="1143000" y="5257800"/>
+            <a:ext cx="9875520" cy="320040"/>
+          </a:xfrm>
+          <a:prstGeom prst="rect">
+            <a:avLst/>
+          </a:prstGeom>
+          <a:noFill/>
+          <a:ln/>
+        </p:spPr>
+        <p:txBody>
+          <a:bodyPr wrap="square" rtlCol="0" anchor="ctr"/>
+          <a:lstStyle/>
+          <a:p>
+            <a:pPr indent="0" marL="0">
+              <a:buNone/>
+            </a:pPr>
+            <a:r>
+              <a:rPr lang="en-US" sz="1400" dirty="0">
                 <a:solidFill>
                   <a:srgbClr val="A1A1AA"/>
                 </a:solidFill>
@@ -3125,121 +4400,38 @@
                 <a:ea typeface="Arial" pitchFamily="34" charset="-122"/>
                 <a:cs typeface="Arial" pitchFamily="34" charset="-120"/>
               </a:rPr>
-              <a:t>Same primitive for humans and agents on Arc testnet.</a:t>
-            </a:r>
-            <a:endParaRPr lang="en-US" sz="1500" dirty="0"/>
-          </a:p>
-        </p:txBody>
-      </p:sp>
-      <p:sp>
-        <p:nvSpPr>
-          <p:cNvPr id="12" name="Shape 10"/>
-          <p:cNvSpPr/>
-          <p:nvPr/>
-        </p:nvSpPr>
-        <p:spPr>
-          <a:xfrm>
-            <a:off x="640080" y="3657600"/>
-            <a:ext cx="10972800" cy="1005840"/>
-          </a:xfrm>
-          <a:prstGeom prst="roundRect">
-            <a:avLst>
-              <a:gd name="adj" fmla="val 9091"/>
-            </a:avLst>
-          </a:prstGeom>
-          <a:solidFill>
-            <a:srgbClr val="14141F"/>
-          </a:solidFill>
-          <a:ln/>
-        </p:spPr>
-      </p:sp>
-      <p:sp>
-        <p:nvSpPr>
-          <p:cNvPr id="13" name="Shape 11"/>
-          <p:cNvSpPr/>
-          <p:nvPr/>
-        </p:nvSpPr>
-        <p:spPr>
-          <a:xfrm>
-            <a:off x="640080" y="3657600"/>
-            <a:ext cx="137160" cy="1005840"/>
-          </a:xfrm>
-          <a:prstGeom prst="roundRect">
-            <a:avLst>
-              <a:gd name="adj" fmla="val 33333"/>
-            </a:avLst>
-          </a:prstGeom>
-          <a:solidFill>
-            <a:srgbClr val="7C3AED"/>
-          </a:solidFill>
-          <a:ln/>
-        </p:spPr>
-      </p:sp>
-      <p:sp>
-        <p:nvSpPr>
-          <p:cNvPr id="14" name="Text 12"/>
-          <p:cNvSpPr/>
-          <p:nvPr/>
-        </p:nvSpPr>
-        <p:spPr>
-          <a:xfrm>
-            <a:off x="1097280" y="3794760"/>
-            <a:ext cx="10058400" cy="365760"/>
-          </a:xfrm>
-          <a:prstGeom prst="rect">
-            <a:avLst/>
-          </a:prstGeom>
-          <a:noFill/>
-          <a:ln/>
-        </p:spPr>
-        <p:txBody>
-          <a:bodyPr wrap="square" rtlCol="0" anchor="ctr"/>
-          <a:lstStyle/>
-          <a:p>
-            <a:pPr indent="0" marL="0">
-              <a:buNone/>
-            </a:pPr>
-            <a:r>
-              <a:rPr lang="en-US" sz="1800" b="1" dirty="0">
-                <a:solidFill>
-                  <a:srgbClr val="F4F4F5"/>
-                </a:solidFill>
-                <a:latin typeface="Arial" pitchFamily="34" charset="0"/>
-                <a:ea typeface="Arial" pitchFamily="34" charset="-122"/>
-                <a:cs typeface="Arial" pitchFamily="34" charset="-120"/>
-              </a:rPr>
-              <a:t>High-frequency small stakes</a:t>
-            </a:r>
-            <a:endParaRPr lang="en-US" sz="1800" dirty="0"/>
-          </a:p>
-        </p:txBody>
-      </p:sp>
-      <p:sp>
-        <p:nvSpPr>
-          <p:cNvPr id="15" name="Text 13"/>
-          <p:cNvSpPr/>
-          <p:nvPr/>
-        </p:nvSpPr>
-        <p:spPr>
-          <a:xfrm>
-            <a:off x="1097280" y="4160520"/>
-            <a:ext cx="10058400" cy="320040"/>
-          </a:xfrm>
-          <a:prstGeom prst="rect">
-            <a:avLst/>
-          </a:prstGeom>
-          <a:noFill/>
-          <a:ln/>
-        </p:spPr>
-        <p:txBody>
-          <a:bodyPr wrap="square" rtlCol="0" anchor="ctr"/>
-          <a:lstStyle/>
-          <a:p>
-            <a:pPr indent="0" marL="0">
-              <a:buNone/>
-            </a:pPr>
-            <a:r>
-              <a:rPr lang="en-US" sz="1500" dirty="0">
+              <a:t>Free capital, seed bps, pot caps, creator fees, LP profit share.</a:t>
+            </a:r>
+            <a:endParaRPr lang="en-US" sz="1400" dirty="0"/>
+          </a:p>
+        </p:txBody>
+      </p:sp>
+      <p:sp>
+        <p:nvSpPr>
+          <p:cNvPr id="21" name="Text 19"/>
+          <p:cNvSpPr/>
+          <p:nvPr/>
+        </p:nvSpPr>
+        <p:spPr>
+          <a:xfrm>
+            <a:off x="640080" y="6446520"/>
+            <a:ext cx="10972800" cy="274320"/>
+          </a:xfrm>
+          <a:prstGeom prst="rect">
+            <a:avLst/>
+          </a:prstGeom>
+          <a:noFill/>
+          <a:ln/>
+        </p:spPr>
+        <p:txBody>
+          <a:bodyPr wrap="square" rtlCol="0" anchor="ctr"/>
+          <a:lstStyle/>
+          <a:p>
+            <a:pPr indent="0" marL="0">
+              <a:buNone/>
+            </a:pPr>
+            <a:r>
+              <a:rPr lang="en-US" sz="1100" dirty="0">
                 <a:solidFill>
                   <a:srgbClr val="A1A1AA"/>
                 </a:solidFill>
@@ -3247,131 +4439,9 @@
                 <a:ea typeface="Arial" pitchFamily="34" charset="-122"/>
                 <a:cs typeface="Arial" pitchFamily="34" charset="-120"/>
               </a:rPr>
-              <a:t>Skill matches + agent loops need cheap, predictable settlement.</a:t>
-            </a:r>
-            <a:endParaRPr lang="en-US" sz="1500" dirty="0"/>
-          </a:p>
-        </p:txBody>
-      </p:sp>
-      <p:sp>
-        <p:nvSpPr>
-          <p:cNvPr id="16" name="Shape 14"/>
-          <p:cNvSpPr/>
-          <p:nvPr/>
-        </p:nvSpPr>
-        <p:spPr>
-          <a:xfrm>
-            <a:off x="640080" y="4800600"/>
-            <a:ext cx="10972800" cy="1005840"/>
-          </a:xfrm>
-          <a:prstGeom prst="roundRect">
-            <a:avLst>
-              <a:gd name="adj" fmla="val 9091"/>
-            </a:avLst>
-          </a:prstGeom>
-          <a:solidFill>
-            <a:srgbClr val="14141F"/>
-          </a:solidFill>
-          <a:ln/>
-        </p:spPr>
-      </p:sp>
-      <p:sp>
-        <p:nvSpPr>
-          <p:cNvPr id="17" name="Shape 15"/>
-          <p:cNvSpPr/>
-          <p:nvPr/>
-        </p:nvSpPr>
-        <p:spPr>
-          <a:xfrm>
-            <a:off x="640080" y="4800600"/>
-            <a:ext cx="137160" cy="1005840"/>
-          </a:xfrm>
-          <a:prstGeom prst="roundRect">
-            <a:avLst>
-              <a:gd name="adj" fmla="val 33333"/>
-            </a:avLst>
-          </a:prstGeom>
-          <a:solidFill>
-            <a:srgbClr val="7C3AED"/>
-          </a:solidFill>
-          <a:ln/>
-        </p:spPr>
-      </p:sp>
-      <p:sp>
-        <p:nvSpPr>
-          <p:cNvPr id="18" name="Text 16"/>
-          <p:cNvSpPr/>
-          <p:nvPr/>
-        </p:nvSpPr>
-        <p:spPr>
-          <a:xfrm>
-            <a:off x="1097280" y="4937760"/>
-            <a:ext cx="10058400" cy="365760"/>
-          </a:xfrm>
-          <a:prstGeom prst="rect">
-            <a:avLst/>
-          </a:prstGeom>
-          <a:noFill/>
-          <a:ln/>
-        </p:spPr>
-        <p:txBody>
-          <a:bodyPr wrap="square" rtlCol="0" anchor="ctr"/>
-          <a:lstStyle/>
-          <a:p>
-            <a:pPr indent="0" marL="0">
-              <a:buNone/>
-            </a:pPr>
-            <a:r>
-              <a:rPr lang="en-US" sz="1800" b="1" dirty="0">
-                <a:solidFill>
-                  <a:srgbClr val="F4F4F5"/>
-                </a:solidFill>
-                <a:latin typeface="Arial" pitchFamily="34" charset="0"/>
-                <a:ea typeface="Arial" pitchFamily="34" charset="-122"/>
-                <a:cs typeface="Arial" pitchFamily="34" charset="-120"/>
-              </a:rPr>
-              <a:t>Programmable money in practice</a:t>
-            </a:r>
-            <a:endParaRPr lang="en-US" sz="1800" dirty="0"/>
-          </a:p>
-        </p:txBody>
-      </p:sp>
-      <p:sp>
-        <p:nvSpPr>
-          <p:cNvPr id="19" name="Text 17"/>
-          <p:cNvSpPr/>
-          <p:nvPr/>
-        </p:nvSpPr>
-        <p:spPr>
-          <a:xfrm>
-            <a:off x="1097280" y="5303520"/>
-            <a:ext cx="10058400" cy="320040"/>
-          </a:xfrm>
-          <a:prstGeom prst="rect">
-            <a:avLst/>
-          </a:prstGeom>
-          <a:noFill/>
-          <a:ln/>
-        </p:spPr>
-        <p:txBody>
-          <a:bodyPr wrap="square" rtlCol="0" anchor="ctr"/>
-          <a:lstStyle/>
-          <a:p>
-            <a:pPr indent="0" marL="0">
-              <a:buNone/>
-            </a:pPr>
-            <a:r>
-              <a:rPr lang="en-US" sz="1500" dirty="0">
-                <a:solidFill>
-                  <a:srgbClr val="A1A1AA"/>
-                </a:solidFill>
-                <a:latin typeface="Arial" pitchFamily="34" charset="0"/>
-                <a:ea typeface="Arial" pitchFamily="34" charset="-122"/>
-                <a:cs typeface="Arial" pitchFamily="34" charset="-120"/>
-              </a:rPr>
-              <a:t>Policy-bound bankrolls, auto seed, LP profit share.</a:t>
-            </a:r>
-            <a:endParaRPr lang="en-US" sz="1500" dirty="0"/>
+              <a:t>Boardman · sideQuest · Arc Programmable Money Hackathon</a:t>
+            </a:r>
+            <a:endParaRPr lang="en-US" sz="1100" dirty="0"/>
           </a:p>
         </p:txBody>
       </p:sp>
@@ -3415,39 +4485,59 @@
             <a:avLst/>
           </a:prstGeom>
           <a:solidFill>
-            <a:srgbClr val="0B0B12"/>
+            <a:srgbClr val="07070C"/>
           </a:solidFill>
           <a:ln/>
         </p:spPr>
       </p:sp>
       <p:sp>
         <p:nvSpPr>
-          <p:cNvPr id="3" name="Text 1"/>
-          <p:cNvSpPr/>
-          <p:nvPr/>
-        </p:nvSpPr>
-        <p:spPr>
-          <a:xfrm>
-            <a:off x="640080" y="457200"/>
-            <a:ext cx="10972800" cy="548640"/>
-          </a:xfrm>
-          <a:prstGeom prst="rect">
-            <a:avLst/>
-          </a:prstGeom>
-          <a:noFill/>
-          <a:ln/>
-        </p:spPr>
-        <p:txBody>
-          <a:bodyPr wrap="square" rtlCol="0" anchor="ctr"/>
-          <a:lstStyle/>
-          <a:p>
-            <a:pPr indent="0" marL="0">
-              <a:buNone/>
-            </a:pPr>
-            <a:r>
-              <a:rPr lang="en-US" sz="3200" b="1" dirty="0">
-                <a:solidFill>
-                  <a:srgbClr val="F4F4F5"/>
+          <p:cNvPr id="3" name="Shape 1"/>
+          <p:cNvSpPr/>
+          <p:nvPr/>
+        </p:nvSpPr>
+        <p:spPr>
+          <a:xfrm>
+            <a:off x="0" y="0"/>
+            <a:ext cx="128016" cy="6858000"/>
+          </a:xfrm>
+          <a:prstGeom prst="rect">
+            <a:avLst/>
+          </a:prstGeom>
+          <a:solidFill>
+            <a:srgbClr val="8B5CF6"/>
+          </a:solidFill>
+          <a:ln/>
+        </p:spPr>
+      </p:sp>
+      <p:sp>
+        <p:nvSpPr>
+          <p:cNvPr id="4" name="Text 2"/>
+          <p:cNvSpPr/>
+          <p:nvPr/>
+        </p:nvSpPr>
+        <p:spPr>
+          <a:xfrm>
+            <a:off x="731520" y="411480"/>
+            <a:ext cx="10058400" cy="502920"/>
+          </a:xfrm>
+          <a:prstGeom prst="rect">
+            <a:avLst/>
+          </a:prstGeom>
+          <a:noFill/>
+          <a:ln/>
+        </p:spPr>
+        <p:txBody>
+          <a:bodyPr wrap="square" rtlCol="0" anchor="ctr"/>
+          <a:lstStyle/>
+          <a:p>
+            <a:pPr indent="0" marL="0">
+              <a:buNone/>
+            </a:pPr>
+            <a:r>
+              <a:rPr lang="en-US" sz="3000" b="1" dirty="0">
+                <a:solidFill>
+                  <a:srgbClr val="FAFAFA"/>
                 </a:solidFill>
                 <a:latin typeface="Arial" pitchFamily="34" charset="0"/>
                 <a:ea typeface="Arial" pitchFamily="34" charset="-122"/>
@@ -3455,38 +4545,67 @@
               </a:rPr>
               <a:t>Live demo</a:t>
             </a:r>
-            <a:endParaRPr lang="en-US" sz="3200" dirty="0"/>
-          </a:p>
-        </p:txBody>
-      </p:sp>
-      <p:sp>
-        <p:nvSpPr>
-          <p:cNvPr id="4" name="Text 2"/>
-          <p:cNvSpPr/>
-          <p:nvPr/>
-        </p:nvSpPr>
-        <p:spPr>
-          <a:xfrm>
-            <a:off x="822960" y="1371600"/>
-            <a:ext cx="2011680" cy="502920"/>
-          </a:xfrm>
-          <a:prstGeom prst="rect">
-            <a:avLst/>
-          </a:prstGeom>
-          <a:noFill/>
-          <a:ln/>
-        </p:spPr>
-        <p:txBody>
-          <a:bodyPr wrap="square" rtlCol="0" anchor="ctr"/>
-          <a:lstStyle/>
-          <a:p>
-            <a:pPr indent="0" marL="0">
-              <a:buNone/>
-            </a:pPr>
-            <a:r>
-              <a:rPr lang="en-US" sz="1800" b="1" dirty="0">
-                <a:solidFill>
-                  <a:srgbClr val="7C3AED"/>
+            <a:endParaRPr lang="en-US" sz="3000" dirty="0"/>
+          </a:p>
+        </p:txBody>
+      </p:sp>
+      <p:sp>
+        <p:nvSpPr>
+          <p:cNvPr id="5" name="Shape 3"/>
+          <p:cNvSpPr/>
+          <p:nvPr/>
+        </p:nvSpPr>
+        <p:spPr>
+          <a:xfrm>
+            <a:off x="731520" y="1097280"/>
+            <a:ext cx="10698480" cy="822960"/>
+          </a:xfrm>
+          <a:prstGeom prst="roundRect">
+            <a:avLst>
+              <a:gd name="adj" fmla="val 13333"/>
+            </a:avLst>
+          </a:prstGeom>
+          <a:solidFill>
+            <a:srgbClr val="12121C"/>
+          </a:solidFill>
+          <a:ln/>
+          <a:effectLst>
+            <a:outerShdw sx="100000" sy="100000" kx="0" ky="0" algn="bl" rotWithShape="0" blurRad="152400" dist="38100" dir="16200000">
+              <a:srgbClr val="000000">
+                <a:alpha val="35000"/>
+              </a:srgbClr>
+            </a:outerShdw>
+          </a:effectLst>
+        </p:spPr>
+      </p:sp>
+      <p:sp>
+        <p:nvSpPr>
+          <p:cNvPr id="6" name="Text 4"/>
+          <p:cNvSpPr/>
+          <p:nvPr/>
+        </p:nvSpPr>
+        <p:spPr>
+          <a:xfrm>
+            <a:off x="1005840" y="1325880"/>
+            <a:ext cx="1645920" cy="365760"/>
+          </a:xfrm>
+          <a:prstGeom prst="rect">
+            <a:avLst/>
+          </a:prstGeom>
+          <a:noFill/>
+          <a:ln/>
+        </p:spPr>
+        <p:txBody>
+          <a:bodyPr wrap="square" rtlCol="0" anchor="ctr"/>
+          <a:lstStyle/>
+          <a:p>
+            <a:pPr indent="0" marL="0">
+              <a:buNone/>
+            </a:pPr>
+            <a:r>
+              <a:rPr lang="en-US" sz="1600" b="1" dirty="0">
+                <a:solidFill>
+                  <a:srgbClr val="8B5CF6"/>
                 </a:solidFill>
                 <a:latin typeface="Arial" pitchFamily="34" charset="0"/>
                 <a:ea typeface="Arial" pitchFamily="34" charset="-122"/>
@@ -3494,38 +4613,38 @@
               </a:rPr>
               <a:t>Arena</a:t>
             </a:r>
-            <a:endParaRPr lang="en-US" sz="1800" dirty="0"/>
-          </a:p>
-        </p:txBody>
-      </p:sp>
-      <p:sp>
-        <p:nvSpPr>
-          <p:cNvPr id="5" name="Text 3"/>
-          <p:cNvSpPr/>
-          <p:nvPr/>
-        </p:nvSpPr>
-        <p:spPr>
-          <a:xfrm>
-            <a:off x="3017520" y="1371600"/>
-            <a:ext cx="8229600" cy="502920"/>
-          </a:xfrm>
-          <a:prstGeom prst="rect">
-            <a:avLst/>
-          </a:prstGeom>
-          <a:noFill/>
-          <a:ln/>
-        </p:spPr>
-        <p:txBody>
-          <a:bodyPr wrap="square" rtlCol="0" anchor="ctr"/>
-          <a:lstStyle/>
-          <a:p>
-            <a:pPr indent="0" marL="0">
-              <a:buNone/>
-            </a:pPr>
-            <a:r>
-              <a:rPr lang="en-US" sz="1800" dirty="0">
-                <a:solidFill>
-                  <a:srgbClr val="F4F4F5"/>
+            <a:endParaRPr lang="en-US" sz="1600" dirty="0"/>
+          </a:p>
+        </p:txBody>
+      </p:sp>
+      <p:sp>
+        <p:nvSpPr>
+          <p:cNvPr id="7" name="Text 5"/>
+          <p:cNvSpPr/>
+          <p:nvPr/>
+        </p:nvSpPr>
+        <p:spPr>
+          <a:xfrm>
+            <a:off x="2743200" y="1207008"/>
+            <a:ext cx="8229600" cy="320040"/>
+          </a:xfrm>
+          <a:prstGeom prst="rect">
+            <a:avLst/>
+          </a:prstGeom>
+          <a:noFill/>
+          <a:ln/>
+        </p:spPr>
+        <p:txBody>
+          <a:bodyPr wrap="square" rtlCol="0" anchor="ctr"/>
+          <a:lstStyle/>
+          <a:p>
+            <a:pPr indent="0" marL="0">
+              <a:buNone/>
+            </a:pPr>
+            <a:r>
+              <a:rPr lang="en-US" sz="1500" dirty="0">
+                <a:solidFill>
+                  <a:srgbClr val="FAFAFA"/>
                 </a:solidFill>
                 <a:latin typeface="Arial" pitchFamily="34" charset="0"/>
                 <a:ea typeface="Arial" pitchFamily="34" charset="-122"/>
@@ -3533,85 +4652,7 @@
               </a:rPr>
               <a:t>boardman.playingsidequest.fun/agentic/arena.html</a:t>
             </a:r>
-            <a:endParaRPr lang="en-US" sz="1800" dirty="0"/>
-          </a:p>
-        </p:txBody>
-      </p:sp>
-      <p:sp>
-        <p:nvSpPr>
-          <p:cNvPr id="6" name="Text 4"/>
-          <p:cNvSpPr/>
-          <p:nvPr/>
-        </p:nvSpPr>
-        <p:spPr>
-          <a:xfrm>
-            <a:off x="822960" y="2240280"/>
-            <a:ext cx="2011680" cy="502920"/>
-          </a:xfrm>
-          <a:prstGeom prst="rect">
-            <a:avLst/>
-          </a:prstGeom>
-          <a:noFill/>
-          <a:ln/>
-        </p:spPr>
-        <p:txBody>
-          <a:bodyPr wrap="square" rtlCol="0" anchor="ctr"/>
-          <a:lstStyle/>
-          <a:p>
-            <a:pPr indent="0" marL="0">
-              <a:buNone/>
-            </a:pPr>
-            <a:r>
-              <a:rPr lang="en-US" sz="1800" b="1" dirty="0">
-                <a:solidFill>
-                  <a:srgbClr val="7C3AED"/>
-                </a:solidFill>
-                <a:latin typeface="Arial" pitchFamily="34" charset="0"/>
-                <a:ea typeface="Arial" pitchFamily="34" charset="-122"/>
-                <a:cs typeface="Arial" pitchFamily="34" charset="-120"/>
-              </a:rPr>
-              <a:t>Hub</a:t>
-            </a:r>
-            <a:endParaRPr lang="en-US" sz="1800" dirty="0"/>
-          </a:p>
-        </p:txBody>
-      </p:sp>
-      <p:sp>
-        <p:nvSpPr>
-          <p:cNvPr id="7" name="Text 5"/>
-          <p:cNvSpPr/>
-          <p:nvPr/>
-        </p:nvSpPr>
-        <p:spPr>
-          <a:xfrm>
-            <a:off x="3017520" y="2240280"/>
-            <a:ext cx="8229600" cy="502920"/>
-          </a:xfrm>
-          <a:prstGeom prst="rect">
-            <a:avLst/>
-          </a:prstGeom>
-          <a:noFill/>
-          <a:ln/>
-        </p:spPr>
-        <p:txBody>
-          <a:bodyPr wrap="square" rtlCol="0" anchor="ctr"/>
-          <a:lstStyle/>
-          <a:p>
-            <a:pPr indent="0" marL="0">
-              <a:buNone/>
-            </a:pPr>
-            <a:r>
-              <a:rPr lang="en-US" sz="1800" dirty="0">
-                <a:solidFill>
-                  <a:srgbClr val="F4F4F5"/>
-                </a:solidFill>
-                <a:latin typeface="Arial" pitchFamily="34" charset="0"/>
-                <a:ea typeface="Arial" pitchFamily="34" charset="-122"/>
-                <a:cs typeface="Arial" pitchFamily="34" charset="-120"/>
-              </a:rPr>
-              <a:t>boardman.playingsidequest.fun/agentic/hub.html</a:t>
-            </a:r>
-            <a:endParaRPr lang="en-US" sz="1800" dirty="0"/>
+            <a:endParaRPr lang="en-US" sz="1500" dirty="0"/>
           </a:p>
         </p:txBody>
       </p:sp>
@@ -3623,75 +4664,65 @@
         </p:nvSpPr>
         <p:spPr>
           <a:xfrm>
-            <a:off x="822960" y="3108960"/>
-            <a:ext cx="2011680" cy="502920"/>
-          </a:xfrm>
-          <a:prstGeom prst="rect">
-            <a:avLst/>
-          </a:prstGeom>
-          <a:noFill/>
-          <a:ln/>
-        </p:spPr>
-        <p:txBody>
-          <a:bodyPr wrap="square" rtlCol="0" anchor="ctr"/>
-          <a:lstStyle/>
-          <a:p>
-            <a:pPr indent="0" marL="0">
-              <a:buNone/>
-            </a:pPr>
-            <a:r>
-              <a:rPr lang="en-US" sz="1800" b="1" dirty="0">
-                <a:solidFill>
-                  <a:srgbClr val="7C3AED"/>
-                </a:solidFill>
-                <a:latin typeface="Arial" pitchFamily="34" charset="0"/>
-                <a:ea typeface="Arial" pitchFamily="34" charset="-122"/>
-                <a:cs typeface="Arial" pitchFamily="34" charset="-120"/>
-              </a:rPr>
-              <a:t>Docs</a:t>
-            </a:r>
-            <a:endParaRPr lang="en-US" sz="1800" dirty="0"/>
-          </a:p>
-        </p:txBody>
-      </p:sp>
-      <p:sp>
-        <p:nvSpPr>
-          <p:cNvPr id="9" name="Text 7"/>
-          <p:cNvSpPr/>
-          <p:nvPr/>
-        </p:nvSpPr>
-        <p:spPr>
-          <a:xfrm>
-            <a:off x="3017520" y="3108960"/>
-            <a:ext cx="8229600" cy="502920"/>
-          </a:xfrm>
-          <a:prstGeom prst="rect">
-            <a:avLst/>
-          </a:prstGeom>
-          <a:noFill/>
-          <a:ln/>
-        </p:spPr>
-        <p:txBody>
-          <a:bodyPr wrap="square" rtlCol="0" anchor="ctr"/>
-          <a:lstStyle/>
-          <a:p>
-            <a:pPr indent="0" marL="0">
-              <a:buNone/>
-            </a:pPr>
-            <a:r>
-              <a:rPr lang="en-US" sz="1800" dirty="0">
-                <a:solidFill>
-                  <a:srgbClr val="F4F4F5"/>
-                </a:solidFill>
-                <a:latin typeface="Arial" pitchFamily="34" charset="0"/>
-                <a:ea typeface="Arial" pitchFamily="34" charset="-122"/>
-                <a:cs typeface="Arial" pitchFamily="34" charset="-120"/>
-              </a:rPr>
-              <a:t>boardman.playingsidequest.fun/agentic/docs.html</a:t>
-            </a:r>
-            <a:endParaRPr lang="en-US" sz="1800" dirty="0"/>
-          </a:p>
-        </p:txBody>
+            <a:off x="2743200" y="1536192"/>
+            <a:ext cx="8229600" cy="274320"/>
+          </a:xfrm>
+          <a:prstGeom prst="rect">
+            <a:avLst/>
+          </a:prstGeom>
+          <a:noFill/>
+          <a:ln/>
+        </p:spPr>
+        <p:txBody>
+          <a:bodyPr wrap="square" rtlCol="0" anchor="ctr"/>
+          <a:lstStyle/>
+          <a:p>
+            <a:pPr indent="0" marL="0">
+              <a:buNone/>
+            </a:pPr>
+            <a:r>
+              <a:rPr lang="en-US" sz="1200" dirty="0">
+                <a:solidFill>
+                  <a:srgbClr val="A1A1AA"/>
+                </a:solidFill>
+                <a:latin typeface="Arial" pitchFamily="34" charset="0"/>
+                <a:ea typeface="Arial" pitchFamily="34" charset="-122"/>
+                <a:cs typeface="Arial" pitchFamily="34" charset="-120"/>
+              </a:rPr>
+              <a:t>Play GM agents · stake any amount</a:t>
+            </a:r>
+            <a:endParaRPr lang="en-US" sz="1200" dirty="0"/>
+          </a:p>
+        </p:txBody>
+      </p:sp>
+      <p:sp>
+        <p:nvSpPr>
+          <p:cNvPr id="9" name="Shape 7"/>
+          <p:cNvSpPr/>
+          <p:nvPr/>
+        </p:nvSpPr>
+        <p:spPr>
+          <a:xfrm>
+            <a:off x="731520" y="2057400"/>
+            <a:ext cx="10698480" cy="822960"/>
+          </a:xfrm>
+          <a:prstGeom prst="roundRect">
+            <a:avLst>
+              <a:gd name="adj" fmla="val 13333"/>
+            </a:avLst>
+          </a:prstGeom>
+          <a:solidFill>
+            <a:srgbClr val="12121C"/>
+          </a:solidFill>
+          <a:ln/>
+          <a:effectLst>
+            <a:outerShdw sx="100000" sy="100000" kx="0" ky="0" algn="bl" rotWithShape="0" blurRad="152400" dist="38100" dir="16200000">
+              <a:srgbClr val="000000">
+                <a:alpha val="35000"/>
+              </a:srgbClr>
+            </a:outerShdw>
+          </a:effectLst>
+        </p:spPr>
       </p:sp>
       <p:sp>
         <p:nvSpPr>
@@ -3701,26 +4732,464 @@
         </p:nvSpPr>
         <p:spPr>
           <a:xfrm>
-            <a:off x="822960" y="3977640"/>
-            <a:ext cx="2011680" cy="502920"/>
-          </a:xfrm>
-          <a:prstGeom prst="rect">
-            <a:avLst/>
-          </a:prstGeom>
-          <a:noFill/>
-          <a:ln/>
-        </p:spPr>
-        <p:txBody>
-          <a:bodyPr wrap="square" rtlCol="0" anchor="ctr"/>
-          <a:lstStyle/>
-          <a:p>
-            <a:pPr indent="0" marL="0">
-              <a:buNone/>
-            </a:pPr>
-            <a:r>
-              <a:rPr lang="en-US" sz="1800" b="1" dirty="0">
-                <a:solidFill>
-                  <a:srgbClr val="7C3AED"/>
+            <a:off x="1005840" y="2286000"/>
+            <a:ext cx="1645920" cy="365760"/>
+          </a:xfrm>
+          <a:prstGeom prst="rect">
+            <a:avLst/>
+          </a:prstGeom>
+          <a:noFill/>
+          <a:ln/>
+        </p:spPr>
+        <p:txBody>
+          <a:bodyPr wrap="square" rtlCol="0" anchor="ctr"/>
+          <a:lstStyle/>
+          <a:p>
+            <a:pPr indent="0" marL="0">
+              <a:buNone/>
+            </a:pPr>
+            <a:r>
+              <a:rPr lang="en-US" sz="1600" b="1" dirty="0">
+                <a:solidFill>
+                  <a:srgbClr val="8B5CF6"/>
+                </a:solidFill>
+                <a:latin typeface="Arial" pitchFamily="34" charset="0"/>
+                <a:ea typeface="Arial" pitchFamily="34" charset="-122"/>
+                <a:cs typeface="Arial" pitchFamily="34" charset="-120"/>
+              </a:rPr>
+              <a:t>Video</a:t>
+            </a:r>
+            <a:endParaRPr lang="en-US" sz="1600" dirty="0"/>
+          </a:p>
+        </p:txBody>
+      </p:sp>
+      <p:sp>
+        <p:nvSpPr>
+          <p:cNvPr id="11" name="Text 9"/>
+          <p:cNvSpPr/>
+          <p:nvPr/>
+        </p:nvSpPr>
+        <p:spPr>
+          <a:xfrm>
+            <a:off x="2743200" y="2167128"/>
+            <a:ext cx="8229600" cy="320040"/>
+          </a:xfrm>
+          <a:prstGeom prst="rect">
+            <a:avLst/>
+          </a:prstGeom>
+          <a:noFill/>
+          <a:ln/>
+        </p:spPr>
+        <p:txBody>
+          <a:bodyPr wrap="square" rtlCol="0" anchor="ctr"/>
+          <a:lstStyle/>
+          <a:p>
+            <a:pPr indent="0" marL="0">
+              <a:buNone/>
+            </a:pPr>
+            <a:r>
+              <a:rPr lang="en-US" sz="1500" dirty="0">
+                <a:solidFill>
+                  <a:srgbClr val="FAFAFA"/>
+                </a:solidFill>
+                <a:latin typeface="Arial" pitchFamily="34" charset="0"/>
+                <a:ea typeface="Arial" pitchFamily="34" charset="-122"/>
+                <a:cs typeface="Arial" pitchFamily="34" charset="-120"/>
+              </a:rPr>
+              <a:t>boardman.playingsidequest.fun/demos/boardman-hackathon-demo.webm</a:t>
+            </a:r>
+            <a:endParaRPr lang="en-US" sz="1500" dirty="0"/>
+          </a:p>
+        </p:txBody>
+      </p:sp>
+      <p:sp>
+        <p:nvSpPr>
+          <p:cNvPr id="12" name="Text 10"/>
+          <p:cNvSpPr/>
+          <p:nvPr/>
+        </p:nvSpPr>
+        <p:spPr>
+          <a:xfrm>
+            <a:off x="2743200" y="2496312"/>
+            <a:ext cx="8229600" cy="274320"/>
+          </a:xfrm>
+          <a:prstGeom prst="rect">
+            <a:avLst/>
+          </a:prstGeom>
+          <a:noFill/>
+          <a:ln/>
+        </p:spPr>
+        <p:txBody>
+          <a:bodyPr wrap="square" rtlCol="0" anchor="ctr"/>
+          <a:lstStyle/>
+          <a:p>
+            <a:pPr indent="0" marL="0">
+              <a:buNone/>
+            </a:pPr>
+            <a:r>
+              <a:rPr lang="en-US" sz="1200" dirty="0">
+                <a:solidFill>
+                  <a:srgbClr val="A1A1AA"/>
+                </a:solidFill>
+                <a:latin typeface="Arial" pitchFamily="34" charset="0"/>
+                <a:ea typeface="Arial" pitchFamily="34" charset="-122"/>
+                <a:cs typeface="Arial" pitchFamily="34" charset="-120"/>
+              </a:rPr>
+              <a:t>Full walkthrough</a:t>
+            </a:r>
+            <a:endParaRPr lang="en-US" sz="1200" dirty="0"/>
+          </a:p>
+        </p:txBody>
+      </p:sp>
+      <p:sp>
+        <p:nvSpPr>
+          <p:cNvPr id="13" name="Shape 11"/>
+          <p:cNvSpPr/>
+          <p:nvPr/>
+        </p:nvSpPr>
+        <p:spPr>
+          <a:xfrm>
+            <a:off x="731520" y="3017520"/>
+            <a:ext cx="10698480" cy="822960"/>
+          </a:xfrm>
+          <a:prstGeom prst="roundRect">
+            <a:avLst>
+              <a:gd name="adj" fmla="val 13333"/>
+            </a:avLst>
+          </a:prstGeom>
+          <a:solidFill>
+            <a:srgbClr val="12121C"/>
+          </a:solidFill>
+          <a:ln/>
+          <a:effectLst>
+            <a:outerShdw sx="100000" sy="100000" kx="0" ky="0" algn="bl" rotWithShape="0" blurRad="152400" dist="38100" dir="16200000">
+              <a:srgbClr val="000000">
+                <a:alpha val="35000"/>
+              </a:srgbClr>
+            </a:outerShdw>
+          </a:effectLst>
+        </p:spPr>
+      </p:sp>
+      <p:sp>
+        <p:nvSpPr>
+          <p:cNvPr id="14" name="Text 12"/>
+          <p:cNvSpPr/>
+          <p:nvPr/>
+        </p:nvSpPr>
+        <p:spPr>
+          <a:xfrm>
+            <a:off x="1005840" y="3246120"/>
+            <a:ext cx="1645920" cy="365760"/>
+          </a:xfrm>
+          <a:prstGeom prst="rect">
+            <a:avLst/>
+          </a:prstGeom>
+          <a:noFill/>
+          <a:ln/>
+        </p:spPr>
+        <p:txBody>
+          <a:bodyPr wrap="square" rtlCol="0" anchor="ctr"/>
+          <a:lstStyle/>
+          <a:p>
+            <a:pPr indent="0" marL="0">
+              <a:buNone/>
+            </a:pPr>
+            <a:r>
+              <a:rPr lang="en-US" sz="1600" b="1" dirty="0">
+                <a:solidFill>
+                  <a:srgbClr val="8B5CF6"/>
+                </a:solidFill>
+                <a:latin typeface="Arial" pitchFamily="34" charset="0"/>
+                <a:ea typeface="Arial" pitchFamily="34" charset="-122"/>
+                <a:cs typeface="Arial" pitchFamily="34" charset="-120"/>
+              </a:rPr>
+              <a:t>Deck</a:t>
+            </a:r>
+            <a:endParaRPr lang="en-US" sz="1600" dirty="0"/>
+          </a:p>
+        </p:txBody>
+      </p:sp>
+      <p:sp>
+        <p:nvSpPr>
+          <p:cNvPr id="15" name="Text 13"/>
+          <p:cNvSpPr/>
+          <p:nvPr/>
+        </p:nvSpPr>
+        <p:spPr>
+          <a:xfrm>
+            <a:off x="2743200" y="3127248"/>
+            <a:ext cx="8229600" cy="320040"/>
+          </a:xfrm>
+          <a:prstGeom prst="rect">
+            <a:avLst/>
+          </a:prstGeom>
+          <a:noFill/>
+          <a:ln/>
+        </p:spPr>
+        <p:txBody>
+          <a:bodyPr wrap="square" rtlCol="0" anchor="ctr"/>
+          <a:lstStyle/>
+          <a:p>
+            <a:pPr indent="0" marL="0">
+              <a:buNone/>
+            </a:pPr>
+            <a:r>
+              <a:rPr lang="en-US" sz="1500" dirty="0">
+                <a:solidFill>
+                  <a:srgbClr val="FAFAFA"/>
+                </a:solidFill>
+                <a:latin typeface="Arial" pitchFamily="34" charset="0"/>
+                <a:ea typeface="Arial" pitchFamily="34" charset="-122"/>
+                <a:cs typeface="Arial" pitchFamily="34" charset="-120"/>
+              </a:rPr>
+              <a:t>boardman.playingsidequest.fun/demos/Boardman_Arc_Hackathon.pptx</a:t>
+            </a:r>
+            <a:endParaRPr lang="en-US" sz="1500" dirty="0"/>
+          </a:p>
+        </p:txBody>
+      </p:sp>
+      <p:sp>
+        <p:nvSpPr>
+          <p:cNvPr id="16" name="Text 14"/>
+          <p:cNvSpPr/>
+          <p:nvPr/>
+        </p:nvSpPr>
+        <p:spPr>
+          <a:xfrm>
+            <a:off x="2743200" y="3456432"/>
+            <a:ext cx="8229600" cy="274320"/>
+          </a:xfrm>
+          <a:prstGeom prst="rect">
+            <a:avLst/>
+          </a:prstGeom>
+          <a:noFill/>
+          <a:ln/>
+        </p:spPr>
+        <p:txBody>
+          <a:bodyPr wrap="square" rtlCol="0" anchor="ctr"/>
+          <a:lstStyle/>
+          <a:p>
+            <a:pPr indent="0" marL="0">
+              <a:buNone/>
+            </a:pPr>
+            <a:r>
+              <a:rPr lang="en-US" sz="1200" dirty="0">
+                <a:solidFill>
+                  <a:srgbClr val="A1A1AA"/>
+                </a:solidFill>
+                <a:latin typeface="Arial" pitchFamily="34" charset="0"/>
+                <a:ea typeface="Arial" pitchFamily="34" charset="-122"/>
+                <a:cs typeface="Arial" pitchFamily="34" charset="-120"/>
+              </a:rPr>
+              <a:t>This presentation</a:t>
+            </a:r>
+            <a:endParaRPr lang="en-US" sz="1200" dirty="0"/>
+          </a:p>
+        </p:txBody>
+      </p:sp>
+      <p:sp>
+        <p:nvSpPr>
+          <p:cNvPr id="17" name="Shape 15"/>
+          <p:cNvSpPr/>
+          <p:nvPr/>
+        </p:nvSpPr>
+        <p:spPr>
+          <a:xfrm>
+            <a:off x="731520" y="3977640"/>
+            <a:ext cx="10698480" cy="822960"/>
+          </a:xfrm>
+          <a:prstGeom prst="roundRect">
+            <a:avLst>
+              <a:gd name="adj" fmla="val 13333"/>
+            </a:avLst>
+          </a:prstGeom>
+          <a:solidFill>
+            <a:srgbClr val="12121C"/>
+          </a:solidFill>
+          <a:ln/>
+          <a:effectLst>
+            <a:outerShdw sx="100000" sy="100000" kx="0" ky="0" algn="bl" rotWithShape="0" blurRad="152400" dist="38100" dir="16200000">
+              <a:srgbClr val="000000">
+                <a:alpha val="35000"/>
+              </a:srgbClr>
+            </a:outerShdw>
+          </a:effectLst>
+        </p:spPr>
+      </p:sp>
+      <p:sp>
+        <p:nvSpPr>
+          <p:cNvPr id="18" name="Text 16"/>
+          <p:cNvSpPr/>
+          <p:nvPr/>
+        </p:nvSpPr>
+        <p:spPr>
+          <a:xfrm>
+            <a:off x="1005840" y="4206240"/>
+            <a:ext cx="1645920" cy="365760"/>
+          </a:xfrm>
+          <a:prstGeom prst="rect">
+            <a:avLst/>
+          </a:prstGeom>
+          <a:noFill/>
+          <a:ln/>
+        </p:spPr>
+        <p:txBody>
+          <a:bodyPr wrap="square" rtlCol="0" anchor="ctr"/>
+          <a:lstStyle/>
+          <a:p>
+            <a:pPr indent="0" marL="0">
+              <a:buNone/>
+            </a:pPr>
+            <a:r>
+              <a:rPr lang="en-US" sz="1600" b="1" dirty="0">
+                <a:solidFill>
+                  <a:srgbClr val="8B5CF6"/>
+                </a:solidFill>
+                <a:latin typeface="Arial" pitchFamily="34" charset="0"/>
+                <a:ea typeface="Arial" pitchFamily="34" charset="-122"/>
+                <a:cs typeface="Arial" pitchFamily="34" charset="-120"/>
+              </a:rPr>
+              <a:t>Code</a:t>
+            </a:r>
+            <a:endParaRPr lang="en-US" sz="1600" dirty="0"/>
+          </a:p>
+        </p:txBody>
+      </p:sp>
+      <p:sp>
+        <p:nvSpPr>
+          <p:cNvPr id="19" name="Text 17"/>
+          <p:cNvSpPr/>
+          <p:nvPr/>
+        </p:nvSpPr>
+        <p:spPr>
+          <a:xfrm>
+            <a:off x="2743200" y="4087368"/>
+            <a:ext cx="8229600" cy="320040"/>
+          </a:xfrm>
+          <a:prstGeom prst="rect">
+            <a:avLst/>
+          </a:prstGeom>
+          <a:noFill/>
+          <a:ln/>
+        </p:spPr>
+        <p:txBody>
+          <a:bodyPr wrap="square" rtlCol="0" anchor="ctr"/>
+          <a:lstStyle/>
+          <a:p>
+            <a:pPr indent="0" marL="0">
+              <a:buNone/>
+            </a:pPr>
+            <a:r>
+              <a:rPr lang="en-US" sz="1500" dirty="0">
+                <a:solidFill>
+                  <a:srgbClr val="FAFAFA"/>
+                </a:solidFill>
+                <a:latin typeface="Arial" pitchFamily="34" charset="0"/>
+                <a:ea typeface="Arial" pitchFamily="34" charset="-122"/>
+                <a:cs typeface="Arial" pitchFamily="34" charset="-120"/>
+              </a:rPr>
+              <a:t>github.com/playingsidequest-dotplay/boardman</a:t>
+            </a:r>
+            <a:endParaRPr lang="en-US" sz="1500" dirty="0"/>
+          </a:p>
+        </p:txBody>
+      </p:sp>
+      <p:sp>
+        <p:nvSpPr>
+          <p:cNvPr id="20" name="Text 18"/>
+          <p:cNvSpPr/>
+          <p:nvPr/>
+        </p:nvSpPr>
+        <p:spPr>
+          <a:xfrm>
+            <a:off x="2743200" y="4416552"/>
+            <a:ext cx="8229600" cy="274320"/>
+          </a:xfrm>
+          <a:prstGeom prst="rect">
+            <a:avLst/>
+          </a:prstGeom>
+          <a:noFill/>
+          <a:ln/>
+        </p:spPr>
+        <p:txBody>
+          <a:bodyPr wrap="square" rtlCol="0" anchor="ctr"/>
+          <a:lstStyle/>
+          <a:p>
+            <a:pPr indent="0" marL="0">
+              <a:buNone/>
+            </a:pPr>
+            <a:r>
+              <a:rPr lang="en-US" sz="1200" dirty="0">
+                <a:solidFill>
+                  <a:srgbClr val="A1A1AA"/>
+                </a:solidFill>
+                <a:latin typeface="Arial" pitchFamily="34" charset="0"/>
+                <a:ea typeface="Arial" pitchFamily="34" charset="-122"/>
+                <a:cs typeface="Arial" pitchFamily="34" charset="-120"/>
+              </a:rPr>
+              <a:t>Public repo</a:t>
+            </a:r>
+            <a:endParaRPr lang="en-US" sz="1200" dirty="0"/>
+          </a:p>
+        </p:txBody>
+      </p:sp>
+      <p:sp>
+        <p:nvSpPr>
+          <p:cNvPr id="21" name="Shape 19"/>
+          <p:cNvSpPr/>
+          <p:nvPr/>
+        </p:nvSpPr>
+        <p:spPr>
+          <a:xfrm>
+            <a:off x="731520" y="4937760"/>
+            <a:ext cx="10698480" cy="822960"/>
+          </a:xfrm>
+          <a:prstGeom prst="roundRect">
+            <a:avLst>
+              <a:gd name="adj" fmla="val 13333"/>
+            </a:avLst>
+          </a:prstGeom>
+          <a:solidFill>
+            <a:srgbClr val="12121C"/>
+          </a:solidFill>
+          <a:ln/>
+          <a:effectLst>
+            <a:outerShdw sx="100000" sy="100000" kx="0" ky="0" algn="bl" rotWithShape="0" blurRad="152400" dist="38100" dir="16200000">
+              <a:srgbClr val="000000">
+                <a:alpha val="35000"/>
+              </a:srgbClr>
+            </a:outerShdw>
+          </a:effectLst>
+        </p:spPr>
+      </p:sp>
+      <p:sp>
+        <p:nvSpPr>
+          <p:cNvPr id="22" name="Text 20"/>
+          <p:cNvSpPr/>
+          <p:nvPr/>
+        </p:nvSpPr>
+        <p:spPr>
+          <a:xfrm>
+            <a:off x="1005840" y="5166360"/>
+            <a:ext cx="1645920" cy="365760"/>
+          </a:xfrm>
+          <a:prstGeom prst="rect">
+            <a:avLst/>
+          </a:prstGeom>
+          <a:noFill/>
+          <a:ln/>
+        </p:spPr>
+        <p:txBody>
+          <a:bodyPr wrap="square" rtlCol="0" anchor="ctr"/>
+          <a:lstStyle/>
+          <a:p>
+            <a:pPr indent="0" marL="0">
+              <a:buNone/>
+            </a:pPr>
+            <a:r>
+              <a:rPr lang="en-US" sz="1600" b="1" dirty="0">
+                <a:solidFill>
+                  <a:srgbClr val="8B5CF6"/>
                 </a:solidFill>
                 <a:latin typeface="Arial" pitchFamily="34" charset="0"/>
                 <a:ea typeface="Arial" pitchFamily="34" charset="-122"/>
@@ -3728,38 +5197,38 @@
               </a:rPr>
               <a:t>Bot</a:t>
             </a:r>
-            <a:endParaRPr lang="en-US" sz="1800" dirty="0"/>
-          </a:p>
-        </p:txBody>
-      </p:sp>
-      <p:sp>
-        <p:nvSpPr>
-          <p:cNvPr id="11" name="Text 9"/>
-          <p:cNvSpPr/>
-          <p:nvPr/>
-        </p:nvSpPr>
-        <p:spPr>
-          <a:xfrm>
-            <a:off x="3017520" y="3977640"/>
-            <a:ext cx="8229600" cy="502920"/>
-          </a:xfrm>
-          <a:prstGeom prst="rect">
-            <a:avLst/>
-          </a:prstGeom>
-          <a:noFill/>
-          <a:ln/>
-        </p:spPr>
-        <p:txBody>
-          <a:bodyPr wrap="square" rtlCol="0" anchor="ctr"/>
-          <a:lstStyle/>
-          <a:p>
-            <a:pPr indent="0" marL="0">
-              <a:buNone/>
-            </a:pPr>
-            <a:r>
-              <a:rPr lang="en-US" sz="1800" dirty="0">
-                <a:solidFill>
-                  <a:srgbClr val="F4F4F5"/>
+            <a:endParaRPr lang="en-US" sz="1600" dirty="0"/>
+          </a:p>
+        </p:txBody>
+      </p:sp>
+      <p:sp>
+        <p:nvSpPr>
+          <p:cNvPr id="23" name="Text 21"/>
+          <p:cNvSpPr/>
+          <p:nvPr/>
+        </p:nvSpPr>
+        <p:spPr>
+          <a:xfrm>
+            <a:off x="2743200" y="5047488"/>
+            <a:ext cx="8229600" cy="320040"/>
+          </a:xfrm>
+          <a:prstGeom prst="rect">
+            <a:avLst/>
+          </a:prstGeom>
+          <a:noFill/>
+          <a:ln/>
+        </p:spPr>
+        <p:txBody>
+          <a:bodyPr wrap="square" rtlCol="0" anchor="ctr"/>
+          <a:lstStyle/>
+          <a:p>
+            <a:pPr indent="0" marL="0">
+              <a:buNone/>
+            </a:pPr>
+            <a:r>
+              <a:rPr lang="en-US" sz="1500" dirty="0">
+                <a:solidFill>
+                  <a:srgbClr val="FAFAFA"/>
                 </a:solidFill>
                 <a:latin typeface="Arial" pitchFamily="34" charset="0"/>
                 <a:ea typeface="Arial" pitchFamily="34" charset="-122"/>
@@ -3767,85 +5236,85 @@
               </a:rPr>
               <a:t>t.me/myboardmanOfficialBot</a:t>
             </a:r>
-            <a:endParaRPr lang="en-US" sz="1800" dirty="0"/>
-          </a:p>
-        </p:txBody>
-      </p:sp>
-      <p:sp>
-        <p:nvSpPr>
-          <p:cNvPr id="12" name="Text 10"/>
-          <p:cNvSpPr/>
-          <p:nvPr/>
-        </p:nvSpPr>
-        <p:spPr>
-          <a:xfrm>
-            <a:off x="822960" y="4846320"/>
-            <a:ext cx="2011680" cy="502920"/>
-          </a:xfrm>
-          <a:prstGeom prst="rect">
-            <a:avLst/>
-          </a:prstGeom>
-          <a:noFill/>
-          <a:ln/>
-        </p:spPr>
-        <p:txBody>
-          <a:bodyPr wrap="square" rtlCol="0" anchor="ctr"/>
-          <a:lstStyle/>
-          <a:p>
-            <a:pPr indent="0" marL="0">
-              <a:buNone/>
-            </a:pPr>
-            <a:r>
-              <a:rPr lang="en-US" sz="1800" b="1" dirty="0">
-                <a:solidFill>
-                  <a:srgbClr val="7C3AED"/>
-                </a:solidFill>
-                <a:latin typeface="Arial" pitchFamily="34" charset="0"/>
-                <a:ea typeface="Arial" pitchFamily="34" charset="-122"/>
-                <a:cs typeface="Arial" pitchFamily="34" charset="-120"/>
-              </a:rPr>
-              <a:t>Code</a:t>
-            </a:r>
-            <a:endParaRPr lang="en-US" sz="1800" dirty="0"/>
-          </a:p>
-        </p:txBody>
-      </p:sp>
-      <p:sp>
-        <p:nvSpPr>
-          <p:cNvPr id="13" name="Text 11"/>
-          <p:cNvSpPr/>
-          <p:nvPr/>
-        </p:nvSpPr>
-        <p:spPr>
-          <a:xfrm>
-            <a:off x="3017520" y="4846320"/>
-            <a:ext cx="8229600" cy="502920"/>
-          </a:xfrm>
-          <a:prstGeom prst="rect">
-            <a:avLst/>
-          </a:prstGeom>
-          <a:noFill/>
-          <a:ln/>
-        </p:spPr>
-        <p:txBody>
-          <a:bodyPr wrap="square" rtlCol="0" anchor="ctr"/>
-          <a:lstStyle/>
-          <a:p>
-            <a:pPr indent="0" marL="0">
-              <a:buNone/>
-            </a:pPr>
-            <a:r>
-              <a:rPr lang="en-US" sz="1800" dirty="0">
-                <a:solidFill>
-                  <a:srgbClr val="F4F4F5"/>
-                </a:solidFill>
-                <a:latin typeface="Arial" pitchFamily="34" charset="0"/>
-                <a:ea typeface="Arial" pitchFamily="34" charset="-122"/>
-                <a:cs typeface="Arial" pitchFamily="34" charset="-120"/>
-              </a:rPr>
-              <a:t>github.com/playingsidequest-dotplay/boardman</a:t>
-            </a:r>
-            <a:endParaRPr lang="en-US" sz="1800" dirty="0"/>
+            <a:endParaRPr lang="en-US" sz="1500" dirty="0"/>
+          </a:p>
+        </p:txBody>
+      </p:sp>
+      <p:sp>
+        <p:nvSpPr>
+          <p:cNvPr id="24" name="Text 22"/>
+          <p:cNvSpPr/>
+          <p:nvPr/>
+        </p:nvSpPr>
+        <p:spPr>
+          <a:xfrm>
+            <a:off x="2743200" y="5376672"/>
+            <a:ext cx="8229600" cy="274320"/>
+          </a:xfrm>
+          <a:prstGeom prst="rect">
+            <a:avLst/>
+          </a:prstGeom>
+          <a:noFill/>
+          <a:ln/>
+        </p:spPr>
+        <p:txBody>
+          <a:bodyPr wrap="square" rtlCol="0" anchor="ctr"/>
+          <a:lstStyle/>
+          <a:p>
+            <a:pPr indent="0" marL="0">
+              <a:buNone/>
+            </a:pPr>
+            <a:r>
+              <a:rPr lang="en-US" sz="1200" dirty="0">
+                <a:solidFill>
+                  <a:srgbClr val="A1A1AA"/>
+                </a:solidFill>
+                <a:latin typeface="Arial" pitchFamily="34" charset="0"/>
+                <a:ea typeface="Arial" pitchFamily="34" charset="-122"/>
+                <a:cs typeface="Arial" pitchFamily="34" charset="-120"/>
+              </a:rPr>
+              <a:t>Human skill path</a:t>
+            </a:r>
+            <a:endParaRPr lang="en-US" sz="1200" dirty="0"/>
+          </a:p>
+        </p:txBody>
+      </p:sp>
+      <p:sp>
+        <p:nvSpPr>
+          <p:cNvPr id="25" name="Text 23"/>
+          <p:cNvSpPr/>
+          <p:nvPr/>
+        </p:nvSpPr>
+        <p:spPr>
+          <a:xfrm>
+            <a:off x="640080" y="6446520"/>
+            <a:ext cx="10972800" cy="274320"/>
+          </a:xfrm>
+          <a:prstGeom prst="rect">
+            <a:avLst/>
+          </a:prstGeom>
+          <a:noFill/>
+          <a:ln/>
+        </p:spPr>
+        <p:txBody>
+          <a:bodyPr wrap="square" rtlCol="0" anchor="ctr"/>
+          <a:lstStyle/>
+          <a:p>
+            <a:pPr indent="0" marL="0">
+              <a:buNone/>
+            </a:pPr>
+            <a:r>
+              <a:rPr lang="en-US" sz="1100" dirty="0">
+                <a:solidFill>
+                  <a:srgbClr val="A1A1AA"/>
+                </a:solidFill>
+                <a:latin typeface="Arial" pitchFamily="34" charset="0"/>
+                <a:ea typeface="Arial" pitchFamily="34" charset="-122"/>
+                <a:cs typeface="Arial" pitchFamily="34" charset="-120"/>
+              </a:rPr>
+              <a:t>Boardman · sideQuest · Arc Programmable Money Hackathon</a:t>
+            </a:r>
+            <a:endParaRPr lang="en-US" sz="1100" dirty="0"/>
           </a:p>
         </p:txBody>
       </p:sp>
@@ -3889,39 +5358,59 @@
             <a:avLst/>
           </a:prstGeom>
           <a:solidFill>
-            <a:srgbClr val="0B0B12"/>
+            <a:srgbClr val="07070C"/>
           </a:solidFill>
           <a:ln/>
         </p:spPr>
       </p:sp>
       <p:sp>
         <p:nvSpPr>
-          <p:cNvPr id="3" name="Text 1"/>
-          <p:cNvSpPr/>
-          <p:nvPr/>
-        </p:nvSpPr>
-        <p:spPr>
-          <a:xfrm>
-            <a:off x="640080" y="457200"/>
-            <a:ext cx="10972800" cy="548640"/>
-          </a:xfrm>
-          <a:prstGeom prst="rect">
-            <a:avLst/>
-          </a:prstGeom>
-          <a:noFill/>
-          <a:ln/>
-        </p:spPr>
-        <p:txBody>
-          <a:bodyPr wrap="square" rtlCol="0" anchor="ctr"/>
-          <a:lstStyle/>
-          <a:p>
-            <a:pPr indent="0" marL="0">
-              <a:buNone/>
-            </a:pPr>
-            <a:r>
-              <a:rPr lang="en-US" sz="3200" b="1" dirty="0">
-                <a:solidFill>
-                  <a:srgbClr val="F4F4F5"/>
+          <p:cNvPr id="3" name="Shape 1"/>
+          <p:cNvSpPr/>
+          <p:nvPr/>
+        </p:nvSpPr>
+        <p:spPr>
+          <a:xfrm>
+            <a:off x="0" y="0"/>
+            <a:ext cx="128016" cy="6858000"/>
+          </a:xfrm>
+          <a:prstGeom prst="rect">
+            <a:avLst/>
+          </a:prstGeom>
+          <a:solidFill>
+            <a:srgbClr val="8B5CF6"/>
+          </a:solidFill>
+          <a:ln/>
+        </p:spPr>
+      </p:sp>
+      <p:sp>
+        <p:nvSpPr>
+          <p:cNvPr id="4" name="Text 2"/>
+          <p:cNvSpPr/>
+          <p:nvPr/>
+        </p:nvSpPr>
+        <p:spPr>
+          <a:xfrm>
+            <a:off x="731520" y="411480"/>
+            <a:ext cx="10058400" cy="502920"/>
+          </a:xfrm>
+          <a:prstGeom prst="rect">
+            <a:avLst/>
+          </a:prstGeom>
+          <a:noFill/>
+          <a:ln/>
+        </p:spPr>
+        <p:txBody>
+          <a:bodyPr wrap="square" rtlCol="0" anchor="ctr"/>
+          <a:lstStyle/>
+          <a:p>
+            <a:pPr indent="0" marL="0">
+              <a:buNone/>
+            </a:pPr>
+            <a:r>
+              <a:rPr lang="en-US" sz="3000" b="1" dirty="0">
+                <a:solidFill>
+                  <a:srgbClr val="FAFAFA"/>
                 </a:solidFill>
                 <a:latin typeface="Arial" pitchFamily="34" charset="0"/>
                 <a:ea typeface="Arial" pitchFamily="34" charset="-122"/>
@@ -3929,42 +5418,49 @@
               </a:rPr>
               <a:t>Tracks</a:t>
             </a:r>
-            <a:endParaRPr lang="en-US" sz="3200" dirty="0"/>
-          </a:p>
-        </p:txBody>
-      </p:sp>
-      <p:sp>
-        <p:nvSpPr>
-          <p:cNvPr id="4" name="Shape 2"/>
-          <p:cNvSpPr/>
-          <p:nvPr/>
-        </p:nvSpPr>
-        <p:spPr>
-          <a:xfrm>
-            <a:off x="640080" y="1463040"/>
-            <a:ext cx="5303520" cy="4114800"/>
+            <a:endParaRPr lang="en-US" sz="3000" dirty="0"/>
+          </a:p>
+        </p:txBody>
+      </p:sp>
+      <p:sp>
+        <p:nvSpPr>
+          <p:cNvPr id="5" name="Shape 3"/>
+          <p:cNvSpPr/>
+          <p:nvPr/>
+        </p:nvSpPr>
+        <p:spPr>
+          <a:xfrm>
+            <a:off x="731520" y="1280160"/>
+            <a:ext cx="5212080" cy="4480560"/>
           </a:xfrm>
           <a:prstGeom prst="roundRect">
             <a:avLst>
-              <a:gd name="adj" fmla="val 3333"/>
+              <a:gd name="adj" fmla="val 2449"/>
             </a:avLst>
           </a:prstGeom>
           <a:solidFill>
-            <a:srgbClr val="14141F"/>
+            <a:srgbClr val="12121C"/>
           </a:solidFill>
           <a:ln/>
-        </p:spPr>
-      </p:sp>
-      <p:sp>
-        <p:nvSpPr>
-          <p:cNvPr id="5" name="Text 3"/>
-          <p:cNvSpPr/>
-          <p:nvPr/>
-        </p:nvSpPr>
-        <p:spPr>
-          <a:xfrm>
-            <a:off x="914400" y="1828800"/>
-            <a:ext cx="4754880" cy="548640"/>
+          <a:effectLst>
+            <a:outerShdw sx="100000" sy="100000" kx="0" ky="0" algn="bl" rotWithShape="0" blurRad="152400" dist="38100" dir="16200000">
+              <a:srgbClr val="000000">
+                <a:alpha val="35000"/>
+              </a:srgbClr>
+            </a:outerShdw>
+          </a:effectLst>
+        </p:spPr>
+      </p:sp>
+      <p:sp>
+        <p:nvSpPr>
+          <p:cNvPr id="6" name="Text 4"/>
+          <p:cNvSpPr/>
+          <p:nvPr/>
+        </p:nvSpPr>
+        <p:spPr>
+          <a:xfrm>
+            <a:off x="1051560" y="1600200"/>
+            <a:ext cx="4663440" cy="457200"/>
           </a:xfrm>
           <a:prstGeom prst="rect">
             <a:avLst/>
@@ -3996,14 +5492,14 @@
       </p:sp>
       <p:sp>
         <p:nvSpPr>
-          <p:cNvPr id="6" name="Text 4"/>
-          <p:cNvSpPr/>
-          <p:nvPr/>
-        </p:nvSpPr>
-        <p:spPr>
-          <a:xfrm>
-            <a:off x="914400" y="2560320"/>
-            <a:ext cx="4754880" cy="2560320"/>
+          <p:cNvPr id="7" name="Text 5"/>
+          <p:cNvSpPr/>
+          <p:nvPr/>
+        </p:nvSpPr>
+        <p:spPr>
+          <a:xfrm>
+            <a:off x="1051560" y="2286000"/>
+            <a:ext cx="4663440" cy="3108960"/>
           </a:xfrm>
           <a:prstGeom prst="rect">
             <a:avLst/>
@@ -4027,7 +5523,7 @@
                 <a:ea typeface="Arial" pitchFamily="34" charset="-122"/>
                 <a:cs typeface="Arial" pitchFamily="34" charset="-120"/>
               </a:rPr>
-              <a:t>Agents with bankrolls</a:t>
+              <a:t>GM Stockfish agents</a:t>
             </a:r>
             <a:endParaRPr lang="en-US" sz="1600" dirty="0"/>
           </a:p>
@@ -4044,7 +5540,7 @@
                 <a:ea typeface="Arial" pitchFamily="34" charset="-122"/>
                 <a:cs typeface="Arial" pitchFamily="34" charset="-120"/>
               </a:rPr>
-              <a:t>Stake negotiation</a:t>
+              <a:t>Bankrolls &amp; negotiation</a:t>
             </a:r>
             <a:endParaRPr lang="en-US" sz="1600" dirty="0"/>
           </a:p>
@@ -4120,36 +5616,43 @@
       </p:sp>
       <p:sp>
         <p:nvSpPr>
-          <p:cNvPr id="7" name="Shape 5"/>
-          <p:cNvSpPr/>
-          <p:nvPr/>
-        </p:nvSpPr>
-        <p:spPr>
-          <a:xfrm>
-            <a:off x="6217920" y="1463040"/>
-            <a:ext cx="5303520" cy="4114800"/>
+          <p:cNvPr id="8" name="Shape 6"/>
+          <p:cNvSpPr/>
+          <p:nvPr/>
+        </p:nvSpPr>
+        <p:spPr>
+          <a:xfrm>
+            <a:off x="6263640" y="1280160"/>
+            <a:ext cx="5212080" cy="4480560"/>
           </a:xfrm>
           <a:prstGeom prst="roundRect">
             <a:avLst>
-              <a:gd name="adj" fmla="val 3333"/>
+              <a:gd name="adj" fmla="val 2449"/>
             </a:avLst>
           </a:prstGeom>
           <a:solidFill>
-            <a:srgbClr val="14141F"/>
+            <a:srgbClr val="12121C"/>
           </a:solidFill>
           <a:ln/>
-        </p:spPr>
-      </p:sp>
-      <p:sp>
-        <p:nvSpPr>
-          <p:cNvPr id="8" name="Text 6"/>
-          <p:cNvSpPr/>
-          <p:nvPr/>
-        </p:nvSpPr>
-        <p:spPr>
-          <a:xfrm>
-            <a:off x="6492240" y="1828800"/>
-            <a:ext cx="4754880" cy="548640"/>
+          <a:effectLst>
+            <a:outerShdw sx="100000" sy="100000" kx="0" ky="0" algn="bl" rotWithShape="0" blurRad="152400" dist="38100" dir="16200000">
+              <a:srgbClr val="000000">
+                <a:alpha val="35000"/>
+              </a:srgbClr>
+            </a:outerShdw>
+          </a:effectLst>
+        </p:spPr>
+      </p:sp>
+      <p:sp>
+        <p:nvSpPr>
+          <p:cNvPr id="9" name="Text 7"/>
+          <p:cNvSpPr/>
+          <p:nvPr/>
+        </p:nvSpPr>
+        <p:spPr>
+          <a:xfrm>
+            <a:off x="6583680" y="1600200"/>
+            <a:ext cx="4663440" cy="457200"/>
           </a:xfrm>
           <a:prstGeom prst="rect">
             <a:avLst/>
@@ -4167,7 +5670,7 @@
             <a:r>
               <a:rPr lang="en-US" sz="2200" b="1" dirty="0">
                 <a:solidFill>
-                  <a:srgbClr val="7C3AED"/>
+                  <a:srgbClr val="8B5CF6"/>
                 </a:solidFill>
                 <a:latin typeface="Arial" pitchFamily="34" charset="0"/>
                 <a:ea typeface="Arial" pitchFamily="34" charset="-122"/>
@@ -4181,14 +5684,14 @@
       </p:sp>
       <p:sp>
         <p:nvSpPr>
-          <p:cNvPr id="9" name="Text 7"/>
-          <p:cNvSpPr/>
-          <p:nvPr/>
-        </p:nvSpPr>
-        <p:spPr>
-          <a:xfrm>
-            <a:off x="6492240" y="2560320"/>
-            <a:ext cx="4754880" cy="2560320"/>
+          <p:cNvPr id="10" name="Text 8"/>
+          <p:cNvSpPr/>
+          <p:nvPr/>
+        </p:nvSpPr>
+        <p:spPr>
+          <a:xfrm>
+            <a:off x="6583680" y="2286000"/>
+            <a:ext cx="4663440" cy="3108960"/>
           </a:xfrm>
           <a:prstGeom prst="rect">
             <a:avLst/>
@@ -4246,7 +5749,7 @@
                 <a:ea typeface="Arial" pitchFamily="34" charset="-122"/>
                 <a:cs typeface="Arial" pitchFamily="34" charset="-120"/>
               </a:rPr>
-              <a:t>Pot caps &amp; settle math</a:t>
+              <a:t>Pot caps &amp; room limits</a:t>
             </a:r>
             <a:endParaRPr lang="en-US" sz="1600" dirty="0"/>
           </a:p>
@@ -4263,7 +5766,7 @@
                 <a:ea typeface="Arial" pitchFamily="34" charset="-122"/>
                 <a:cs typeface="Arial" pitchFamily="34" charset="-120"/>
               </a:rPr>
-              <a:t>Bankroll free capital</a:t>
+              <a:t>Free-capital staking</a:t>
             </a:r>
             <a:endParaRPr lang="en-US" sz="1600" dirty="0"/>
           </a:p>
@@ -4300,6 +5803,45 @@
               <a:t>Arc-first settlement</a:t>
             </a:r>
             <a:endParaRPr lang="en-US" sz="1600" dirty="0"/>
+          </a:p>
+        </p:txBody>
+      </p:sp>
+      <p:sp>
+        <p:nvSpPr>
+          <p:cNvPr id="11" name="Text 9"/>
+          <p:cNvSpPr/>
+          <p:nvPr/>
+        </p:nvSpPr>
+        <p:spPr>
+          <a:xfrm>
+            <a:off x="640080" y="6446520"/>
+            <a:ext cx="10972800" cy="274320"/>
+          </a:xfrm>
+          <a:prstGeom prst="rect">
+            <a:avLst/>
+          </a:prstGeom>
+          <a:noFill/>
+          <a:ln/>
+        </p:spPr>
+        <p:txBody>
+          <a:bodyPr wrap="square" rtlCol="0" anchor="ctr"/>
+          <a:lstStyle/>
+          <a:p>
+            <a:pPr indent="0" marL="0">
+              <a:buNone/>
+            </a:pPr>
+            <a:r>
+              <a:rPr lang="en-US" sz="1100" dirty="0">
+                <a:solidFill>
+                  <a:srgbClr val="A1A1AA"/>
+                </a:solidFill>
+                <a:latin typeface="Arial" pitchFamily="34" charset="0"/>
+                <a:ea typeface="Arial" pitchFamily="34" charset="-122"/>
+                <a:cs typeface="Arial" pitchFamily="34" charset="-120"/>
+              </a:rPr>
+              <a:t>Boardman · sideQuest · Arc Programmable Money Hackathon</a:t>
+            </a:r>
+            <a:endParaRPr lang="en-US" sz="1100" dirty="0"/>
           </a:p>
         </p:txBody>
       </p:sp>
@@ -4343,20 +5885,40 @@
             <a:avLst/>
           </a:prstGeom>
           <a:solidFill>
-            <a:srgbClr val="0B0B12"/>
+            <a:srgbClr val="07070C"/>
           </a:solidFill>
           <a:ln/>
         </p:spPr>
       </p:sp>
       <p:sp>
         <p:nvSpPr>
-          <p:cNvPr id="3" name="Text 1"/>
-          <p:cNvSpPr/>
-          <p:nvPr/>
-        </p:nvSpPr>
-        <p:spPr>
-          <a:xfrm>
-            <a:off x="731520" y="2011680"/>
+          <p:cNvPr id="3" name="Shape 1"/>
+          <p:cNvSpPr/>
+          <p:nvPr/>
+        </p:nvSpPr>
+        <p:spPr>
+          <a:xfrm>
+            <a:off x="0" y="0"/>
+            <a:ext cx="128016" cy="6858000"/>
+          </a:xfrm>
+          <a:prstGeom prst="rect">
+            <a:avLst/>
+          </a:prstGeom>
+          <a:solidFill>
+            <a:srgbClr val="8B5CF6"/>
+          </a:solidFill>
+          <a:ln/>
+        </p:spPr>
+      </p:sp>
+      <p:sp>
+        <p:nvSpPr>
+          <p:cNvPr id="4" name="Text 2"/>
+          <p:cNvSpPr/>
+          <p:nvPr/>
+        </p:nvSpPr>
+        <p:spPr>
+          <a:xfrm>
+            <a:off x="822960" y="2103120"/>
             <a:ext cx="10515600" cy="731520"/>
           </a:xfrm>
           <a:prstGeom prst="rect">
@@ -4375,7 +5937,7 @@
             <a:r>
               <a:rPr lang="en-US" sz="4400" b="1" dirty="0">
                 <a:solidFill>
-                  <a:srgbClr val="F4F4F5"/>
+                  <a:srgbClr val="FAFAFA"/>
                 </a:solidFill>
                 <a:latin typeface="Arial" pitchFamily="34" charset="0"/>
                 <a:ea typeface="Arial" pitchFamily="34" charset="-122"/>
@@ -4389,14 +5951,53 @@
       </p:sp>
       <p:sp>
         <p:nvSpPr>
-          <p:cNvPr id="4" name="Text 2"/>
-          <p:cNvSpPr/>
-          <p:nvPr/>
-        </p:nvSpPr>
-        <p:spPr>
-          <a:xfrm>
-            <a:off x="731520" y="3017520"/>
-            <a:ext cx="10515600" cy="1097280"/>
+          <p:cNvPr id="5" name="Text 3"/>
+          <p:cNvSpPr/>
+          <p:nvPr/>
+        </p:nvSpPr>
+        <p:spPr>
+          <a:xfrm>
+            <a:off x="822960" y="3017520"/>
+            <a:ext cx="10515600" cy="411480"/>
+          </a:xfrm>
+          <a:prstGeom prst="rect">
+            <a:avLst/>
+          </a:prstGeom>
+          <a:noFill/>
+          <a:ln/>
+        </p:spPr>
+        <p:txBody>
+          <a:bodyPr wrap="square" rtlCol="0" anchor="ctr"/>
+          <a:lstStyle/>
+          <a:p>
+            <a:pPr indent="0" marL="0">
+              <a:buNone/>
+            </a:pPr>
+            <a:r>
+              <a:rPr lang="en-US" sz="1600" dirty="0">
+                <a:solidFill>
+                  <a:srgbClr val="A1A1AA"/>
+                </a:solidFill>
+                <a:latin typeface="Arial" pitchFamily="34" charset="0"/>
+                <a:ea typeface="Arial" pitchFamily="34" charset="-122"/>
+                <a:cs typeface="Arial" pitchFamily="34" charset="-120"/>
+              </a:rPr>
+              <a:t>Play a match · stake custom amounts · watch GM agents fight</a:t>
+            </a:r>
+            <a:endParaRPr lang="en-US" sz="1600" dirty="0"/>
+          </a:p>
+        </p:txBody>
+      </p:sp>
+      <p:sp>
+        <p:nvSpPr>
+          <p:cNvPr id="6" name="Text 4"/>
+          <p:cNvSpPr/>
+          <p:nvPr/>
+        </p:nvSpPr>
+        <p:spPr>
+          <a:xfrm>
+            <a:off x="822960" y="3749040"/>
+            <a:ext cx="10515600" cy="411480"/>
           </a:xfrm>
           <a:prstGeom prst="rect">
             <a:avLst/>
@@ -4414,22 +6015,83 @@
             <a:r>
               <a:rPr lang="en-US" sz="1800" dirty="0">
                 <a:solidFill>
+                  <a:srgbClr val="8B5CF6"/>
+                </a:solidFill>
+                <a:latin typeface="Arial" pitchFamily="34" charset="0"/>
+                <a:ea typeface="Arial" pitchFamily="34" charset="-122"/>
+                <a:cs typeface="Arial" pitchFamily="34" charset="-120"/>
+              </a:rPr>
+              <a:t>boardman.playingsidequest.fun/agentic/arena.html</a:t>
+            </a:r>
+            <a:endParaRPr lang="en-US" sz="1800" dirty="0"/>
+          </a:p>
+        </p:txBody>
+      </p:sp>
+      <p:sp>
+        <p:nvSpPr>
+          <p:cNvPr id="7" name="Text 5"/>
+          <p:cNvSpPr/>
+          <p:nvPr/>
+        </p:nvSpPr>
+        <p:spPr>
+          <a:xfrm>
+            <a:off x="822960" y="4297680"/>
+            <a:ext cx="10515600" cy="365760"/>
+          </a:xfrm>
+          <a:prstGeom prst="rect">
+            <a:avLst/>
+          </a:prstGeom>
+          <a:noFill/>
+          <a:ln/>
+        </p:spPr>
+        <p:txBody>
+          <a:bodyPr wrap="square" rtlCol="0" anchor="ctr"/>
+          <a:lstStyle/>
+          <a:p>
+            <a:pPr indent="0" marL="0">
+              <a:buNone/>
+            </a:pPr>
+            <a:r>
+              <a:rPr lang="en-US" sz="1500" dirty="0">
+                <a:solidFill>
                   <a:srgbClr val="A1A1AA"/>
                 </a:solidFill>
                 <a:latin typeface="Arial" pitchFamily="34" charset="0"/>
                 <a:ea typeface="Arial" pitchFamily="34" charset="-122"/>
                 <a:cs typeface="Arial" pitchFamily="34" charset="-120"/>
               </a:rPr>
-              <a:t>Boardman · sideQuest · Arc programmable money</a:t>
-            </a:r>
-            <a:endParaRPr lang="en-US" sz="1800" dirty="0"/>
-          </a:p>
-          <a:p>
-            <a:pPr indent="0" marL="0">
-              <a:buNone/>
-            </a:pPr>
-            <a:r>
-              <a:rPr lang="en-US" sz="1800" dirty="0">
+              <a:t>github.com/playingsidequest-dotplay/boardman</a:t>
+            </a:r>
+            <a:endParaRPr lang="en-US" sz="1500" dirty="0"/>
+          </a:p>
+        </p:txBody>
+      </p:sp>
+      <p:sp>
+        <p:nvSpPr>
+          <p:cNvPr id="8" name="Text 6"/>
+          <p:cNvSpPr/>
+          <p:nvPr/>
+        </p:nvSpPr>
+        <p:spPr>
+          <a:xfrm>
+            <a:off x="640080" y="6446520"/>
+            <a:ext cx="10972800" cy="274320"/>
+          </a:xfrm>
+          <a:prstGeom prst="rect">
+            <a:avLst/>
+          </a:prstGeom>
+          <a:noFill/>
+          <a:ln/>
+        </p:spPr>
+        <p:txBody>
+          <a:bodyPr wrap="square" rtlCol="0" anchor="ctr"/>
+          <a:lstStyle/>
+          <a:p>
+            <a:pPr indent="0" marL="0">
+              <a:buNone/>
+            </a:pPr>
+            <a:r>
+              <a:rPr lang="en-US" sz="1100" dirty="0">
                 <a:solidFill>
                   <a:srgbClr val="A1A1AA"/>
                 </a:solidFill>
@@ -4437,48 +6099,9 @@
                 <a:ea typeface="Arial" pitchFamily="34" charset="-122"/>
                 <a:cs typeface="Arial" pitchFamily="34" charset="-120"/>
               </a:rPr>
-              <a:t>Play a match: boardman.playingsidequest.fun/agentic/arena.html</a:t>
-            </a:r>
-            <a:endParaRPr lang="en-US" sz="1800" dirty="0"/>
-          </a:p>
-        </p:txBody>
-      </p:sp>
-      <p:sp>
-        <p:nvSpPr>
-          <p:cNvPr id="5" name="Text 3"/>
-          <p:cNvSpPr/>
-          <p:nvPr/>
-        </p:nvSpPr>
-        <p:spPr>
-          <a:xfrm>
-            <a:off x="731520" y="5029200"/>
-            <a:ext cx="10515600" cy="457200"/>
-          </a:xfrm>
-          <a:prstGeom prst="rect">
-            <a:avLst/>
-          </a:prstGeom>
-          <a:noFill/>
-          <a:ln/>
-        </p:spPr>
-        <p:txBody>
-          <a:bodyPr wrap="square" rtlCol="0" anchor="ctr"/>
-          <a:lstStyle/>
-          <a:p>
-            <a:pPr indent="0" marL="0">
-              <a:buNone/>
-            </a:pPr>
-            <a:r>
-              <a:rPr lang="en-US" sz="1600" dirty="0">
-                <a:solidFill>
-                  <a:srgbClr val="7C3AED"/>
-                </a:solidFill>
-                <a:latin typeface="Arial" pitchFamily="34" charset="0"/>
-                <a:ea typeface="Arial" pitchFamily="34" charset="-122"/>
-                <a:cs typeface="Arial" pitchFamily="34" charset="-120"/>
-              </a:rPr>
-              <a:t>github.com/playingsidequest-dotplay/boardman</a:t>
-            </a:r>
-            <a:endParaRPr lang="en-US" sz="1600" dirty="0"/>
+              <a:t>sideQuest · Boardman</a:t>
+            </a:r>
+            <a:endParaRPr lang="en-US" sz="1100" dirty="0"/>
           </a:p>
         </p:txBody>
       </p:sp>

--- a/demos/Boardman_Arc_Hackathon.pptx
+++ b/demos/Boardman_Arc_Hackathon.pptx
@@ -1882,7 +1882,7 @@
         </p:nvSpPr>
         <p:spPr>
           <a:xfrm>
-            <a:off x="822960" y="1417320"/>
+            <a:off x="822960" y="1280160"/>
             <a:ext cx="10058400" cy="274320"/>
           </a:xfrm>
           <a:prstGeom prst="rect">
@@ -1899,7 +1899,7 @@
               <a:buNone/>
             </a:pPr>
             <a:r>
-              <a:rPr lang="en-US" sz="1200" b="1" spc="250" kern="0" dirty="0">
+              <a:rPr lang="en-US" sz="1200" b="1" spc="200" kern="0" dirty="0">
                 <a:solidFill>
                   <a:srgbClr val="A78BFA"/>
                 </a:solidFill>
@@ -1907,7 +1907,7 @@
                 <a:ea typeface="Calibri" pitchFamily="34" charset="-122"/>
                 <a:cs typeface="Calibri" pitchFamily="34" charset="-120"/>
               </a:rPr>
-              <a:t>ARC  ·  PROGRAMMABLE MONEY  ·  2026</a:t>
+              <a:t>ENCODE  ·  ARC PROGRAMMABLE MONEY  ·  2026</a:t>
             </a:r>
             <a:endParaRPr lang="en-US" sz="1200" dirty="0"/>
           </a:p>
@@ -1921,24 +1921,24 @@
         </p:nvSpPr>
         <p:spPr>
           <a:xfrm>
-            <a:off x="822960" y="1920240"/>
-            <a:ext cx="10058400" cy="822960"/>
-          </a:xfrm>
-          <a:prstGeom prst="rect">
-            <a:avLst/>
-          </a:prstGeom>
-          <a:noFill/>
-          <a:ln/>
-        </p:spPr>
-        <p:txBody>
-          <a:bodyPr wrap="square" lIns="0" tIns="0" rIns="0" bIns="0" rtlCol="0" anchor="ctr"/>
-          <a:lstStyle/>
-          <a:p>
-            <a:pPr indent="0" marL="0">
-              <a:buNone/>
-            </a:pPr>
-            <a:r>
-              <a:rPr lang="en-US" sz="5400" b="1" dirty="0">
+            <a:off x="822960" y="1783080"/>
+            <a:ext cx="10058400" cy="777240"/>
+          </a:xfrm>
+          <a:prstGeom prst="rect">
+            <a:avLst/>
+          </a:prstGeom>
+          <a:noFill/>
+          <a:ln/>
+        </p:spPr>
+        <p:txBody>
+          <a:bodyPr wrap="square" lIns="0" tIns="0" rIns="0" bIns="0" rtlCol="0" anchor="ctr"/>
+          <a:lstStyle/>
+          <a:p>
+            <a:pPr indent="0" marL="0">
+              <a:buNone/>
+            </a:pPr>
+            <a:r>
+              <a:rPr lang="en-US" sz="5200" b="1" dirty="0">
                 <a:solidFill>
                   <a:srgbClr val="FFFFFF"/>
                 </a:solidFill>
@@ -1948,7 +1948,7 @@
               </a:rPr>
               <a:t>Boardman</a:t>
             </a:r>
-            <a:endParaRPr lang="en-US" sz="5400" dirty="0"/>
+            <a:endParaRPr lang="en-US" sz="5200" dirty="0"/>
           </a:p>
         </p:txBody>
       </p:sp>
@@ -1960,8 +1960,8 @@
         </p:nvSpPr>
         <p:spPr>
           <a:xfrm>
-            <a:off x="822960" y="2880360"/>
-            <a:ext cx="9601200" cy="914400"/>
+            <a:off x="822960" y="2697480"/>
+            <a:ext cx="10058400" cy="868680"/>
           </a:xfrm>
           <a:prstGeom prst="rect">
             <a:avLst/>
@@ -1985,7 +1985,7 @@
                 <a:ea typeface="Calibri" pitchFamily="34" charset="-122"/>
                 <a:cs typeface="Calibri" pitchFamily="34" charset="-120"/>
               </a:rPr>
-              <a:t>The settlement layer for skill contests—</a:t>
+              <a:t>Programmable USDC settlement for skill contests—</a:t>
             </a:r>
             <a:endParaRPr lang="en-US" sz="2000" dirty="0"/>
           </a:p>
@@ -2002,7 +2002,7 @@
                 <a:ea typeface="Calibri" pitchFamily="34" charset="-122"/>
                 <a:cs typeface="Calibri" pitchFamily="34" charset="-120"/>
               </a:rPr>
-              <a:t>human and autonomous—denominated in USDC.</a:t>
+              <a:t>humans in Telegram, agents on Boardman Stack.</a:t>
             </a:r>
             <a:endParaRPr lang="en-US" sz="2000" dirty="0"/>
           </a:p>
@@ -2016,8 +2016,8 @@
         </p:nvSpPr>
         <p:spPr>
           <a:xfrm>
-            <a:off x="822960" y="4114800"/>
-            <a:ext cx="2011680" cy="54864"/>
+            <a:off x="822960" y="3840480"/>
+            <a:ext cx="1828800" cy="54864"/>
           </a:xfrm>
           <a:prstGeom prst="rect">
             <a:avLst/>
@@ -2036,7 +2036,7 @@
         </p:nvSpPr>
         <p:spPr>
           <a:xfrm>
-            <a:off x="822960" y="4434840"/>
+            <a:off x="822960" y="4114800"/>
             <a:ext cx="9144000" cy="320040"/>
           </a:xfrm>
           <a:prstGeom prst="rect">
@@ -2053,7 +2053,46 @@
               <a:buNone/>
             </a:pPr>
             <a:r>
-              <a:rPr lang="en-US" sz="1400" dirty="0">
+              <a:rPr lang="en-US" sz="1500" b="1" dirty="0">
+                <a:solidFill>
+                  <a:srgbClr val="22D3EE"/>
+                </a:solidFill>
+                <a:latin typeface="Calibri" pitchFamily="34" charset="0"/>
+                <a:ea typeface="Calibri" pitchFamily="34" charset="-122"/>
+                <a:cs typeface="Calibri" pitchFamily="34" charset="-120"/>
+              </a:rPr>
+              <a:t>DeFi Track  +  Agentic Economy Track</a:t>
+            </a:r>
+            <a:endParaRPr lang="en-US" sz="1500" dirty="0"/>
+          </a:p>
+        </p:txBody>
+      </p:sp>
+      <p:sp>
+        <p:nvSpPr>
+          <p:cNvPr id="8" name="Text 6"/>
+          <p:cNvSpPr/>
+          <p:nvPr/>
+        </p:nvSpPr>
+        <p:spPr>
+          <a:xfrm>
+            <a:off x="822960" y="5669280"/>
+            <a:ext cx="10515600" cy="320040"/>
+          </a:xfrm>
+          <a:prstGeom prst="rect">
+            <a:avLst/>
+          </a:prstGeom>
+          <a:noFill/>
+          <a:ln/>
+        </p:spPr>
+        <p:txBody>
+          <a:bodyPr wrap="square" lIns="0" tIns="0" rIns="0" bIns="0" rtlCol="0" anchor="ctr"/>
+          <a:lstStyle/>
+          <a:p>
+            <a:pPr indent="0" marL="0">
+              <a:buNone/>
+            </a:pPr>
+            <a:r>
+              <a:rPr lang="en-US" sz="1300" dirty="0">
                 <a:solidFill>
                   <a:srgbClr val="64748B"/>
                 </a:solidFill>
@@ -2061,46 +2100,7 @@
                 <a:ea typeface="Calibri" pitchFamily="34" charset="-122"/>
                 <a:cs typeface="Calibri" pitchFamily="34" charset="-120"/>
               </a:rPr>
-              <a:t>sideQuest  ·  DeFi Track &amp; Agentic Economy Track</a:t>
-            </a:r>
-            <a:endParaRPr lang="en-US" sz="1400" dirty="0"/>
-          </a:p>
-        </p:txBody>
-      </p:sp>
-      <p:sp>
-        <p:nvSpPr>
-          <p:cNvPr id="8" name="Text 6"/>
-          <p:cNvSpPr/>
-          <p:nvPr/>
-        </p:nvSpPr>
-        <p:spPr>
-          <a:xfrm>
-            <a:off x="822960" y="5806440"/>
-            <a:ext cx="9144000" cy="274320"/>
-          </a:xfrm>
-          <a:prstGeom prst="rect">
-            <a:avLst/>
-          </a:prstGeom>
-          <a:noFill/>
-          <a:ln/>
-        </p:spPr>
-        <p:txBody>
-          <a:bodyPr wrap="square" lIns="0" tIns="0" rIns="0" bIns="0" rtlCol="0" anchor="ctr"/>
-          <a:lstStyle/>
-          <a:p>
-            <a:pPr indent="0" marL="0">
-              <a:buNone/>
-            </a:pPr>
-            <a:r>
-              <a:rPr lang="en-US" sz="1300" dirty="0">
-                <a:solidFill>
-                  <a:srgbClr val="64748B"/>
-                </a:solidFill>
-                <a:latin typeface="Calibri" pitchFamily="34" charset="0"/>
-                <a:ea typeface="Calibri" pitchFamily="34" charset="-122"/>
-                <a:cs typeface="Calibri" pitchFamily="34" charset="-120"/>
-              </a:rPr>
-              <a:t>boardman.playingsidequest.fun</a:t>
+              <a:t>sideQuest  ·  boardman.playingsidequest.fun  ·  t.me/myboardmanOfficialBot</a:t>
             </a:r>
             <a:endParaRPr lang="en-US" sz="1300" dirty="0"/>
           </a:p>
@@ -2171,7 +2171,7 @@
                 <a:ea typeface="Calibri" pitchFamily="34" charset="-122"/>
                 <a:cs typeface="Calibri" pitchFamily="34" charset="-120"/>
               </a:rPr>
-              <a:t>TRACTION</a:t>
+              <a:t>SHIPPED</a:t>
             </a:r>
             <a:endParaRPr lang="en-US" sz="1100" dirty="0"/>
           </a:p>
@@ -2202,7 +2202,7 @@
               <a:buNone/>
             </a:pPr>
             <a:r>
-              <a:rPr lang="en-US" sz="3200" b="1" dirty="0">
+              <a:rPr lang="en-US" sz="3000" b="1" dirty="0">
                 <a:solidFill>
                   <a:srgbClr val="F8FAFC"/>
                 </a:solidFill>
@@ -2210,9 +2210,9 @@
                 <a:ea typeface="Calibri" pitchFamily="34" charset="-122"/>
                 <a:cs typeface="Calibri" pitchFamily="34" charset="-120"/>
               </a:rPr>
-              <a:t>Shipped infrastructure—not a slideware concept.</a:t>
-            </a:r>
-            <a:endParaRPr lang="en-US" sz="3200" dirty="0"/>
+              <a:t>Live rails—not slideware.</a:t>
+            </a:r>
+            <a:endParaRPr lang="en-US" sz="3000" dirty="0"/>
           </a:p>
         </p:txBody>
       </p:sp>
@@ -2224,8 +2224,8 @@
         </p:nvSpPr>
         <p:spPr>
           <a:xfrm>
-            <a:off x="640080" y="1417320"/>
-            <a:ext cx="2743200" cy="1737360"/>
+            <a:off x="640080" y="1371600"/>
+            <a:ext cx="2743200" cy="1691640"/>
           </a:xfrm>
           <a:prstGeom prst="rect">
             <a:avLst/>
@@ -2251,8 +2251,8 @@
         </p:nvSpPr>
         <p:spPr>
           <a:xfrm>
-            <a:off x="822960" y="1737360"/>
-            <a:ext cx="2377440" cy="502920"/>
+            <a:off x="777240" y="1691640"/>
+            <a:ext cx="2468880" cy="457200"/>
           </a:xfrm>
           <a:prstGeom prst="rect">
             <a:avLst/>
@@ -2268,7 +2268,7 @@
               <a:buNone/>
             </a:pPr>
             <a:r>
-              <a:rPr lang="en-US" sz="2600" b="1" dirty="0">
+              <a:rPr lang="en-US" sz="2000" b="1" dirty="0">
                 <a:solidFill>
                   <a:srgbClr val="A78BFA"/>
                 </a:solidFill>
@@ -2276,9 +2276,9 @@
                 <a:ea typeface="Calibri" pitchFamily="34" charset="-122"/>
                 <a:cs typeface="Calibri" pitchFamily="34" charset="-120"/>
               </a:rPr>
-              <a:t>Live</a:t>
-            </a:r>
-            <a:endParaRPr lang="en-US" sz="2600" dirty="0"/>
+              <a:t>Telegram</a:t>
+            </a:r>
+            <a:endParaRPr lang="en-US" sz="2000" dirty="0"/>
           </a:p>
         </p:txBody>
       </p:sp>
@@ -2290,8 +2290,8 @@
         </p:nvSpPr>
         <p:spPr>
           <a:xfrm>
-            <a:off x="822960" y="2377440"/>
-            <a:ext cx="2377440" cy="502920"/>
+            <a:off x="777240" y="2286000"/>
+            <a:ext cx="2468880" cy="502920"/>
           </a:xfrm>
           <a:prstGeom prst="rect">
             <a:avLst/>
@@ -2315,7 +2315,7 @@
                 <a:ea typeface="Calibri" pitchFamily="34" charset="-122"/>
                 <a:cs typeface="Calibri" pitchFamily="34" charset="-120"/>
               </a:rPr>
-              <a:t>Product on Arc testnet rails</a:t>
+              <a:t>Bot + community challenges</a:t>
             </a:r>
             <a:endParaRPr lang="en-US" sz="1200" dirty="0"/>
           </a:p>
@@ -2329,8 +2329,8 @@
         </p:nvSpPr>
         <p:spPr>
           <a:xfrm>
-            <a:off x="3520440" y="1417320"/>
-            <a:ext cx="2743200" cy="1737360"/>
+            <a:off x="3520440" y="1371600"/>
+            <a:ext cx="2743200" cy="1691640"/>
           </a:xfrm>
           <a:prstGeom prst="rect">
             <a:avLst/>
@@ -2356,8 +2356,8 @@
         </p:nvSpPr>
         <p:spPr>
           <a:xfrm>
-            <a:off x="3703320" y="1737360"/>
-            <a:ext cx="2377440" cy="502920"/>
+            <a:off x="3657600" y="1691640"/>
+            <a:ext cx="2468880" cy="457200"/>
           </a:xfrm>
           <a:prstGeom prst="rect">
             <a:avLst/>
@@ -2373,7 +2373,7 @@
               <a:buNone/>
             </a:pPr>
             <a:r>
-              <a:rPr lang="en-US" sz="2600" b="1" dirty="0">
+              <a:rPr lang="en-US" sz="2000" b="1" dirty="0">
                 <a:solidFill>
                   <a:srgbClr val="A78BFA"/>
                 </a:solidFill>
@@ -2383,7 +2383,7 @@
               </a:rPr>
               <a:t>Escrow</a:t>
             </a:r>
-            <a:endParaRPr lang="en-US" sz="2600" dirty="0"/>
+            <a:endParaRPr lang="en-US" sz="2000" dirty="0"/>
           </a:p>
         </p:txBody>
       </p:sp>
@@ -2395,8 +2395,8 @@
         </p:nvSpPr>
         <p:spPr>
           <a:xfrm>
-            <a:off x="3703320" y="2377440"/>
-            <a:ext cx="2377440" cy="502920"/>
+            <a:off x="3657600" y="2286000"/>
+            <a:ext cx="2468880" cy="502920"/>
           </a:xfrm>
           <a:prstGeom prst="rect">
             <a:avLst/>
@@ -2420,7 +2420,7 @@
                 <a:ea typeface="Calibri" pitchFamily="34" charset="-122"/>
                 <a:cs typeface="Calibri" pitchFamily="34" charset="-120"/>
               </a:rPr>
-              <a:t>Dual-lock BoardmanEscrow path</a:t>
+              <a:t>BoardmanEscrow dual-lock Arc</a:t>
             </a:r>
             <a:endParaRPr lang="en-US" sz="1200" dirty="0"/>
           </a:p>
@@ -2434,8 +2434,8 @@
         </p:nvSpPr>
         <p:spPr>
           <a:xfrm>
-            <a:off x="6400800" y="1417320"/>
-            <a:ext cx="2743200" cy="1737360"/>
+            <a:off x="6400800" y="1371600"/>
+            <a:ext cx="2743200" cy="1691640"/>
           </a:xfrm>
           <a:prstGeom prst="rect">
             <a:avLst/>
@@ -2461,8 +2461,8 @@
         </p:nvSpPr>
         <p:spPr>
           <a:xfrm>
-            <a:off x="6583680" y="1737360"/>
-            <a:ext cx="2377440" cy="502920"/>
+            <a:off x="6537960" y="1691640"/>
+            <a:ext cx="2468880" cy="457200"/>
           </a:xfrm>
           <a:prstGeom prst="rect">
             <a:avLst/>
@@ -2478,7 +2478,7 @@
               <a:buNone/>
             </a:pPr>
             <a:r>
-              <a:rPr lang="en-US" sz="2600" b="1" dirty="0">
+              <a:rPr lang="en-US" sz="2000" b="1" dirty="0">
                 <a:solidFill>
                   <a:srgbClr val="A78BFA"/>
                 </a:solidFill>
@@ -2486,9 +2486,9 @@
                 <a:ea typeface="Calibri" pitchFamily="34" charset="-122"/>
                 <a:cs typeface="Calibri" pitchFamily="34" charset="-120"/>
               </a:rPr>
-              <a:t>Agents</a:t>
-            </a:r>
-            <a:endParaRPr lang="en-US" sz="2600" dirty="0"/>
+              <a:t>Arena</a:t>
+            </a:r>
+            <a:endParaRPr lang="en-US" sz="2000" dirty="0"/>
           </a:p>
         </p:txBody>
       </p:sp>
@@ -2500,8 +2500,8 @@
         </p:nvSpPr>
         <p:spPr>
           <a:xfrm>
-            <a:off x="6583680" y="2377440"/>
-            <a:ext cx="2377440" cy="502920"/>
+            <a:off x="6537960" y="2286000"/>
+            <a:ext cx="2468880" cy="502920"/>
           </a:xfrm>
           <a:prstGeom prst="rect">
             <a:avLst/>
@@ -2525,7 +2525,7 @@
                 <a:ea typeface="Calibri" pitchFamily="34" charset="-122"/>
                 <a:cs typeface="Calibri" pitchFamily="34" charset="-120"/>
               </a:rPr>
-              <a:t>GM-strength hybrid Stockfish</a:t>
+              <a:t>Agents · bets · creator desk</a:t>
             </a:r>
             <a:endParaRPr lang="en-US" sz="1200" dirty="0"/>
           </a:p>
@@ -2539,8 +2539,8 @@
         </p:nvSpPr>
         <p:spPr>
           <a:xfrm>
-            <a:off x="9281160" y="1417320"/>
-            <a:ext cx="2743200" cy="1737360"/>
+            <a:off x="9281160" y="1371600"/>
+            <a:ext cx="2743200" cy="1691640"/>
           </a:xfrm>
           <a:prstGeom prst="rect">
             <a:avLst/>
@@ -2566,8 +2566,8 @@
         </p:nvSpPr>
         <p:spPr>
           <a:xfrm>
-            <a:off x="9464040" y="1737360"/>
-            <a:ext cx="2377440" cy="502920"/>
+            <a:off x="9418320" y="1691640"/>
+            <a:ext cx="2468880" cy="457200"/>
           </a:xfrm>
           <a:prstGeom prst="rect">
             <a:avLst/>
@@ -2583,7 +2583,7 @@
               <a:buNone/>
             </a:pPr>
             <a:r>
-              <a:rPr lang="en-US" sz="2600" b="1" dirty="0">
+              <a:rPr lang="en-US" sz="2000" b="1" dirty="0">
                 <a:solidFill>
                   <a:srgbClr val="A78BFA"/>
                 </a:solidFill>
@@ -2591,9 +2591,9 @@
                 <a:ea typeface="Calibri" pitchFamily="34" charset="-122"/>
                 <a:cs typeface="Calibri" pitchFamily="34" charset="-120"/>
               </a:rPr>
-              <a:t>Open</a:t>
-            </a:r>
-            <a:endParaRPr lang="en-US" sz="2600" dirty="0"/>
+              <a:t>Stack</a:t>
+            </a:r>
+            <a:endParaRPr lang="en-US" sz="2000" dirty="0"/>
           </a:p>
         </p:txBody>
       </p:sp>
@@ -2605,8 +2605,8 @@
         </p:nvSpPr>
         <p:spPr>
           <a:xfrm>
-            <a:off x="9464040" y="2377440"/>
-            <a:ext cx="2377440" cy="502920"/>
+            <a:off x="9418320" y="2286000"/>
+            <a:ext cx="2468880" cy="502920"/>
           </a:xfrm>
           <a:prstGeom prst="rect">
             <a:avLst/>
@@ -2630,7 +2630,7 @@
                 <a:ea typeface="Calibri" pitchFamily="34" charset="-122"/>
                 <a:cs typeface="Calibri" pitchFamily="34" charset="-120"/>
               </a:rPr>
-              <a:t>Public repo + builder stack</a:t>
+              <a:t>Public repo + builder docs</a:t>
             </a:r>
             <a:endParaRPr lang="en-US" sz="1200" dirty="0"/>
           </a:p>
@@ -2644,7 +2644,7 @@
         </p:nvSpPr>
         <p:spPr>
           <a:xfrm>
-            <a:off x="640080" y="3474720"/>
+            <a:off x="640080" y="3383280"/>
             <a:ext cx="10972800" cy="320040"/>
           </a:xfrm>
           <a:prstGeom prst="rect">
@@ -2669,7 +2669,7 @@
                 <a:ea typeface="Calibri" pitchFamily="34" charset="-122"/>
                 <a:cs typeface="Calibri" pitchFamily="34" charset="-120"/>
               </a:rPr>
-              <a:t>Public links</a:t>
+              <a:t>Open these</a:t>
             </a:r>
             <a:endParaRPr lang="en-US" sz="1400" dirty="0"/>
           </a:p>
@@ -2683,7 +2683,7 @@
         </p:nvSpPr>
         <p:spPr>
           <a:xfrm>
-            <a:off x="640080" y="3931920"/>
+            <a:off x="640080" y="3840480"/>
             <a:ext cx="10972800" cy="365760"/>
           </a:xfrm>
           <a:prstGeom prst="rect">
@@ -2700,7 +2700,7 @@
               <a:buNone/>
             </a:pPr>
             <a:r>
-              <a:rPr lang="en-US" sz="1400" dirty="0">
+              <a:rPr lang="en-US" sz="1500" dirty="0">
                 <a:solidFill>
                   <a:srgbClr val="94A3B8"/>
                 </a:solidFill>
@@ -2708,21 +2708,60 @@
                 <a:ea typeface="Calibri" pitchFamily="34" charset="-122"/>
                 <a:cs typeface="Calibri" pitchFamily="34" charset="-120"/>
               </a:rPr>
+              <a:t>t.me/myboardmanOfficialBot</a:t>
+            </a:r>
+            <a:endParaRPr lang="en-US" sz="1500" dirty="0"/>
+          </a:p>
+        </p:txBody>
+      </p:sp>
+      <p:sp>
+        <p:nvSpPr>
+          <p:cNvPr id="18" name="Text 16"/>
+          <p:cNvSpPr/>
+          <p:nvPr/>
+        </p:nvSpPr>
+        <p:spPr>
+          <a:xfrm>
+            <a:off x="640080" y="4251960"/>
+            <a:ext cx="10972800" cy="365760"/>
+          </a:xfrm>
+          <a:prstGeom prst="rect">
+            <a:avLst/>
+          </a:prstGeom>
+          <a:noFill/>
+          <a:ln/>
+        </p:spPr>
+        <p:txBody>
+          <a:bodyPr wrap="square" lIns="0" tIns="0" rIns="0" bIns="0" rtlCol="0" anchor="ctr"/>
+          <a:lstStyle/>
+          <a:p>
+            <a:pPr indent="0" marL="0">
+              <a:buNone/>
+            </a:pPr>
+            <a:r>
+              <a:rPr lang="en-US" sz="1500" dirty="0">
+                <a:solidFill>
+                  <a:srgbClr val="94A3B8"/>
+                </a:solidFill>
+                <a:latin typeface="Calibri" pitchFamily="34" charset="0"/>
+                <a:ea typeface="Calibri" pitchFamily="34" charset="-122"/>
+                <a:cs typeface="Calibri" pitchFamily="34" charset="-120"/>
+              </a:rPr>
               <a:t>boardman.playingsidequest.fun/agentic/arena.html</a:t>
             </a:r>
-            <a:endParaRPr lang="en-US" sz="1400" dirty="0"/>
-          </a:p>
-        </p:txBody>
-      </p:sp>
-      <p:sp>
-        <p:nvSpPr>
-          <p:cNvPr id="18" name="Text 16"/>
-          <p:cNvSpPr/>
-          <p:nvPr/>
-        </p:nvSpPr>
-        <p:spPr>
-          <a:xfrm>
-            <a:off x="640080" y="4343400"/>
+            <a:endParaRPr lang="en-US" sz="1500" dirty="0"/>
+          </a:p>
+        </p:txBody>
+      </p:sp>
+      <p:sp>
+        <p:nvSpPr>
+          <p:cNvPr id="19" name="Text 17"/>
+          <p:cNvSpPr/>
+          <p:nvPr/>
+        </p:nvSpPr>
+        <p:spPr>
+          <a:xfrm>
+            <a:off x="640080" y="4663440"/>
             <a:ext cx="10972800" cy="365760"/>
           </a:xfrm>
           <a:prstGeom prst="rect">
@@ -2739,7 +2778,7 @@
               <a:buNone/>
             </a:pPr>
             <a:r>
-              <a:rPr lang="en-US" sz="1400" dirty="0">
+              <a:rPr lang="en-US" sz="1500" dirty="0">
                 <a:solidFill>
                   <a:srgbClr val="94A3B8"/>
                 </a:solidFill>
@@ -2749,46 +2788,7 @@
               </a:rPr>
               <a:t>github.com/playingsidequest-dotplay/boardman</a:t>
             </a:r>
-            <a:endParaRPr lang="en-US" sz="1400" dirty="0"/>
-          </a:p>
-        </p:txBody>
-      </p:sp>
-      <p:sp>
-        <p:nvSpPr>
-          <p:cNvPr id="19" name="Text 17"/>
-          <p:cNvSpPr/>
-          <p:nvPr/>
-        </p:nvSpPr>
-        <p:spPr>
-          <a:xfrm>
-            <a:off x="640080" y="4754880"/>
-            <a:ext cx="10972800" cy="365760"/>
-          </a:xfrm>
-          <a:prstGeom prst="rect">
-            <a:avLst/>
-          </a:prstGeom>
-          <a:noFill/>
-          <a:ln/>
-        </p:spPr>
-        <p:txBody>
-          <a:bodyPr wrap="square" lIns="0" tIns="0" rIns="0" bIns="0" rtlCol="0" anchor="ctr"/>
-          <a:lstStyle/>
-          <a:p>
-            <a:pPr indent="0" marL="0">
-              <a:buNone/>
-            </a:pPr>
-            <a:r>
-              <a:rPr lang="en-US" sz="1400" dirty="0">
-                <a:solidFill>
-                  <a:srgbClr val="94A3B8"/>
-                </a:solidFill>
-                <a:latin typeface="Calibri" pitchFamily="34" charset="0"/>
-                <a:ea typeface="Calibri" pitchFamily="34" charset="-122"/>
-                <a:cs typeface="Calibri" pitchFamily="34" charset="-120"/>
-              </a:rPr>
-              <a:t>t.me/myboardmanOfficialBot</a:t>
-            </a:r>
-            <a:endParaRPr lang="en-US" sz="1400" dirty="0"/>
+            <a:endParaRPr lang="en-US" sz="1500" dirty="0"/>
           </a:p>
         </p:txBody>
       </p:sp>
@@ -2839,8 +2839,8 @@
         </p:nvSpPr>
         <p:spPr>
           <a:xfrm>
-            <a:off x="4754880" y="6492240"/>
-            <a:ext cx="2743200" cy="228600"/>
+            <a:off x="4114800" y="6492240"/>
+            <a:ext cx="4114800" cy="228600"/>
           </a:xfrm>
           <a:prstGeom prst="rect">
             <a:avLst/>
@@ -2864,7 +2864,7 @@
                 <a:ea typeface="Calibri" pitchFamily="34" charset="-122"/>
                 <a:cs typeface="Calibri" pitchFamily="34" charset="-120"/>
               </a:rPr>
-              <a:t>CONFIDENTIAL</a:t>
+              <a:t>sideQuest  ·  Encode Arc</a:t>
             </a:r>
             <a:endParaRPr lang="en-US" sz="1000" dirty="0"/>
           </a:p>
@@ -3005,7 +3005,7 @@
               <a:buNone/>
             </a:pPr>
             <a:r>
-              <a:rPr lang="en-US" sz="3200" b="1" dirty="0">
+              <a:rPr lang="en-US" sz="3000" b="1" dirty="0">
                 <a:solidFill>
                   <a:srgbClr val="F8FAFC"/>
                 </a:solidFill>
@@ -3013,9 +3013,9 @@
                 <a:ea typeface="Calibri" pitchFamily="34" charset="-122"/>
                 <a:cs typeface="Calibri" pitchFamily="34" charset="-120"/>
               </a:rPr>
-              <a:t>From testnet truth to mainnet markets.</a:t>
-            </a:r>
-            <a:endParaRPr lang="en-US" sz="3200" dirty="0"/>
+              <a:t>Testnet truth → mainnet markets.</a:t>
+            </a:r>
+            <a:endParaRPr lang="en-US" sz="3000" dirty="0"/>
           </a:p>
         </p:txBody>
       </p:sp>
@@ -3027,8 +3027,8 @@
         </p:nvSpPr>
         <p:spPr>
           <a:xfrm>
-            <a:off x="640080" y="1554480"/>
-            <a:ext cx="2743200" cy="3931920"/>
+            <a:off x="640080" y="1508760"/>
+            <a:ext cx="2743200" cy="3977640"/>
           </a:xfrm>
           <a:prstGeom prst="rect">
             <a:avLst/>
@@ -3054,7 +3054,7 @@
         </p:nvSpPr>
         <p:spPr>
           <a:xfrm>
-            <a:off x="640080" y="1554480"/>
+            <a:off x="640080" y="1508760"/>
             <a:ext cx="2743200" cy="109728"/>
           </a:xfrm>
           <a:prstGeom prst="rect">
@@ -3074,7 +3074,7 @@
         </p:nvSpPr>
         <p:spPr>
           <a:xfrm>
-            <a:off x="868680" y="1965960"/>
+            <a:off x="868680" y="1920240"/>
             <a:ext cx="2286000" cy="274320"/>
           </a:xfrm>
           <a:prstGeom prst="rect">
@@ -3113,7 +3113,7 @@
         </p:nvSpPr>
         <p:spPr>
           <a:xfrm>
-            <a:off x="868680" y="2423160"/>
+            <a:off x="868680" y="2377440"/>
             <a:ext cx="2286000" cy="777240"/>
           </a:xfrm>
           <a:prstGeom prst="rect">
@@ -3152,7 +3152,7 @@
         </p:nvSpPr>
         <p:spPr>
           <a:xfrm>
-            <a:off x="868680" y="3383280"/>
+            <a:off x="868680" y="3337560"/>
             <a:ext cx="2286000" cy="1737360"/>
           </a:xfrm>
           <a:prstGeom prst="rect">
@@ -3177,7 +3177,7 @@
                 <a:ea typeface="Calibri" pitchFamily="34" charset="-122"/>
                 <a:cs typeface="Calibri" pitchFamily="34" charset="-120"/>
               </a:rPr>
-              <a:t>Human dual-lock, agent arena, spectator books, LP accounting, public stack.</a:t>
+              <a:t>Telegram humans, agent arena, spectator books, LP accounting, public stack.</a:t>
             </a:r>
             <a:endParaRPr lang="en-US" sz="1300" dirty="0"/>
           </a:p>
@@ -3191,8 +3191,8 @@
         </p:nvSpPr>
         <p:spPr>
           <a:xfrm>
-            <a:off x="3520440" y="1554480"/>
-            <a:ext cx="2743200" cy="3931920"/>
+            <a:off x="3520440" y="1508760"/>
+            <a:ext cx="2743200" cy="3977640"/>
           </a:xfrm>
           <a:prstGeom prst="rect">
             <a:avLst/>
@@ -3218,7 +3218,7 @@
         </p:nvSpPr>
         <p:spPr>
           <a:xfrm>
-            <a:off x="3520440" y="1554480"/>
+            <a:off x="3520440" y="1508760"/>
             <a:ext cx="2743200" cy="109728"/>
           </a:xfrm>
           <a:prstGeom prst="rect">
@@ -3238,7 +3238,7 @@
         </p:nvSpPr>
         <p:spPr>
           <a:xfrm>
-            <a:off x="3749040" y="1965960"/>
+            <a:off x="3749040" y="1920240"/>
             <a:ext cx="2286000" cy="274320"/>
           </a:xfrm>
           <a:prstGeom prst="rect">
@@ -3277,7 +3277,7 @@
         </p:nvSpPr>
         <p:spPr>
           <a:xfrm>
-            <a:off x="3749040" y="2423160"/>
+            <a:off x="3749040" y="2377440"/>
             <a:ext cx="2286000" cy="777240"/>
           </a:xfrm>
           <a:prstGeom prst="rect">
@@ -3316,7 +3316,7 @@
         </p:nvSpPr>
         <p:spPr>
           <a:xfrm>
-            <a:off x="3749040" y="3383280"/>
+            <a:off x="3749040" y="3337560"/>
             <a:ext cx="2286000" cy="1737360"/>
           </a:xfrm>
           <a:prstGeom prst="rect">
@@ -3341,7 +3341,7 @@
                 <a:ea typeface="Calibri" pitchFamily="34" charset="-122"/>
                 <a:cs typeface="Calibri" pitchFamily="34" charset="-120"/>
               </a:rPr>
-              <a:t>Anti-collusion, sybil limits on books, production deposits (no faucet), ops tooling.</a:t>
+              <a:t>Anti-abuse on public rooms, production deposits, ops tooling, better proof UX.</a:t>
             </a:r>
             <a:endParaRPr lang="en-US" sz="1300" dirty="0"/>
           </a:p>
@@ -3355,8 +3355,8 @@
         </p:nvSpPr>
         <p:spPr>
           <a:xfrm>
-            <a:off x="6400800" y="1554480"/>
-            <a:ext cx="2743200" cy="3931920"/>
+            <a:off x="6400800" y="1508760"/>
+            <a:ext cx="2743200" cy="3977640"/>
           </a:xfrm>
           <a:prstGeom prst="rect">
             <a:avLst/>
@@ -3382,7 +3382,7 @@
         </p:nvSpPr>
         <p:spPr>
           <a:xfrm>
-            <a:off x="6400800" y="1554480"/>
+            <a:off x="6400800" y="1508760"/>
             <a:ext cx="2743200" cy="109728"/>
           </a:xfrm>
           <a:prstGeom prst="rect">
@@ -3402,7 +3402,7 @@
         </p:nvSpPr>
         <p:spPr>
           <a:xfrm>
-            <a:off x="6629400" y="1965960"/>
+            <a:off x="6629400" y="1920240"/>
             <a:ext cx="2286000" cy="274320"/>
           </a:xfrm>
           <a:prstGeom prst="rect">
@@ -3441,7 +3441,7 @@
         </p:nvSpPr>
         <p:spPr>
           <a:xfrm>
-            <a:off x="6629400" y="2423160"/>
+            <a:off x="6629400" y="2377440"/>
             <a:ext cx="2286000" cy="777240"/>
           </a:xfrm>
           <a:prstGeom prst="rect">
@@ -3480,7 +3480,7 @@
         </p:nvSpPr>
         <p:spPr>
           <a:xfrm>
-            <a:off x="6629400" y="3383280"/>
+            <a:off x="6629400" y="3337560"/>
             <a:ext cx="2286000" cy="1737360"/>
           </a:xfrm>
           <a:prstGeom prst="rect">
@@ -3505,7 +3505,7 @@
                 <a:ea typeface="Calibri" pitchFamily="34" charset="-122"/>
                 <a:cs typeface="Calibri" pitchFamily="34" charset="-120"/>
               </a:rPr>
-              <a:t>BoardmanEscrow mainnet, Circle wallet UX, scaled agent deploy for third parties.</a:t>
+              <a:t>BoardmanEscrow mainnet, Circle wallet UX, third-party agent deploy at scale.</a:t>
             </a:r>
             <a:endParaRPr lang="en-US" sz="1300" dirty="0"/>
           </a:p>
@@ -3519,8 +3519,8 @@
         </p:nvSpPr>
         <p:spPr>
           <a:xfrm>
-            <a:off x="9281160" y="1554480"/>
-            <a:ext cx="2743200" cy="3931920"/>
+            <a:off x="9281160" y="1508760"/>
+            <a:ext cx="2743200" cy="3977640"/>
           </a:xfrm>
           <a:prstGeom prst="rect">
             <a:avLst/>
@@ -3546,7 +3546,7 @@
         </p:nvSpPr>
         <p:spPr>
           <a:xfrm>
-            <a:off x="9281160" y="1554480"/>
+            <a:off x="9281160" y="1508760"/>
             <a:ext cx="2743200" cy="109728"/>
           </a:xfrm>
           <a:prstGeom prst="rect">
@@ -3566,7 +3566,7 @@
         </p:nvSpPr>
         <p:spPr>
           <a:xfrm>
-            <a:off x="9509760" y="1965960"/>
+            <a:off x="9509760" y="1920240"/>
             <a:ext cx="2286000" cy="274320"/>
           </a:xfrm>
           <a:prstGeom prst="rect">
@@ -3605,7 +3605,7 @@
         </p:nvSpPr>
         <p:spPr>
           <a:xfrm>
-            <a:off x="9509760" y="2423160"/>
+            <a:off x="9509760" y="2377440"/>
             <a:ext cx="2286000" cy="777240"/>
           </a:xfrm>
           <a:prstGeom prst="rect">
@@ -3644,7 +3644,7 @@
         </p:nvSpPr>
         <p:spPr>
           <a:xfrm>
-            <a:off x="9509760" y="3383280"/>
+            <a:off x="9509760" y="3337560"/>
             <a:ext cx="2286000" cy="1737360"/>
           </a:xfrm>
           <a:prstGeom prst="rect">
@@ -3669,7 +3669,7 @@
                 <a:ea typeface="Calibri" pitchFamily="34" charset="-122"/>
                 <a:cs typeface="Calibri" pitchFamily="34" charset="-120"/>
               </a:rPr>
-              <a:t>Catalog expansion, partner game centers, optional CCTP funding paths.</a:t>
+              <a:t>Catalog + partner game centers; optional multi-rail funding.</a:t>
             </a:r>
             <a:endParaRPr lang="en-US" sz="1300" dirty="0"/>
           </a:p>
@@ -3722,8 +3722,8 @@
         </p:nvSpPr>
         <p:spPr>
           <a:xfrm>
-            <a:off x="4754880" y="6492240"/>
-            <a:ext cx="2743200" cy="228600"/>
+            <a:off x="4114800" y="6492240"/>
+            <a:ext cx="4114800" cy="228600"/>
           </a:xfrm>
           <a:prstGeom prst="rect">
             <a:avLst/>
@@ -3747,7 +3747,7 @@
                 <a:ea typeface="Calibri" pitchFamily="34" charset="-122"/>
                 <a:cs typeface="Calibri" pitchFamily="34" charset="-120"/>
               </a:rPr>
-              <a:t>CONFIDENTIAL</a:t>
+              <a:t>sideQuest  ·  Encode Arc</a:t>
             </a:r>
             <a:endParaRPr lang="en-US" sz="1000" dirty="0"/>
           </a:p>
@@ -3852,7 +3852,7 @@
         </p:nvSpPr>
         <p:spPr>
           <a:xfrm>
-            <a:off x="822960" y="1280160"/>
+            <a:off x="822960" y="1234440"/>
             <a:ext cx="10058400" cy="274320"/>
           </a:xfrm>
           <a:prstGeom prst="rect">
@@ -3891,24 +3891,24 @@
         </p:nvSpPr>
         <p:spPr>
           <a:xfrm>
-            <a:off x="822960" y="1737360"/>
-            <a:ext cx="10515600" cy="1280160"/>
-          </a:xfrm>
-          <a:prstGeom prst="rect">
-            <a:avLst/>
-          </a:prstGeom>
-          <a:noFill/>
-          <a:ln/>
-        </p:spPr>
-        <p:txBody>
-          <a:bodyPr wrap="square" lIns="0" tIns="0" rIns="0" bIns="0" rtlCol="0" anchor="ctr"/>
-          <a:lstStyle/>
-          <a:p>
-            <a:pPr indent="0" marL="0">
-              <a:buNone/>
-            </a:pPr>
-            <a:r>
-              <a:rPr lang="en-US" sz="3400" b="1" dirty="0">
+            <a:off x="822960" y="1691640"/>
+            <a:ext cx="10515600" cy="1234440"/>
+          </a:xfrm>
+          <a:prstGeom prst="rect">
+            <a:avLst/>
+          </a:prstGeom>
+          <a:noFill/>
+          <a:ln/>
+        </p:spPr>
+        <p:txBody>
+          <a:bodyPr wrap="square" lIns="0" tIns="0" rIns="0" bIns="0" rtlCol="0" anchor="ctr"/>
+          <a:lstStyle/>
+          <a:p>
+            <a:pPr indent="0" marL="0">
+              <a:buNone/>
+            </a:pPr>
+            <a:r>
+              <a:rPr lang="en-US" sz="3200" b="1" dirty="0">
                 <a:solidFill>
                   <a:srgbClr val="FFFFFF"/>
                 </a:solidFill>
@@ -3916,16 +3916,16 @@
                 <a:ea typeface="Calibri" pitchFamily="34" charset="-122"/>
                 <a:cs typeface="Calibri" pitchFamily="34" charset="-120"/>
               </a:rPr>
-              <a:t>Build the settlement standard</a:t>
-            </a:r>
-            <a:endParaRPr lang="en-US" sz="3400" dirty="0"/>
-          </a:p>
-          <a:p>
-            <a:pPr indent="0" marL="0">
-              <a:buNone/>
-            </a:pPr>
-            <a:r>
-              <a:rPr lang="en-US" sz="3400" b="1" dirty="0">
+              <a:t>Settle skill—human and agent—</a:t>
+            </a:r>
+            <a:endParaRPr lang="en-US" sz="3200" dirty="0"/>
+          </a:p>
+          <a:p>
+            <a:pPr indent="0" marL="0">
+              <a:buNone/>
+            </a:pPr>
+            <a:r>
+              <a:rPr lang="en-US" sz="3200" b="1" dirty="0">
                 <a:solidFill>
                   <a:srgbClr val="FFFFFF"/>
                 </a:solidFill>
@@ -3933,9 +3933,9 @@
                 <a:ea typeface="Calibri" pitchFamily="34" charset="-122"/>
                 <a:cs typeface="Calibri" pitchFamily="34" charset="-120"/>
               </a:rPr>
-              <a:t>for skill—on Arc.</a:t>
-            </a:r>
-            <a:endParaRPr lang="en-US" sz="3400" dirty="0"/>
+              <a:t>on Arc with Boardman.</a:t>
+            </a:r>
+            <a:endParaRPr lang="en-US" sz="3200" dirty="0"/>
           </a:p>
         </p:txBody>
       </p:sp>
@@ -3947,8 +3947,8 @@
         </p:nvSpPr>
         <p:spPr>
           <a:xfrm>
-            <a:off x="822960" y="3200400"/>
-            <a:ext cx="10058400" cy="731520"/>
+            <a:off x="822960" y="3108960"/>
+            <a:ext cx="10241280" cy="777240"/>
           </a:xfrm>
           <a:prstGeom prst="rect">
             <a:avLst/>
@@ -3972,7 +3972,7 @@
                 <a:ea typeface="Calibri" pitchFamily="34" charset="-122"/>
                 <a:cs typeface="Calibri" pitchFamily="34" charset="-120"/>
               </a:rPr>
-              <a:t>We are submitting under both tracks: DeFi (escrow, fees, capital rails) and Agentic Economy (autonomous agents, markets, creator &amp; LP incentives).</a:t>
+              <a:t>Submitting DeFi (escrow, fees, capital rails) and Agentic Economy (autonomous agents, markets, creators &amp; LPs). Accelerator: scale Telegram rooms + agent stack with Encode network.</a:t>
             </a:r>
             <a:endParaRPr lang="en-US" sz="1500" dirty="0"/>
           </a:p>
@@ -3986,8 +3986,8 @@
         </p:nvSpPr>
         <p:spPr>
           <a:xfrm>
-            <a:off x="822960" y="4206240"/>
-            <a:ext cx="5029200" cy="1371600"/>
+            <a:off x="822960" y="4114800"/>
+            <a:ext cx="5029200" cy="1325880"/>
           </a:xfrm>
           <a:prstGeom prst="rect">
             <a:avLst/>
@@ -4013,30 +4013,27 @@
         </p:nvSpPr>
         <p:spPr>
           <a:xfrm>
-            <a:off x="1051560" y="4434840"/>
-            <a:ext cx="4572000" cy="274320"/>
-          </a:xfrm>
-          <a:prstGeom prst="rect">
-            <a:avLst/>
-          </a:prstGeom>
-          <a:noFill/>
-          <a:ln/>
-        </p:spPr>
-        <p:txBody>
-          <a:bodyPr wrap="square" lIns="0" tIns="0" rIns="0" bIns="0" rtlCol="0" anchor="ctr"/>
-          <a:lstStyle/>
-          <a:p>
-            <a:pPr indent="0" marL="0">
-              <a:buNone/>
-            </a:pPr>
-            <a:r>
-              <a:rPr lang="en-US" sz="1200" b="1" spc="100" kern="0" dirty="0">
+            <a:off x="1051560" y="4297680"/>
+            <a:ext cx="4572000" cy="256032"/>
+          </a:xfrm>
+          <a:prstGeom prst="rect">
+            <a:avLst/>
+          </a:prstGeom>
+          <a:noFill/>
+          <a:ln/>
+        </p:spPr>
+        <p:txBody>
+          <a:bodyPr wrap="square" lIns="0" tIns="0" rIns="0" bIns="0" rtlCol="0" anchor="ctr"/>
+          <a:lstStyle/>
+          <a:p>
+            <a:pPr indent="0" marL="0">
+              <a:buNone/>
+            </a:pPr>
+            <a:r>
+              <a:rPr lang="en-US" sz="1200" b="1" dirty="0">
                 <a:solidFill>
                   <a:srgbClr val="64748B"/>
                 </a:solidFill>
-                <a:latin typeface="Calibri" pitchFamily="34" charset="0"/>
-                <a:ea typeface="Calibri" pitchFamily="34" charset="-122"/>
-                <a:cs typeface="Calibri" pitchFamily="34" charset="-120"/>
               </a:rPr>
               <a:t>Live</a:t>
             </a:r>
@@ -4052,34 +4049,45 @@
         </p:nvSpPr>
         <p:spPr>
           <a:xfrm>
-            <a:off x="1051560" y="4800600"/>
-            <a:ext cx="4572000" cy="457200"/>
-          </a:xfrm>
-          <a:prstGeom prst="rect">
-            <a:avLst/>
-          </a:prstGeom>
-          <a:noFill/>
-          <a:ln/>
-        </p:spPr>
-        <p:txBody>
-          <a:bodyPr wrap="square" lIns="0" tIns="0" rIns="0" bIns="0" rtlCol="0" anchor="ctr"/>
-          <a:lstStyle/>
-          <a:p>
-            <a:pPr indent="0" marL="0">
-              <a:buNone/>
-            </a:pPr>
-            <a:r>
-              <a:rPr lang="en-US" sz="1500" dirty="0">
+            <a:off x="1051560" y="4663440"/>
+            <a:ext cx="4572000" cy="594360"/>
+          </a:xfrm>
+          <a:prstGeom prst="rect">
+            <a:avLst/>
+          </a:prstGeom>
+          <a:noFill/>
+          <a:ln/>
+        </p:spPr>
+        <p:txBody>
+          <a:bodyPr wrap="square" lIns="0" tIns="0" rIns="0" bIns="0" rtlCol="0" anchor="ctr"/>
+          <a:lstStyle/>
+          <a:p>
+            <a:pPr indent="0" marL="0">
+              <a:buNone/>
+            </a:pPr>
+            <a:r>
+              <a:rPr lang="en-US" sz="1400" dirty="0">
                 <a:solidFill>
                   <a:srgbClr val="A78BFA"/>
                 </a:solidFill>
-                <a:latin typeface="Calibri" pitchFamily="34" charset="0"/>
-                <a:ea typeface="Calibri" pitchFamily="34" charset="-122"/>
-                <a:cs typeface="Calibri" pitchFamily="34" charset="-120"/>
               </a:rPr>
               <a:t>boardman.playingsidequest.fun</a:t>
             </a:r>
-            <a:endParaRPr lang="en-US" sz="1500" dirty="0"/>
+            <a:endParaRPr lang="en-US" sz="1400" dirty="0"/>
+          </a:p>
+          <a:p>
+            <a:pPr indent="0" marL="0">
+              <a:buNone/>
+            </a:pPr>
+            <a:r>
+              <a:rPr lang="en-US" sz="1400" dirty="0">
+                <a:solidFill>
+                  <a:srgbClr val="A78BFA"/>
+                </a:solidFill>
+              </a:rPr>
+              <a:t>t.me/myboardmanOfficialBot</a:t>
+            </a:r>
+            <a:endParaRPr lang="en-US" sz="1400" dirty="0"/>
           </a:p>
         </p:txBody>
       </p:sp>
@@ -4091,8 +4099,8 @@
         </p:nvSpPr>
         <p:spPr>
           <a:xfrm>
-            <a:off x="6126480" y="4206240"/>
-            <a:ext cx="5212080" cy="1371600"/>
+            <a:off x="6126480" y="4114800"/>
+            <a:ext cx="5212080" cy="1325880"/>
           </a:xfrm>
           <a:prstGeom prst="rect">
             <a:avLst/>
@@ -4118,30 +4126,27 @@
         </p:nvSpPr>
         <p:spPr>
           <a:xfrm>
-            <a:off x="6355080" y="4434840"/>
-            <a:ext cx="4754880" cy="274320"/>
-          </a:xfrm>
-          <a:prstGeom prst="rect">
-            <a:avLst/>
-          </a:prstGeom>
-          <a:noFill/>
-          <a:ln/>
-        </p:spPr>
-        <p:txBody>
-          <a:bodyPr wrap="square" lIns="0" tIns="0" rIns="0" bIns="0" rtlCol="0" anchor="ctr"/>
-          <a:lstStyle/>
-          <a:p>
-            <a:pPr indent="0" marL="0">
-              <a:buNone/>
-            </a:pPr>
-            <a:r>
-              <a:rPr lang="en-US" sz="1200" b="1" spc="100" kern="0" dirty="0">
+            <a:off x="6355080" y="4297680"/>
+            <a:ext cx="4754880" cy="256032"/>
+          </a:xfrm>
+          <a:prstGeom prst="rect">
+            <a:avLst/>
+          </a:prstGeom>
+          <a:noFill/>
+          <a:ln/>
+        </p:spPr>
+        <p:txBody>
+          <a:bodyPr wrap="square" lIns="0" tIns="0" rIns="0" bIns="0" rtlCol="0" anchor="ctr"/>
+          <a:lstStyle/>
+          <a:p>
+            <a:pPr indent="0" marL="0">
+              <a:buNone/>
+            </a:pPr>
+            <a:r>
+              <a:rPr lang="en-US" sz="1200" b="1" dirty="0">
                 <a:solidFill>
                   <a:srgbClr val="64748B"/>
                 </a:solidFill>
-                <a:latin typeface="Calibri" pitchFamily="34" charset="0"/>
-                <a:ea typeface="Calibri" pitchFamily="34" charset="-122"/>
-                <a:cs typeface="Calibri" pitchFamily="34" charset="-120"/>
               </a:rPr>
               <a:t>Code</a:t>
             </a:r>
@@ -4157,34 +4162,31 @@
         </p:nvSpPr>
         <p:spPr>
           <a:xfrm>
-            <a:off x="6355080" y="4800600"/>
-            <a:ext cx="4754880" cy="457200"/>
-          </a:xfrm>
-          <a:prstGeom prst="rect">
-            <a:avLst/>
-          </a:prstGeom>
-          <a:noFill/>
-          <a:ln/>
-        </p:spPr>
-        <p:txBody>
-          <a:bodyPr wrap="square" lIns="0" tIns="0" rIns="0" bIns="0" rtlCol="0" anchor="ctr"/>
-          <a:lstStyle/>
-          <a:p>
-            <a:pPr indent="0" marL="0">
-              <a:buNone/>
-            </a:pPr>
-            <a:r>
-              <a:rPr lang="en-US" sz="1400" dirty="0">
+            <a:off x="6355080" y="4709160"/>
+            <a:ext cx="4754880" cy="411480"/>
+          </a:xfrm>
+          <a:prstGeom prst="rect">
+            <a:avLst/>
+          </a:prstGeom>
+          <a:noFill/>
+          <a:ln/>
+        </p:spPr>
+        <p:txBody>
+          <a:bodyPr wrap="square" lIns="0" tIns="0" rIns="0" bIns="0" rtlCol="0" anchor="ctr"/>
+          <a:lstStyle/>
+          <a:p>
+            <a:pPr indent="0" marL="0">
+              <a:buNone/>
+            </a:pPr>
+            <a:r>
+              <a:rPr lang="en-US" sz="1300" dirty="0">
                 <a:solidFill>
                   <a:srgbClr val="A78BFA"/>
                 </a:solidFill>
-                <a:latin typeface="Calibri" pitchFamily="34" charset="0"/>
-                <a:ea typeface="Calibri" pitchFamily="34" charset="-122"/>
-                <a:cs typeface="Calibri" pitchFamily="34" charset="-120"/>
               </a:rPr>
               <a:t>github.com/playingsidequest-dotplay/boardman</a:t>
             </a:r>
-            <a:endParaRPr lang="en-US" sz="1400" dirty="0"/>
+            <a:endParaRPr lang="en-US" sz="1300" dirty="0"/>
           </a:p>
         </p:txBody>
       </p:sp>
@@ -4196,7 +4198,7 @@
         </p:nvSpPr>
         <p:spPr>
           <a:xfrm>
-            <a:off x="822960" y="5943600"/>
+            <a:off x="822960" y="5806440"/>
             <a:ext cx="10058400" cy="274320"/>
           </a:xfrm>
           <a:prstGeom prst="rect">
@@ -4217,9 +4219,6 @@
                 <a:solidFill>
                   <a:srgbClr val="64748B"/>
                 </a:solidFill>
-                <a:latin typeface="Calibri" pitchFamily="34" charset="0"/>
-                <a:ea typeface="Calibri" pitchFamily="34" charset="-122"/>
-                <a:cs typeface="Calibri" pitchFamily="34" charset="-120"/>
               </a:rPr>
               <a:t>sideQuest  ·  Boardman</a:t>
             </a:r>
@@ -4323,7 +4322,7 @@
               <a:buNone/>
             </a:pPr>
             <a:r>
-              <a:rPr lang="en-US" sz="3200" b="1" dirty="0">
+              <a:rPr lang="en-US" sz="3000" b="1" dirty="0">
                 <a:solidFill>
                   <a:srgbClr val="F8FAFC"/>
                 </a:solidFill>
@@ -4331,9 +4330,9 @@
                 <a:ea typeface="Calibri" pitchFamily="34" charset="-122"/>
                 <a:cs typeface="Calibri" pitchFamily="34" charset="-120"/>
               </a:rPr>
-              <a:t>Skill has a market. Settlement does not.</a:t>
-            </a:r>
-            <a:endParaRPr lang="en-US" sz="3200" dirty="0"/>
+              <a:t>Skill capital is huge. Settlement is broken.</a:t>
+            </a:r>
+            <a:endParaRPr lang="en-US" sz="3000" dirty="0"/>
           </a:p>
         </p:txBody>
       </p:sp>
@@ -4345,8 +4344,8 @@
         </p:nvSpPr>
         <p:spPr>
           <a:xfrm>
-            <a:off x="640080" y="1325880"/>
-            <a:ext cx="10972800" cy="640080"/>
+            <a:off x="640080" y="1280160"/>
+            <a:ext cx="10972800" cy="594360"/>
           </a:xfrm>
           <a:prstGeom prst="rect">
             <a:avLst/>
@@ -4370,7 +4369,7 @@
                 <a:ea typeface="Calibri" pitchFamily="34" charset="-122"/>
                 <a:cs typeface="Calibri" pitchFamily="34" charset="-120"/>
               </a:rPr>
-              <a:t>Billions of informal wagers already happen around games of skill—console 1v1s, local tournaments, online ladders. Almost none settle as programmable money.</a:t>
+              <a:t>Friends already stake console, mobile, and local games. Money sits in chat apps, cash, or trust. Agents can play—but have no bankroll economy.</a:t>
             </a:r>
             <a:endParaRPr lang="en-US" sz="1500" dirty="0"/>
           </a:p>
@@ -4384,8 +4383,8 @@
         </p:nvSpPr>
         <p:spPr>
           <a:xfrm>
-            <a:off x="640080" y="2240280"/>
-            <a:ext cx="3611880" cy="3383280"/>
+            <a:off x="640080" y="2103120"/>
+            <a:ext cx="3611880" cy="3566160"/>
           </a:xfrm>
           <a:prstGeom prst="rect">
             <a:avLst/>
@@ -4411,24 +4410,24 @@
         </p:nvSpPr>
         <p:spPr>
           <a:xfrm>
-            <a:off x="914400" y="2514600"/>
-            <a:ext cx="3017520" cy="411480"/>
-          </a:xfrm>
-          <a:prstGeom prst="rect">
-            <a:avLst/>
-          </a:prstGeom>
-          <a:noFill/>
-          <a:ln/>
-        </p:spPr>
-        <p:txBody>
-          <a:bodyPr wrap="square" lIns="0" tIns="0" rIns="0" bIns="0" rtlCol="0" anchor="ctr"/>
-          <a:lstStyle/>
-          <a:p>
-            <a:pPr indent="0" marL="0">
-              <a:buNone/>
-            </a:pPr>
-            <a:r>
-              <a:rPr lang="en-US" sz="2200" b="1" dirty="0">
+            <a:off x="914400" y="2377440"/>
+            <a:ext cx="3017520" cy="365760"/>
+          </a:xfrm>
+          <a:prstGeom prst="rect">
+            <a:avLst/>
+          </a:prstGeom>
+          <a:noFill/>
+          <a:ln/>
+        </p:spPr>
+        <p:txBody>
+          <a:bodyPr wrap="square" lIns="0" tIns="0" rIns="0" bIns="0" rtlCol="0" anchor="ctr"/>
+          <a:lstStyle/>
+          <a:p>
+            <a:pPr indent="0" marL="0">
+              <a:buNone/>
+            </a:pPr>
+            <a:r>
+              <a:rPr lang="en-US" sz="2000" b="1" dirty="0">
                 <a:solidFill>
                   <a:srgbClr val="7C3AED"/>
                 </a:solidFill>
@@ -4438,7 +4437,7 @@
               </a:rPr>
               <a:t>01</a:t>
             </a:r>
-            <a:endParaRPr lang="en-US" sz="2200" dirty="0"/>
+            <a:endParaRPr lang="en-US" sz="2000" dirty="0"/>
           </a:p>
         </p:txBody>
       </p:sp>
@@ -4450,24 +4449,24 @@
         </p:nvSpPr>
         <p:spPr>
           <a:xfrm>
-            <a:off x="914400" y="3108960"/>
-            <a:ext cx="3017520" cy="640080"/>
-          </a:xfrm>
-          <a:prstGeom prst="rect">
-            <a:avLst/>
-          </a:prstGeom>
-          <a:noFill/>
-          <a:ln/>
-        </p:spPr>
-        <p:txBody>
-          <a:bodyPr wrap="square" lIns="0" tIns="0" rIns="0" bIns="0" rtlCol="0" anchor="ctr"/>
-          <a:lstStyle/>
-          <a:p>
-            <a:pPr indent="0" marL="0">
-              <a:buNone/>
-            </a:pPr>
-            <a:r>
-              <a:rPr lang="en-US" sz="1800" b="1" dirty="0">
+            <a:off x="914400" y="2926080"/>
+            <a:ext cx="3017520" cy="685800"/>
+          </a:xfrm>
+          <a:prstGeom prst="rect">
+            <a:avLst/>
+          </a:prstGeom>
+          <a:noFill/>
+          <a:ln/>
+        </p:spPr>
+        <p:txBody>
+          <a:bodyPr wrap="square" lIns="0" tIns="0" rIns="0" bIns="0" rtlCol="0" anchor="ctr"/>
+          <a:lstStyle/>
+          <a:p>
+            <a:pPr indent="0" marL="0">
+              <a:buNone/>
+            </a:pPr>
+            <a:r>
+              <a:rPr lang="en-US" sz="1700" b="1" dirty="0">
                 <a:solidFill>
                   <a:srgbClr val="F8FAFC"/>
                 </a:solidFill>
@@ -4475,9 +4474,9 @@
                 <a:ea typeface="Calibri" pitchFamily="34" charset="-122"/>
                 <a:cs typeface="Calibri" pitchFamily="34" charset="-120"/>
               </a:rPr>
-              <a:t>Trust-based settlement</a:t>
-            </a:r>
-            <a:endParaRPr lang="en-US" sz="1800" dirty="0"/>
+              <a:t>Human stakes are informal</a:t>
+            </a:r>
+            <a:endParaRPr lang="en-US" sz="1700" dirty="0"/>
           </a:p>
         </p:txBody>
       </p:sp>
@@ -4489,8 +4488,8 @@
         </p:nvSpPr>
         <p:spPr>
           <a:xfrm>
-            <a:off x="914400" y="3886200"/>
-            <a:ext cx="3017520" cy="1371600"/>
+            <a:off x="914400" y="3794760"/>
+            <a:ext cx="3017520" cy="1554480"/>
           </a:xfrm>
           <a:prstGeom prst="rect">
             <a:avLst/>
@@ -4514,7 +4513,7 @@
                 <a:ea typeface="Calibri" pitchFamily="34" charset="-122"/>
                 <a:cs typeface="Calibri" pitchFamily="34" charset="-120"/>
               </a:rPr>
-              <a:t>Cash, chat apps, and IOUs. Disputes are social, not contractual. Capital cannot scale.</a:t>
+              <a:t>IOUs and group-chat “hold my money.” Disputes are social. No dual-lock, no proof, no compound capital.</a:t>
             </a:r>
             <a:endParaRPr lang="en-US" sz="1400" dirty="0"/>
           </a:p>
@@ -4528,8 +4527,8 @@
         </p:nvSpPr>
         <p:spPr>
           <a:xfrm>
-            <a:off x="4434840" y="2240280"/>
-            <a:ext cx="3611880" cy="3383280"/>
+            <a:off x="4434840" y="2103120"/>
+            <a:ext cx="3611880" cy="3566160"/>
           </a:xfrm>
           <a:prstGeom prst="rect">
             <a:avLst/>
@@ -4555,24 +4554,24 @@
         </p:nvSpPr>
         <p:spPr>
           <a:xfrm>
-            <a:off x="4709160" y="2514600"/>
-            <a:ext cx="3017520" cy="411480"/>
-          </a:xfrm>
-          <a:prstGeom prst="rect">
-            <a:avLst/>
-          </a:prstGeom>
-          <a:noFill/>
-          <a:ln/>
-        </p:spPr>
-        <p:txBody>
-          <a:bodyPr wrap="square" lIns="0" tIns="0" rIns="0" bIns="0" rtlCol="0" anchor="ctr"/>
-          <a:lstStyle/>
-          <a:p>
-            <a:pPr indent="0" marL="0">
-              <a:buNone/>
-            </a:pPr>
-            <a:r>
-              <a:rPr lang="en-US" sz="2200" b="1" dirty="0">
+            <a:off x="4709160" y="2377440"/>
+            <a:ext cx="3017520" cy="365760"/>
+          </a:xfrm>
+          <a:prstGeom prst="rect">
+            <a:avLst/>
+          </a:prstGeom>
+          <a:noFill/>
+          <a:ln/>
+        </p:spPr>
+        <p:txBody>
+          <a:bodyPr wrap="square" lIns="0" tIns="0" rIns="0" bIns="0" rtlCol="0" anchor="ctr"/>
+          <a:lstStyle/>
+          <a:p>
+            <a:pPr indent="0" marL="0">
+              <a:buNone/>
+            </a:pPr>
+            <a:r>
+              <a:rPr lang="en-US" sz="2000" b="1" dirty="0">
                 <a:solidFill>
                   <a:srgbClr val="7C3AED"/>
                 </a:solidFill>
@@ -4582,7 +4581,7 @@
               </a:rPr>
               <a:t>02</a:t>
             </a:r>
-            <a:endParaRPr lang="en-US" sz="2200" dirty="0"/>
+            <a:endParaRPr lang="en-US" sz="2000" dirty="0"/>
           </a:p>
         </p:txBody>
       </p:sp>
@@ -4594,24 +4593,24 @@
         </p:nvSpPr>
         <p:spPr>
           <a:xfrm>
-            <a:off x="4709160" y="3108960"/>
-            <a:ext cx="3017520" cy="640080"/>
-          </a:xfrm>
-          <a:prstGeom prst="rect">
-            <a:avLst/>
-          </a:prstGeom>
-          <a:noFill/>
-          <a:ln/>
-        </p:spPr>
-        <p:txBody>
-          <a:bodyPr wrap="square" lIns="0" tIns="0" rIns="0" bIns="0" rtlCol="0" anchor="ctr"/>
-          <a:lstStyle/>
-          <a:p>
-            <a:pPr indent="0" marL="0">
-              <a:buNone/>
-            </a:pPr>
-            <a:r>
-              <a:rPr lang="en-US" sz="1800" b="1" dirty="0">
+            <a:off x="4709160" y="2926080"/>
+            <a:ext cx="3017520" cy="685800"/>
+          </a:xfrm>
+          <a:prstGeom prst="rect">
+            <a:avLst/>
+          </a:prstGeom>
+          <a:noFill/>
+          <a:ln/>
+        </p:spPr>
+        <p:txBody>
+          <a:bodyPr wrap="square" lIns="0" tIns="0" rIns="0" bIns="0" rtlCol="0" anchor="ctr"/>
+          <a:lstStyle/>
+          <a:p>
+            <a:pPr indent="0" marL="0">
+              <a:buNone/>
+            </a:pPr>
+            <a:r>
+              <a:rPr lang="en-US" sz="1700" b="1" dirty="0">
                 <a:solidFill>
                   <a:srgbClr val="F8FAFC"/>
                 </a:solidFill>
@@ -4619,9 +4618,9 @@
                 <a:ea typeface="Calibri" pitchFamily="34" charset="-122"/>
                 <a:cs typeface="Calibri" pitchFamily="34" charset="-120"/>
               </a:rPr>
-              <a:t>Crypto UX fails the user</a:t>
-            </a:r>
-            <a:endParaRPr lang="en-US" sz="1800" dirty="0"/>
+              <a:t>Crypto UX kills play</a:t>
+            </a:r>
+            <a:endParaRPr lang="en-US" sz="1700" dirty="0"/>
           </a:p>
         </p:txBody>
       </p:sp>
@@ -4633,8 +4632,8 @@
         </p:nvSpPr>
         <p:spPr>
           <a:xfrm>
-            <a:off x="4709160" y="3886200"/>
-            <a:ext cx="3017520" cy="1371600"/>
+            <a:off x="4709160" y="3794760"/>
+            <a:ext cx="3017520" cy="1554480"/>
           </a:xfrm>
           <a:prstGeom prst="rect">
             <a:avLst/>
@@ -4658,7 +4657,7 @@
                 <a:ea typeface="Calibri" pitchFamily="34" charset="-122"/>
                 <a:cs typeface="Calibri" pitchFamily="34" charset="-120"/>
               </a:rPr>
-              <a:t>Seed phrases, gas tokens, and multi-step bridges kill conversion for mainstream players.</a:t>
+              <a:t>Seed phrases, gas tokens, bridges. Mainstream players drop before the first match locks.</a:t>
             </a:r>
             <a:endParaRPr lang="en-US" sz="1400" dirty="0"/>
           </a:p>
@@ -4672,8 +4671,8 @@
         </p:nvSpPr>
         <p:spPr>
           <a:xfrm>
-            <a:off x="8229600" y="2240280"/>
-            <a:ext cx="3611880" cy="3383280"/>
+            <a:off x="8229600" y="2103120"/>
+            <a:ext cx="3611880" cy="3566160"/>
           </a:xfrm>
           <a:prstGeom prst="rect">
             <a:avLst/>
@@ -4699,24 +4698,24 @@
         </p:nvSpPr>
         <p:spPr>
           <a:xfrm>
-            <a:off x="8503920" y="2514600"/>
-            <a:ext cx="3017520" cy="411480"/>
-          </a:xfrm>
-          <a:prstGeom prst="rect">
-            <a:avLst/>
-          </a:prstGeom>
-          <a:noFill/>
-          <a:ln/>
-        </p:spPr>
-        <p:txBody>
-          <a:bodyPr wrap="square" lIns="0" tIns="0" rIns="0" bIns="0" rtlCol="0" anchor="ctr"/>
-          <a:lstStyle/>
-          <a:p>
-            <a:pPr indent="0" marL="0">
-              <a:buNone/>
-            </a:pPr>
-            <a:r>
-              <a:rPr lang="en-US" sz="2200" b="1" dirty="0">
+            <a:off x="8503920" y="2377440"/>
+            <a:ext cx="3017520" cy="365760"/>
+          </a:xfrm>
+          <a:prstGeom prst="rect">
+            <a:avLst/>
+          </a:prstGeom>
+          <a:noFill/>
+          <a:ln/>
+        </p:spPr>
+        <p:txBody>
+          <a:bodyPr wrap="square" lIns="0" tIns="0" rIns="0" bIns="0" rtlCol="0" anchor="ctr"/>
+          <a:lstStyle/>
+          <a:p>
+            <a:pPr indent="0" marL="0">
+              <a:buNone/>
+            </a:pPr>
+            <a:r>
+              <a:rPr lang="en-US" sz="2000" b="1" dirty="0">
                 <a:solidFill>
                   <a:srgbClr val="7C3AED"/>
                 </a:solidFill>
@@ -4726,7 +4725,7 @@
               </a:rPr>
               <a:t>03</a:t>
             </a:r>
-            <a:endParaRPr lang="en-US" sz="2200" dirty="0"/>
+            <a:endParaRPr lang="en-US" sz="2000" dirty="0"/>
           </a:p>
         </p:txBody>
       </p:sp>
@@ -4738,24 +4737,24 @@
         </p:nvSpPr>
         <p:spPr>
           <a:xfrm>
-            <a:off x="8503920" y="3108960"/>
-            <a:ext cx="3017520" cy="640080"/>
-          </a:xfrm>
-          <a:prstGeom prst="rect">
-            <a:avLst/>
-          </a:prstGeom>
-          <a:noFill/>
-          <a:ln/>
-        </p:spPr>
-        <p:txBody>
-          <a:bodyPr wrap="square" lIns="0" tIns="0" rIns="0" bIns="0" rtlCol="0" anchor="ctr"/>
-          <a:lstStyle/>
-          <a:p>
-            <a:pPr indent="0" marL="0">
-              <a:buNone/>
-            </a:pPr>
-            <a:r>
-              <a:rPr lang="en-US" sz="1800" b="1" dirty="0">
+            <a:off x="8503920" y="2926080"/>
+            <a:ext cx="3017520" cy="685800"/>
+          </a:xfrm>
+          <a:prstGeom prst="rect">
+            <a:avLst/>
+          </a:prstGeom>
+          <a:noFill/>
+          <a:ln/>
+        </p:spPr>
+        <p:txBody>
+          <a:bodyPr wrap="square" lIns="0" tIns="0" rIns="0" bIns="0" rtlCol="0" anchor="ctr"/>
+          <a:lstStyle/>
+          <a:p>
+            <a:pPr indent="0" marL="0">
+              <a:buNone/>
+            </a:pPr>
+            <a:r>
+              <a:rPr lang="en-US" sz="1700" b="1" dirty="0">
                 <a:solidFill>
                   <a:srgbClr val="F8FAFC"/>
                 </a:solidFill>
@@ -4763,9 +4762,9 @@
                 <a:ea typeface="Calibri" pitchFamily="34" charset="-122"/>
                 <a:cs typeface="Calibri" pitchFamily="34" charset="-120"/>
               </a:rPr>
-              <a:t>Agents are not economic actors</a:t>
-            </a:r>
-            <a:endParaRPr lang="en-US" sz="1800" dirty="0"/>
+              <a:t>Agents aren’t economic actors</a:t>
+            </a:r>
+            <a:endParaRPr lang="en-US" sz="1700" dirty="0"/>
           </a:p>
         </p:txBody>
       </p:sp>
@@ -4777,8 +4776,8 @@
         </p:nvSpPr>
         <p:spPr>
           <a:xfrm>
-            <a:off x="8503920" y="3886200"/>
-            <a:ext cx="3017520" cy="1371600"/>
+            <a:off x="8503920" y="3794760"/>
+            <a:ext cx="3017520" cy="1554480"/>
           </a:xfrm>
           <a:prstGeom prst="rect">
             <a:avLst/>
@@ -4802,7 +4801,7 @@
                 <a:ea typeface="Calibri" pitchFamily="34" charset="-122"/>
                 <a:cs typeface="Calibri" pitchFamily="34" charset="-120"/>
               </a:rPr>
-              <a:t>AI can play—but without wallets, policy, fees, and markets, agents cannot participate in an economy.</a:t>
+              <a:t>AI can move pieces. Without wallets, policy, fees, and markets, agents can’t join an economy.</a:t>
             </a:r>
             <a:endParaRPr lang="en-US" sz="1400" dirty="0"/>
           </a:p>
@@ -4855,8 +4854,8 @@
         </p:nvSpPr>
         <p:spPr>
           <a:xfrm>
-            <a:off x="4754880" y="6492240"/>
-            <a:ext cx="2743200" cy="228600"/>
+            <a:off x="4114800" y="6492240"/>
+            <a:ext cx="4114800" cy="228600"/>
           </a:xfrm>
           <a:prstGeom prst="rect">
             <a:avLst/>
@@ -4880,7 +4879,7 @@
                 <a:ea typeface="Calibri" pitchFamily="34" charset="-122"/>
                 <a:cs typeface="Calibri" pitchFamily="34" charset="-120"/>
               </a:rPr>
-              <a:t>CONFIDENTIAL</a:t>
+              <a:t>sideQuest  ·  Encode Arc</a:t>
             </a:r>
             <a:endParaRPr lang="en-US" sz="1000" dirty="0"/>
           </a:p>
@@ -5021,7 +5020,7 @@
               <a:buNone/>
             </a:pPr>
             <a:r>
-              <a:rPr lang="en-US" sz="3200" b="1" dirty="0">
+              <a:rPr lang="en-US" sz="3000" b="1" dirty="0">
                 <a:solidFill>
                   <a:srgbClr val="F8FAFC"/>
                 </a:solidFill>
@@ -5029,9 +5028,9 @@
                 <a:ea typeface="Calibri" pitchFamily="34" charset="-122"/>
                 <a:cs typeface="Calibri" pitchFamily="34" charset="-120"/>
               </a:rPr>
-              <a:t>One rail. Two participants. Same money.</a:t>
-            </a:r>
-            <a:endParaRPr lang="en-US" sz="3200" dirty="0"/>
+              <a:t>One settlement layer. Two ways to play.</a:t>
+            </a:r>
+            <a:endParaRPr lang="en-US" sz="3000" dirty="0"/>
           </a:p>
         </p:txBody>
       </p:sp>
@@ -5043,7 +5042,7 @@
         </p:nvSpPr>
         <p:spPr>
           <a:xfrm>
-            <a:off x="640080" y="1280160"/>
+            <a:off x="640080" y="1234440"/>
             <a:ext cx="10972800" cy="502920"/>
           </a:xfrm>
           <a:prstGeom prst="rect">
@@ -5068,7 +5067,7 @@
                 <a:ea typeface="Calibri" pitchFamily="34" charset="-122"/>
                 <a:cs typeface="Calibri" pitchFamily="34" charset="-120"/>
               </a:rPr>
-              <a:t>Boardman is programmable settlement infrastructure for finite-outcome skill contests—starting on Arc with USDC.</a:t>
+              <a:t>Boardman is programmable money for finite-outcome skill contests on Arc (USDC). Same dual-lock primitive for humans and agents.</a:t>
             </a:r>
             <a:endParaRPr lang="en-US" sz="1500" dirty="0"/>
           </a:p>
@@ -5082,8 +5081,8 @@
         </p:nvSpPr>
         <p:spPr>
           <a:xfrm>
-            <a:off x="640080" y="2011680"/>
-            <a:ext cx="5349240" cy="3840480"/>
+            <a:off x="640080" y="1965960"/>
+            <a:ext cx="5349240" cy="3886200"/>
           </a:xfrm>
           <a:prstGeom prst="rect">
             <a:avLst/>
@@ -5109,8 +5108,8 @@
         </p:nvSpPr>
         <p:spPr>
           <a:xfrm>
-            <a:off x="640080" y="2011680"/>
-            <a:ext cx="109728" cy="3840480"/>
+            <a:off x="640080" y="1965960"/>
+            <a:ext cx="109728" cy="3886200"/>
           </a:xfrm>
           <a:prstGeom prst="rect">
             <a:avLst/>
@@ -5129,24 +5128,24 @@
         </p:nvSpPr>
         <p:spPr>
           <a:xfrm>
-            <a:off x="1051560" y="2286000"/>
-            <a:ext cx="4572000" cy="320040"/>
-          </a:xfrm>
-          <a:prstGeom prst="rect">
-            <a:avLst/>
-          </a:prstGeom>
-          <a:noFill/>
-          <a:ln/>
-        </p:spPr>
-        <p:txBody>
-          <a:bodyPr wrap="square" lIns="0" tIns="0" rIns="0" bIns="0" rtlCol="0" anchor="ctr"/>
-          <a:lstStyle/>
-          <a:p>
-            <a:pPr indent="0" marL="0">
-              <a:buNone/>
-            </a:pPr>
-            <a:r>
-              <a:rPr lang="en-US" sz="1200" b="1" spc="150" kern="0" dirty="0">
+            <a:off x="1051560" y="2194560"/>
+            <a:ext cx="4572000" cy="274320"/>
+          </a:xfrm>
+          <a:prstGeom prst="rect">
+            <a:avLst/>
+          </a:prstGeom>
+          <a:noFill/>
+          <a:ln/>
+        </p:spPr>
+        <p:txBody>
+          <a:bodyPr wrap="square" lIns="0" tIns="0" rIns="0" bIns="0" rtlCol="0" anchor="ctr"/>
+          <a:lstStyle/>
+          <a:p>
+            <a:pPr indent="0" marL="0">
+              <a:buNone/>
+            </a:pPr>
+            <a:r>
+              <a:rPr lang="en-US" sz="1200" b="1" spc="120" kern="0" dirty="0">
                 <a:solidFill>
                   <a:srgbClr val="22D3EE"/>
                 </a:solidFill>
@@ -5154,7 +5153,7 @@
                 <a:ea typeface="Calibri" pitchFamily="34" charset="-122"/>
                 <a:cs typeface="Calibri" pitchFamily="34" charset="-120"/>
               </a:rPr>
-              <a:t>HUMANS</a:t>
+              <a:t>HUMANS  ·  TELEGRAM</a:t>
             </a:r>
             <a:endParaRPr lang="en-US" sz="1200" dirty="0"/>
           </a:p>
@@ -5168,8 +5167,8 @@
         </p:nvSpPr>
         <p:spPr>
           <a:xfrm>
-            <a:off x="1051560" y="2697480"/>
-            <a:ext cx="4572000" cy="411480"/>
+            <a:off x="1051560" y="2560320"/>
+            <a:ext cx="4572000" cy="365760"/>
           </a:xfrm>
           <a:prstGeom prst="rect">
             <a:avLst/>
@@ -5193,7 +5192,7 @@
                 <a:ea typeface="Calibri" pitchFamily="34" charset="-122"/>
                 <a:cs typeface="Calibri" pitchFamily="34" charset="-120"/>
               </a:rPr>
-              <a:t>Skill matches that settle</a:t>
+              <a:t>Human ↔ human skill</a:t>
             </a:r>
             <a:endParaRPr lang="en-US" sz="2000" dirty="0"/>
           </a:p>
@@ -5207,8 +5206,8 @@
         </p:nvSpPr>
         <p:spPr>
           <a:xfrm>
-            <a:off x="1051560" y="3291840"/>
-            <a:ext cx="4572000" cy="2194560"/>
+            <a:off x="1051560" y="3108960"/>
+            <a:ext cx="4572000" cy="2377440"/>
           </a:xfrm>
           <a:prstGeom prst="rect">
             <a:avLst/>
@@ -5222,7 +5221,7 @@
           <a:p>
             <a:pPr marL="342900" indent="-342900">
               <a:spcAft>
-                <a:spcPts val="1000"/>
+                <a:spcPts val="800"/>
               </a:spcAft>
               <a:buSzPct val="100000"/>
               <a:buChar char="•"/>
@@ -5236,14 +5235,14 @@
                 <a:ea typeface="Calibri" pitchFamily="34" charset="-122"/>
                 <a:cs typeface="Calibri" pitchFamily="34" charset="-120"/>
               </a:rPr>
-              <a:t>Challenge a peer, dual-lock USDC</a:t>
+              <a:t>Official bot + community group</a:t>
             </a:r>
             <a:endParaRPr lang="en-US" sz="1400" dirty="0"/>
           </a:p>
           <a:p>
             <a:pPr marL="342900" indent="-342900">
               <a:spcAft>
-                <a:spcPts val="1000"/>
+                <a:spcPts val="800"/>
               </a:spcAft>
               <a:buSzPct val="100000"/>
               <a:buChar char="•"/>
@@ -5257,14 +5256,14 @@
                 <a:ea typeface="Calibri" pitchFamily="34" charset="-122"/>
                 <a:cs typeface="Calibri" pitchFamily="34" charset="-120"/>
               </a:rPr>
-              <a:t>Play offline or online (console first)</a:t>
+              <a:t>Public challenges — claim open matches</a:t>
             </a:r>
             <a:endParaRPr lang="en-US" sz="1400" dirty="0"/>
           </a:p>
           <a:p>
             <a:pPr marL="342900" indent="-342900">
               <a:spcAft>
-                <a:spcPts val="1000"/>
+                <a:spcPts val="800"/>
               </a:spcAft>
               <a:buSzPct val="100000"/>
               <a:buChar char="•"/>
@@ -5278,14 +5277,14 @@
                 <a:ea typeface="Calibri" pitchFamily="34" charset="-122"/>
                 <a:cs typeface="Calibri" pitchFamily="34" charset="-120"/>
               </a:rPr>
-              <a:t>Proof via AI vision on result media</a:t>
+              <a:t>Private 1v1s — challenge a friend</a:t>
             </a:r>
             <a:endParaRPr lang="en-US" sz="1400" dirty="0"/>
           </a:p>
           <a:p>
             <a:pPr marL="342900" indent="-342900">
               <a:spcAft>
-                <a:spcPts val="1000"/>
+                <a:spcPts val="800"/>
               </a:spcAft>
               <a:buSzPct val="100000"/>
               <a:buChar char="•"/>
@@ -5299,7 +5298,7 @@
                 <a:ea typeface="Calibri" pitchFamily="34" charset="-122"/>
                 <a:cs typeface="Calibri" pitchFamily="34" charset="-120"/>
               </a:rPr>
-              <a:t>Winner paid automatically from escrow</a:t>
+              <a:t>Dual-lock USDC · play · AI proof · settle</a:t>
             </a:r>
             <a:endParaRPr lang="en-US" sz="1400" dirty="0"/>
           </a:p>
@@ -5313,8 +5312,8 @@
         </p:nvSpPr>
         <p:spPr>
           <a:xfrm>
-            <a:off x="6217920" y="2011680"/>
-            <a:ext cx="5349240" cy="3840480"/>
+            <a:off x="6217920" y="1965960"/>
+            <a:ext cx="5349240" cy="3886200"/>
           </a:xfrm>
           <a:prstGeom prst="rect">
             <a:avLst/>
@@ -5340,8 +5339,8 @@
         </p:nvSpPr>
         <p:spPr>
           <a:xfrm>
-            <a:off x="6217920" y="2011680"/>
-            <a:ext cx="109728" cy="3840480"/>
+            <a:off x="6217920" y="1965960"/>
+            <a:ext cx="109728" cy="3886200"/>
           </a:xfrm>
           <a:prstGeom prst="rect">
             <a:avLst/>
@@ -5360,24 +5359,24 @@
         </p:nvSpPr>
         <p:spPr>
           <a:xfrm>
-            <a:off x="6629400" y="2286000"/>
-            <a:ext cx="4572000" cy="320040"/>
-          </a:xfrm>
-          <a:prstGeom prst="rect">
-            <a:avLst/>
-          </a:prstGeom>
-          <a:noFill/>
-          <a:ln/>
-        </p:spPr>
-        <p:txBody>
-          <a:bodyPr wrap="square" lIns="0" tIns="0" rIns="0" bIns="0" rtlCol="0" anchor="ctr"/>
-          <a:lstStyle/>
-          <a:p>
-            <a:pPr indent="0" marL="0">
-              <a:buNone/>
-            </a:pPr>
-            <a:r>
-              <a:rPr lang="en-US" sz="1200" b="1" spc="150" kern="0" dirty="0">
+            <a:off x="6629400" y="2194560"/>
+            <a:ext cx="4572000" cy="274320"/>
+          </a:xfrm>
+          <a:prstGeom prst="rect">
+            <a:avLst/>
+          </a:prstGeom>
+          <a:noFill/>
+          <a:ln/>
+        </p:spPr>
+        <p:txBody>
+          <a:bodyPr wrap="square" lIns="0" tIns="0" rIns="0" bIns="0" rtlCol="0" anchor="ctr"/>
+          <a:lstStyle/>
+          <a:p>
+            <a:pPr indent="0" marL="0">
+              <a:buNone/>
+            </a:pPr>
+            <a:r>
+              <a:rPr lang="en-US" sz="1200" b="1" spc="120" kern="0" dirty="0">
                 <a:solidFill>
                   <a:srgbClr val="A78BFA"/>
                 </a:solidFill>
@@ -5385,7 +5384,7 @@
                 <a:ea typeface="Calibri" pitchFamily="34" charset="-122"/>
                 <a:cs typeface="Calibri" pitchFamily="34" charset="-120"/>
               </a:rPr>
-              <a:t>AGENTS</a:t>
+              <a:t>AGENTS  ·  BOARDMAN STACK</a:t>
             </a:r>
             <a:endParaRPr lang="en-US" sz="1200" dirty="0"/>
           </a:p>
@@ -5399,8 +5398,8 @@
         </p:nvSpPr>
         <p:spPr>
           <a:xfrm>
-            <a:off x="6629400" y="2697480"/>
-            <a:ext cx="4572000" cy="411480"/>
+            <a:off x="6629400" y="2560320"/>
+            <a:ext cx="4572000" cy="365760"/>
           </a:xfrm>
           <a:prstGeom prst="rect">
             <a:avLst/>
@@ -5424,7 +5423,7 @@
                 <a:ea typeface="Calibri" pitchFamily="34" charset="-122"/>
                 <a:cs typeface="Calibri" pitchFamily="34" charset="-120"/>
               </a:rPr>
-              <a:t>An economy for AI players</a:t>
+              <a:t>Autonomous economy</a:t>
             </a:r>
             <a:endParaRPr lang="en-US" sz="2000" dirty="0"/>
           </a:p>
@@ -5438,8 +5437,8 @@
         </p:nvSpPr>
         <p:spPr>
           <a:xfrm>
-            <a:off x="6629400" y="3291840"/>
-            <a:ext cx="4572000" cy="2194560"/>
+            <a:off x="6629400" y="3108960"/>
+            <a:ext cx="4572000" cy="2377440"/>
           </a:xfrm>
           <a:prstGeom prst="rect">
             <a:avLst/>
@@ -5453,7 +5452,7 @@
           <a:p>
             <a:pPr marL="342900" indent="-342900">
               <a:spcAft>
-                <a:spcPts val="1000"/>
+                <a:spcPts val="800"/>
               </a:spcAft>
               <a:buSzPct val="100000"/>
               <a:buChar char="•"/>
@@ -5467,14 +5466,14 @@
                 <a:ea typeface="Calibri" pitchFamily="34" charset="-122"/>
                 <a:cs typeface="Calibri" pitchFamily="34" charset="-120"/>
               </a:rPr>
-              <a:t>Agents hold bankrolls and policies</a:t>
+              <a:t>Agents with bankrolls &amp; policies</a:t>
             </a:r>
             <a:endParaRPr lang="en-US" sz="1400" dirty="0"/>
           </a:p>
           <a:p>
             <a:pPr marL="342900" indent="-342900">
               <a:spcAft>
-                <a:spcPts val="1000"/>
+                <a:spcPts val="800"/>
               </a:spcAft>
               <a:buSzPct val="100000"/>
               <a:buChar char="•"/>
@@ -5488,14 +5487,14 @@
                 <a:ea typeface="Calibri" pitchFamily="34" charset="-122"/>
                 <a:cs typeface="Calibri" pitchFamily="34" charset="-120"/>
               </a:rPr>
-              <a:t>Negotiate equal stakes from free capital</a:t>
+              <a:t>Negotiated equal skill stakes</a:t>
             </a:r>
             <a:endParaRPr lang="en-US" sz="1400" dirty="0"/>
           </a:p>
           <a:p>
             <a:pPr marL="342900" indent="-342900">
               <a:spcAft>
-                <a:spcPts val="1000"/>
+                <a:spcPts val="800"/>
               </a:spcAft>
               <a:buSzPct val="100000"/>
               <a:buChar char="•"/>
@@ -5509,14 +5508,14 @@
                 <a:ea typeface="Calibri" pitchFamily="34" charset="-122"/>
                 <a:cs typeface="Calibri" pitchFamily="34" charset="-120"/>
               </a:rPr>
-              <a:t>Creators earn fees on wins</a:t>
+              <a:t>Creator fees · LPs · spectator pots</a:t>
             </a:r>
             <a:endParaRPr lang="en-US" sz="1400" dirty="0"/>
           </a:p>
           <a:p>
             <a:pPr marL="342900" indent="-342900">
               <a:spcAft>
-                <a:spcPts val="1000"/>
+                <a:spcPts val="800"/>
               </a:spcAft>
               <a:buSzPct val="100000"/>
               <a:buChar char="•"/>
@@ -5530,7 +5529,7 @@
                 <a:ea typeface="Calibri" pitchFamily="34" charset="-122"/>
                 <a:cs typeface="Calibri" pitchFamily="34" charset="-120"/>
               </a:rPr>
-              <a:t>Spectators and LPs provide side capital</a:t>
+              <a:t>Builder stack: manifests + webhooks</a:t>
             </a:r>
             <a:endParaRPr lang="en-US" sz="1400" dirty="0"/>
           </a:p>
@@ -5583,8 +5582,8 @@
         </p:nvSpPr>
         <p:spPr>
           <a:xfrm>
-            <a:off x="4754880" y="6492240"/>
-            <a:ext cx="2743200" cy="228600"/>
+            <a:off x="4114800" y="6492240"/>
+            <a:ext cx="4114800" cy="228600"/>
           </a:xfrm>
           <a:prstGeom prst="rect">
             <a:avLst/>
@@ -5608,7 +5607,7 @@
                 <a:ea typeface="Calibri" pitchFamily="34" charset="-122"/>
                 <a:cs typeface="Calibri" pitchFamily="34" charset="-120"/>
               </a:rPr>
-              <a:t>CONFIDENTIAL</a:t>
+              <a:t>sideQuest  ·  Encode Arc</a:t>
             </a:r>
             <a:endParaRPr lang="en-US" sz="1000" dirty="0"/>
           </a:p>
@@ -5718,7 +5717,7 @@
                 <a:ea typeface="Calibri" pitchFamily="34" charset="-122"/>
                 <a:cs typeface="Calibri" pitchFamily="34" charset="-120"/>
               </a:rPr>
-              <a:t>PRODUCT</a:t>
+              <a:t>HUMAN LAYER</a:t>
             </a:r>
             <a:endParaRPr lang="en-US" sz="1100" dirty="0"/>
           </a:p>
@@ -5749,7 +5748,7 @@
               <a:buNone/>
             </a:pPr>
             <a:r>
-              <a:rPr lang="en-US" sz="3200" b="1" dirty="0">
+              <a:rPr lang="en-US" sz="3000" b="1" dirty="0">
                 <a:solidFill>
                   <a:srgbClr val="F8FAFC"/>
                 </a:solidFill>
@@ -5757,22 +5756,61 @@
                 <a:ea typeface="Calibri" pitchFamily="34" charset="-122"/>
                 <a:cs typeface="Calibri" pitchFamily="34" charset="-120"/>
               </a:rPr>
-              <a:t>Three products. One settlement stack.</a:t>
-            </a:r>
-            <a:endParaRPr lang="en-US" sz="3200" dirty="0"/>
-          </a:p>
-        </p:txBody>
-      </p:sp>
-      <p:sp>
-        <p:nvSpPr>
-          <p:cNvPr id="4" name="Shape 2"/>
-          <p:cNvSpPr/>
-          <p:nvPr/>
-        </p:nvSpPr>
-        <p:spPr>
-          <a:xfrm>
-            <a:off x="640080" y="1417320"/>
-            <a:ext cx="10972800" cy="1280160"/>
+              <a:t>Telegram is the boardroom.</a:t>
+            </a:r>
+            <a:endParaRPr lang="en-US" sz="3000" dirty="0"/>
+          </a:p>
+        </p:txBody>
+      </p:sp>
+      <p:sp>
+        <p:nvSpPr>
+          <p:cNvPr id="4" name="Text 2"/>
+          <p:cNvSpPr/>
+          <p:nvPr/>
+        </p:nvSpPr>
+        <p:spPr>
+          <a:xfrm>
+            <a:off x="640080" y="1234440"/>
+            <a:ext cx="10972800" cy="457200"/>
+          </a:xfrm>
+          <a:prstGeom prst="rect">
+            <a:avLst/>
+          </a:prstGeom>
+          <a:noFill/>
+          <a:ln/>
+        </p:spPr>
+        <p:txBody>
+          <a:bodyPr wrap="square" lIns="0" tIns="0" rIns="0" bIns="0" rtlCol="0" anchor="ctr"/>
+          <a:lstStyle/>
+          <a:p>
+            <a:pPr indent="0" marL="0">
+              <a:buNone/>
+            </a:pPr>
+            <a:r>
+              <a:rPr lang="en-US" sz="1400" dirty="0">
+                <a:solidFill>
+                  <a:srgbClr val="94A3B8"/>
+                </a:solidFill>
+                <a:latin typeface="Calibri" pitchFamily="34" charset="0"/>
+                <a:ea typeface="Calibri" pitchFamily="34" charset="-122"/>
+                <a:cs typeface="Calibri" pitchFamily="34" charset="-120"/>
+              </a:rPr>
+              <a:t>Where skill stakes already live — chat. Boardman turns that into dual-lock USDC, without forcing a new app install.</a:t>
+            </a:r>
+            <a:endParaRPr lang="en-US" sz="1400" dirty="0"/>
+          </a:p>
+        </p:txBody>
+      </p:sp>
+      <p:sp>
+        <p:nvSpPr>
+          <p:cNvPr id="5" name="Shape 3"/>
+          <p:cNvSpPr/>
+          <p:nvPr/>
+        </p:nvSpPr>
+        <p:spPr>
+          <a:xfrm>
+            <a:off x="502920" y="1920240"/>
+            <a:ext cx="2148840" cy="3200400"/>
           </a:xfrm>
           <a:prstGeom prst="rect">
             <a:avLst/>
@@ -5792,69 +5830,89 @@
       </p:sp>
       <p:sp>
         <p:nvSpPr>
-          <p:cNvPr id="5" name="Text 3"/>
-          <p:cNvSpPr/>
-          <p:nvPr/>
-        </p:nvSpPr>
-        <p:spPr>
-          <a:xfrm>
-            <a:off x="914400" y="1783080"/>
-            <a:ext cx="914400" cy="502920"/>
-          </a:xfrm>
-          <a:prstGeom prst="rect">
-            <a:avLst/>
-          </a:prstGeom>
-          <a:noFill/>
-          <a:ln/>
-        </p:spPr>
-        <p:txBody>
-          <a:bodyPr wrap="square" lIns="0" tIns="0" rIns="0" bIns="0" rtlCol="0" anchor="ctr"/>
-          <a:lstStyle/>
-          <a:p>
-            <a:pPr indent="0" marL="0">
-              <a:buNone/>
-            </a:pPr>
-            <a:r>
-              <a:rPr lang="en-US" sz="2200" b="1" dirty="0">
-                <a:solidFill>
-                  <a:srgbClr val="7C3AED"/>
-                </a:solidFill>
-                <a:latin typeface="Calibri" pitchFamily="34" charset="0"/>
-                <a:ea typeface="Calibri" pitchFamily="34" charset="-122"/>
-                <a:cs typeface="Calibri" pitchFamily="34" charset="-120"/>
-              </a:rPr>
-              <a:t>01</a:t>
-            </a:r>
-            <a:endParaRPr lang="en-US" sz="2200" dirty="0"/>
-          </a:p>
-        </p:txBody>
-      </p:sp>
-      <p:sp>
-        <p:nvSpPr>
-          <p:cNvPr id="6" name="Text 4"/>
-          <p:cNvSpPr/>
-          <p:nvPr/>
-        </p:nvSpPr>
-        <p:spPr>
-          <a:xfrm>
-            <a:off x="2011680" y="1645920"/>
-            <a:ext cx="5486400" cy="365760"/>
-          </a:xfrm>
-          <a:prstGeom prst="rect">
-            <a:avLst/>
-          </a:prstGeom>
-          <a:noFill/>
-          <a:ln/>
-        </p:spPr>
-        <p:txBody>
-          <a:bodyPr wrap="square" lIns="0" tIns="0" rIns="0" bIns="0" rtlCol="0" anchor="ctr"/>
-          <a:lstStyle/>
-          <a:p>
-            <a:pPr indent="0" marL="0">
-              <a:buNone/>
-            </a:pPr>
-            <a:r>
-              <a:rPr lang="en-US" sz="2000" b="1" dirty="0">
+          <p:cNvPr id="6" name="Shape 4"/>
+          <p:cNvSpPr/>
+          <p:nvPr/>
+        </p:nvSpPr>
+        <p:spPr>
+          <a:xfrm>
+            <a:off x="1280160" y="2148840"/>
+            <a:ext cx="502920" cy="502920"/>
+          </a:xfrm>
+          <a:prstGeom prst="ellipse">
+            <a:avLst/>
+          </a:prstGeom>
+          <a:solidFill>
+            <a:srgbClr val="22D3EE"/>
+          </a:solidFill>
+          <a:ln/>
+        </p:spPr>
+      </p:sp>
+      <p:sp>
+        <p:nvSpPr>
+          <p:cNvPr id="7" name="Text 5"/>
+          <p:cNvSpPr/>
+          <p:nvPr/>
+        </p:nvSpPr>
+        <p:spPr>
+          <a:xfrm>
+            <a:off x="1280160" y="2212848"/>
+            <a:ext cx="502920" cy="411480"/>
+          </a:xfrm>
+          <a:prstGeom prst="rect">
+            <a:avLst/>
+          </a:prstGeom>
+          <a:noFill/>
+          <a:ln/>
+        </p:spPr>
+        <p:txBody>
+          <a:bodyPr wrap="square" lIns="0" tIns="0" rIns="0" bIns="0" rtlCol="0" anchor="ctr"/>
+          <a:lstStyle/>
+          <a:p>
+            <a:pPr algn="ctr" indent="0" marL="0">
+              <a:buNone/>
+            </a:pPr>
+            <a:r>
+              <a:rPr lang="en-US" sz="1600" b="1" dirty="0">
+                <a:solidFill>
+                  <a:srgbClr val="0B1220"/>
+                </a:solidFill>
+                <a:latin typeface="Calibri" pitchFamily="34" charset="0"/>
+                <a:ea typeface="Calibri" pitchFamily="34" charset="-122"/>
+                <a:cs typeface="Calibri" pitchFamily="34" charset="-120"/>
+              </a:rPr>
+              <a:t>1</a:t>
+            </a:r>
+            <a:endParaRPr lang="en-US" sz="1600" dirty="0"/>
+          </a:p>
+        </p:txBody>
+      </p:sp>
+      <p:sp>
+        <p:nvSpPr>
+          <p:cNvPr id="8" name="Text 6"/>
+          <p:cNvSpPr/>
+          <p:nvPr/>
+        </p:nvSpPr>
+        <p:spPr>
+          <a:xfrm>
+            <a:off x="640080" y="2880360"/>
+            <a:ext cx="1874520" cy="411480"/>
+          </a:xfrm>
+          <a:prstGeom prst="rect">
+            <a:avLst/>
+          </a:prstGeom>
+          <a:noFill/>
+          <a:ln/>
+        </p:spPr>
+        <p:txBody>
+          <a:bodyPr wrap="square" lIns="0" tIns="0" rIns="0" bIns="0" rtlCol="0" anchor="ctr"/>
+          <a:lstStyle/>
+          <a:p>
+            <a:pPr algn="ctr" indent="0" marL="0">
+              <a:buNone/>
+            </a:pPr>
+            <a:r>
+              <a:rPr lang="en-US" sz="1500" b="1" dirty="0">
                 <a:solidFill>
                   <a:srgbClr val="F8FAFC"/>
                 </a:solidFill>
@@ -5862,77 +5920,38 @@
                 <a:ea typeface="Calibri" pitchFamily="34" charset="-122"/>
                 <a:cs typeface="Calibri" pitchFamily="34" charset="-120"/>
               </a:rPr>
-              <a:t>Boardman App</a:t>
-            </a:r>
-            <a:endParaRPr lang="en-US" sz="2000" dirty="0"/>
-          </a:p>
-        </p:txBody>
-      </p:sp>
-      <p:sp>
-        <p:nvSpPr>
-          <p:cNvPr id="7" name="Text 5"/>
-          <p:cNvSpPr/>
-          <p:nvPr/>
-        </p:nvSpPr>
-        <p:spPr>
-          <a:xfrm>
-            <a:off x="8686800" y="1691640"/>
-            <a:ext cx="2560320" cy="320040"/>
-          </a:xfrm>
-          <a:prstGeom prst="rect">
-            <a:avLst/>
-          </a:prstGeom>
-          <a:noFill/>
-          <a:ln/>
-        </p:spPr>
-        <p:txBody>
-          <a:bodyPr wrap="square" lIns="0" tIns="0" rIns="0" bIns="0" rtlCol="0" anchor="ctr"/>
-          <a:lstStyle/>
-          <a:p>
-            <a:pPr algn="r" indent="0" marL="0">
-              <a:buNone/>
-            </a:pPr>
-            <a:r>
-              <a:rPr lang="en-US" sz="1100" b="1" spc="100" kern="0" dirty="0">
-                <a:solidFill>
-                  <a:srgbClr val="A78BFA"/>
-                </a:solidFill>
-                <a:latin typeface="Calibri" pitchFamily="34" charset="0"/>
-                <a:ea typeface="Calibri" pitchFamily="34" charset="-122"/>
-                <a:cs typeface="Calibri" pitchFamily="34" charset="-120"/>
-              </a:rPr>
-              <a:t>CONSUMER</a:t>
-            </a:r>
-            <a:endParaRPr lang="en-US" sz="1100" dirty="0"/>
-          </a:p>
-        </p:txBody>
-      </p:sp>
-      <p:sp>
-        <p:nvSpPr>
-          <p:cNvPr id="8" name="Text 6"/>
-          <p:cNvSpPr/>
-          <p:nvPr/>
-        </p:nvSpPr>
-        <p:spPr>
-          <a:xfrm>
-            <a:off x="2011680" y="2103120"/>
-            <a:ext cx="9144000" cy="411480"/>
-          </a:xfrm>
-          <a:prstGeom prst="rect">
-            <a:avLst/>
-          </a:prstGeom>
-          <a:noFill/>
-          <a:ln/>
-        </p:spPr>
-        <p:txBody>
-          <a:bodyPr wrap="square" lIns="0" tIns="0" rIns="0" bIns="0" rtlCol="0" anchor="ctr"/>
-          <a:lstStyle/>
-          <a:p>
-            <a:pPr indent="0" marL="0">
-              <a:buNone/>
-            </a:pPr>
-            <a:r>
-              <a:rPr lang="en-US" sz="1400" dirty="0">
+              <a:t>Fund</a:t>
+            </a:r>
+            <a:endParaRPr lang="en-US" sz="1500" dirty="0"/>
+          </a:p>
+        </p:txBody>
+      </p:sp>
+      <p:sp>
+        <p:nvSpPr>
+          <p:cNvPr id="9" name="Text 7"/>
+          <p:cNvSpPr/>
+          <p:nvPr/>
+        </p:nvSpPr>
+        <p:spPr>
+          <a:xfrm>
+            <a:off x="640080" y="3383280"/>
+            <a:ext cx="1874520" cy="1463040"/>
+          </a:xfrm>
+          <a:prstGeom prst="rect">
+            <a:avLst/>
+          </a:prstGeom>
+          <a:noFill/>
+          <a:ln/>
+        </p:spPr>
+        <p:txBody>
+          <a:bodyPr wrap="square" lIns="0" tIns="0" rIns="0" bIns="0" rtlCol="0" anchor="ctr"/>
+          <a:lstStyle/>
+          <a:p>
+            <a:pPr algn="ctr" indent="0" marL="0">
+              <a:buNone/>
+            </a:pPr>
+            <a:r>
+              <a:rPr lang="en-US" sz="1200" dirty="0">
                 <a:solidFill>
                   <a:srgbClr val="94A3B8"/>
                 </a:solidFill>
@@ -5940,22 +5959,22 @@
                 <a:ea typeface="Calibri" pitchFamily="34" charset="-122"/>
                 <a:cs typeface="Calibri" pitchFamily="34" charset="-120"/>
               </a:rPr>
-              <a:t>Telegram-native skill 1v1s with dual-lock escrow, wallets, and proof-based settle.</a:t>
-            </a:r>
-            <a:endParaRPr lang="en-US" sz="1400" dirty="0"/>
-          </a:p>
-        </p:txBody>
-      </p:sp>
-      <p:sp>
-        <p:nvSpPr>
-          <p:cNvPr id="9" name="Shape 7"/>
-          <p:cNvSpPr/>
-          <p:nvPr/>
-        </p:nvSpPr>
-        <p:spPr>
-          <a:xfrm>
-            <a:off x="640080" y="2880360"/>
-            <a:ext cx="10972800" cy="1280160"/>
+              <a:t>Open bot → Get USDC → fund wallet (testnet faucet path live).</a:t>
+            </a:r>
+            <a:endParaRPr lang="en-US" sz="1200" dirty="0"/>
+          </a:p>
+        </p:txBody>
+      </p:sp>
+      <p:sp>
+        <p:nvSpPr>
+          <p:cNvPr id="10" name="Shape 8"/>
+          <p:cNvSpPr/>
+          <p:nvPr/>
+        </p:nvSpPr>
+        <p:spPr>
+          <a:xfrm>
+            <a:off x="2788920" y="1920240"/>
+            <a:ext cx="2148840" cy="3200400"/>
           </a:xfrm>
           <a:prstGeom prst="rect">
             <a:avLst/>
@@ -5975,69 +5994,89 @@
       </p:sp>
       <p:sp>
         <p:nvSpPr>
-          <p:cNvPr id="10" name="Text 8"/>
-          <p:cNvSpPr/>
-          <p:nvPr/>
-        </p:nvSpPr>
-        <p:spPr>
-          <a:xfrm>
-            <a:off x="914400" y="3246120"/>
-            <a:ext cx="914400" cy="502920"/>
-          </a:xfrm>
-          <a:prstGeom prst="rect">
-            <a:avLst/>
-          </a:prstGeom>
-          <a:noFill/>
-          <a:ln/>
-        </p:spPr>
-        <p:txBody>
-          <a:bodyPr wrap="square" lIns="0" tIns="0" rIns="0" bIns="0" rtlCol="0" anchor="ctr"/>
-          <a:lstStyle/>
-          <a:p>
-            <a:pPr indent="0" marL="0">
-              <a:buNone/>
-            </a:pPr>
-            <a:r>
-              <a:rPr lang="en-US" sz="2200" b="1" dirty="0">
-                <a:solidFill>
-                  <a:srgbClr val="7C3AED"/>
-                </a:solidFill>
-                <a:latin typeface="Calibri" pitchFamily="34" charset="0"/>
-                <a:ea typeface="Calibri" pitchFamily="34" charset="-122"/>
-                <a:cs typeface="Calibri" pitchFamily="34" charset="-120"/>
-              </a:rPr>
-              <a:t>02</a:t>
-            </a:r>
-            <a:endParaRPr lang="en-US" sz="2200" dirty="0"/>
-          </a:p>
-        </p:txBody>
-      </p:sp>
-      <p:sp>
-        <p:nvSpPr>
-          <p:cNvPr id="11" name="Text 9"/>
-          <p:cNvSpPr/>
-          <p:nvPr/>
-        </p:nvSpPr>
-        <p:spPr>
-          <a:xfrm>
-            <a:off x="2011680" y="3108960"/>
-            <a:ext cx="5486400" cy="365760"/>
-          </a:xfrm>
-          <a:prstGeom prst="rect">
-            <a:avLst/>
-          </a:prstGeom>
-          <a:noFill/>
-          <a:ln/>
-        </p:spPr>
-        <p:txBody>
-          <a:bodyPr wrap="square" lIns="0" tIns="0" rIns="0" bIns="0" rtlCol="0" anchor="ctr"/>
-          <a:lstStyle/>
-          <a:p>
-            <a:pPr indent="0" marL="0">
-              <a:buNone/>
-            </a:pPr>
-            <a:r>
-              <a:rPr lang="en-US" sz="2000" b="1" dirty="0">
+          <p:cNvPr id="11" name="Shape 9"/>
+          <p:cNvSpPr/>
+          <p:nvPr/>
+        </p:nvSpPr>
+        <p:spPr>
+          <a:xfrm>
+            <a:off x="3566160" y="2148840"/>
+            <a:ext cx="502920" cy="502920"/>
+          </a:xfrm>
+          <a:prstGeom prst="ellipse">
+            <a:avLst/>
+          </a:prstGeom>
+          <a:solidFill>
+            <a:srgbClr val="22D3EE"/>
+          </a:solidFill>
+          <a:ln/>
+        </p:spPr>
+      </p:sp>
+      <p:sp>
+        <p:nvSpPr>
+          <p:cNvPr id="12" name="Text 10"/>
+          <p:cNvSpPr/>
+          <p:nvPr/>
+        </p:nvSpPr>
+        <p:spPr>
+          <a:xfrm>
+            <a:off x="3566160" y="2212848"/>
+            <a:ext cx="502920" cy="411480"/>
+          </a:xfrm>
+          <a:prstGeom prst="rect">
+            <a:avLst/>
+          </a:prstGeom>
+          <a:noFill/>
+          <a:ln/>
+        </p:spPr>
+        <p:txBody>
+          <a:bodyPr wrap="square" lIns="0" tIns="0" rIns="0" bIns="0" rtlCol="0" anchor="ctr"/>
+          <a:lstStyle/>
+          <a:p>
+            <a:pPr algn="ctr" indent="0" marL="0">
+              <a:buNone/>
+            </a:pPr>
+            <a:r>
+              <a:rPr lang="en-US" sz="1600" b="1" dirty="0">
+                <a:solidFill>
+                  <a:srgbClr val="0B1220"/>
+                </a:solidFill>
+                <a:latin typeface="Calibri" pitchFamily="34" charset="0"/>
+                <a:ea typeface="Calibri" pitchFamily="34" charset="-122"/>
+                <a:cs typeface="Calibri" pitchFamily="34" charset="-120"/>
+              </a:rPr>
+              <a:t>2</a:t>
+            </a:r>
+            <a:endParaRPr lang="en-US" sz="1600" dirty="0"/>
+          </a:p>
+        </p:txBody>
+      </p:sp>
+      <p:sp>
+        <p:nvSpPr>
+          <p:cNvPr id="13" name="Text 11"/>
+          <p:cNvSpPr/>
+          <p:nvPr/>
+        </p:nvSpPr>
+        <p:spPr>
+          <a:xfrm>
+            <a:off x="2926080" y="2880360"/>
+            <a:ext cx="1874520" cy="411480"/>
+          </a:xfrm>
+          <a:prstGeom prst="rect">
+            <a:avLst/>
+          </a:prstGeom>
+          <a:noFill/>
+          <a:ln/>
+        </p:spPr>
+        <p:txBody>
+          <a:bodyPr wrap="square" lIns="0" tIns="0" rIns="0" bIns="0" rtlCol="0" anchor="ctr"/>
+          <a:lstStyle/>
+          <a:p>
+            <a:pPr algn="ctr" indent="0" marL="0">
+              <a:buNone/>
+            </a:pPr>
+            <a:r>
+              <a:rPr lang="en-US" sz="1500" b="1" dirty="0">
                 <a:solidFill>
                   <a:srgbClr val="F8FAFC"/>
                 </a:solidFill>
@@ -6045,77 +6084,38 @@
                 <a:ea typeface="Calibri" pitchFamily="34" charset="-122"/>
                 <a:cs typeface="Calibri" pitchFamily="34" charset="-120"/>
               </a:rPr>
-              <a:t>Agent Arena</a:t>
-            </a:r>
-            <a:endParaRPr lang="en-US" sz="2000" dirty="0"/>
-          </a:p>
-        </p:txBody>
-      </p:sp>
-      <p:sp>
-        <p:nvSpPr>
-          <p:cNvPr id="12" name="Text 10"/>
-          <p:cNvSpPr/>
-          <p:nvPr/>
-        </p:nvSpPr>
-        <p:spPr>
-          <a:xfrm>
-            <a:off x="8686800" y="3154680"/>
-            <a:ext cx="2560320" cy="320040"/>
-          </a:xfrm>
-          <a:prstGeom prst="rect">
-            <a:avLst/>
-          </a:prstGeom>
-          <a:noFill/>
-          <a:ln/>
-        </p:spPr>
-        <p:txBody>
-          <a:bodyPr wrap="square" lIns="0" tIns="0" rIns="0" bIns="0" rtlCol="0" anchor="ctr"/>
-          <a:lstStyle/>
-          <a:p>
-            <a:pPr algn="r" indent="0" marL="0">
-              <a:buNone/>
-            </a:pPr>
-            <a:r>
-              <a:rPr lang="en-US" sz="1100" b="1" spc="100" kern="0" dirty="0">
-                <a:solidFill>
-                  <a:srgbClr val="A78BFA"/>
-                </a:solidFill>
-                <a:latin typeface="Calibri" pitchFamily="34" charset="0"/>
-                <a:ea typeface="Calibri" pitchFamily="34" charset="-122"/>
-                <a:cs typeface="Calibri" pitchFamily="34" charset="-120"/>
-              </a:rPr>
-              <a:t>MARKET</a:t>
-            </a:r>
-            <a:endParaRPr lang="en-US" sz="1100" dirty="0"/>
-          </a:p>
-        </p:txBody>
-      </p:sp>
-      <p:sp>
-        <p:nvSpPr>
-          <p:cNvPr id="13" name="Text 11"/>
-          <p:cNvSpPr/>
-          <p:nvPr/>
-        </p:nvSpPr>
-        <p:spPr>
-          <a:xfrm>
-            <a:off x="2011680" y="3566160"/>
-            <a:ext cx="9144000" cy="411480"/>
-          </a:xfrm>
-          <a:prstGeom prst="rect">
-            <a:avLst/>
-          </a:prstGeom>
-          <a:noFill/>
-          <a:ln/>
-        </p:spPr>
-        <p:txBody>
-          <a:bodyPr wrap="square" lIns="0" tIns="0" rIns="0" bIns="0" rtlCol="0" anchor="ctr"/>
-          <a:lstStyle/>
-          <a:p>
-            <a:pPr indent="0" marL="0">
-              <a:buNone/>
-            </a:pPr>
-            <a:r>
-              <a:rPr lang="en-US" sz="1400" dirty="0">
+              <a:t>Public room</a:t>
+            </a:r>
+            <a:endParaRPr lang="en-US" sz="1500" dirty="0"/>
+          </a:p>
+        </p:txBody>
+      </p:sp>
+      <p:sp>
+        <p:nvSpPr>
+          <p:cNvPr id="14" name="Text 12"/>
+          <p:cNvSpPr/>
+          <p:nvPr/>
+        </p:nvSpPr>
+        <p:spPr>
+          <a:xfrm>
+            <a:off x="2926080" y="3383280"/>
+            <a:ext cx="1874520" cy="1463040"/>
+          </a:xfrm>
+          <a:prstGeom prst="rect">
+            <a:avLst/>
+          </a:prstGeom>
+          <a:noFill/>
+          <a:ln/>
+        </p:spPr>
+        <p:txBody>
+          <a:bodyPr wrap="square" lIns="0" tIns="0" rIns="0" bIns="0" rtlCol="0" anchor="ctr"/>
+          <a:lstStyle/>
+          <a:p>
+            <a:pPr algn="ctr" indent="0" marL="0">
+              <a:buNone/>
+            </a:pPr>
+            <a:r>
+              <a:rPr lang="en-US" sz="1200" dirty="0">
                 <a:solidFill>
                   <a:srgbClr val="94A3B8"/>
                 </a:solidFill>
@@ -6123,22 +6123,22 @@
                 <a:ea typeface="Calibri" pitchFamily="34" charset="-122"/>
                 <a:cs typeface="Calibri" pitchFamily="34" charset="-120"/>
               </a:rPr>
-              <a:t>Autonomous matches with live odds, capped spectator pots, and creator economics.</a:t>
-            </a:r>
-            <a:endParaRPr lang="en-US" sz="1400" dirty="0"/>
-          </a:p>
-        </p:txBody>
-      </p:sp>
-      <p:sp>
-        <p:nvSpPr>
-          <p:cNvPr id="14" name="Shape 12"/>
-          <p:cNvSpPr/>
-          <p:nvPr/>
-        </p:nvSpPr>
-        <p:spPr>
-          <a:xfrm>
-            <a:off x="640080" y="4343400"/>
-            <a:ext cx="10972800" cy="1280160"/>
+              <a:t>Community group + live rooms. Post an open challenge; others claim (fastest fingers).</a:t>
+            </a:r>
+            <a:endParaRPr lang="en-US" sz="1200" dirty="0"/>
+          </a:p>
+        </p:txBody>
+      </p:sp>
+      <p:sp>
+        <p:nvSpPr>
+          <p:cNvPr id="15" name="Shape 13"/>
+          <p:cNvSpPr/>
+          <p:nvPr/>
+        </p:nvSpPr>
+        <p:spPr>
+          <a:xfrm>
+            <a:off x="5074920" y="1920240"/>
+            <a:ext cx="2148840" cy="3200400"/>
           </a:xfrm>
           <a:prstGeom prst="rect">
             <a:avLst/>
@@ -6158,69 +6158,89 @@
       </p:sp>
       <p:sp>
         <p:nvSpPr>
-          <p:cNvPr id="15" name="Text 13"/>
-          <p:cNvSpPr/>
-          <p:nvPr/>
-        </p:nvSpPr>
-        <p:spPr>
-          <a:xfrm>
-            <a:off x="914400" y="4709160"/>
-            <a:ext cx="914400" cy="502920"/>
-          </a:xfrm>
-          <a:prstGeom prst="rect">
-            <a:avLst/>
-          </a:prstGeom>
-          <a:noFill/>
-          <a:ln/>
-        </p:spPr>
-        <p:txBody>
-          <a:bodyPr wrap="square" lIns="0" tIns="0" rIns="0" bIns="0" rtlCol="0" anchor="ctr"/>
-          <a:lstStyle/>
-          <a:p>
-            <a:pPr indent="0" marL="0">
-              <a:buNone/>
-            </a:pPr>
-            <a:r>
-              <a:rPr lang="en-US" sz="2200" b="1" dirty="0">
-                <a:solidFill>
-                  <a:srgbClr val="7C3AED"/>
-                </a:solidFill>
-                <a:latin typeface="Calibri" pitchFamily="34" charset="0"/>
-                <a:ea typeface="Calibri" pitchFamily="34" charset="-122"/>
-                <a:cs typeface="Calibri" pitchFamily="34" charset="-120"/>
-              </a:rPr>
-              <a:t>03</a:t>
-            </a:r>
-            <a:endParaRPr lang="en-US" sz="2200" dirty="0"/>
-          </a:p>
-        </p:txBody>
-      </p:sp>
-      <p:sp>
-        <p:nvSpPr>
-          <p:cNvPr id="16" name="Text 14"/>
-          <p:cNvSpPr/>
-          <p:nvPr/>
-        </p:nvSpPr>
-        <p:spPr>
-          <a:xfrm>
-            <a:off x="2011680" y="4572000"/>
-            <a:ext cx="5486400" cy="365760"/>
-          </a:xfrm>
-          <a:prstGeom prst="rect">
-            <a:avLst/>
-          </a:prstGeom>
-          <a:noFill/>
-          <a:ln/>
-        </p:spPr>
-        <p:txBody>
-          <a:bodyPr wrap="square" lIns="0" tIns="0" rIns="0" bIns="0" rtlCol="0" anchor="ctr"/>
-          <a:lstStyle/>
-          <a:p>
-            <a:pPr indent="0" marL="0">
-              <a:buNone/>
-            </a:pPr>
-            <a:r>
-              <a:rPr lang="en-US" sz="2000" b="1" dirty="0">
+          <p:cNvPr id="16" name="Shape 14"/>
+          <p:cNvSpPr/>
+          <p:nvPr/>
+        </p:nvSpPr>
+        <p:spPr>
+          <a:xfrm>
+            <a:off x="5852160" y="2148840"/>
+            <a:ext cx="502920" cy="502920"/>
+          </a:xfrm>
+          <a:prstGeom prst="ellipse">
+            <a:avLst/>
+          </a:prstGeom>
+          <a:solidFill>
+            <a:srgbClr val="22D3EE"/>
+          </a:solidFill>
+          <a:ln/>
+        </p:spPr>
+      </p:sp>
+      <p:sp>
+        <p:nvSpPr>
+          <p:cNvPr id="17" name="Text 15"/>
+          <p:cNvSpPr/>
+          <p:nvPr/>
+        </p:nvSpPr>
+        <p:spPr>
+          <a:xfrm>
+            <a:off x="5852160" y="2212848"/>
+            <a:ext cx="502920" cy="411480"/>
+          </a:xfrm>
+          <a:prstGeom prst="rect">
+            <a:avLst/>
+          </a:prstGeom>
+          <a:noFill/>
+          <a:ln/>
+        </p:spPr>
+        <p:txBody>
+          <a:bodyPr wrap="square" lIns="0" tIns="0" rIns="0" bIns="0" rtlCol="0" anchor="ctr"/>
+          <a:lstStyle/>
+          <a:p>
+            <a:pPr algn="ctr" indent="0" marL="0">
+              <a:buNone/>
+            </a:pPr>
+            <a:r>
+              <a:rPr lang="en-US" sz="1600" b="1" dirty="0">
+                <a:solidFill>
+                  <a:srgbClr val="0B1220"/>
+                </a:solidFill>
+                <a:latin typeface="Calibri" pitchFamily="34" charset="0"/>
+                <a:ea typeface="Calibri" pitchFamily="34" charset="-122"/>
+                <a:cs typeface="Calibri" pitchFamily="34" charset="-120"/>
+              </a:rPr>
+              <a:t>3</a:t>
+            </a:r>
+            <a:endParaRPr lang="en-US" sz="1600" dirty="0"/>
+          </a:p>
+        </p:txBody>
+      </p:sp>
+      <p:sp>
+        <p:nvSpPr>
+          <p:cNvPr id="18" name="Text 16"/>
+          <p:cNvSpPr/>
+          <p:nvPr/>
+        </p:nvSpPr>
+        <p:spPr>
+          <a:xfrm>
+            <a:off x="5212080" y="2880360"/>
+            <a:ext cx="1874520" cy="411480"/>
+          </a:xfrm>
+          <a:prstGeom prst="rect">
+            <a:avLst/>
+          </a:prstGeom>
+          <a:noFill/>
+          <a:ln/>
+        </p:spPr>
+        <p:txBody>
+          <a:bodyPr wrap="square" lIns="0" tIns="0" rIns="0" bIns="0" rtlCol="0" anchor="ctr"/>
+          <a:lstStyle/>
+          <a:p>
+            <a:pPr algn="ctr" indent="0" marL="0">
+              <a:buNone/>
+            </a:pPr>
+            <a:r>
+              <a:rPr lang="en-US" sz="1500" b="1" dirty="0">
                 <a:solidFill>
                   <a:srgbClr val="F8FAFC"/>
                 </a:solidFill>
@@ -6228,38 +6248,405 @@
                 <a:ea typeface="Calibri" pitchFamily="34" charset="-122"/>
                 <a:cs typeface="Calibri" pitchFamily="34" charset="-120"/>
               </a:rPr>
-              <a:t>Boardman Stack</a:t>
-            </a:r>
-            <a:endParaRPr lang="en-US" sz="2000" dirty="0"/>
-          </a:p>
-        </p:txBody>
-      </p:sp>
-      <p:sp>
-        <p:nvSpPr>
-          <p:cNvPr id="17" name="Text 15"/>
-          <p:cNvSpPr/>
-          <p:nvPr/>
-        </p:nvSpPr>
-        <p:spPr>
-          <a:xfrm>
-            <a:off x="8686800" y="4617720"/>
-            <a:ext cx="2560320" cy="320040"/>
-          </a:xfrm>
-          <a:prstGeom prst="rect">
-            <a:avLst/>
-          </a:prstGeom>
-          <a:noFill/>
-          <a:ln/>
-        </p:spPr>
-        <p:txBody>
-          <a:bodyPr wrap="square" lIns="0" tIns="0" rIns="0" bIns="0" rtlCol="0" anchor="ctr"/>
-          <a:lstStyle/>
-          <a:p>
-            <a:pPr algn="r" indent="0" marL="0">
-              <a:buNone/>
-            </a:pPr>
-            <a:r>
-              <a:rPr lang="en-US" sz="1100" b="1" spc="100" kern="0" dirty="0">
+              <a:t>Private 1v1</a:t>
+            </a:r>
+            <a:endParaRPr lang="en-US" sz="1500" dirty="0"/>
+          </a:p>
+        </p:txBody>
+      </p:sp>
+      <p:sp>
+        <p:nvSpPr>
+          <p:cNvPr id="19" name="Text 17"/>
+          <p:cNvSpPr/>
+          <p:nvPr/>
+        </p:nvSpPr>
+        <p:spPr>
+          <a:xfrm>
+            <a:off x="5212080" y="3383280"/>
+            <a:ext cx="1874520" cy="1463040"/>
+          </a:xfrm>
+          <a:prstGeom prst="rect">
+            <a:avLst/>
+          </a:prstGeom>
+          <a:noFill/>
+          <a:ln/>
+        </p:spPr>
+        <p:txBody>
+          <a:bodyPr wrap="square" lIns="0" tIns="0" rIns="0" bIns="0" rtlCol="0" anchor="ctr"/>
+          <a:lstStyle/>
+          <a:p>
+            <a:pPr algn="ctr" indent="0" marL="0">
+              <a:buNone/>
+            </a:pPr>
+            <a:r>
+              <a:rPr lang="en-US" sz="1200" dirty="0">
+                <a:solidFill>
+                  <a:srgbClr val="94A3B8"/>
+                </a:solidFill>
+                <a:latin typeface="Calibri" pitchFamily="34" charset="0"/>
+                <a:ea typeface="Calibri" pitchFamily="34" charset="-122"/>
+                <a:cs typeface="Calibri" pitchFamily="34" charset="-120"/>
+              </a:rPr>
+              <a:t>Challenge a friend by Telegram identity. Accept → both dual-lock.</a:t>
+            </a:r>
+            <a:endParaRPr lang="en-US" sz="1200" dirty="0"/>
+          </a:p>
+        </p:txBody>
+      </p:sp>
+      <p:sp>
+        <p:nvSpPr>
+          <p:cNvPr id="20" name="Shape 18"/>
+          <p:cNvSpPr/>
+          <p:nvPr/>
+        </p:nvSpPr>
+        <p:spPr>
+          <a:xfrm>
+            <a:off x="7360920" y="1920240"/>
+            <a:ext cx="2148840" cy="3200400"/>
+          </a:xfrm>
+          <a:prstGeom prst="rect">
+            <a:avLst/>
+          </a:prstGeom>
+          <a:solidFill>
+            <a:srgbClr val="151C2C"/>
+          </a:solidFill>
+          <a:ln/>
+          <a:effectLst>
+            <a:outerShdw sx="100000" sy="100000" kx="0" ky="0" algn="bl" rotWithShape="0" blurRad="228600" dist="50800" dir="8100000">
+              <a:srgbClr val="000000">
+                <a:alpha val="35000"/>
+              </a:srgbClr>
+            </a:outerShdw>
+          </a:effectLst>
+        </p:spPr>
+      </p:sp>
+      <p:sp>
+        <p:nvSpPr>
+          <p:cNvPr id="21" name="Shape 19"/>
+          <p:cNvSpPr/>
+          <p:nvPr/>
+        </p:nvSpPr>
+        <p:spPr>
+          <a:xfrm>
+            <a:off x="8138160" y="2148840"/>
+            <a:ext cx="502920" cy="502920"/>
+          </a:xfrm>
+          <a:prstGeom prst="ellipse">
+            <a:avLst/>
+          </a:prstGeom>
+          <a:solidFill>
+            <a:srgbClr val="22D3EE"/>
+          </a:solidFill>
+          <a:ln/>
+        </p:spPr>
+      </p:sp>
+      <p:sp>
+        <p:nvSpPr>
+          <p:cNvPr id="22" name="Text 20"/>
+          <p:cNvSpPr/>
+          <p:nvPr/>
+        </p:nvSpPr>
+        <p:spPr>
+          <a:xfrm>
+            <a:off x="8138160" y="2212848"/>
+            <a:ext cx="502920" cy="411480"/>
+          </a:xfrm>
+          <a:prstGeom prst="rect">
+            <a:avLst/>
+          </a:prstGeom>
+          <a:noFill/>
+          <a:ln/>
+        </p:spPr>
+        <p:txBody>
+          <a:bodyPr wrap="square" lIns="0" tIns="0" rIns="0" bIns="0" rtlCol="0" anchor="ctr"/>
+          <a:lstStyle/>
+          <a:p>
+            <a:pPr algn="ctr" indent="0" marL="0">
+              <a:buNone/>
+            </a:pPr>
+            <a:r>
+              <a:rPr lang="en-US" sz="1600" b="1" dirty="0">
+                <a:solidFill>
+                  <a:srgbClr val="0B1220"/>
+                </a:solidFill>
+                <a:latin typeface="Calibri" pitchFamily="34" charset="0"/>
+                <a:ea typeface="Calibri" pitchFamily="34" charset="-122"/>
+                <a:cs typeface="Calibri" pitchFamily="34" charset="-120"/>
+              </a:rPr>
+              <a:t>4</a:t>
+            </a:r>
+            <a:endParaRPr lang="en-US" sz="1600" dirty="0"/>
+          </a:p>
+        </p:txBody>
+      </p:sp>
+      <p:sp>
+        <p:nvSpPr>
+          <p:cNvPr id="23" name="Text 21"/>
+          <p:cNvSpPr/>
+          <p:nvPr/>
+        </p:nvSpPr>
+        <p:spPr>
+          <a:xfrm>
+            <a:off x="7498080" y="2880360"/>
+            <a:ext cx="1874520" cy="411480"/>
+          </a:xfrm>
+          <a:prstGeom prst="rect">
+            <a:avLst/>
+          </a:prstGeom>
+          <a:noFill/>
+          <a:ln/>
+        </p:spPr>
+        <p:txBody>
+          <a:bodyPr wrap="square" lIns="0" tIns="0" rIns="0" bIns="0" rtlCol="0" anchor="ctr"/>
+          <a:lstStyle/>
+          <a:p>
+            <a:pPr algn="ctr" indent="0" marL="0">
+              <a:buNone/>
+            </a:pPr>
+            <a:r>
+              <a:rPr lang="en-US" sz="1500" b="1" dirty="0">
+                <a:solidFill>
+                  <a:srgbClr val="F8FAFC"/>
+                </a:solidFill>
+                <a:latin typeface="Calibri" pitchFamily="34" charset="0"/>
+                <a:ea typeface="Calibri" pitchFamily="34" charset="-122"/>
+                <a:cs typeface="Calibri" pitchFamily="34" charset="-120"/>
+              </a:rPr>
+              <a:t>Play</a:t>
+            </a:r>
+            <a:endParaRPr lang="en-US" sz="1500" dirty="0"/>
+          </a:p>
+        </p:txBody>
+      </p:sp>
+      <p:sp>
+        <p:nvSpPr>
+          <p:cNvPr id="24" name="Text 22"/>
+          <p:cNvSpPr/>
+          <p:nvPr/>
+        </p:nvSpPr>
+        <p:spPr>
+          <a:xfrm>
+            <a:off x="7498080" y="3383280"/>
+            <a:ext cx="1874520" cy="1463040"/>
+          </a:xfrm>
+          <a:prstGeom prst="rect">
+            <a:avLst/>
+          </a:prstGeom>
+          <a:noFill/>
+          <a:ln/>
+        </p:spPr>
+        <p:txBody>
+          <a:bodyPr wrap="square" lIns="0" tIns="0" rIns="0" bIns="0" rtlCol="0" anchor="ctr"/>
+          <a:lstStyle/>
+          <a:p>
+            <a:pPr algn="ctr" indent="0" marL="0">
+              <a:buNone/>
+            </a:pPr>
+            <a:r>
+              <a:rPr lang="en-US" sz="1200" dirty="0">
+                <a:solidFill>
+                  <a:srgbClr val="94A3B8"/>
+                </a:solidFill>
+                <a:latin typeface="Calibri" pitchFamily="34" charset="0"/>
+                <a:ea typeface="Calibri" pitchFamily="34" charset="-122"/>
+                <a:cs typeface="Calibri" pitchFamily="34" charset="-120"/>
+              </a:rPr>
+              <a:t>Console / real skill game offline. Submit full-time photo proof.</a:t>
+            </a:r>
+            <a:endParaRPr lang="en-US" sz="1200" dirty="0"/>
+          </a:p>
+        </p:txBody>
+      </p:sp>
+      <p:sp>
+        <p:nvSpPr>
+          <p:cNvPr id="25" name="Shape 23"/>
+          <p:cNvSpPr/>
+          <p:nvPr/>
+        </p:nvSpPr>
+        <p:spPr>
+          <a:xfrm>
+            <a:off x="9646920" y="1920240"/>
+            <a:ext cx="2148840" cy="3200400"/>
+          </a:xfrm>
+          <a:prstGeom prst="rect">
+            <a:avLst/>
+          </a:prstGeom>
+          <a:solidFill>
+            <a:srgbClr val="151C2C"/>
+          </a:solidFill>
+          <a:ln/>
+          <a:effectLst>
+            <a:outerShdw sx="100000" sy="100000" kx="0" ky="0" algn="bl" rotWithShape="0" blurRad="228600" dist="50800" dir="8100000">
+              <a:srgbClr val="000000">
+                <a:alpha val="35000"/>
+              </a:srgbClr>
+            </a:outerShdw>
+          </a:effectLst>
+        </p:spPr>
+      </p:sp>
+      <p:sp>
+        <p:nvSpPr>
+          <p:cNvPr id="26" name="Shape 24"/>
+          <p:cNvSpPr/>
+          <p:nvPr/>
+        </p:nvSpPr>
+        <p:spPr>
+          <a:xfrm>
+            <a:off x="10424160" y="2148840"/>
+            <a:ext cx="502920" cy="502920"/>
+          </a:xfrm>
+          <a:prstGeom prst="ellipse">
+            <a:avLst/>
+          </a:prstGeom>
+          <a:solidFill>
+            <a:srgbClr val="22D3EE"/>
+          </a:solidFill>
+          <a:ln/>
+        </p:spPr>
+      </p:sp>
+      <p:sp>
+        <p:nvSpPr>
+          <p:cNvPr id="27" name="Text 25"/>
+          <p:cNvSpPr/>
+          <p:nvPr/>
+        </p:nvSpPr>
+        <p:spPr>
+          <a:xfrm>
+            <a:off x="10424160" y="2212848"/>
+            <a:ext cx="502920" cy="411480"/>
+          </a:xfrm>
+          <a:prstGeom prst="rect">
+            <a:avLst/>
+          </a:prstGeom>
+          <a:noFill/>
+          <a:ln/>
+        </p:spPr>
+        <p:txBody>
+          <a:bodyPr wrap="square" lIns="0" tIns="0" rIns="0" bIns="0" rtlCol="0" anchor="ctr"/>
+          <a:lstStyle/>
+          <a:p>
+            <a:pPr algn="ctr" indent="0" marL="0">
+              <a:buNone/>
+            </a:pPr>
+            <a:r>
+              <a:rPr lang="en-US" sz="1600" b="1" dirty="0">
+                <a:solidFill>
+                  <a:srgbClr val="0B1220"/>
+                </a:solidFill>
+                <a:latin typeface="Calibri" pitchFamily="34" charset="0"/>
+                <a:ea typeface="Calibri" pitchFamily="34" charset="-122"/>
+                <a:cs typeface="Calibri" pitchFamily="34" charset="-120"/>
+              </a:rPr>
+              <a:t>5</a:t>
+            </a:r>
+            <a:endParaRPr lang="en-US" sz="1600" dirty="0"/>
+          </a:p>
+        </p:txBody>
+      </p:sp>
+      <p:sp>
+        <p:nvSpPr>
+          <p:cNvPr id="28" name="Text 26"/>
+          <p:cNvSpPr/>
+          <p:nvPr/>
+        </p:nvSpPr>
+        <p:spPr>
+          <a:xfrm>
+            <a:off x="9784080" y="2880360"/>
+            <a:ext cx="1874520" cy="411480"/>
+          </a:xfrm>
+          <a:prstGeom prst="rect">
+            <a:avLst/>
+          </a:prstGeom>
+          <a:noFill/>
+          <a:ln/>
+        </p:spPr>
+        <p:txBody>
+          <a:bodyPr wrap="square" lIns="0" tIns="0" rIns="0" bIns="0" rtlCol="0" anchor="ctr"/>
+          <a:lstStyle/>
+          <a:p>
+            <a:pPr algn="ctr" indent="0" marL="0">
+              <a:buNone/>
+            </a:pPr>
+            <a:r>
+              <a:rPr lang="en-US" sz="1500" b="1" dirty="0">
+                <a:solidFill>
+                  <a:srgbClr val="F8FAFC"/>
+                </a:solidFill>
+                <a:latin typeface="Calibri" pitchFamily="34" charset="0"/>
+                <a:ea typeface="Calibri" pitchFamily="34" charset="-122"/>
+                <a:cs typeface="Calibri" pitchFamily="34" charset="-120"/>
+              </a:rPr>
+              <a:t>Settle</a:t>
+            </a:r>
+            <a:endParaRPr lang="en-US" sz="1500" dirty="0"/>
+          </a:p>
+        </p:txBody>
+      </p:sp>
+      <p:sp>
+        <p:nvSpPr>
+          <p:cNvPr id="29" name="Text 27"/>
+          <p:cNvSpPr/>
+          <p:nvPr/>
+        </p:nvSpPr>
+        <p:spPr>
+          <a:xfrm>
+            <a:off x="9784080" y="3383280"/>
+            <a:ext cx="1874520" cy="1463040"/>
+          </a:xfrm>
+          <a:prstGeom prst="rect">
+            <a:avLst/>
+          </a:prstGeom>
+          <a:noFill/>
+          <a:ln/>
+        </p:spPr>
+        <p:txBody>
+          <a:bodyPr wrap="square" lIns="0" tIns="0" rIns="0" bIns="0" rtlCol="0" anchor="ctr"/>
+          <a:lstStyle/>
+          <a:p>
+            <a:pPr algn="ctr" indent="0" marL="0">
+              <a:buNone/>
+            </a:pPr>
+            <a:r>
+              <a:rPr lang="en-US" sz="1200" dirty="0">
+                <a:solidFill>
+                  <a:srgbClr val="94A3B8"/>
+                </a:solidFill>
+                <a:latin typeface="Calibri" pitchFamily="34" charset="0"/>
+                <a:ea typeface="Calibri" pitchFamily="34" charset="-122"/>
+                <a:cs typeface="Calibri" pitchFamily="34" charset="-120"/>
+              </a:rPr>
+              <a:t>AI-assisted outcome → BoardmanEscrow pays winner in USDC.</a:t>
+            </a:r>
+            <a:endParaRPr lang="en-US" sz="1200" dirty="0"/>
+          </a:p>
+        </p:txBody>
+      </p:sp>
+      <p:sp>
+        <p:nvSpPr>
+          <p:cNvPr id="30" name="Text 28"/>
+          <p:cNvSpPr/>
+          <p:nvPr/>
+        </p:nvSpPr>
+        <p:spPr>
+          <a:xfrm>
+            <a:off x="640080" y="5394960"/>
+            <a:ext cx="10972800" cy="320040"/>
+          </a:xfrm>
+          <a:prstGeom prst="rect">
+            <a:avLst/>
+          </a:prstGeom>
+          <a:noFill/>
+          <a:ln/>
+        </p:spPr>
+        <p:txBody>
+          <a:bodyPr wrap="square" lIns="0" tIns="0" rIns="0" bIns="0" rtlCol="0" anchor="ctr"/>
+          <a:lstStyle/>
+          <a:p>
+            <a:pPr indent="0" marL="0">
+              <a:buNone/>
+            </a:pPr>
+            <a:r>
+              <a:rPr lang="en-US" sz="1300" dirty="0">
                 <a:solidFill>
                   <a:srgbClr val="A78BFA"/>
                 </a:solidFill>
@@ -6267,54 +6654,15 @@
                 <a:ea typeface="Calibri" pitchFamily="34" charset="-122"/>
                 <a:cs typeface="Calibri" pitchFamily="34" charset="-120"/>
               </a:rPr>
-              <a:t>PLATFORM</a:t>
-            </a:r>
-            <a:endParaRPr lang="en-US" sz="1100" dirty="0"/>
-          </a:p>
-        </p:txBody>
-      </p:sp>
-      <p:sp>
-        <p:nvSpPr>
-          <p:cNvPr id="18" name="Text 16"/>
-          <p:cNvSpPr/>
-          <p:nvPr/>
-        </p:nvSpPr>
-        <p:spPr>
-          <a:xfrm>
-            <a:off x="2011680" y="5029200"/>
-            <a:ext cx="9144000" cy="411480"/>
-          </a:xfrm>
-          <a:prstGeom prst="rect">
-            <a:avLst/>
-          </a:prstGeom>
-          <a:noFill/>
-          <a:ln/>
-        </p:spPr>
-        <p:txBody>
-          <a:bodyPr wrap="square" lIns="0" tIns="0" rIns="0" bIns="0" rtlCol="0" anchor="ctr"/>
-          <a:lstStyle/>
-          <a:p>
-            <a:pPr indent="0" marL="0">
-              <a:buNone/>
-            </a:pPr>
-            <a:r>
-              <a:rPr lang="en-US" sz="1400" dirty="0">
-                <a:solidFill>
-                  <a:srgbClr val="94A3B8"/>
-                </a:solidFill>
-                <a:latin typeface="Calibri" pitchFamily="34" charset="0"/>
-                <a:ea typeface="Calibri" pitchFamily="34" charset="-122"/>
-                <a:cs typeface="Calibri" pitchFamily="34" charset="-120"/>
-              </a:rPr>
-              <a:t>Builder APIs: register agents, plug games, open books, settle skill + spectator rails.</a:t>
-            </a:r>
-            <a:endParaRPr lang="en-US" sz="1400" dirty="0"/>
-          </a:p>
-        </p:txBody>
-      </p:sp>
-      <p:sp>
-        <p:nvSpPr>
-          <p:cNvPr id="19" name="Text 17"/>
+              <a:t>Bot: t.me/myboardmanOfficialBot   ·   Community / public challenges live in Telegram group</a:t>
+            </a:r>
+            <a:endParaRPr lang="en-US" sz="1300" dirty="0"/>
+          </a:p>
+        </p:txBody>
+      </p:sp>
+      <p:sp>
+        <p:nvSpPr>
+          <p:cNvPr id="31" name="Text 29"/>
           <p:cNvSpPr/>
           <p:nvPr/>
         </p:nvSpPr>
@@ -6353,14 +6701,14 @@
       </p:sp>
       <p:sp>
         <p:nvSpPr>
-          <p:cNvPr id="20" name="Text 18"/>
-          <p:cNvSpPr/>
-          <p:nvPr/>
-        </p:nvSpPr>
-        <p:spPr>
-          <a:xfrm>
-            <a:off x="4754880" y="6492240"/>
-            <a:ext cx="2743200" cy="228600"/>
+          <p:cNvPr id="32" name="Text 30"/>
+          <p:cNvSpPr/>
+          <p:nvPr/>
+        </p:nvSpPr>
+        <p:spPr>
+          <a:xfrm>
+            <a:off x="4114800" y="6492240"/>
+            <a:ext cx="4114800" cy="228600"/>
           </a:xfrm>
           <a:prstGeom prst="rect">
             <a:avLst/>
@@ -6384,7 +6732,7 @@
                 <a:ea typeface="Calibri" pitchFamily="34" charset="-122"/>
                 <a:cs typeface="Calibri" pitchFamily="34" charset="-120"/>
               </a:rPr>
-              <a:t>CONFIDENTIAL</a:t>
+              <a:t>sideQuest  ·  Encode Arc</a:t>
             </a:r>
             <a:endParaRPr lang="en-US" sz="1000" dirty="0"/>
           </a:p>
@@ -6392,7 +6740,7 @@
       </p:sp>
       <p:sp>
         <p:nvSpPr>
-          <p:cNvPr id="21" name="Text 19"/>
+          <p:cNvPr id="33" name="Text 31"/>
           <p:cNvSpPr/>
           <p:nvPr/>
         </p:nvSpPr>
@@ -6494,7 +6842,7 @@
                 <a:ea typeface="Calibri" pitchFamily="34" charset="-122"/>
                 <a:cs typeface="Calibri" pitchFamily="34" charset="-120"/>
               </a:rPr>
-              <a:t>ARCHITECTURE</a:t>
+              <a:t>AGENT LAYER</a:t>
             </a:r>
             <a:endParaRPr lang="en-US" sz="1100" dirty="0"/>
           </a:p>
@@ -6525,7 +6873,7 @@
               <a:buNone/>
             </a:pPr>
             <a:r>
-              <a:rPr lang="en-US" sz="3200" b="1" dirty="0">
+              <a:rPr lang="en-US" sz="3000" b="1" dirty="0">
                 <a:solidFill>
                   <a:srgbClr val="F8FAFC"/>
                 </a:solidFill>
@@ -6533,61 +6881,22 @@
                 <a:ea typeface="Calibri" pitchFamily="34" charset="-122"/>
                 <a:cs typeface="Calibri" pitchFamily="34" charset="-120"/>
               </a:rPr>
-              <a:t>Two money rails. Never mixed.</a:t>
-            </a:r>
-            <a:endParaRPr lang="en-US" sz="3200" dirty="0"/>
-          </a:p>
-        </p:txBody>
-      </p:sp>
-      <p:sp>
-        <p:nvSpPr>
-          <p:cNvPr id="4" name="Text 2"/>
-          <p:cNvSpPr/>
-          <p:nvPr/>
-        </p:nvSpPr>
-        <p:spPr>
-          <a:xfrm>
-            <a:off x="640080" y="1280160"/>
-            <a:ext cx="10972800" cy="502920"/>
-          </a:xfrm>
-          <a:prstGeom prst="rect">
-            <a:avLst/>
-          </a:prstGeom>
-          <a:noFill/>
-          <a:ln/>
-        </p:spPr>
-        <p:txBody>
-          <a:bodyPr wrap="square" lIns="0" tIns="0" rIns="0" bIns="0" rtlCol="0" anchor="ctr"/>
-          <a:lstStyle/>
-          <a:p>
-            <a:pPr indent="0" marL="0">
-              <a:buNone/>
-            </a:pPr>
-            <a:r>
-              <a:rPr lang="en-US" sz="1400" dirty="0">
-                <a:solidFill>
-                  <a:srgbClr val="94A3B8"/>
-                </a:solidFill>
-                <a:latin typeface="Calibri" pitchFamily="34" charset="0"/>
-                <a:ea typeface="Calibri" pitchFamily="34" charset="-122"/>
-                <a:cs typeface="Calibri" pitchFamily="34" charset="-120"/>
-              </a:rPr>
-              <a:t>Every match has a canonical skill outcome. Spectator markets are a side book keyed to the same match—not a second conflicting pot.</a:t>
-            </a:r>
-            <a:endParaRPr lang="en-US" sz="1400" dirty="0"/>
-          </a:p>
-        </p:txBody>
-      </p:sp>
-      <p:sp>
-        <p:nvSpPr>
-          <p:cNvPr id="5" name="Shape 3"/>
-          <p:cNvSpPr/>
-          <p:nvPr/>
-        </p:nvSpPr>
-        <p:spPr>
-          <a:xfrm>
-            <a:off x="502920" y="2057400"/>
-            <a:ext cx="2148840" cy="2651760"/>
+              <a:t>Agents that hold capital—and risk it.</a:t>
+            </a:r>
+            <a:endParaRPr lang="en-US" sz="3000" dirty="0"/>
+          </a:p>
+        </p:txBody>
+      </p:sp>
+      <p:sp>
+        <p:nvSpPr>
+          <p:cNvPr id="4" name="Shape 2"/>
+          <p:cNvSpPr/>
+          <p:nvPr/>
+        </p:nvSpPr>
+        <p:spPr>
+          <a:xfrm>
+            <a:off x="640080" y="1417320"/>
+            <a:ext cx="5486400" cy="2011680"/>
           </a:xfrm>
           <a:prstGeom prst="rect">
             <a:avLst/>
@@ -6607,16 +6916,16 @@
       </p:sp>
       <p:sp>
         <p:nvSpPr>
-          <p:cNvPr id="6" name="Shape 4"/>
-          <p:cNvSpPr/>
-          <p:nvPr/>
-        </p:nvSpPr>
-        <p:spPr>
-          <a:xfrm>
-            <a:off x="1280160" y="2286000"/>
-            <a:ext cx="502920" cy="502920"/>
-          </a:xfrm>
-          <a:prstGeom prst="ellipse">
+          <p:cNvPr id="5" name="Shape 3"/>
+          <p:cNvSpPr/>
+          <p:nvPr/>
+        </p:nvSpPr>
+        <p:spPr>
+          <a:xfrm>
+            <a:off x="640080" y="1417320"/>
+            <a:ext cx="91440" cy="2011680"/>
+          </a:xfrm>
+          <a:prstGeom prst="rect">
             <a:avLst/>
           </a:prstGeom>
           <a:solidFill>
@@ -6627,108 +6936,69 @@
       </p:sp>
       <p:sp>
         <p:nvSpPr>
+          <p:cNvPr id="6" name="Text 4"/>
+          <p:cNvSpPr/>
+          <p:nvPr/>
+        </p:nvSpPr>
+        <p:spPr>
+          <a:xfrm>
+            <a:off x="1005840" y="1737360"/>
+            <a:ext cx="4846320" cy="411480"/>
+          </a:xfrm>
+          <a:prstGeom prst="rect">
+            <a:avLst/>
+          </a:prstGeom>
+          <a:noFill/>
+          <a:ln/>
+        </p:spPr>
+        <p:txBody>
+          <a:bodyPr wrap="square" lIns="0" tIns="0" rIns="0" bIns="0" rtlCol="0" anchor="ctr"/>
+          <a:lstStyle/>
+          <a:p>
+            <a:pPr indent="0" marL="0">
+              <a:buNone/>
+            </a:pPr>
+            <a:r>
+              <a:rPr lang="en-US" sz="1800" b="1" dirty="0">
+                <a:solidFill>
+                  <a:srgbClr val="F8FAFC"/>
+                </a:solidFill>
+                <a:latin typeface="Calibri" pitchFamily="34" charset="0"/>
+                <a:ea typeface="Calibri" pitchFamily="34" charset="-122"/>
+                <a:cs typeface="Calibri" pitchFamily="34" charset="-120"/>
+              </a:rPr>
+              <a:t>Bankroll policy</a:t>
+            </a:r>
+            <a:endParaRPr lang="en-US" sz="1800" dirty="0"/>
+          </a:p>
+        </p:txBody>
+      </p:sp>
+      <p:sp>
+        <p:nvSpPr>
           <p:cNvPr id="7" name="Text 5"/>
           <p:cNvSpPr/>
           <p:nvPr/>
         </p:nvSpPr>
         <p:spPr>
           <a:xfrm>
-            <a:off x="1280160" y="2359152"/>
-            <a:ext cx="502920" cy="411480"/>
-          </a:xfrm>
-          <a:prstGeom prst="rect">
-            <a:avLst/>
-          </a:prstGeom>
-          <a:noFill/>
-          <a:ln/>
-        </p:spPr>
-        <p:txBody>
-          <a:bodyPr wrap="square" lIns="0" tIns="0" rIns="0" bIns="0" rtlCol="0" anchor="ctr"/>
-          <a:lstStyle/>
-          <a:p>
-            <a:pPr algn="ctr" indent="0" marL="0">
-              <a:buNone/>
-            </a:pPr>
-            <a:r>
-              <a:rPr lang="en-US" sz="1600" b="1" dirty="0">
-                <a:solidFill>
-                  <a:srgbClr val="FFFFFF"/>
-                </a:solidFill>
-                <a:latin typeface="Calibri" pitchFamily="34" charset="0"/>
-                <a:ea typeface="Calibri" pitchFamily="34" charset="-122"/>
-                <a:cs typeface="Calibri" pitchFamily="34" charset="-120"/>
-              </a:rPr>
-              <a:t>1</a:t>
-            </a:r>
-            <a:endParaRPr lang="en-US" sz="1600" dirty="0"/>
-          </a:p>
-        </p:txBody>
-      </p:sp>
-      <p:sp>
-        <p:nvSpPr>
-          <p:cNvPr id="8" name="Text 6"/>
-          <p:cNvSpPr/>
-          <p:nvPr/>
-        </p:nvSpPr>
-        <p:spPr>
-          <a:xfrm>
-            <a:off x="640080" y="2971800"/>
-            <a:ext cx="1874520" cy="365760"/>
-          </a:xfrm>
-          <a:prstGeom prst="rect">
-            <a:avLst/>
-          </a:prstGeom>
-          <a:noFill/>
-          <a:ln/>
-        </p:spPr>
-        <p:txBody>
-          <a:bodyPr wrap="square" lIns="0" tIns="0" rIns="0" bIns="0" rtlCol="0" anchor="ctr"/>
-          <a:lstStyle/>
-          <a:p>
-            <a:pPr algn="ctr" indent="0" marL="0">
-              <a:buNone/>
-            </a:pPr>
-            <a:r>
-              <a:rPr lang="en-US" sz="1600" b="1" dirty="0">
-                <a:solidFill>
-                  <a:srgbClr val="F8FAFC"/>
-                </a:solidFill>
-                <a:latin typeface="Calibri" pitchFamily="34" charset="0"/>
-                <a:ea typeface="Calibri" pitchFamily="34" charset="-122"/>
-                <a:cs typeface="Calibri" pitchFamily="34" charset="-120"/>
-              </a:rPr>
-              <a:t>Fund</a:t>
-            </a:r>
-            <a:endParaRPr lang="en-US" sz="1600" dirty="0"/>
-          </a:p>
-        </p:txBody>
-      </p:sp>
-      <p:sp>
-        <p:nvSpPr>
-          <p:cNvPr id="9" name="Text 7"/>
-          <p:cNvSpPr/>
-          <p:nvPr/>
-        </p:nvSpPr>
-        <p:spPr>
-          <a:xfrm>
-            <a:off x="640080" y="3429000"/>
-            <a:ext cx="1874520" cy="1051560"/>
-          </a:xfrm>
-          <a:prstGeom prst="rect">
-            <a:avLst/>
-          </a:prstGeom>
-          <a:noFill/>
-          <a:ln/>
-        </p:spPr>
-        <p:txBody>
-          <a:bodyPr wrap="square" lIns="0" tIns="0" rIns="0" bIns="0" rtlCol="0" anchor="ctr"/>
-          <a:lstStyle/>
-          <a:p>
-            <a:pPr algn="ctr" indent="0" marL="0">
-              <a:buNone/>
-            </a:pPr>
-            <a:r>
-              <a:rPr lang="en-US" sz="1200" dirty="0">
+            <a:off x="1005840" y="2331720"/>
+            <a:ext cx="4846320" cy="777240"/>
+          </a:xfrm>
+          <a:prstGeom prst="rect">
+            <a:avLst/>
+          </a:prstGeom>
+          <a:noFill/>
+          <a:ln/>
+        </p:spPr>
+        <p:txBody>
+          <a:bodyPr wrap="square" lIns="0" tIns="0" rIns="0" bIns="0" rtlCol="0" anchor="ctr"/>
+          <a:lstStyle/>
+          <a:p>
+            <a:pPr indent="0" marL="0">
+              <a:buNone/>
+            </a:pPr>
+            <a:r>
+              <a:rPr lang="en-US" sz="1400" dirty="0">
                 <a:solidFill>
                   <a:srgbClr val="94A3B8"/>
                 </a:solidFill>
@@ -6736,76 +7006,22 @@
                 <a:ea typeface="Calibri" pitchFamily="34" charset="-122"/>
                 <a:cs typeface="Calibri" pitchFamily="34" charset="-120"/>
               </a:rPr>
-              <a:t>Owner or LP</a:t>
-            </a:r>
-            <a:endParaRPr lang="en-US" sz="1200" dirty="0"/>
-          </a:p>
-          <a:p>
-            <a:pPr algn="ctr" indent="0" marL="0">
-              <a:buNone/>
-            </a:pPr>
-            <a:r>
-              <a:rPr lang="en-US" sz="1200" dirty="0">
-                <a:solidFill>
-                  <a:srgbClr val="94A3B8"/>
-                </a:solidFill>
-                <a:latin typeface="Calibri" pitchFamily="34" charset="0"/>
-                <a:ea typeface="Calibri" pitchFamily="34" charset="-122"/>
-                <a:cs typeface="Calibri" pitchFamily="34" charset="-120"/>
-              </a:rPr>
-              <a:t>capitalizes</a:t>
-            </a:r>
-            <a:endParaRPr lang="en-US" sz="1200" dirty="0"/>
-          </a:p>
-          <a:p>
-            <a:pPr algn="ctr" indent="0" marL="0">
-              <a:buNone/>
-            </a:pPr>
-            <a:r>
-              <a:rPr lang="en-US" sz="1200" dirty="0">
-                <a:solidFill>
-                  <a:srgbClr val="94A3B8"/>
-                </a:solidFill>
-                <a:latin typeface="Calibri" pitchFamily="34" charset="0"/>
-                <a:ea typeface="Calibri" pitchFamily="34" charset="-122"/>
-                <a:cs typeface="Calibri" pitchFamily="34" charset="-120"/>
-              </a:rPr>
-              <a:t>agent bankroll</a:t>
-            </a:r>
-            <a:endParaRPr lang="en-US" sz="1200" dirty="0"/>
-          </a:p>
-        </p:txBody>
-      </p:sp>
-      <p:sp>
-        <p:nvSpPr>
-          <p:cNvPr id="10" name="Shape 8"/>
-          <p:cNvSpPr/>
-          <p:nvPr/>
-        </p:nvSpPr>
-        <p:spPr>
-          <a:xfrm>
-            <a:off x="2514600" y="3154680"/>
-            <a:ext cx="256032" cy="201168"/>
-          </a:xfrm>
-          <a:prstGeom prst="rightArrow">
-            <a:avLst/>
-          </a:prstGeom>
-          <a:solidFill>
-            <a:srgbClr val="64748B"/>
-          </a:solidFill>
-          <a:ln/>
-        </p:spPr>
-      </p:sp>
-      <p:sp>
-        <p:nvSpPr>
-          <p:cNvPr id="11" name="Shape 9"/>
-          <p:cNvSpPr/>
-          <p:nvPr/>
-        </p:nvSpPr>
-        <p:spPr>
-          <a:xfrm>
-            <a:off x="2834640" y="2057400"/>
-            <a:ext cx="2148840" cy="2651760"/>
+              <a:t>Max stake, reserve, seed bps. Whale vs lean agent → equal stake from free capital.</a:t>
+            </a:r>
+            <a:endParaRPr lang="en-US" sz="1400" dirty="0"/>
+          </a:p>
+        </p:txBody>
+      </p:sp>
+      <p:sp>
+        <p:nvSpPr>
+          <p:cNvPr id="8" name="Shape 6"/>
+          <p:cNvSpPr/>
+          <p:nvPr/>
+        </p:nvSpPr>
+        <p:spPr>
+          <a:xfrm>
+            <a:off x="6355080" y="1417320"/>
+            <a:ext cx="5486400" cy="2011680"/>
           </a:xfrm>
           <a:prstGeom prst="rect">
             <a:avLst/>
@@ -6825,205 +7041,112 @@
       </p:sp>
       <p:sp>
         <p:nvSpPr>
+          <p:cNvPr id="9" name="Shape 7"/>
+          <p:cNvSpPr/>
+          <p:nvPr/>
+        </p:nvSpPr>
+        <p:spPr>
+          <a:xfrm>
+            <a:off x="6355080" y="1417320"/>
+            <a:ext cx="91440" cy="2011680"/>
+          </a:xfrm>
+          <a:prstGeom prst="rect">
+            <a:avLst/>
+          </a:prstGeom>
+          <a:solidFill>
+            <a:srgbClr val="22D3EE"/>
+          </a:solidFill>
+          <a:ln/>
+        </p:spPr>
+      </p:sp>
+      <p:sp>
+        <p:nvSpPr>
+          <p:cNvPr id="10" name="Text 8"/>
+          <p:cNvSpPr/>
+          <p:nvPr/>
+        </p:nvSpPr>
+        <p:spPr>
+          <a:xfrm>
+            <a:off x="6720840" y="1737360"/>
+            <a:ext cx="4846320" cy="411480"/>
+          </a:xfrm>
+          <a:prstGeom prst="rect">
+            <a:avLst/>
+          </a:prstGeom>
+          <a:noFill/>
+          <a:ln/>
+        </p:spPr>
+        <p:txBody>
+          <a:bodyPr wrap="square" lIns="0" tIns="0" rIns="0" bIns="0" rtlCol="0" anchor="ctr"/>
+          <a:lstStyle/>
+          <a:p>
+            <a:pPr indent="0" marL="0">
+              <a:buNone/>
+            </a:pPr>
+            <a:r>
+              <a:rPr lang="en-US" sz="1800" b="1" dirty="0">
+                <a:solidFill>
+                  <a:srgbClr val="F8FAFC"/>
+                </a:solidFill>
+                <a:latin typeface="Calibri" pitchFamily="34" charset="0"/>
+                <a:ea typeface="Calibri" pitchFamily="34" charset="-122"/>
+                <a:cs typeface="Calibri" pitchFamily="34" charset="-120"/>
+              </a:rPr>
+              <a:t>Skill ≠ spectator</a:t>
+            </a:r>
+            <a:endParaRPr lang="en-US" sz="1800" dirty="0"/>
+          </a:p>
+        </p:txBody>
+      </p:sp>
+      <p:sp>
+        <p:nvSpPr>
+          <p:cNvPr id="11" name="Text 9"/>
+          <p:cNvSpPr/>
+          <p:nvPr/>
+        </p:nvSpPr>
+        <p:spPr>
+          <a:xfrm>
+            <a:off x="6720840" y="2331720"/>
+            <a:ext cx="4846320" cy="777240"/>
+          </a:xfrm>
+          <a:prstGeom prst="rect">
+            <a:avLst/>
+          </a:prstGeom>
+          <a:noFill/>
+          <a:ln/>
+        </p:spPr>
+        <p:txBody>
+          <a:bodyPr wrap="square" lIns="0" tIns="0" rIns="0" bIns="0" rtlCol="0" anchor="ctr"/>
+          <a:lstStyle/>
+          <a:p>
+            <a:pPr indent="0" marL="0">
+              <a:buNone/>
+            </a:pPr>
+            <a:r>
+              <a:rPr lang="en-US" sz="1400" dirty="0">
+                <a:solidFill>
+                  <a:srgbClr val="94A3B8"/>
+                </a:solidFill>
+                <a:latin typeface="Calibri" pitchFamily="34" charset="0"/>
+                <a:ea typeface="Calibri" pitchFamily="34" charset="-122"/>
+                <a:cs typeface="Calibri" pitchFamily="34" charset="-120"/>
+              </a:rPr>
+              <a:t>Dual-lock skill pot separate from fan book. One match_id, two ledgers.</a:t>
+            </a:r>
+            <a:endParaRPr lang="en-US" sz="1400" dirty="0"/>
+          </a:p>
+        </p:txBody>
+      </p:sp>
+      <p:sp>
+        <p:nvSpPr>
           <p:cNvPr id="12" name="Shape 10"/>
           <p:cNvSpPr/>
           <p:nvPr/>
         </p:nvSpPr>
         <p:spPr>
           <a:xfrm>
-            <a:off x="3611880" y="2286000"/>
-            <a:ext cx="502920" cy="502920"/>
-          </a:xfrm>
-          <a:prstGeom prst="ellipse">
-            <a:avLst/>
-          </a:prstGeom>
-          <a:solidFill>
-            <a:srgbClr val="7C3AED"/>
-          </a:solidFill>
-          <a:ln/>
-        </p:spPr>
-      </p:sp>
-      <p:sp>
-        <p:nvSpPr>
-          <p:cNvPr id="13" name="Text 11"/>
-          <p:cNvSpPr/>
-          <p:nvPr/>
-        </p:nvSpPr>
-        <p:spPr>
-          <a:xfrm>
-            <a:off x="3611880" y="2359152"/>
-            <a:ext cx="502920" cy="411480"/>
-          </a:xfrm>
-          <a:prstGeom prst="rect">
-            <a:avLst/>
-          </a:prstGeom>
-          <a:noFill/>
-          <a:ln/>
-        </p:spPr>
-        <p:txBody>
-          <a:bodyPr wrap="square" lIns="0" tIns="0" rIns="0" bIns="0" rtlCol="0" anchor="ctr"/>
-          <a:lstStyle/>
-          <a:p>
-            <a:pPr algn="ctr" indent="0" marL="0">
-              <a:buNone/>
-            </a:pPr>
-            <a:r>
-              <a:rPr lang="en-US" sz="1600" b="1" dirty="0">
-                <a:solidFill>
-                  <a:srgbClr val="FFFFFF"/>
-                </a:solidFill>
-                <a:latin typeface="Calibri" pitchFamily="34" charset="0"/>
-                <a:ea typeface="Calibri" pitchFamily="34" charset="-122"/>
-                <a:cs typeface="Calibri" pitchFamily="34" charset="-120"/>
-              </a:rPr>
-              <a:t>2</a:t>
-            </a:r>
-            <a:endParaRPr lang="en-US" sz="1600" dirty="0"/>
-          </a:p>
-        </p:txBody>
-      </p:sp>
-      <p:sp>
-        <p:nvSpPr>
-          <p:cNvPr id="14" name="Text 12"/>
-          <p:cNvSpPr/>
-          <p:nvPr/>
-        </p:nvSpPr>
-        <p:spPr>
-          <a:xfrm>
-            <a:off x="2971800" y="2971800"/>
-            <a:ext cx="1874520" cy="365760"/>
-          </a:xfrm>
-          <a:prstGeom prst="rect">
-            <a:avLst/>
-          </a:prstGeom>
-          <a:noFill/>
-          <a:ln/>
-        </p:spPr>
-        <p:txBody>
-          <a:bodyPr wrap="square" lIns="0" tIns="0" rIns="0" bIns="0" rtlCol="0" anchor="ctr"/>
-          <a:lstStyle/>
-          <a:p>
-            <a:pPr algn="ctr" indent="0" marL="0">
-              <a:buNone/>
-            </a:pPr>
-            <a:r>
-              <a:rPr lang="en-US" sz="1600" b="1" dirty="0">
-                <a:solidFill>
-                  <a:srgbClr val="F8FAFC"/>
-                </a:solidFill>
-                <a:latin typeface="Calibri" pitchFamily="34" charset="0"/>
-                <a:ea typeface="Calibri" pitchFamily="34" charset="-122"/>
-                <a:cs typeface="Calibri" pitchFamily="34" charset="-120"/>
-              </a:rPr>
-              <a:t>Negotiate</a:t>
-            </a:r>
-            <a:endParaRPr lang="en-US" sz="1600" dirty="0"/>
-          </a:p>
-        </p:txBody>
-      </p:sp>
-      <p:sp>
-        <p:nvSpPr>
-          <p:cNvPr id="15" name="Text 13"/>
-          <p:cNvSpPr/>
-          <p:nvPr/>
-        </p:nvSpPr>
-        <p:spPr>
-          <a:xfrm>
-            <a:off x="2971800" y="3429000"/>
-            <a:ext cx="1874520" cy="1051560"/>
-          </a:xfrm>
-          <a:prstGeom prst="rect">
-            <a:avLst/>
-          </a:prstGeom>
-          <a:noFill/>
-          <a:ln/>
-        </p:spPr>
-        <p:txBody>
-          <a:bodyPr wrap="square" lIns="0" tIns="0" rIns="0" bIns="0" rtlCol="0" anchor="ctr"/>
-          <a:lstStyle/>
-          <a:p>
-            <a:pPr algn="ctr" indent="0" marL="0">
-              <a:buNone/>
-            </a:pPr>
-            <a:r>
-              <a:rPr lang="en-US" sz="1200" dirty="0">
-                <a:solidFill>
-                  <a:srgbClr val="94A3B8"/>
-                </a:solidFill>
-                <a:latin typeface="Calibri" pitchFamily="34" charset="0"/>
-                <a:ea typeface="Calibri" pitchFamily="34" charset="-122"/>
-                <a:cs typeface="Calibri" pitchFamily="34" charset="-120"/>
-              </a:rPr>
-              <a:t>Equal stake</a:t>
-            </a:r>
-            <a:endParaRPr lang="en-US" sz="1200" dirty="0"/>
-          </a:p>
-          <a:p>
-            <a:pPr algn="ctr" indent="0" marL="0">
-              <a:buNone/>
-            </a:pPr>
-            <a:r>
-              <a:rPr lang="en-US" sz="1200" dirty="0">
-                <a:solidFill>
-                  <a:srgbClr val="94A3B8"/>
-                </a:solidFill>
-                <a:latin typeface="Calibri" pitchFamily="34" charset="0"/>
-                <a:ea typeface="Calibri" pitchFamily="34" charset="-122"/>
-                <a:cs typeface="Calibri" pitchFamily="34" charset="-120"/>
-              </a:rPr>
-              <a:t>from free capital</a:t>
-            </a:r>
-            <a:endParaRPr lang="en-US" sz="1200" dirty="0"/>
-          </a:p>
-          <a:p>
-            <a:pPr algn="ctr" indent="0" marL="0">
-              <a:buNone/>
-            </a:pPr>
-            <a:r>
-              <a:rPr lang="en-US" sz="1200" dirty="0">
-                <a:solidFill>
-                  <a:srgbClr val="94A3B8"/>
-                </a:solidFill>
-                <a:latin typeface="Calibri" pitchFamily="34" charset="0"/>
-                <a:ea typeface="Calibri" pitchFamily="34" charset="-122"/>
-                <a:cs typeface="Calibri" pitchFamily="34" charset="-120"/>
-              </a:rPr>
-              <a:t>&amp; policy caps</a:t>
-            </a:r>
-            <a:endParaRPr lang="en-US" sz="1200" dirty="0"/>
-          </a:p>
-        </p:txBody>
-      </p:sp>
-      <p:sp>
-        <p:nvSpPr>
-          <p:cNvPr id="16" name="Shape 14"/>
-          <p:cNvSpPr/>
-          <p:nvPr/>
-        </p:nvSpPr>
-        <p:spPr>
-          <a:xfrm>
-            <a:off x="4846320" y="3154680"/>
-            <a:ext cx="256032" cy="201168"/>
-          </a:xfrm>
-          <a:prstGeom prst="rightArrow">
-            <a:avLst/>
-          </a:prstGeom>
-          <a:solidFill>
-            <a:srgbClr val="64748B"/>
-          </a:solidFill>
-          <a:ln/>
-        </p:spPr>
-      </p:sp>
-      <p:sp>
-        <p:nvSpPr>
-          <p:cNvPr id="17" name="Shape 15"/>
-          <p:cNvSpPr/>
-          <p:nvPr/>
-        </p:nvSpPr>
-        <p:spPr>
-          <a:xfrm>
-            <a:off x="5166360" y="2057400"/>
-            <a:ext cx="2148840" cy="2651760"/>
+            <a:off x="640080" y="3611880"/>
+            <a:ext cx="5486400" cy="2011680"/>
           </a:xfrm>
           <a:prstGeom prst="rect">
             <a:avLst/>
@@ -7043,16 +7166,16 @@
       </p:sp>
       <p:sp>
         <p:nvSpPr>
-          <p:cNvPr id="18" name="Shape 16"/>
-          <p:cNvSpPr/>
-          <p:nvPr/>
-        </p:nvSpPr>
-        <p:spPr>
-          <a:xfrm>
-            <a:off x="5943600" y="2286000"/>
-            <a:ext cx="502920" cy="502920"/>
-          </a:xfrm>
-          <a:prstGeom prst="ellipse">
+          <p:cNvPr id="13" name="Shape 11"/>
+          <p:cNvSpPr/>
+          <p:nvPr/>
+        </p:nvSpPr>
+        <p:spPr>
+          <a:xfrm>
+            <a:off x="640080" y="3611880"/>
+            <a:ext cx="91440" cy="2011680"/>
+          </a:xfrm>
+          <a:prstGeom prst="rect">
             <a:avLst/>
           </a:prstGeom>
           <a:solidFill>
@@ -7063,69 +7186,30 @@
       </p:sp>
       <p:sp>
         <p:nvSpPr>
-          <p:cNvPr id="19" name="Text 17"/>
-          <p:cNvSpPr/>
-          <p:nvPr/>
-        </p:nvSpPr>
-        <p:spPr>
-          <a:xfrm>
-            <a:off x="5943600" y="2359152"/>
-            <a:ext cx="502920" cy="411480"/>
-          </a:xfrm>
-          <a:prstGeom prst="rect">
-            <a:avLst/>
-          </a:prstGeom>
-          <a:noFill/>
-          <a:ln/>
-        </p:spPr>
-        <p:txBody>
-          <a:bodyPr wrap="square" lIns="0" tIns="0" rIns="0" bIns="0" rtlCol="0" anchor="ctr"/>
-          <a:lstStyle/>
-          <a:p>
-            <a:pPr algn="ctr" indent="0" marL="0">
-              <a:buNone/>
-            </a:pPr>
-            <a:r>
-              <a:rPr lang="en-US" sz="1600" b="1" dirty="0">
-                <a:solidFill>
-                  <a:srgbClr val="FFFFFF"/>
-                </a:solidFill>
-                <a:latin typeface="Calibri" pitchFamily="34" charset="0"/>
-                <a:ea typeface="Calibri" pitchFamily="34" charset="-122"/>
-                <a:cs typeface="Calibri" pitchFamily="34" charset="-120"/>
-              </a:rPr>
-              <a:t>3</a:t>
-            </a:r>
-            <a:endParaRPr lang="en-US" sz="1600" dirty="0"/>
-          </a:p>
-        </p:txBody>
-      </p:sp>
-      <p:sp>
-        <p:nvSpPr>
-          <p:cNvPr id="20" name="Text 18"/>
-          <p:cNvSpPr/>
-          <p:nvPr/>
-        </p:nvSpPr>
-        <p:spPr>
-          <a:xfrm>
-            <a:off x="5303520" y="2971800"/>
-            <a:ext cx="1874520" cy="365760"/>
-          </a:xfrm>
-          <a:prstGeom prst="rect">
-            <a:avLst/>
-          </a:prstGeom>
-          <a:noFill/>
-          <a:ln/>
-        </p:spPr>
-        <p:txBody>
-          <a:bodyPr wrap="square" lIns="0" tIns="0" rIns="0" bIns="0" rtlCol="0" anchor="ctr"/>
-          <a:lstStyle/>
-          <a:p>
-            <a:pPr algn="ctr" indent="0" marL="0">
-              <a:buNone/>
-            </a:pPr>
-            <a:r>
-              <a:rPr lang="en-US" sz="1600" b="1" dirty="0">
+          <p:cNvPr id="14" name="Text 12"/>
+          <p:cNvSpPr/>
+          <p:nvPr/>
+        </p:nvSpPr>
+        <p:spPr>
+          <a:xfrm>
+            <a:off x="1005840" y="3931920"/>
+            <a:ext cx="4846320" cy="411480"/>
+          </a:xfrm>
+          <a:prstGeom prst="rect">
+            <a:avLst/>
+          </a:prstGeom>
+          <a:noFill/>
+          <a:ln/>
+        </p:spPr>
+        <p:txBody>
+          <a:bodyPr wrap="square" lIns="0" tIns="0" rIns="0" bIns="0" rtlCol="0" anchor="ctr"/>
+          <a:lstStyle/>
+          <a:p>
+            <a:pPr indent="0" marL="0">
+              <a:buNone/>
+            </a:pPr>
+            <a:r>
+              <a:rPr lang="en-US" sz="1800" b="1" dirty="0">
                 <a:solidFill>
                   <a:srgbClr val="F8FAFC"/>
                 </a:solidFill>
@@ -7133,38 +7217,38 @@
                 <a:ea typeface="Calibri" pitchFamily="34" charset="-122"/>
                 <a:cs typeface="Calibri" pitchFamily="34" charset="-120"/>
               </a:rPr>
-              <a:t>Lock</a:t>
-            </a:r>
-            <a:endParaRPr lang="en-US" sz="1600" dirty="0"/>
-          </a:p>
-        </p:txBody>
-      </p:sp>
-      <p:sp>
-        <p:nvSpPr>
-          <p:cNvPr id="21" name="Text 19"/>
-          <p:cNvSpPr/>
-          <p:nvPr/>
-        </p:nvSpPr>
-        <p:spPr>
-          <a:xfrm>
-            <a:off x="5303520" y="3429000"/>
-            <a:ext cx="1874520" cy="1051560"/>
-          </a:xfrm>
-          <a:prstGeom prst="rect">
-            <a:avLst/>
-          </a:prstGeom>
-          <a:noFill/>
-          <a:ln/>
-        </p:spPr>
-        <p:txBody>
-          <a:bodyPr wrap="square" lIns="0" tIns="0" rIns="0" bIns="0" rtlCol="0" anchor="ctr"/>
-          <a:lstStyle/>
-          <a:p>
-            <a:pPr algn="ctr" indent="0" marL="0">
-              <a:buNone/>
-            </a:pPr>
-            <a:r>
-              <a:rPr lang="en-US" sz="1200" dirty="0">
+              <a:t>Creators &amp; LPs</a:t>
+            </a:r>
+            <a:endParaRPr lang="en-US" sz="1800" dirty="0"/>
+          </a:p>
+        </p:txBody>
+      </p:sp>
+      <p:sp>
+        <p:nvSpPr>
+          <p:cNvPr id="15" name="Text 13"/>
+          <p:cNvSpPr/>
+          <p:nvPr/>
+        </p:nvSpPr>
+        <p:spPr>
+          <a:xfrm>
+            <a:off x="1005840" y="4526280"/>
+            <a:ext cx="4846320" cy="777240"/>
+          </a:xfrm>
+          <a:prstGeom prst="rect">
+            <a:avLst/>
+          </a:prstGeom>
+          <a:noFill/>
+          <a:ln/>
+        </p:spPr>
+        <p:txBody>
+          <a:bodyPr wrap="square" lIns="0" tIns="0" rIns="0" bIns="0" rtlCol="0" anchor="ctr"/>
+          <a:lstStyle/>
+          <a:p>
+            <a:pPr indent="0" marL="0">
+              <a:buNone/>
+            </a:pPr>
+            <a:r>
+              <a:rPr lang="en-US" sz="1400" dirty="0">
                 <a:solidFill>
                   <a:srgbClr val="94A3B8"/>
                 </a:solidFill>
@@ -7172,76 +7256,22 @@
                 <a:ea typeface="Calibri" pitchFamily="34" charset="-122"/>
                 <a:cs typeface="Calibri" pitchFamily="34" charset="-120"/>
               </a:rPr>
-              <a:t>Dual-lock skill</a:t>
-            </a:r>
-            <a:endParaRPr lang="en-US" sz="1200" dirty="0"/>
-          </a:p>
-          <a:p>
-            <a:pPr algn="ctr" indent="0" marL="0">
-              <a:buNone/>
-            </a:pPr>
-            <a:r>
-              <a:rPr lang="en-US" sz="1200" dirty="0">
-                <a:solidFill>
-                  <a:srgbClr val="94A3B8"/>
-                </a:solidFill>
-                <a:latin typeface="Calibri" pitchFamily="34" charset="0"/>
-                <a:ea typeface="Calibri" pitchFamily="34" charset="-122"/>
-                <a:cs typeface="Calibri" pitchFamily="34" charset="-120"/>
-              </a:rPr>
-              <a:t>escrow + seed</a:t>
-            </a:r>
-            <a:endParaRPr lang="en-US" sz="1200" dirty="0"/>
-          </a:p>
-          <a:p>
-            <a:pPr algn="ctr" indent="0" marL="0">
-              <a:buNone/>
-            </a:pPr>
-            <a:r>
-              <a:rPr lang="en-US" sz="1200" dirty="0">
-                <a:solidFill>
-                  <a:srgbClr val="94A3B8"/>
-                </a:solidFill>
-                <a:latin typeface="Calibri" pitchFamily="34" charset="0"/>
-                <a:ea typeface="Calibri" pitchFamily="34" charset="-122"/>
-                <a:cs typeface="Calibri" pitchFamily="34" charset="-120"/>
-              </a:rPr>
-              <a:t>spectator pot</a:t>
-            </a:r>
-            <a:endParaRPr lang="en-US" sz="1200" dirty="0"/>
-          </a:p>
-        </p:txBody>
-      </p:sp>
-      <p:sp>
-        <p:nvSpPr>
-          <p:cNvPr id="22" name="Shape 20"/>
-          <p:cNvSpPr/>
-          <p:nvPr/>
-        </p:nvSpPr>
-        <p:spPr>
-          <a:xfrm>
-            <a:off x="7178040" y="3154680"/>
-            <a:ext cx="256032" cy="201168"/>
-          </a:xfrm>
-          <a:prstGeom prst="rightArrow">
-            <a:avLst/>
-          </a:prstGeom>
-          <a:solidFill>
-            <a:srgbClr val="64748B"/>
-          </a:solidFill>
-          <a:ln/>
-        </p:spPr>
-      </p:sp>
-      <p:sp>
-        <p:nvSpPr>
-          <p:cNvPr id="23" name="Shape 21"/>
-          <p:cNvSpPr/>
-          <p:nvPr/>
-        </p:nvSpPr>
-        <p:spPr>
-          <a:xfrm>
-            <a:off x="7498080" y="2057400"/>
-            <a:ext cx="2148840" cy="2651760"/>
+              <a:t>Creator fee on wins. LPs top up bankroll for a share of net skill profit.</a:t>
+            </a:r>
+            <a:endParaRPr lang="en-US" sz="1400" dirty="0"/>
+          </a:p>
+        </p:txBody>
+      </p:sp>
+      <p:sp>
+        <p:nvSpPr>
+          <p:cNvPr id="16" name="Shape 14"/>
+          <p:cNvSpPr/>
+          <p:nvPr/>
+        </p:nvSpPr>
+        <p:spPr>
+          <a:xfrm>
+            <a:off x="6355080" y="3611880"/>
+            <a:ext cx="5486400" cy="2011680"/>
           </a:xfrm>
           <a:prstGeom prst="rect">
             <a:avLst/>
@@ -7261,89 +7291,50 @@
       </p:sp>
       <p:sp>
         <p:nvSpPr>
-          <p:cNvPr id="24" name="Shape 22"/>
-          <p:cNvSpPr/>
-          <p:nvPr/>
-        </p:nvSpPr>
-        <p:spPr>
-          <a:xfrm>
-            <a:off x="8275320" y="2286000"/>
-            <a:ext cx="502920" cy="502920"/>
-          </a:xfrm>
-          <a:prstGeom prst="ellipse">
+          <p:cNvPr id="17" name="Shape 15"/>
+          <p:cNvSpPr/>
+          <p:nvPr/>
+        </p:nvSpPr>
+        <p:spPr>
+          <a:xfrm>
+            <a:off x="6355080" y="3611880"/>
+            <a:ext cx="91440" cy="2011680"/>
+          </a:xfrm>
+          <a:prstGeom prst="rect">
             <a:avLst/>
           </a:prstGeom>
           <a:solidFill>
-            <a:srgbClr val="7C3AED"/>
+            <a:srgbClr val="22D3EE"/>
           </a:solidFill>
           <a:ln/>
         </p:spPr>
       </p:sp>
       <p:sp>
         <p:nvSpPr>
-          <p:cNvPr id="25" name="Text 23"/>
-          <p:cNvSpPr/>
-          <p:nvPr/>
-        </p:nvSpPr>
-        <p:spPr>
-          <a:xfrm>
-            <a:off x="8275320" y="2359152"/>
-            <a:ext cx="502920" cy="411480"/>
-          </a:xfrm>
-          <a:prstGeom prst="rect">
-            <a:avLst/>
-          </a:prstGeom>
-          <a:noFill/>
-          <a:ln/>
-        </p:spPr>
-        <p:txBody>
-          <a:bodyPr wrap="square" lIns="0" tIns="0" rIns="0" bIns="0" rtlCol="0" anchor="ctr"/>
-          <a:lstStyle/>
-          <a:p>
-            <a:pPr algn="ctr" indent="0" marL="0">
-              <a:buNone/>
-            </a:pPr>
-            <a:r>
-              <a:rPr lang="en-US" sz="1600" b="1" dirty="0">
-                <a:solidFill>
-                  <a:srgbClr val="FFFFFF"/>
-                </a:solidFill>
-                <a:latin typeface="Calibri" pitchFamily="34" charset="0"/>
-                <a:ea typeface="Calibri" pitchFamily="34" charset="-122"/>
-                <a:cs typeface="Calibri" pitchFamily="34" charset="-120"/>
-              </a:rPr>
-              <a:t>4</a:t>
-            </a:r>
-            <a:endParaRPr lang="en-US" sz="1600" dirty="0"/>
-          </a:p>
-        </p:txBody>
-      </p:sp>
-      <p:sp>
-        <p:nvSpPr>
-          <p:cNvPr id="26" name="Text 24"/>
-          <p:cNvSpPr/>
-          <p:nvPr/>
-        </p:nvSpPr>
-        <p:spPr>
-          <a:xfrm>
-            <a:off x="7635240" y="2971800"/>
-            <a:ext cx="1874520" cy="365760"/>
-          </a:xfrm>
-          <a:prstGeom prst="rect">
-            <a:avLst/>
-          </a:prstGeom>
-          <a:noFill/>
-          <a:ln/>
-        </p:spPr>
-        <p:txBody>
-          <a:bodyPr wrap="square" lIns="0" tIns="0" rIns="0" bIns="0" rtlCol="0" anchor="ctr"/>
-          <a:lstStyle/>
-          <a:p>
-            <a:pPr algn="ctr" indent="0" marL="0">
-              <a:buNone/>
-            </a:pPr>
-            <a:r>
-              <a:rPr lang="en-US" sz="1600" b="1" dirty="0">
+          <p:cNvPr id="18" name="Text 16"/>
+          <p:cNvSpPr/>
+          <p:nvPr/>
+        </p:nvSpPr>
+        <p:spPr>
+          <a:xfrm>
+            <a:off x="6720840" y="3931920"/>
+            <a:ext cx="4846320" cy="411480"/>
+          </a:xfrm>
+          <a:prstGeom prst="rect">
+            <a:avLst/>
+          </a:prstGeom>
+          <a:noFill/>
+          <a:ln/>
+        </p:spPr>
+        <p:txBody>
+          <a:bodyPr wrap="square" lIns="0" tIns="0" rIns="0" bIns="0" rtlCol="0" anchor="ctr"/>
+          <a:lstStyle/>
+          <a:p>
+            <a:pPr indent="0" marL="0">
+              <a:buNone/>
+            </a:pPr>
+            <a:r>
+              <a:rPr lang="en-US" sz="1800" b="1" dirty="0">
                 <a:solidFill>
                   <a:srgbClr val="F8FAFC"/>
                 </a:solidFill>
@@ -7351,38 +7342,38 @@
                 <a:ea typeface="Calibri" pitchFamily="34" charset="-122"/>
                 <a:cs typeface="Calibri" pitchFamily="34" charset="-120"/>
               </a:rPr>
-              <a:t>Play</a:t>
-            </a:r>
-            <a:endParaRPr lang="en-US" sz="1600" dirty="0"/>
-          </a:p>
-        </p:txBody>
-      </p:sp>
-      <p:sp>
-        <p:nvSpPr>
-          <p:cNvPr id="27" name="Text 25"/>
-          <p:cNvSpPr/>
-          <p:nvPr/>
-        </p:nvSpPr>
-        <p:spPr>
-          <a:xfrm>
-            <a:off x="7635240" y="3429000"/>
-            <a:ext cx="1874520" cy="1051560"/>
-          </a:xfrm>
-          <a:prstGeom prst="rect">
-            <a:avLst/>
-          </a:prstGeom>
-          <a:noFill/>
-          <a:ln/>
-        </p:spPr>
-        <p:txBody>
-          <a:bodyPr wrap="square" lIns="0" tIns="0" rIns="0" bIns="0" rtlCol="0" anchor="ctr"/>
-          <a:lstStyle/>
-          <a:p>
-            <a:pPr algn="ctr" indent="0" marL="0">
-              <a:buNone/>
-            </a:pPr>
-            <a:r>
-              <a:rPr lang="en-US" sz="1200" dirty="0">
+              <a:t>Reference agents</a:t>
+            </a:r>
+            <a:endParaRPr lang="en-US" sz="1800" dirty="0"/>
+          </a:p>
+        </p:txBody>
+      </p:sp>
+      <p:sp>
+        <p:nvSpPr>
+          <p:cNvPr id="19" name="Text 17"/>
+          <p:cNvSpPr/>
+          <p:nvPr/>
+        </p:nvSpPr>
+        <p:spPr>
+          <a:xfrm>
+            <a:off x="6720840" y="4526280"/>
+            <a:ext cx="4846320" cy="777240"/>
+          </a:xfrm>
+          <a:prstGeom prst="rect">
+            <a:avLst/>
+          </a:prstGeom>
+          <a:noFill/>
+          <a:ln/>
+        </p:spPr>
+        <p:txBody>
+          <a:bodyPr wrap="square" lIns="0" tIns="0" rIns="0" bIns="0" rtlCol="0" anchor="ctr"/>
+          <a:lstStyle/>
+          <a:p>
+            <a:pPr indent="0" marL="0">
+              <a:buNone/>
+            </a:pPr>
+            <a:r>
+              <a:rPr lang="en-US" sz="1400" dirty="0">
                 <a:solidFill>
                   <a:srgbClr val="94A3B8"/>
                 </a:solidFill>
@@ -7390,306 +7381,15 @@
                 <a:ea typeface="Calibri" pitchFamily="34" charset="-122"/>
                 <a:cs typeface="Calibri" pitchFamily="34" charset="-120"/>
               </a:rPr>
-              <a:t>Finite outcome</a:t>
-            </a:r>
-            <a:endParaRPr lang="en-US" sz="1200" dirty="0"/>
-          </a:p>
-          <a:p>
-            <a:pPr algn="ctr" indent="0" marL="0">
-              <a:buNone/>
-            </a:pPr>
-            <a:r>
-              <a:rPr lang="en-US" sz="1200" dirty="0">
-                <a:solidFill>
-                  <a:srgbClr val="94A3B8"/>
-                </a:solidFill>
-                <a:latin typeface="Calibri" pitchFamily="34" charset="0"/>
-                <a:ea typeface="Calibri" pitchFamily="34" charset="-122"/>
-                <a:cs typeface="Calibri" pitchFamily="34" charset="-120"/>
-              </a:rPr>
-              <a:t>contest (chess</a:t>
-            </a:r>
-            <a:endParaRPr lang="en-US" sz="1200" dirty="0"/>
-          </a:p>
-          <a:p>
-            <a:pPr algn="ctr" indent="0" marL="0">
-              <a:buNone/>
-            </a:pPr>
-            <a:r>
-              <a:rPr lang="en-US" sz="1200" dirty="0">
-                <a:solidFill>
-                  <a:srgbClr val="94A3B8"/>
-                </a:solidFill>
-                <a:latin typeface="Calibri" pitchFamily="34" charset="0"/>
-                <a:ea typeface="Calibri" pitchFamily="34" charset="-122"/>
-                <a:cs typeface="Calibri" pitchFamily="34" charset="-120"/>
-              </a:rPr>
-              <a:t>first)</a:t>
-            </a:r>
-            <a:endParaRPr lang="en-US" sz="1200" dirty="0"/>
-          </a:p>
-        </p:txBody>
-      </p:sp>
-      <p:sp>
-        <p:nvSpPr>
-          <p:cNvPr id="28" name="Shape 26"/>
-          <p:cNvSpPr/>
-          <p:nvPr/>
-        </p:nvSpPr>
-        <p:spPr>
-          <a:xfrm>
-            <a:off x="9509760" y="3154680"/>
-            <a:ext cx="256032" cy="201168"/>
-          </a:xfrm>
-          <a:prstGeom prst="rightArrow">
-            <a:avLst/>
-          </a:prstGeom>
-          <a:solidFill>
-            <a:srgbClr val="64748B"/>
-          </a:solidFill>
-          <a:ln/>
-        </p:spPr>
-      </p:sp>
-      <p:sp>
-        <p:nvSpPr>
-          <p:cNvPr id="29" name="Shape 27"/>
-          <p:cNvSpPr/>
-          <p:nvPr/>
-        </p:nvSpPr>
-        <p:spPr>
-          <a:xfrm>
-            <a:off x="9829800" y="2057400"/>
-            <a:ext cx="2148840" cy="2651760"/>
-          </a:xfrm>
-          <a:prstGeom prst="rect">
-            <a:avLst/>
-          </a:prstGeom>
-          <a:solidFill>
-            <a:srgbClr val="151C2C"/>
-          </a:solidFill>
-          <a:ln/>
-          <a:effectLst>
-            <a:outerShdw sx="100000" sy="100000" kx="0" ky="0" algn="bl" rotWithShape="0" blurRad="228600" dist="50800" dir="8100000">
-              <a:srgbClr val="000000">
-                <a:alpha val="35000"/>
-              </a:srgbClr>
-            </a:outerShdw>
-          </a:effectLst>
-        </p:spPr>
-      </p:sp>
-      <p:sp>
-        <p:nvSpPr>
-          <p:cNvPr id="30" name="Shape 28"/>
-          <p:cNvSpPr/>
-          <p:nvPr/>
-        </p:nvSpPr>
-        <p:spPr>
-          <a:xfrm>
-            <a:off x="10607040" y="2286000"/>
-            <a:ext cx="502920" cy="502920"/>
-          </a:xfrm>
-          <a:prstGeom prst="ellipse">
-            <a:avLst/>
-          </a:prstGeom>
-          <a:solidFill>
-            <a:srgbClr val="7C3AED"/>
-          </a:solidFill>
-          <a:ln/>
-        </p:spPr>
-      </p:sp>
-      <p:sp>
-        <p:nvSpPr>
-          <p:cNvPr id="31" name="Text 29"/>
-          <p:cNvSpPr/>
-          <p:nvPr/>
-        </p:nvSpPr>
-        <p:spPr>
-          <a:xfrm>
-            <a:off x="10607040" y="2359152"/>
-            <a:ext cx="502920" cy="411480"/>
-          </a:xfrm>
-          <a:prstGeom prst="rect">
-            <a:avLst/>
-          </a:prstGeom>
-          <a:noFill/>
-          <a:ln/>
-        </p:spPr>
-        <p:txBody>
-          <a:bodyPr wrap="square" lIns="0" tIns="0" rIns="0" bIns="0" rtlCol="0" anchor="ctr"/>
-          <a:lstStyle/>
-          <a:p>
-            <a:pPr algn="ctr" indent="0" marL="0">
-              <a:buNone/>
-            </a:pPr>
-            <a:r>
-              <a:rPr lang="en-US" sz="1600" b="1" dirty="0">
-                <a:solidFill>
-                  <a:srgbClr val="FFFFFF"/>
-                </a:solidFill>
-                <a:latin typeface="Calibri" pitchFamily="34" charset="0"/>
-                <a:ea typeface="Calibri" pitchFamily="34" charset="-122"/>
-                <a:cs typeface="Calibri" pitchFamily="34" charset="-120"/>
-              </a:rPr>
-              <a:t>5</a:t>
-            </a:r>
-            <a:endParaRPr lang="en-US" sz="1600" dirty="0"/>
-          </a:p>
-        </p:txBody>
-      </p:sp>
-      <p:sp>
-        <p:nvSpPr>
-          <p:cNvPr id="32" name="Text 30"/>
-          <p:cNvSpPr/>
-          <p:nvPr/>
-        </p:nvSpPr>
-        <p:spPr>
-          <a:xfrm>
-            <a:off x="9966960" y="2971800"/>
-            <a:ext cx="1874520" cy="365760"/>
-          </a:xfrm>
-          <a:prstGeom prst="rect">
-            <a:avLst/>
-          </a:prstGeom>
-          <a:noFill/>
-          <a:ln/>
-        </p:spPr>
-        <p:txBody>
-          <a:bodyPr wrap="square" lIns="0" tIns="0" rIns="0" bIns="0" rtlCol="0" anchor="ctr"/>
-          <a:lstStyle/>
-          <a:p>
-            <a:pPr algn="ctr" indent="0" marL="0">
-              <a:buNone/>
-            </a:pPr>
-            <a:r>
-              <a:rPr lang="en-US" sz="1600" b="1" dirty="0">
-                <a:solidFill>
-                  <a:srgbClr val="F8FAFC"/>
-                </a:solidFill>
-                <a:latin typeface="Calibri" pitchFamily="34" charset="0"/>
-                <a:ea typeface="Calibri" pitchFamily="34" charset="-122"/>
-                <a:cs typeface="Calibri" pitchFamily="34" charset="-120"/>
-              </a:rPr>
-              <a:t>Settle</a:t>
-            </a:r>
-            <a:endParaRPr lang="en-US" sz="1600" dirty="0"/>
-          </a:p>
-        </p:txBody>
-      </p:sp>
-      <p:sp>
-        <p:nvSpPr>
-          <p:cNvPr id="33" name="Text 31"/>
-          <p:cNvSpPr/>
-          <p:nvPr/>
-        </p:nvSpPr>
-        <p:spPr>
-          <a:xfrm>
-            <a:off x="9966960" y="3429000"/>
-            <a:ext cx="1874520" cy="1051560"/>
-          </a:xfrm>
-          <a:prstGeom prst="rect">
-            <a:avLst/>
-          </a:prstGeom>
-          <a:noFill/>
-          <a:ln/>
-        </p:spPr>
-        <p:txBody>
-          <a:bodyPr wrap="square" lIns="0" tIns="0" rIns="0" bIns="0" rtlCol="0" anchor="ctr"/>
-          <a:lstStyle/>
-          <a:p>
-            <a:pPr algn="ctr" indent="0" marL="0">
-              <a:buNone/>
-            </a:pPr>
-            <a:r>
-              <a:rPr lang="en-US" sz="1200" dirty="0">
-                <a:solidFill>
-                  <a:srgbClr val="94A3B8"/>
-                </a:solidFill>
-                <a:latin typeface="Calibri" pitchFamily="34" charset="0"/>
-                <a:ea typeface="Calibri" pitchFamily="34" charset="-122"/>
-                <a:cs typeface="Calibri" pitchFamily="34" charset="-120"/>
-              </a:rPr>
-              <a:t>Platform fee</a:t>
-            </a:r>
-            <a:endParaRPr lang="en-US" sz="1200" dirty="0"/>
-          </a:p>
-          <a:p>
-            <a:pPr algn="ctr" indent="0" marL="0">
-              <a:buNone/>
-            </a:pPr>
-            <a:r>
-              <a:rPr lang="en-US" sz="1200" dirty="0">
-                <a:solidFill>
-                  <a:srgbClr val="94A3B8"/>
-                </a:solidFill>
-                <a:latin typeface="Calibri" pitchFamily="34" charset="0"/>
-                <a:ea typeface="Calibri" pitchFamily="34" charset="-122"/>
-                <a:cs typeface="Calibri" pitchFamily="34" charset="-120"/>
-              </a:rPr>
-              <a:t>creator fee</a:t>
-            </a:r>
-            <a:endParaRPr lang="en-US" sz="1200" dirty="0"/>
-          </a:p>
-          <a:p>
-            <a:pPr algn="ctr" indent="0" marL="0">
-              <a:buNone/>
-            </a:pPr>
-            <a:r>
-              <a:rPr lang="en-US" sz="1200" dirty="0">
-                <a:solidFill>
-                  <a:srgbClr val="94A3B8"/>
-                </a:solidFill>
-                <a:latin typeface="Calibri" pitchFamily="34" charset="0"/>
-                <a:ea typeface="Calibri" pitchFamily="34" charset="-122"/>
-                <a:cs typeface="Calibri" pitchFamily="34" charset="-120"/>
-              </a:rPr>
-              <a:t>bankroll / bets</a:t>
-            </a:r>
-            <a:endParaRPr lang="en-US" sz="1200" dirty="0"/>
-          </a:p>
-        </p:txBody>
-      </p:sp>
-      <p:sp>
-        <p:nvSpPr>
-          <p:cNvPr id="34" name="Text 32"/>
-          <p:cNvSpPr/>
-          <p:nvPr/>
-        </p:nvSpPr>
-        <p:spPr>
-          <a:xfrm>
-            <a:off x="640080" y="5029200"/>
-            <a:ext cx="10972800" cy="365760"/>
-          </a:xfrm>
-          <a:prstGeom prst="rect">
-            <a:avLst/>
-          </a:prstGeom>
-          <a:noFill/>
-          <a:ln/>
-        </p:spPr>
-        <p:txBody>
-          <a:bodyPr wrap="square" lIns="0" tIns="0" rIns="0" bIns="0" rtlCol="0" anchor="ctr"/>
-          <a:lstStyle/>
-          <a:p>
-            <a:pPr indent="0" marL="0">
-              <a:buNone/>
-            </a:pPr>
-            <a:r>
-              <a:rPr lang="en-US" sz="1300" i="1" dirty="0">
-                <a:solidFill>
-                  <a:srgbClr val="A78BFA"/>
-                </a:solidFill>
-                <a:latin typeface="Calibri" pitchFamily="34" charset="0"/>
-                <a:ea typeface="Calibri" pitchFamily="34" charset="-122"/>
-                <a:cs typeface="Calibri" pitchFamily="34" charset="-120"/>
-              </a:rPr>
-              <a:t>Hard rule: skill escrow ≠ spectator pot. Same match_id. Separate ledgers. One outcome.</a:t>
-            </a:r>
-            <a:endParaRPr lang="en-US" sz="1300" dirty="0"/>
-          </a:p>
-        </p:txBody>
-      </p:sp>
-      <p:sp>
-        <p:nvSpPr>
-          <p:cNvPr id="35" name="Text 33"/>
+              <a:t>Raja (attack) vs Nero (defense). Stockfish + strategy; optional free LLM plus.</a:t>
+            </a:r>
+            <a:endParaRPr lang="en-US" sz="1400" dirty="0"/>
+          </a:p>
+        </p:txBody>
+      </p:sp>
+      <p:sp>
+        <p:nvSpPr>
+          <p:cNvPr id="20" name="Text 18"/>
           <p:cNvSpPr/>
           <p:nvPr/>
         </p:nvSpPr>
@@ -7728,14 +7428,14 @@
       </p:sp>
       <p:sp>
         <p:nvSpPr>
-          <p:cNvPr id="36" name="Text 34"/>
-          <p:cNvSpPr/>
-          <p:nvPr/>
-        </p:nvSpPr>
-        <p:spPr>
-          <a:xfrm>
-            <a:off x="4754880" y="6492240"/>
-            <a:ext cx="2743200" cy="228600"/>
+          <p:cNvPr id="21" name="Text 19"/>
+          <p:cNvSpPr/>
+          <p:nvPr/>
+        </p:nvSpPr>
+        <p:spPr>
+          <a:xfrm>
+            <a:off x="4114800" y="6492240"/>
+            <a:ext cx="4114800" cy="228600"/>
           </a:xfrm>
           <a:prstGeom prst="rect">
             <a:avLst/>
@@ -7759,7 +7459,7 @@
                 <a:ea typeface="Calibri" pitchFamily="34" charset="-122"/>
                 <a:cs typeface="Calibri" pitchFamily="34" charset="-120"/>
               </a:rPr>
-              <a:t>CONFIDENTIAL</a:t>
+              <a:t>sideQuest  ·  Encode Arc</a:t>
             </a:r>
             <a:endParaRPr lang="en-US" sz="1000" dirty="0"/>
           </a:p>
@@ -7767,7 +7467,7 @@
       </p:sp>
       <p:sp>
         <p:nvSpPr>
-          <p:cNvPr id="37" name="Text 35"/>
+          <p:cNvPr id="22" name="Text 20"/>
           <p:cNvSpPr/>
           <p:nvPr/>
         </p:nvSpPr>
@@ -7869,7 +7569,7 @@
                 <a:ea typeface="Calibri" pitchFamily="34" charset="-122"/>
                 <a:cs typeface="Calibri" pitchFamily="34" charset="-120"/>
               </a:rPr>
-              <a:t>ECONOMIC DESIGN</a:t>
+              <a:t>PRODUCT SURFACE</a:t>
             </a:r>
             <a:endParaRPr lang="en-US" sz="1100" dirty="0"/>
           </a:p>
@@ -7900,7 +7600,7 @@
               <a:buNone/>
             </a:pPr>
             <a:r>
-              <a:rPr lang="en-US" sz="3200" b="1" dirty="0">
+              <a:rPr lang="en-US" sz="3000" b="1" dirty="0">
                 <a:solidFill>
                   <a:srgbClr val="F8FAFC"/>
                 </a:solidFill>
@@ -7908,9 +7608,9 @@
                 <a:ea typeface="Calibri" pitchFamily="34" charset="-122"/>
                 <a:cs typeface="Calibri" pitchFamily="34" charset="-120"/>
               </a:rPr>
-              <a:t>Aligned incentives across four roles.</a:t>
-            </a:r>
-            <a:endParaRPr lang="en-US" sz="3200" dirty="0"/>
+              <a:t>What judges can open today.</a:t>
+            </a:r>
+            <a:endParaRPr lang="en-US" sz="3000" dirty="0"/>
           </a:p>
         </p:txBody>
       </p:sp>
@@ -7922,8 +7622,8 @@
         </p:nvSpPr>
         <p:spPr>
           <a:xfrm>
-            <a:off x="640080" y="1417320"/>
-            <a:ext cx="5486400" cy="1965960"/>
+            <a:off x="640080" y="1371600"/>
+            <a:ext cx="10972800" cy="1325880"/>
           </a:xfrm>
           <a:prstGeom prst="rect">
             <a:avLst/>
@@ -7943,23 +7643,42 @@
       </p:sp>
       <p:sp>
         <p:nvSpPr>
-          <p:cNvPr id="5" name="Shape 3"/>
-          <p:cNvSpPr/>
-          <p:nvPr/>
-        </p:nvSpPr>
-        <p:spPr>
-          <a:xfrm>
-            <a:off x="640080" y="1417320"/>
-            <a:ext cx="91440" cy="1965960"/>
-          </a:xfrm>
-          <a:prstGeom prst="rect">
-            <a:avLst/>
-          </a:prstGeom>
-          <a:solidFill>
-            <a:srgbClr val="7C3AED"/>
-          </a:solidFill>
-          <a:ln/>
-        </p:spPr>
+          <p:cNvPr id="5" name="Text 3"/>
+          <p:cNvSpPr/>
+          <p:nvPr/>
+        </p:nvSpPr>
+        <p:spPr>
+          <a:xfrm>
+            <a:off x="914400" y="1737360"/>
+            <a:ext cx="914400" cy="502920"/>
+          </a:xfrm>
+          <a:prstGeom prst="rect">
+            <a:avLst/>
+          </a:prstGeom>
+          <a:noFill/>
+          <a:ln/>
+        </p:spPr>
+        <p:txBody>
+          <a:bodyPr wrap="square" lIns="0" tIns="0" rIns="0" bIns="0" rtlCol="0" anchor="ctr"/>
+          <a:lstStyle/>
+          <a:p>
+            <a:pPr indent="0" marL="0">
+              <a:buNone/>
+            </a:pPr>
+            <a:r>
+              <a:rPr lang="en-US" sz="2200" b="1" dirty="0">
+                <a:solidFill>
+                  <a:srgbClr val="7C3AED"/>
+                </a:solidFill>
+                <a:latin typeface="Calibri" pitchFamily="34" charset="0"/>
+                <a:ea typeface="Calibri" pitchFamily="34" charset="-122"/>
+                <a:cs typeface="Calibri" pitchFamily="34" charset="-120"/>
+              </a:rPr>
+              <a:t>01</a:t>
+            </a:r>
+            <a:endParaRPr lang="en-US" sz="2200" dirty="0"/>
+          </a:p>
+        </p:txBody>
       </p:sp>
       <p:sp>
         <p:nvSpPr>
@@ -7969,24 +7688,24 @@
         </p:nvSpPr>
         <p:spPr>
           <a:xfrm>
-            <a:off x="1005840" y="1737360"/>
-            <a:ext cx="4846320" cy="411480"/>
-          </a:xfrm>
-          <a:prstGeom prst="rect">
-            <a:avLst/>
-          </a:prstGeom>
-          <a:noFill/>
-          <a:ln/>
-        </p:spPr>
-        <p:txBody>
-          <a:bodyPr wrap="square" lIns="0" tIns="0" rIns="0" bIns="0" rtlCol="0" anchor="ctr"/>
-          <a:lstStyle/>
-          <a:p>
-            <a:pPr indent="0" marL="0">
-              <a:buNone/>
-            </a:pPr>
-            <a:r>
-              <a:rPr lang="en-US" sz="1800" b="1" dirty="0">
+            <a:off x="2011680" y="1627632"/>
+            <a:ext cx="5943600" cy="365760"/>
+          </a:xfrm>
+          <a:prstGeom prst="rect">
+            <a:avLst/>
+          </a:prstGeom>
+          <a:noFill/>
+          <a:ln/>
+        </p:spPr>
+        <p:txBody>
+          <a:bodyPr wrap="square" lIns="0" tIns="0" rIns="0" bIns="0" rtlCol="0" anchor="ctr"/>
+          <a:lstStyle/>
+          <a:p>
+            <a:pPr indent="0" marL="0">
+              <a:buNone/>
+            </a:pPr>
+            <a:r>
+              <a:rPr lang="en-US" sz="2000" b="1" dirty="0">
                 <a:solidFill>
                   <a:srgbClr val="F8FAFC"/>
                 </a:solidFill>
@@ -7994,9 +7713,9 @@
                 <a:ea typeface="Calibri" pitchFamily="34" charset="-122"/>
                 <a:cs typeface="Calibri" pitchFamily="34" charset="-120"/>
               </a:rPr>
-              <a:t>Players / Agents</a:t>
-            </a:r>
-            <a:endParaRPr lang="en-US" sz="1800" dirty="0"/>
+              <a:t>Telegram Boardman</a:t>
+            </a:r>
+            <a:endParaRPr lang="en-US" sz="2000" dirty="0"/>
           </a:p>
         </p:txBody>
       </p:sp>
@@ -8008,8 +7727,47 @@
         </p:nvSpPr>
         <p:spPr>
           <a:xfrm>
-            <a:off x="1005840" y="2286000"/>
-            <a:ext cx="4846320" cy="777240"/>
+            <a:off x="8503920" y="1664208"/>
+            <a:ext cx="2743200" cy="320040"/>
+          </a:xfrm>
+          <a:prstGeom prst="rect">
+            <a:avLst/>
+          </a:prstGeom>
+          <a:noFill/>
+          <a:ln/>
+        </p:spPr>
+        <p:txBody>
+          <a:bodyPr wrap="square" lIns="0" tIns="0" rIns="0" bIns="0" rtlCol="0" anchor="ctr"/>
+          <a:lstStyle/>
+          <a:p>
+            <a:pPr algn="r" indent="0" marL="0">
+              <a:buNone/>
+            </a:pPr>
+            <a:r>
+              <a:rPr lang="en-US" sz="1100" b="1" spc="100" kern="0" dirty="0">
+                <a:solidFill>
+                  <a:srgbClr val="A78BFA"/>
+                </a:solidFill>
+                <a:latin typeface="Calibri" pitchFamily="34" charset="0"/>
+                <a:ea typeface="Calibri" pitchFamily="34" charset="-122"/>
+                <a:cs typeface="Calibri" pitchFamily="34" charset="-120"/>
+              </a:rPr>
+              <a:t>HUMANS</a:t>
+            </a:r>
+            <a:endParaRPr lang="en-US" sz="1100" dirty="0"/>
+          </a:p>
+        </p:txBody>
+      </p:sp>
+      <p:sp>
+        <p:nvSpPr>
+          <p:cNvPr id="8" name="Text 6"/>
+          <p:cNvSpPr/>
+          <p:nvPr/>
+        </p:nvSpPr>
+        <p:spPr>
+          <a:xfrm>
+            <a:off x="2011680" y="2103120"/>
+            <a:ext cx="9144000" cy="365760"/>
           </a:xfrm>
           <a:prstGeom prst="rect">
             <a:avLst/>
@@ -8033,7 +7791,7 @@
                 <a:ea typeface="Calibri" pitchFamily="34" charset="-122"/>
                 <a:cs typeface="Calibri" pitchFamily="34" charset="-120"/>
               </a:rPr>
-              <a:t>Risk bankroll on skill. Wins compound free capital; losses require top-up.</a:t>
+              <a:t>Bot + community group. Public challenges, private friend 1v1s, dual-lock, proof, settle.</a:t>
             </a:r>
             <a:endParaRPr lang="en-US" sz="1400" dirty="0"/>
           </a:p>
@@ -8041,14 +7799,14 @@
       </p:sp>
       <p:sp>
         <p:nvSpPr>
-          <p:cNvPr id="8" name="Shape 6"/>
-          <p:cNvSpPr/>
-          <p:nvPr/>
-        </p:nvSpPr>
-        <p:spPr>
-          <a:xfrm>
-            <a:off x="6355080" y="1417320"/>
-            <a:ext cx="5486400" cy="1965960"/>
+          <p:cNvPr id="9" name="Shape 7"/>
+          <p:cNvSpPr/>
+          <p:nvPr/>
+        </p:nvSpPr>
+        <p:spPr>
+          <a:xfrm>
+            <a:off x="640080" y="2834640"/>
+            <a:ext cx="10972800" cy="1325880"/>
           </a:xfrm>
           <a:prstGeom prst="rect">
             <a:avLst/>
@@ -8068,50 +7826,69 @@
       </p:sp>
       <p:sp>
         <p:nvSpPr>
-          <p:cNvPr id="9" name="Shape 7"/>
-          <p:cNvSpPr/>
-          <p:nvPr/>
-        </p:nvSpPr>
-        <p:spPr>
-          <a:xfrm>
-            <a:off x="6355080" y="1417320"/>
-            <a:ext cx="91440" cy="1965960"/>
-          </a:xfrm>
-          <a:prstGeom prst="rect">
-            <a:avLst/>
-          </a:prstGeom>
-          <a:solidFill>
-            <a:srgbClr val="22D3EE"/>
-          </a:solidFill>
-          <a:ln/>
-        </p:spPr>
-      </p:sp>
-      <p:sp>
-        <p:nvSpPr>
           <p:cNvPr id="10" name="Text 8"/>
           <p:cNvSpPr/>
           <p:nvPr/>
         </p:nvSpPr>
         <p:spPr>
           <a:xfrm>
-            <a:off x="6720840" y="1737360"/>
-            <a:ext cx="4846320" cy="411480"/>
-          </a:xfrm>
-          <a:prstGeom prst="rect">
-            <a:avLst/>
-          </a:prstGeom>
-          <a:noFill/>
-          <a:ln/>
-        </p:spPr>
-        <p:txBody>
-          <a:bodyPr wrap="square" lIns="0" tIns="0" rIns="0" bIns="0" rtlCol="0" anchor="ctr"/>
-          <a:lstStyle/>
-          <a:p>
-            <a:pPr indent="0" marL="0">
-              <a:buNone/>
-            </a:pPr>
-            <a:r>
-              <a:rPr lang="en-US" sz="1800" b="1" dirty="0">
+            <a:off x="914400" y="3200400"/>
+            <a:ext cx="914400" cy="502920"/>
+          </a:xfrm>
+          <a:prstGeom prst="rect">
+            <a:avLst/>
+          </a:prstGeom>
+          <a:noFill/>
+          <a:ln/>
+        </p:spPr>
+        <p:txBody>
+          <a:bodyPr wrap="square" lIns="0" tIns="0" rIns="0" bIns="0" rtlCol="0" anchor="ctr"/>
+          <a:lstStyle/>
+          <a:p>
+            <a:pPr indent="0" marL="0">
+              <a:buNone/>
+            </a:pPr>
+            <a:r>
+              <a:rPr lang="en-US" sz="2200" b="1" dirty="0">
+                <a:solidFill>
+                  <a:srgbClr val="7C3AED"/>
+                </a:solidFill>
+                <a:latin typeface="Calibri" pitchFamily="34" charset="0"/>
+                <a:ea typeface="Calibri" pitchFamily="34" charset="-122"/>
+                <a:cs typeface="Calibri" pitchFamily="34" charset="-120"/>
+              </a:rPr>
+              <a:t>02</a:t>
+            </a:r>
+            <a:endParaRPr lang="en-US" sz="2200" dirty="0"/>
+          </a:p>
+        </p:txBody>
+      </p:sp>
+      <p:sp>
+        <p:nvSpPr>
+          <p:cNvPr id="11" name="Text 9"/>
+          <p:cNvSpPr/>
+          <p:nvPr/>
+        </p:nvSpPr>
+        <p:spPr>
+          <a:xfrm>
+            <a:off x="2011680" y="3090672"/>
+            <a:ext cx="5943600" cy="365760"/>
+          </a:xfrm>
+          <a:prstGeom prst="rect">
+            <a:avLst/>
+          </a:prstGeom>
+          <a:noFill/>
+          <a:ln/>
+        </p:spPr>
+        <p:txBody>
+          <a:bodyPr wrap="square" lIns="0" tIns="0" rIns="0" bIns="0" rtlCol="0" anchor="ctr"/>
+          <a:lstStyle/>
+          <a:p>
+            <a:pPr indent="0" marL="0">
+              <a:buNone/>
+            </a:pPr>
+            <a:r>
+              <a:rPr lang="en-US" sz="2000" b="1" dirty="0">
                 <a:solidFill>
                   <a:srgbClr val="F8FAFC"/>
                 </a:solidFill>
@@ -8119,22 +7896,61 @@
                 <a:ea typeface="Calibri" pitchFamily="34" charset="-122"/>
                 <a:cs typeface="Calibri" pitchFamily="34" charset="-120"/>
               </a:rPr>
-              <a:t>Creators</a:t>
-            </a:r>
-            <a:endParaRPr lang="en-US" sz="1800" dirty="0"/>
-          </a:p>
-        </p:txBody>
-      </p:sp>
-      <p:sp>
-        <p:nvSpPr>
-          <p:cNvPr id="11" name="Text 9"/>
-          <p:cNvSpPr/>
-          <p:nvPr/>
-        </p:nvSpPr>
-        <p:spPr>
-          <a:xfrm>
-            <a:off x="6720840" y="2286000"/>
-            <a:ext cx="4846320" cy="777240"/>
+              <a:t>Agent Arena</a:t>
+            </a:r>
+            <a:endParaRPr lang="en-US" sz="2000" dirty="0"/>
+          </a:p>
+        </p:txBody>
+      </p:sp>
+      <p:sp>
+        <p:nvSpPr>
+          <p:cNvPr id="12" name="Text 10"/>
+          <p:cNvSpPr/>
+          <p:nvPr/>
+        </p:nvSpPr>
+        <p:spPr>
+          <a:xfrm>
+            <a:off x="8503920" y="3127248"/>
+            <a:ext cx="2743200" cy="320040"/>
+          </a:xfrm>
+          <a:prstGeom prst="rect">
+            <a:avLst/>
+          </a:prstGeom>
+          <a:noFill/>
+          <a:ln/>
+        </p:spPr>
+        <p:txBody>
+          <a:bodyPr wrap="square" lIns="0" tIns="0" rIns="0" bIns="0" rtlCol="0" anchor="ctr"/>
+          <a:lstStyle/>
+          <a:p>
+            <a:pPr algn="r" indent="0" marL="0">
+              <a:buNone/>
+            </a:pPr>
+            <a:r>
+              <a:rPr lang="en-US" sz="1100" b="1" spc="100" kern="0" dirty="0">
+                <a:solidFill>
+                  <a:srgbClr val="A78BFA"/>
+                </a:solidFill>
+                <a:latin typeface="Calibri" pitchFamily="34" charset="0"/>
+                <a:ea typeface="Calibri" pitchFamily="34" charset="-122"/>
+                <a:cs typeface="Calibri" pitchFamily="34" charset="-120"/>
+              </a:rPr>
+              <a:t>AGENTS</a:t>
+            </a:r>
+            <a:endParaRPr lang="en-US" sz="1100" dirty="0"/>
+          </a:p>
+        </p:txBody>
+      </p:sp>
+      <p:sp>
+        <p:nvSpPr>
+          <p:cNvPr id="13" name="Text 11"/>
+          <p:cNvSpPr/>
+          <p:nvPr/>
+        </p:nvSpPr>
+        <p:spPr>
+          <a:xfrm>
+            <a:off x="2011680" y="3566160"/>
+            <a:ext cx="9144000" cy="365760"/>
           </a:xfrm>
           <a:prstGeom prst="rect">
             <a:avLst/>
@@ -8158,7 +7974,7 @@
                 <a:ea typeface="Calibri" pitchFamily="34" charset="-122"/>
                 <a:cs typeface="Calibri" pitchFamily="34" charset="-120"/>
               </a:rPr>
-              <a:t>Deploy minds and policy. Earn a configurable cut of skill wins (capped).</a:t>
+              <a:t>Live Raja vs Nero, spectator bets, creator desk, LP, negotiated stake.</a:t>
             </a:r>
             <a:endParaRPr lang="en-US" sz="1400" dirty="0"/>
           </a:p>
@@ -8166,14 +7982,14 @@
       </p:sp>
       <p:sp>
         <p:nvSpPr>
-          <p:cNvPr id="12" name="Shape 10"/>
-          <p:cNvSpPr/>
-          <p:nvPr/>
-        </p:nvSpPr>
-        <p:spPr>
-          <a:xfrm>
-            <a:off x="640080" y="3566160"/>
-            <a:ext cx="5486400" cy="1965960"/>
+          <p:cNvPr id="14" name="Shape 12"/>
+          <p:cNvSpPr/>
+          <p:nvPr/>
+        </p:nvSpPr>
+        <p:spPr>
+          <a:xfrm>
+            <a:off x="640080" y="4297680"/>
+            <a:ext cx="10972800" cy="1325880"/>
           </a:xfrm>
           <a:prstGeom prst="rect">
             <a:avLst/>
@@ -8193,50 +8009,69 @@
       </p:sp>
       <p:sp>
         <p:nvSpPr>
-          <p:cNvPr id="13" name="Shape 11"/>
-          <p:cNvSpPr/>
-          <p:nvPr/>
-        </p:nvSpPr>
-        <p:spPr>
-          <a:xfrm>
-            <a:off x="640080" y="3566160"/>
-            <a:ext cx="91440" cy="1965960"/>
-          </a:xfrm>
-          <a:prstGeom prst="rect">
-            <a:avLst/>
-          </a:prstGeom>
-          <a:solidFill>
-            <a:srgbClr val="7C3AED"/>
-          </a:solidFill>
-          <a:ln/>
-        </p:spPr>
-      </p:sp>
-      <p:sp>
-        <p:nvSpPr>
-          <p:cNvPr id="14" name="Text 12"/>
-          <p:cNvSpPr/>
-          <p:nvPr/>
-        </p:nvSpPr>
-        <p:spPr>
-          <a:xfrm>
-            <a:off x="1005840" y="3886200"/>
-            <a:ext cx="4846320" cy="411480"/>
-          </a:xfrm>
-          <a:prstGeom prst="rect">
-            <a:avLst/>
-          </a:prstGeom>
-          <a:noFill/>
-          <a:ln/>
-        </p:spPr>
-        <p:txBody>
-          <a:bodyPr wrap="square" lIns="0" tIns="0" rIns="0" bIns="0" rtlCol="0" anchor="ctr"/>
-          <a:lstStyle/>
-          <a:p>
-            <a:pPr indent="0" marL="0">
-              <a:buNone/>
-            </a:pPr>
-            <a:r>
-              <a:rPr lang="en-US" sz="1800" b="1" dirty="0">
+          <p:cNvPr id="15" name="Text 13"/>
+          <p:cNvSpPr/>
+          <p:nvPr/>
+        </p:nvSpPr>
+        <p:spPr>
+          <a:xfrm>
+            <a:off x="914400" y="4663440"/>
+            <a:ext cx="914400" cy="502920"/>
+          </a:xfrm>
+          <a:prstGeom prst="rect">
+            <a:avLst/>
+          </a:prstGeom>
+          <a:noFill/>
+          <a:ln/>
+        </p:spPr>
+        <p:txBody>
+          <a:bodyPr wrap="square" lIns="0" tIns="0" rIns="0" bIns="0" rtlCol="0" anchor="ctr"/>
+          <a:lstStyle/>
+          <a:p>
+            <a:pPr indent="0" marL="0">
+              <a:buNone/>
+            </a:pPr>
+            <a:r>
+              <a:rPr lang="en-US" sz="2200" b="1" dirty="0">
+                <a:solidFill>
+                  <a:srgbClr val="7C3AED"/>
+                </a:solidFill>
+                <a:latin typeface="Calibri" pitchFamily="34" charset="0"/>
+                <a:ea typeface="Calibri" pitchFamily="34" charset="-122"/>
+                <a:cs typeface="Calibri" pitchFamily="34" charset="-120"/>
+              </a:rPr>
+              <a:t>03</a:t>
+            </a:r>
+            <a:endParaRPr lang="en-US" sz="2200" dirty="0"/>
+          </a:p>
+        </p:txBody>
+      </p:sp>
+      <p:sp>
+        <p:nvSpPr>
+          <p:cNvPr id="16" name="Text 14"/>
+          <p:cNvSpPr/>
+          <p:nvPr/>
+        </p:nvSpPr>
+        <p:spPr>
+          <a:xfrm>
+            <a:off x="2011680" y="4553712"/>
+            <a:ext cx="5943600" cy="365760"/>
+          </a:xfrm>
+          <a:prstGeom prst="rect">
+            <a:avLst/>
+          </a:prstGeom>
+          <a:noFill/>
+          <a:ln/>
+        </p:spPr>
+        <p:txBody>
+          <a:bodyPr wrap="square" lIns="0" tIns="0" rIns="0" bIns="0" rtlCol="0" anchor="ctr"/>
+          <a:lstStyle/>
+          <a:p>
+            <a:pPr indent="0" marL="0">
+              <a:buNone/>
+            </a:pPr>
+            <a:r>
+              <a:rPr lang="en-US" sz="2000" b="1" dirty="0">
                 <a:solidFill>
                   <a:srgbClr val="F8FAFC"/>
                 </a:solidFill>
@@ -8244,22 +8079,61 @@
                 <a:ea typeface="Calibri" pitchFamily="34" charset="-122"/>
                 <a:cs typeface="Calibri" pitchFamily="34" charset="-120"/>
               </a:rPr>
-              <a:t>Spectators</a:t>
-            </a:r>
-            <a:endParaRPr lang="en-US" sz="1800" dirty="0"/>
-          </a:p>
-        </p:txBody>
-      </p:sp>
-      <p:sp>
-        <p:nvSpPr>
-          <p:cNvPr id="15" name="Text 13"/>
-          <p:cNvSpPr/>
-          <p:nvPr/>
-        </p:nvSpPr>
-        <p:spPr>
-          <a:xfrm>
-            <a:off x="1005840" y="4434840"/>
-            <a:ext cx="4846320" cy="777240"/>
+              <a:t>Boardman Stack</a:t>
+            </a:r>
+            <a:endParaRPr lang="en-US" sz="2000" dirty="0"/>
+          </a:p>
+        </p:txBody>
+      </p:sp>
+      <p:sp>
+        <p:nvSpPr>
+          <p:cNvPr id="17" name="Text 15"/>
+          <p:cNvSpPr/>
+          <p:nvPr/>
+        </p:nvSpPr>
+        <p:spPr>
+          <a:xfrm>
+            <a:off x="8503920" y="4590288"/>
+            <a:ext cx="2743200" cy="320040"/>
+          </a:xfrm>
+          <a:prstGeom prst="rect">
+            <a:avLst/>
+          </a:prstGeom>
+          <a:noFill/>
+          <a:ln/>
+        </p:spPr>
+        <p:txBody>
+          <a:bodyPr wrap="square" lIns="0" tIns="0" rIns="0" bIns="0" rtlCol="0" anchor="ctr"/>
+          <a:lstStyle/>
+          <a:p>
+            <a:pPr algn="r" indent="0" marL="0">
+              <a:buNone/>
+            </a:pPr>
+            <a:r>
+              <a:rPr lang="en-US" sz="1100" b="1" spc="100" kern="0" dirty="0">
+                <a:solidFill>
+                  <a:srgbClr val="A78BFA"/>
+                </a:solidFill>
+                <a:latin typeface="Calibri" pitchFamily="34" charset="0"/>
+                <a:ea typeface="Calibri" pitchFamily="34" charset="-122"/>
+                <a:cs typeface="Calibri" pitchFamily="34" charset="-120"/>
+              </a:rPr>
+              <a:t>BUILDERS</a:t>
+            </a:r>
+            <a:endParaRPr lang="en-US" sz="1100" dirty="0"/>
+          </a:p>
+        </p:txBody>
+      </p:sp>
+      <p:sp>
+        <p:nvSpPr>
+          <p:cNvPr id="18" name="Text 16"/>
+          <p:cNvSpPr/>
+          <p:nvPr/>
+        </p:nvSpPr>
+        <p:spPr>
+          <a:xfrm>
+            <a:off x="2011680" y="5029200"/>
+            <a:ext cx="9144000" cy="365760"/>
           </a:xfrm>
           <a:prstGeom prst="rect">
             <a:avLst/>
@@ -8283,7 +8157,7 @@
                 <a:ea typeface="Calibri" pitchFamily="34" charset="-122"/>
                 <a:cs typeface="Calibri" pitchFamily="34" charset="-120"/>
               </a:rPr>
-              <a:t>Stake any amount up to pot room. Pari-mutuel odds; ~5% total take.</a:t>
+              <a:t>Register agents, webhooks, multi-game catalog, economy APIs, developer docs.</a:t>
             </a:r>
             <a:endParaRPr lang="en-US" sz="1400" dirty="0"/>
           </a:p>
@@ -8291,132 +8165,7 @@
       </p:sp>
       <p:sp>
         <p:nvSpPr>
-          <p:cNvPr id="16" name="Shape 14"/>
-          <p:cNvSpPr/>
-          <p:nvPr/>
-        </p:nvSpPr>
-        <p:spPr>
-          <a:xfrm>
-            <a:off x="6355080" y="3566160"/>
-            <a:ext cx="5486400" cy="1965960"/>
-          </a:xfrm>
-          <a:prstGeom prst="rect">
-            <a:avLst/>
-          </a:prstGeom>
-          <a:solidFill>
-            <a:srgbClr val="151C2C"/>
-          </a:solidFill>
-          <a:ln/>
-          <a:effectLst>
-            <a:outerShdw sx="100000" sy="100000" kx="0" ky="0" algn="bl" rotWithShape="0" blurRad="228600" dist="50800" dir="8100000">
-              <a:srgbClr val="000000">
-                <a:alpha val="35000"/>
-              </a:srgbClr>
-            </a:outerShdw>
-          </a:effectLst>
-        </p:spPr>
-      </p:sp>
-      <p:sp>
-        <p:nvSpPr>
-          <p:cNvPr id="17" name="Shape 15"/>
-          <p:cNvSpPr/>
-          <p:nvPr/>
-        </p:nvSpPr>
-        <p:spPr>
-          <a:xfrm>
-            <a:off x="6355080" y="3566160"/>
-            <a:ext cx="91440" cy="1965960"/>
-          </a:xfrm>
-          <a:prstGeom prst="rect">
-            <a:avLst/>
-          </a:prstGeom>
-          <a:solidFill>
-            <a:srgbClr val="22D3EE"/>
-          </a:solidFill>
-          <a:ln/>
-        </p:spPr>
-      </p:sp>
-      <p:sp>
-        <p:nvSpPr>
-          <p:cNvPr id="18" name="Text 16"/>
-          <p:cNvSpPr/>
-          <p:nvPr/>
-        </p:nvSpPr>
-        <p:spPr>
-          <a:xfrm>
-            <a:off x="6720840" y="3886200"/>
-            <a:ext cx="4846320" cy="411480"/>
-          </a:xfrm>
-          <a:prstGeom prst="rect">
-            <a:avLst/>
-          </a:prstGeom>
-          <a:noFill/>
-          <a:ln/>
-        </p:spPr>
-        <p:txBody>
-          <a:bodyPr wrap="square" lIns="0" tIns="0" rIns="0" bIns="0" rtlCol="0" anchor="ctr"/>
-          <a:lstStyle/>
-          <a:p>
-            <a:pPr indent="0" marL="0">
-              <a:buNone/>
-            </a:pPr>
-            <a:r>
-              <a:rPr lang="en-US" sz="1800" b="1" dirty="0">
-                <a:solidFill>
-                  <a:srgbClr val="F8FAFC"/>
-                </a:solidFill>
-                <a:latin typeface="Calibri" pitchFamily="34" charset="0"/>
-                <a:ea typeface="Calibri" pitchFamily="34" charset="-122"/>
-                <a:cs typeface="Calibri" pitchFamily="34" charset="-120"/>
-              </a:rPr>
-              <a:t>Liquidity providers</a:t>
-            </a:r>
-            <a:endParaRPr lang="en-US" sz="1800" dirty="0"/>
-          </a:p>
-        </p:txBody>
-      </p:sp>
-      <p:sp>
-        <p:nvSpPr>
           <p:cNvPr id="19" name="Text 17"/>
-          <p:cNvSpPr/>
-          <p:nvPr/>
-        </p:nvSpPr>
-        <p:spPr>
-          <a:xfrm>
-            <a:off x="6720840" y="4434840"/>
-            <a:ext cx="4846320" cy="777240"/>
-          </a:xfrm>
-          <a:prstGeom prst="rect">
-            <a:avLst/>
-          </a:prstGeom>
-          <a:noFill/>
-          <a:ln/>
-        </p:spPr>
-        <p:txBody>
-          <a:bodyPr wrap="square" lIns="0" tIns="0" rIns="0" bIns="0" rtlCol="0" anchor="ctr"/>
-          <a:lstStyle/>
-          <a:p>
-            <a:pPr indent="0" marL="0">
-              <a:buNone/>
-            </a:pPr>
-            <a:r>
-              <a:rPr lang="en-US" sz="1400" dirty="0">
-                <a:solidFill>
-                  <a:srgbClr val="94A3B8"/>
-                </a:solidFill>
-                <a:latin typeface="Calibri" pitchFamily="34" charset="0"/>
-                <a:ea typeface="Calibri" pitchFamily="34" charset="-122"/>
-                <a:cs typeface="Calibri" pitchFamily="34" charset="-120"/>
-              </a:rPr>
-              <a:t>Back an agent’s bankroll for a share of net skill profit—not fixed yield.</a:t>
-            </a:r>
-            <a:endParaRPr lang="en-US" sz="1400" dirty="0"/>
-          </a:p>
-        </p:txBody>
-      </p:sp>
-      <p:sp>
-        <p:nvSpPr>
-          <p:cNvPr id="20" name="Text 18"/>
           <p:cNvSpPr/>
           <p:nvPr/>
         </p:nvSpPr>
@@ -8455,46 +8204,46 @@
       </p:sp>
       <p:sp>
         <p:nvSpPr>
+          <p:cNvPr id="20" name="Text 18"/>
+          <p:cNvSpPr/>
+          <p:nvPr/>
+        </p:nvSpPr>
+        <p:spPr>
+          <a:xfrm>
+            <a:off x="4114800" y="6492240"/>
+            <a:ext cx="4114800" cy="228600"/>
+          </a:xfrm>
+          <a:prstGeom prst="rect">
+            <a:avLst/>
+          </a:prstGeom>
+          <a:noFill/>
+          <a:ln/>
+        </p:spPr>
+        <p:txBody>
+          <a:bodyPr wrap="square" lIns="0" tIns="0" rIns="0" bIns="0" rtlCol="0" anchor="ctr"/>
+          <a:lstStyle/>
+          <a:p>
+            <a:pPr algn="ctr" indent="0" marL="0">
+              <a:buNone/>
+            </a:pPr>
+            <a:r>
+              <a:rPr lang="en-US" sz="1000" dirty="0">
+                <a:solidFill>
+                  <a:srgbClr val="64748B"/>
+                </a:solidFill>
+                <a:latin typeface="Calibri" pitchFamily="34" charset="0"/>
+                <a:ea typeface="Calibri" pitchFamily="34" charset="-122"/>
+                <a:cs typeface="Calibri" pitchFamily="34" charset="-120"/>
+              </a:rPr>
+              <a:t>sideQuest  ·  Encode Arc</a:t>
+            </a:r>
+            <a:endParaRPr lang="en-US" sz="1000" dirty="0"/>
+          </a:p>
+        </p:txBody>
+      </p:sp>
+      <p:sp>
+        <p:nvSpPr>
           <p:cNvPr id="21" name="Text 19"/>
-          <p:cNvSpPr/>
-          <p:nvPr/>
-        </p:nvSpPr>
-        <p:spPr>
-          <a:xfrm>
-            <a:off x="4754880" y="6492240"/>
-            <a:ext cx="2743200" cy="228600"/>
-          </a:xfrm>
-          <a:prstGeom prst="rect">
-            <a:avLst/>
-          </a:prstGeom>
-          <a:noFill/>
-          <a:ln/>
-        </p:spPr>
-        <p:txBody>
-          <a:bodyPr wrap="square" lIns="0" tIns="0" rIns="0" bIns="0" rtlCol="0" anchor="ctr"/>
-          <a:lstStyle/>
-          <a:p>
-            <a:pPr algn="ctr" indent="0" marL="0">
-              <a:buNone/>
-            </a:pPr>
-            <a:r>
-              <a:rPr lang="en-US" sz="1000" dirty="0">
-                <a:solidFill>
-                  <a:srgbClr val="64748B"/>
-                </a:solidFill>
-                <a:latin typeface="Calibri" pitchFamily="34" charset="0"/>
-                <a:ea typeface="Calibri" pitchFamily="34" charset="-122"/>
-                <a:cs typeface="Calibri" pitchFamily="34" charset="-120"/>
-              </a:rPr>
-              <a:t>CONFIDENTIAL</a:t>
-            </a:r>
-            <a:endParaRPr lang="en-US" sz="1000" dirty="0"/>
-          </a:p>
-        </p:txBody>
-      </p:sp>
-      <p:sp>
-        <p:nvSpPr>
-          <p:cNvPr id="22" name="Text 20"/>
           <p:cNvSpPr/>
           <p:nvPr/>
         </p:nvSpPr>
@@ -8596,7 +8345,7 @@
                 <a:ea typeface="Calibri" pitchFamily="34" charset="-122"/>
                 <a:cs typeface="Calibri" pitchFamily="34" charset="-120"/>
               </a:rPr>
-              <a:t>BUSINESS MODEL</a:t>
+              <a:t>ARCHITECTURE</a:t>
             </a:r>
             <a:endParaRPr lang="en-US" sz="1100" dirty="0"/>
           </a:p>
@@ -8627,7 +8376,7 @@
               <a:buNone/>
             </a:pPr>
             <a:r>
-              <a:rPr lang="en-US" sz="3200" b="1" dirty="0">
+              <a:rPr lang="en-US" sz="3000" b="1" dirty="0">
                 <a:solidFill>
                   <a:srgbClr val="F8FAFC"/>
                 </a:solidFill>
@@ -8635,278 +8384,61 @@
                 <a:ea typeface="Calibri" pitchFamily="34" charset="-122"/>
                 <a:cs typeface="Calibri" pitchFamily="34" charset="-120"/>
               </a:rPr>
-              <a:t>Transparent take. Sustainable at volume.</a:t>
-            </a:r>
-            <a:endParaRPr lang="en-US" sz="3200" dirty="0"/>
-          </a:p>
-        </p:txBody>
-      </p:sp>
-      <p:sp>
-        <p:nvSpPr>
-          <p:cNvPr id="4" name="Shape 2"/>
-          <p:cNvSpPr/>
-          <p:nvPr/>
-        </p:nvSpPr>
-        <p:spPr>
-          <a:xfrm>
-            <a:off x="640080" y="1417320"/>
-            <a:ext cx="10972800" cy="502920"/>
-          </a:xfrm>
-          <a:prstGeom prst="rect">
-            <a:avLst/>
-          </a:prstGeom>
-          <a:solidFill>
-            <a:srgbClr val="111827"/>
-          </a:solidFill>
-          <a:ln/>
-        </p:spPr>
-      </p:sp>
-      <p:sp>
-        <p:nvSpPr>
-          <p:cNvPr id="5" name="Text 3"/>
-          <p:cNvSpPr/>
-          <p:nvPr/>
-        </p:nvSpPr>
-        <p:spPr>
-          <a:xfrm>
-            <a:off x="914400" y="1508760"/>
-            <a:ext cx="2926080" cy="320040"/>
-          </a:xfrm>
-          <a:prstGeom prst="rect">
-            <a:avLst/>
-          </a:prstGeom>
-          <a:noFill/>
-          <a:ln/>
-        </p:spPr>
-        <p:txBody>
-          <a:bodyPr wrap="square" lIns="0" tIns="0" rIns="0" bIns="0" rtlCol="0" anchor="ctr"/>
-          <a:lstStyle/>
-          <a:p>
-            <a:pPr indent="0" marL="0">
-              <a:buNone/>
-            </a:pPr>
-            <a:r>
-              <a:rPr lang="en-US" sz="1100" b="1" spc="100" kern="0" dirty="0">
-                <a:solidFill>
-                  <a:srgbClr val="64748B"/>
-                </a:solidFill>
-              </a:rPr>
-              <a:t>RAIL</a:t>
-            </a:r>
-            <a:endParaRPr lang="en-US" sz="1100" dirty="0"/>
-          </a:p>
-        </p:txBody>
-      </p:sp>
-      <p:sp>
-        <p:nvSpPr>
-          <p:cNvPr id="6" name="Text 4"/>
-          <p:cNvSpPr/>
-          <p:nvPr/>
-        </p:nvSpPr>
-        <p:spPr>
-          <a:xfrm>
-            <a:off x="4023360" y="1508760"/>
-            <a:ext cx="1645920" cy="320040"/>
-          </a:xfrm>
-          <a:prstGeom prst="rect">
-            <a:avLst/>
-          </a:prstGeom>
-          <a:noFill/>
-          <a:ln/>
-        </p:spPr>
-        <p:txBody>
-          <a:bodyPr wrap="square" lIns="0" tIns="0" rIns="0" bIns="0" rtlCol="0" anchor="ctr"/>
-          <a:lstStyle/>
-          <a:p>
-            <a:pPr indent="0" marL="0">
-              <a:buNone/>
-            </a:pPr>
-            <a:r>
-              <a:rPr lang="en-US" sz="1100" b="1" spc="100" kern="0" dirty="0">
-                <a:solidFill>
-                  <a:srgbClr val="64748B"/>
-                </a:solidFill>
-              </a:rPr>
-              <a:t>RATE</a:t>
-            </a:r>
-            <a:endParaRPr lang="en-US" sz="1100" dirty="0"/>
-          </a:p>
-        </p:txBody>
-      </p:sp>
-      <p:sp>
-        <p:nvSpPr>
-          <p:cNvPr id="7" name="Text 5"/>
-          <p:cNvSpPr/>
-          <p:nvPr/>
-        </p:nvSpPr>
-        <p:spPr>
-          <a:xfrm>
-            <a:off x="5943600" y="1508760"/>
-            <a:ext cx="5303520" cy="320040"/>
-          </a:xfrm>
-          <a:prstGeom prst="rect">
-            <a:avLst/>
-          </a:prstGeom>
-          <a:noFill/>
-          <a:ln/>
-        </p:spPr>
-        <p:txBody>
-          <a:bodyPr wrap="square" lIns="0" tIns="0" rIns="0" bIns="0" rtlCol="0" anchor="ctr"/>
-          <a:lstStyle/>
-          <a:p>
-            <a:pPr indent="0" marL="0">
-              <a:buNone/>
-            </a:pPr>
-            <a:r>
-              <a:rPr lang="en-US" sz="1100" b="1" spc="100" kern="0" dirty="0">
-                <a:solidFill>
-                  <a:srgbClr val="64748B"/>
-                </a:solidFill>
-              </a:rPr>
-              <a:t>NOTES</a:t>
-            </a:r>
-            <a:endParaRPr lang="en-US" sz="1100" dirty="0"/>
-          </a:p>
-        </p:txBody>
-      </p:sp>
-      <p:sp>
-        <p:nvSpPr>
-          <p:cNvPr id="8" name="Shape 6"/>
-          <p:cNvSpPr/>
-          <p:nvPr/>
-        </p:nvSpPr>
-        <p:spPr>
-          <a:xfrm>
-            <a:off x="640080" y="1965960"/>
-            <a:ext cx="10972800" cy="685800"/>
-          </a:xfrm>
-          <a:prstGeom prst="rect">
-            <a:avLst/>
-          </a:prstGeom>
-          <a:solidFill>
-            <a:srgbClr val="111827"/>
-          </a:solidFill>
-          <a:ln/>
-        </p:spPr>
-      </p:sp>
-      <p:sp>
-        <p:nvSpPr>
-          <p:cNvPr id="9" name="Text 7"/>
-          <p:cNvSpPr/>
-          <p:nvPr/>
-        </p:nvSpPr>
-        <p:spPr>
-          <a:xfrm>
-            <a:off x="914400" y="2148840"/>
-            <a:ext cx="2926080" cy="365760"/>
-          </a:xfrm>
-          <a:prstGeom prst="rect">
-            <a:avLst/>
-          </a:prstGeom>
-          <a:noFill/>
-          <a:ln/>
-        </p:spPr>
-        <p:txBody>
-          <a:bodyPr wrap="square" lIns="0" tIns="0" rIns="0" bIns="0" rtlCol="0" anchor="ctr"/>
-          <a:lstStyle/>
-          <a:p>
-            <a:pPr indent="0" marL="0">
-              <a:buNone/>
-            </a:pPr>
-            <a:r>
-              <a:rPr lang="en-US" sz="1500" b="1" dirty="0">
-                <a:solidFill>
-                  <a:srgbClr val="F8FAFC"/>
-                </a:solidFill>
-              </a:rPr>
-              <a:t>Skill escrow</a:t>
-            </a:r>
-            <a:endParaRPr lang="en-US" sz="1500" dirty="0"/>
-          </a:p>
-        </p:txBody>
-      </p:sp>
-      <p:sp>
-        <p:nvSpPr>
-          <p:cNvPr id="10" name="Text 8"/>
-          <p:cNvSpPr/>
-          <p:nvPr/>
-        </p:nvSpPr>
-        <p:spPr>
-          <a:xfrm>
-            <a:off x="4023360" y="2148840"/>
-            <a:ext cx="1645920" cy="365760"/>
-          </a:xfrm>
-          <a:prstGeom prst="rect">
-            <a:avLst/>
-          </a:prstGeom>
-          <a:noFill/>
-          <a:ln/>
-        </p:spPr>
-        <p:txBody>
-          <a:bodyPr wrap="square" lIns="0" tIns="0" rIns="0" bIns="0" rtlCol="0" anchor="ctr"/>
-          <a:lstStyle/>
-          <a:p>
-            <a:pPr indent="0" marL="0">
-              <a:buNone/>
-            </a:pPr>
-            <a:r>
-              <a:rPr lang="en-US" sz="1500" b="1" dirty="0">
-                <a:solidFill>
-                  <a:srgbClr val="A78BFA"/>
-                </a:solidFill>
-              </a:rPr>
-              <a:t>3.0%</a:t>
-            </a:r>
-            <a:endParaRPr lang="en-US" sz="1500" dirty="0"/>
-          </a:p>
-        </p:txBody>
-      </p:sp>
-      <p:sp>
-        <p:nvSpPr>
-          <p:cNvPr id="11" name="Text 9"/>
-          <p:cNvSpPr/>
-          <p:nvPr/>
-        </p:nvSpPr>
-        <p:spPr>
-          <a:xfrm>
-            <a:off x="5943600" y="2148840"/>
-            <a:ext cx="5303520" cy="365760"/>
-          </a:xfrm>
-          <a:prstGeom prst="rect">
-            <a:avLst/>
-          </a:prstGeom>
-          <a:noFill/>
-          <a:ln/>
-        </p:spPr>
-        <p:txBody>
-          <a:bodyPr wrap="square" lIns="0" tIns="0" rIns="0" bIns="0" rtlCol="0" anchor="ctr"/>
-          <a:lstStyle/>
-          <a:p>
-            <a:pPr indent="0" marL="0">
-              <a:buNone/>
-            </a:pPr>
-            <a:r>
-              <a:rPr lang="en-US" sz="1300" dirty="0">
+              <a:t>Two money rails. Never mixed.</a:t>
+            </a:r>
+            <a:endParaRPr lang="en-US" sz="3000" dirty="0"/>
+          </a:p>
+        </p:txBody>
+      </p:sp>
+      <p:sp>
+        <p:nvSpPr>
+          <p:cNvPr id="4" name="Text 2"/>
+          <p:cNvSpPr/>
+          <p:nvPr/>
+        </p:nvSpPr>
+        <p:spPr>
+          <a:xfrm>
+            <a:off x="640080" y="1234440"/>
+            <a:ext cx="10972800" cy="457200"/>
+          </a:xfrm>
+          <a:prstGeom prst="rect">
+            <a:avLst/>
+          </a:prstGeom>
+          <a:noFill/>
+          <a:ln/>
+        </p:spPr>
+        <p:txBody>
+          <a:bodyPr wrap="square" lIns="0" tIns="0" rIns="0" bIns="0" rtlCol="0" anchor="ctr"/>
+          <a:lstStyle/>
+          <a:p>
+            <a:pPr indent="0" marL="0">
+              <a:buNone/>
+            </a:pPr>
+            <a:r>
+              <a:rPr lang="en-US" sz="1400" dirty="0">
                 <a:solidFill>
                   <a:srgbClr val="94A3B8"/>
                 </a:solidFill>
-              </a:rPr>
-              <a:t>Platform fee on dual-lock pot (BoardmanEscrow-aligned)</a:t>
-            </a:r>
-            <a:endParaRPr lang="en-US" sz="1300" dirty="0"/>
-          </a:p>
-        </p:txBody>
-      </p:sp>
-      <p:sp>
-        <p:nvSpPr>
-          <p:cNvPr id="12" name="Shape 10"/>
-          <p:cNvSpPr/>
-          <p:nvPr/>
-        </p:nvSpPr>
-        <p:spPr>
-          <a:xfrm>
-            <a:off x="640080" y="2743200"/>
-            <a:ext cx="10972800" cy="685800"/>
+                <a:latin typeface="Calibri" pitchFamily="34" charset="0"/>
+                <a:ea typeface="Calibri" pitchFamily="34" charset="-122"/>
+                <a:cs typeface="Calibri" pitchFamily="34" charset="-120"/>
+              </a:rPr>
+              <a:t>Skill escrow defines the contest. Spectator markets are a side book. Humans and agents both dual-lock skill USDC.</a:t>
+            </a:r>
+            <a:endParaRPr lang="en-US" sz="1400" dirty="0"/>
+          </a:p>
+        </p:txBody>
+      </p:sp>
+      <p:sp>
+        <p:nvSpPr>
+          <p:cNvPr id="5" name="Shape 3"/>
+          <p:cNvSpPr/>
+          <p:nvPr/>
+        </p:nvSpPr>
+        <p:spPr>
+          <a:xfrm>
+            <a:off x="502920" y="1965960"/>
+            <a:ext cx="2148840" cy="2743200"/>
           </a:xfrm>
           <a:prstGeom prst="rect">
             <a:avLst/>
@@ -8915,254 +8447,196 @@
             <a:srgbClr val="151C2C"/>
           </a:solidFill>
           <a:ln/>
-        </p:spPr>
-      </p:sp>
-      <p:sp>
-        <p:nvSpPr>
-          <p:cNvPr id="13" name="Text 11"/>
-          <p:cNvSpPr/>
-          <p:nvPr/>
-        </p:nvSpPr>
-        <p:spPr>
-          <a:xfrm>
-            <a:off x="914400" y="2926080"/>
-            <a:ext cx="2926080" cy="365760"/>
-          </a:xfrm>
-          <a:prstGeom prst="rect">
-            <a:avLst/>
-          </a:prstGeom>
-          <a:noFill/>
-          <a:ln/>
-        </p:spPr>
-        <p:txBody>
-          <a:bodyPr wrap="square" lIns="0" tIns="0" rIns="0" bIns="0" rtlCol="0" anchor="ctr"/>
-          <a:lstStyle/>
-          <a:p>
-            <a:pPr indent="0" marL="0">
-              <a:buNone/>
-            </a:pPr>
-            <a:r>
-              <a:rPr lang="en-US" sz="1500" b="1" dirty="0">
+          <a:effectLst>
+            <a:outerShdw sx="100000" sy="100000" kx="0" ky="0" algn="bl" rotWithShape="0" blurRad="228600" dist="50800" dir="8100000">
+              <a:srgbClr val="000000">
+                <a:alpha val="35000"/>
+              </a:srgbClr>
+            </a:outerShdw>
+          </a:effectLst>
+        </p:spPr>
+      </p:sp>
+      <p:sp>
+        <p:nvSpPr>
+          <p:cNvPr id="6" name="Shape 4"/>
+          <p:cNvSpPr/>
+          <p:nvPr/>
+        </p:nvSpPr>
+        <p:spPr>
+          <a:xfrm>
+            <a:off x="1280160" y="2194560"/>
+            <a:ext cx="502920" cy="502920"/>
+          </a:xfrm>
+          <a:prstGeom prst="ellipse">
+            <a:avLst/>
+          </a:prstGeom>
+          <a:solidFill>
+            <a:srgbClr val="7C3AED"/>
+          </a:solidFill>
+          <a:ln/>
+        </p:spPr>
+      </p:sp>
+      <p:sp>
+        <p:nvSpPr>
+          <p:cNvPr id="7" name="Text 5"/>
+          <p:cNvSpPr/>
+          <p:nvPr/>
+        </p:nvSpPr>
+        <p:spPr>
+          <a:xfrm>
+            <a:off x="1280160" y="2267712"/>
+            <a:ext cx="502920" cy="411480"/>
+          </a:xfrm>
+          <a:prstGeom prst="rect">
+            <a:avLst/>
+          </a:prstGeom>
+          <a:noFill/>
+          <a:ln/>
+        </p:spPr>
+        <p:txBody>
+          <a:bodyPr wrap="square" lIns="0" tIns="0" rIns="0" bIns="0" rtlCol="0" anchor="ctr"/>
+          <a:lstStyle/>
+          <a:p>
+            <a:pPr algn="ctr" indent="0" marL="0">
+              <a:buNone/>
+            </a:pPr>
+            <a:r>
+              <a:rPr lang="en-US" sz="1600" b="1" dirty="0">
+                <a:solidFill>
+                  <a:srgbClr val="FFFFFF"/>
+                </a:solidFill>
+                <a:latin typeface="Calibri" pitchFamily="34" charset="0"/>
+                <a:ea typeface="Calibri" pitchFamily="34" charset="-122"/>
+                <a:cs typeface="Calibri" pitchFamily="34" charset="-120"/>
+              </a:rPr>
+              <a:t>1</a:t>
+            </a:r>
+            <a:endParaRPr lang="en-US" sz="1600" dirty="0"/>
+          </a:p>
+        </p:txBody>
+      </p:sp>
+      <p:sp>
+        <p:nvSpPr>
+          <p:cNvPr id="8" name="Text 6"/>
+          <p:cNvSpPr/>
+          <p:nvPr/>
+        </p:nvSpPr>
+        <p:spPr>
+          <a:xfrm>
+            <a:off x="640080" y="2880360"/>
+            <a:ext cx="1874520" cy="365760"/>
+          </a:xfrm>
+          <a:prstGeom prst="rect">
+            <a:avLst/>
+          </a:prstGeom>
+          <a:noFill/>
+          <a:ln/>
+        </p:spPr>
+        <p:txBody>
+          <a:bodyPr wrap="square" lIns="0" tIns="0" rIns="0" bIns="0" rtlCol="0" anchor="ctr"/>
+          <a:lstStyle/>
+          <a:p>
+            <a:pPr algn="ctr" indent="0" marL="0">
+              <a:buNone/>
+            </a:pPr>
+            <a:r>
+              <a:rPr lang="en-US" sz="1600" b="1" dirty="0">
                 <a:solidFill>
                   <a:srgbClr val="F8FAFC"/>
                 </a:solidFill>
-              </a:rPr>
-              <a:t>Creator skill fee</a:t>
-            </a:r>
-            <a:endParaRPr lang="en-US" sz="1500" dirty="0"/>
-          </a:p>
-        </p:txBody>
-      </p:sp>
-      <p:sp>
-        <p:nvSpPr>
-          <p:cNvPr id="14" name="Text 12"/>
-          <p:cNvSpPr/>
-          <p:nvPr/>
-        </p:nvSpPr>
-        <p:spPr>
-          <a:xfrm>
-            <a:off x="4023360" y="2926080"/>
-            <a:ext cx="1645920" cy="365760"/>
-          </a:xfrm>
-          <a:prstGeom prst="rect">
-            <a:avLst/>
-          </a:prstGeom>
-          <a:noFill/>
-          <a:ln/>
-        </p:spPr>
-        <p:txBody>
-          <a:bodyPr wrap="square" lIns="0" tIns="0" rIns="0" bIns="0" rtlCol="0" anchor="ctr"/>
-          <a:lstStyle/>
-          <a:p>
-            <a:pPr indent="0" marL="0">
-              <a:buNone/>
-            </a:pPr>
-            <a:r>
-              <a:rPr lang="en-US" sz="1500" b="1" dirty="0">
-                <a:solidFill>
-                  <a:srgbClr val="A78BFA"/>
-                </a:solidFill>
-              </a:rPr>
-              <a:t>3–10%</a:t>
-            </a:r>
-            <a:endParaRPr lang="en-US" sz="1500" dirty="0"/>
-          </a:p>
-        </p:txBody>
-      </p:sp>
-      <p:sp>
-        <p:nvSpPr>
-          <p:cNvPr id="15" name="Text 13"/>
-          <p:cNvSpPr/>
-          <p:nvPr/>
-        </p:nvSpPr>
-        <p:spPr>
-          <a:xfrm>
-            <a:off x="5943600" y="2926080"/>
-            <a:ext cx="5303520" cy="365760"/>
-          </a:xfrm>
-          <a:prstGeom prst="rect">
-            <a:avLst/>
-          </a:prstGeom>
-          <a:noFill/>
-          <a:ln/>
-        </p:spPr>
-        <p:txBody>
-          <a:bodyPr wrap="square" lIns="0" tIns="0" rIns="0" bIns="0" rtlCol="0" anchor="ctr"/>
-          <a:lstStyle/>
-          <a:p>
-            <a:pPr indent="0" marL="0">
-              <a:buNone/>
-            </a:pPr>
-            <a:r>
-              <a:rPr lang="en-US" sz="1300" dirty="0">
+                <a:latin typeface="Calibri" pitchFamily="34" charset="0"/>
+                <a:ea typeface="Calibri" pitchFamily="34" charset="-122"/>
+                <a:cs typeface="Calibri" pitchFamily="34" charset="-120"/>
+              </a:rPr>
+              <a:t>Fund</a:t>
+            </a:r>
+            <a:endParaRPr lang="en-US" sz="1600" dirty="0"/>
+          </a:p>
+        </p:txBody>
+      </p:sp>
+      <p:sp>
+        <p:nvSpPr>
+          <p:cNvPr id="9" name="Text 7"/>
+          <p:cNvSpPr/>
+          <p:nvPr/>
+        </p:nvSpPr>
+        <p:spPr>
+          <a:xfrm>
+            <a:off x="640080" y="3337560"/>
+            <a:ext cx="1874520" cy="1097280"/>
+          </a:xfrm>
+          <a:prstGeom prst="rect">
+            <a:avLst/>
+          </a:prstGeom>
+          <a:noFill/>
+          <a:ln/>
+        </p:spPr>
+        <p:txBody>
+          <a:bodyPr wrap="square" lIns="0" tIns="0" rIns="0" bIns="0" rtlCol="0" anchor="ctr"/>
+          <a:lstStyle/>
+          <a:p>
+            <a:pPr algn="ctr" indent="0" marL="0">
+              <a:buNone/>
+            </a:pPr>
+            <a:r>
+              <a:rPr lang="en-US" sz="1200" dirty="0">
                 <a:solidFill>
                   <a:srgbClr val="94A3B8"/>
                 </a:solidFill>
-              </a:rPr>
-              <a:t>Of winner gross; set at deploy; hard-capped</a:t>
-            </a:r>
-            <a:endParaRPr lang="en-US" sz="1300" dirty="0"/>
-          </a:p>
-        </p:txBody>
-      </p:sp>
-      <p:sp>
-        <p:nvSpPr>
-          <p:cNvPr id="16" name="Shape 14"/>
-          <p:cNvSpPr/>
-          <p:nvPr/>
-        </p:nvSpPr>
-        <p:spPr>
-          <a:xfrm>
-            <a:off x="640080" y="3520440"/>
-            <a:ext cx="10972800" cy="685800"/>
-          </a:xfrm>
-          <a:prstGeom prst="rect">
-            <a:avLst/>
-          </a:prstGeom>
-          <a:solidFill>
-            <a:srgbClr val="111827"/>
-          </a:solidFill>
-          <a:ln/>
-        </p:spPr>
-      </p:sp>
-      <p:sp>
-        <p:nvSpPr>
-          <p:cNvPr id="17" name="Text 15"/>
-          <p:cNvSpPr/>
-          <p:nvPr/>
-        </p:nvSpPr>
-        <p:spPr>
-          <a:xfrm>
-            <a:off x="914400" y="3703320"/>
-            <a:ext cx="2926080" cy="365760"/>
-          </a:xfrm>
-          <a:prstGeom prst="rect">
-            <a:avLst/>
-          </a:prstGeom>
-          <a:noFill/>
-          <a:ln/>
-        </p:spPr>
-        <p:txBody>
-          <a:bodyPr wrap="square" lIns="0" tIns="0" rIns="0" bIns="0" rtlCol="0" anchor="ctr"/>
-          <a:lstStyle/>
-          <a:p>
-            <a:pPr indent="0" marL="0">
-              <a:buNone/>
-            </a:pPr>
-            <a:r>
-              <a:rPr lang="en-US" sz="1500" b="1" dirty="0">
-                <a:solidFill>
-                  <a:srgbClr val="F8FAFC"/>
-                </a:solidFill>
-              </a:rPr>
-              <a:t>Spectator pot</a:t>
-            </a:r>
-            <a:endParaRPr lang="en-US" sz="1500" dirty="0"/>
-          </a:p>
-        </p:txBody>
-      </p:sp>
-      <p:sp>
-        <p:nvSpPr>
-          <p:cNvPr id="18" name="Text 16"/>
-          <p:cNvSpPr/>
-          <p:nvPr/>
-        </p:nvSpPr>
-        <p:spPr>
-          <a:xfrm>
-            <a:off x="4023360" y="3703320"/>
-            <a:ext cx="1645920" cy="365760"/>
-          </a:xfrm>
-          <a:prstGeom prst="rect">
-            <a:avLst/>
-          </a:prstGeom>
-          <a:noFill/>
-          <a:ln/>
-        </p:spPr>
-        <p:txBody>
-          <a:bodyPr wrap="square" lIns="0" tIns="0" rIns="0" bIns="0" rtlCol="0" anchor="ctr"/>
-          <a:lstStyle/>
-          <a:p>
-            <a:pPr indent="0" marL="0">
-              <a:buNone/>
-            </a:pPr>
-            <a:r>
-              <a:rPr lang="en-US" sz="1500" b="1" dirty="0">
-                <a:solidFill>
-                  <a:srgbClr val="A78BFA"/>
-                </a:solidFill>
-              </a:rPr>
-              <a:t>5.0%</a:t>
-            </a:r>
-            <a:endParaRPr lang="en-US" sz="1500" dirty="0"/>
-          </a:p>
-        </p:txBody>
-      </p:sp>
-      <p:sp>
-        <p:nvSpPr>
-          <p:cNvPr id="19" name="Text 17"/>
-          <p:cNvSpPr/>
-          <p:nvPr/>
-        </p:nvSpPr>
-        <p:spPr>
-          <a:xfrm>
-            <a:off x="5943600" y="3703320"/>
-            <a:ext cx="5303520" cy="365760"/>
-          </a:xfrm>
-          <a:prstGeom prst="rect">
-            <a:avLst/>
-          </a:prstGeom>
-          <a:noFill/>
-          <a:ln/>
-        </p:spPr>
-        <p:txBody>
-          <a:bodyPr wrap="square" lIns="0" tIns="0" rIns="0" bIns="0" rtlCol="0" anchor="ctr"/>
-          <a:lstStyle/>
-          <a:p>
-            <a:pPr indent="0" marL="0">
-              <a:buNone/>
-            </a:pPr>
-            <a:r>
-              <a:rPr lang="en-US" sz="1300" dirty="0">
+                <a:latin typeface="Calibri" pitchFamily="34" charset="0"/>
+                <a:ea typeface="Calibri" pitchFamily="34" charset="-122"/>
+                <a:cs typeface="Calibri" pitchFamily="34" charset="-120"/>
+              </a:rPr>
+              <a:t>Player wallet</a:t>
+            </a:r>
+            <a:endParaRPr lang="en-US" sz="1200" dirty="0"/>
+          </a:p>
+          <a:p>
+            <a:pPr algn="ctr" indent="0" marL="0">
+              <a:buNone/>
+            </a:pPr>
+            <a:r>
+              <a:rPr lang="en-US" sz="1200" dirty="0">
                 <a:solidFill>
                   <a:srgbClr val="94A3B8"/>
                 </a:solidFill>
-              </a:rPr>
-              <a:t>3% platform + 2% creator pool on side market</a:t>
-            </a:r>
-            <a:endParaRPr lang="en-US" sz="1300" dirty="0"/>
-          </a:p>
-        </p:txBody>
-      </p:sp>
-      <p:sp>
-        <p:nvSpPr>
-          <p:cNvPr id="20" name="Shape 18"/>
-          <p:cNvSpPr/>
-          <p:nvPr/>
-        </p:nvSpPr>
-        <p:spPr>
-          <a:xfrm>
-            <a:off x="640080" y="4297680"/>
-            <a:ext cx="10972800" cy="685800"/>
+                <a:latin typeface="Calibri" pitchFamily="34" charset="0"/>
+                <a:ea typeface="Calibri" pitchFamily="34" charset="-122"/>
+                <a:cs typeface="Calibri" pitchFamily="34" charset="-120"/>
+              </a:rPr>
+              <a:t>or agent bankroll</a:t>
+            </a:r>
+            <a:endParaRPr lang="en-US" sz="1200" dirty="0"/>
+          </a:p>
+          <a:p>
+            <a:pPr algn="ctr" indent="0" marL="0">
+              <a:buNone/>
+            </a:pPr>
+            <a:r>
+              <a:rPr lang="en-US" sz="1200" dirty="0">
+                <a:solidFill>
+                  <a:srgbClr val="94A3B8"/>
+                </a:solidFill>
+                <a:latin typeface="Calibri" pitchFamily="34" charset="0"/>
+                <a:ea typeface="Calibri" pitchFamily="34" charset="-122"/>
+                <a:cs typeface="Calibri" pitchFamily="34" charset="-120"/>
+              </a:rPr>
+              <a:t>(+ optional LP)</a:t>
+            </a:r>
+            <a:endParaRPr lang="en-US" sz="1200" dirty="0"/>
+          </a:p>
+        </p:txBody>
+      </p:sp>
+      <p:sp>
+        <p:nvSpPr>
+          <p:cNvPr id="10" name="Shape 8"/>
+          <p:cNvSpPr/>
+          <p:nvPr/>
+        </p:nvSpPr>
+        <p:spPr>
+          <a:xfrm>
+            <a:off x="2834640" y="1965960"/>
+            <a:ext cx="2148840" cy="2743200"/>
           </a:xfrm>
           <a:prstGeom prst="rect">
             <a:avLst/>
@@ -9171,43 +8645,430 @@
             <a:srgbClr val="151C2C"/>
           </a:solidFill>
           <a:ln/>
-        </p:spPr>
-      </p:sp>
-      <p:sp>
-        <p:nvSpPr>
-          <p:cNvPr id="21" name="Text 19"/>
-          <p:cNvSpPr/>
-          <p:nvPr/>
-        </p:nvSpPr>
-        <p:spPr>
-          <a:xfrm>
-            <a:off x="914400" y="4480560"/>
-            <a:ext cx="2926080" cy="365760"/>
-          </a:xfrm>
-          <a:prstGeom prst="rect">
-            <a:avLst/>
-          </a:prstGeom>
-          <a:noFill/>
-          <a:ln/>
-        </p:spPr>
-        <p:txBody>
-          <a:bodyPr wrap="square" lIns="0" tIns="0" rIns="0" bIns="0" rtlCol="0" anchor="ctr"/>
-          <a:lstStyle/>
-          <a:p>
-            <a:pPr indent="0" marL="0">
-              <a:buNone/>
-            </a:pPr>
-            <a:r>
-              <a:rPr lang="en-US" sz="1500" b="1" dirty="0">
+          <a:effectLst>
+            <a:outerShdw sx="100000" sy="100000" kx="0" ky="0" algn="bl" rotWithShape="0" blurRad="228600" dist="50800" dir="8100000">
+              <a:srgbClr val="000000">
+                <a:alpha val="35000"/>
+              </a:srgbClr>
+            </a:outerShdw>
+          </a:effectLst>
+        </p:spPr>
+      </p:sp>
+      <p:sp>
+        <p:nvSpPr>
+          <p:cNvPr id="11" name="Shape 9"/>
+          <p:cNvSpPr/>
+          <p:nvPr/>
+        </p:nvSpPr>
+        <p:spPr>
+          <a:xfrm>
+            <a:off x="3611880" y="2194560"/>
+            <a:ext cx="502920" cy="502920"/>
+          </a:xfrm>
+          <a:prstGeom prst="ellipse">
+            <a:avLst/>
+          </a:prstGeom>
+          <a:solidFill>
+            <a:srgbClr val="7C3AED"/>
+          </a:solidFill>
+          <a:ln/>
+        </p:spPr>
+      </p:sp>
+      <p:sp>
+        <p:nvSpPr>
+          <p:cNvPr id="12" name="Text 10"/>
+          <p:cNvSpPr/>
+          <p:nvPr/>
+        </p:nvSpPr>
+        <p:spPr>
+          <a:xfrm>
+            <a:off x="3611880" y="2267712"/>
+            <a:ext cx="502920" cy="411480"/>
+          </a:xfrm>
+          <a:prstGeom prst="rect">
+            <a:avLst/>
+          </a:prstGeom>
+          <a:noFill/>
+          <a:ln/>
+        </p:spPr>
+        <p:txBody>
+          <a:bodyPr wrap="square" lIns="0" tIns="0" rIns="0" bIns="0" rtlCol="0" anchor="ctr"/>
+          <a:lstStyle/>
+          <a:p>
+            <a:pPr algn="ctr" indent="0" marL="0">
+              <a:buNone/>
+            </a:pPr>
+            <a:r>
+              <a:rPr lang="en-US" sz="1600" b="1" dirty="0">
+                <a:solidFill>
+                  <a:srgbClr val="FFFFFF"/>
+                </a:solidFill>
+                <a:latin typeface="Calibri" pitchFamily="34" charset="0"/>
+                <a:ea typeface="Calibri" pitchFamily="34" charset="-122"/>
+                <a:cs typeface="Calibri" pitchFamily="34" charset="-120"/>
+              </a:rPr>
+              <a:t>2</a:t>
+            </a:r>
+            <a:endParaRPr lang="en-US" sz="1600" dirty="0"/>
+          </a:p>
+        </p:txBody>
+      </p:sp>
+      <p:sp>
+        <p:nvSpPr>
+          <p:cNvPr id="13" name="Text 11"/>
+          <p:cNvSpPr/>
+          <p:nvPr/>
+        </p:nvSpPr>
+        <p:spPr>
+          <a:xfrm>
+            <a:off x="2971800" y="2880360"/>
+            <a:ext cx="1874520" cy="365760"/>
+          </a:xfrm>
+          <a:prstGeom prst="rect">
+            <a:avLst/>
+          </a:prstGeom>
+          <a:noFill/>
+          <a:ln/>
+        </p:spPr>
+        <p:txBody>
+          <a:bodyPr wrap="square" lIns="0" tIns="0" rIns="0" bIns="0" rtlCol="0" anchor="ctr"/>
+          <a:lstStyle/>
+          <a:p>
+            <a:pPr algn="ctr" indent="0" marL="0">
+              <a:buNone/>
+            </a:pPr>
+            <a:r>
+              <a:rPr lang="en-US" sz="1600" b="1" dirty="0">
                 <a:solidFill>
                   <a:srgbClr val="F8FAFC"/>
                 </a:solidFill>
-              </a:rPr>
-              <a:t>LP share</a:t>
-            </a:r>
-            <a:endParaRPr lang="en-US" sz="1500" dirty="0"/>
-          </a:p>
-        </p:txBody>
+                <a:latin typeface="Calibri" pitchFamily="34" charset="0"/>
+                <a:ea typeface="Calibri" pitchFamily="34" charset="-122"/>
+                <a:cs typeface="Calibri" pitchFamily="34" charset="-120"/>
+              </a:rPr>
+              <a:t>Challenge</a:t>
+            </a:r>
+            <a:endParaRPr lang="en-US" sz="1600" dirty="0"/>
+          </a:p>
+        </p:txBody>
+      </p:sp>
+      <p:sp>
+        <p:nvSpPr>
+          <p:cNvPr id="14" name="Text 12"/>
+          <p:cNvSpPr/>
+          <p:nvPr/>
+        </p:nvSpPr>
+        <p:spPr>
+          <a:xfrm>
+            <a:off x="2971800" y="3337560"/>
+            <a:ext cx="1874520" cy="1097280"/>
+          </a:xfrm>
+          <a:prstGeom prst="rect">
+            <a:avLst/>
+          </a:prstGeom>
+          <a:noFill/>
+          <a:ln/>
+        </p:spPr>
+        <p:txBody>
+          <a:bodyPr wrap="square" lIns="0" tIns="0" rIns="0" bIns="0" rtlCol="0" anchor="ctr"/>
+          <a:lstStyle/>
+          <a:p>
+            <a:pPr algn="ctr" indent="0" marL="0">
+              <a:buNone/>
+            </a:pPr>
+            <a:r>
+              <a:rPr lang="en-US" sz="1200" dirty="0">
+                <a:solidFill>
+                  <a:srgbClr val="94A3B8"/>
+                </a:solidFill>
+                <a:latin typeface="Calibri" pitchFamily="34" charset="0"/>
+                <a:ea typeface="Calibri" pitchFamily="34" charset="-122"/>
+                <a:cs typeface="Calibri" pitchFamily="34" charset="-120"/>
+              </a:rPr>
+              <a:t>Public claim</a:t>
+            </a:r>
+            <a:endParaRPr lang="en-US" sz="1200" dirty="0"/>
+          </a:p>
+          <a:p>
+            <a:pPr algn="ctr" indent="0" marL="0">
+              <a:buNone/>
+            </a:pPr>
+            <a:r>
+              <a:rPr lang="en-US" sz="1200" dirty="0">
+                <a:solidFill>
+                  <a:srgbClr val="94A3B8"/>
+                </a:solidFill>
+                <a:latin typeface="Calibri" pitchFamily="34" charset="0"/>
+                <a:ea typeface="Calibri" pitchFamily="34" charset="-122"/>
+                <a:cs typeface="Calibri" pitchFamily="34" charset="-120"/>
+              </a:rPr>
+              <a:t>or private accept</a:t>
+            </a:r>
+            <a:endParaRPr lang="en-US" sz="1200" dirty="0"/>
+          </a:p>
+          <a:p>
+            <a:pPr algn="ctr" indent="0" marL="0">
+              <a:buNone/>
+            </a:pPr>
+            <a:r>
+              <a:rPr lang="en-US" sz="1200" dirty="0">
+                <a:solidFill>
+                  <a:srgbClr val="94A3B8"/>
+                </a:solidFill>
+                <a:latin typeface="Calibri" pitchFamily="34" charset="0"/>
+                <a:ea typeface="Calibri" pitchFamily="34" charset="-122"/>
+                <a:cs typeface="Calibri" pitchFamily="34" charset="-120"/>
+              </a:rPr>
+              <a:t>(Telegram / API)</a:t>
+            </a:r>
+            <a:endParaRPr lang="en-US" sz="1200" dirty="0"/>
+          </a:p>
+        </p:txBody>
+      </p:sp>
+      <p:sp>
+        <p:nvSpPr>
+          <p:cNvPr id="15" name="Shape 13"/>
+          <p:cNvSpPr/>
+          <p:nvPr/>
+        </p:nvSpPr>
+        <p:spPr>
+          <a:xfrm>
+            <a:off x="5166360" y="1965960"/>
+            <a:ext cx="2148840" cy="2743200"/>
+          </a:xfrm>
+          <a:prstGeom prst="rect">
+            <a:avLst/>
+          </a:prstGeom>
+          <a:solidFill>
+            <a:srgbClr val="151C2C"/>
+          </a:solidFill>
+          <a:ln/>
+          <a:effectLst>
+            <a:outerShdw sx="100000" sy="100000" kx="0" ky="0" algn="bl" rotWithShape="0" blurRad="228600" dist="50800" dir="8100000">
+              <a:srgbClr val="000000">
+                <a:alpha val="35000"/>
+              </a:srgbClr>
+            </a:outerShdw>
+          </a:effectLst>
+        </p:spPr>
+      </p:sp>
+      <p:sp>
+        <p:nvSpPr>
+          <p:cNvPr id="16" name="Shape 14"/>
+          <p:cNvSpPr/>
+          <p:nvPr/>
+        </p:nvSpPr>
+        <p:spPr>
+          <a:xfrm>
+            <a:off x="5943600" y="2194560"/>
+            <a:ext cx="502920" cy="502920"/>
+          </a:xfrm>
+          <a:prstGeom prst="ellipse">
+            <a:avLst/>
+          </a:prstGeom>
+          <a:solidFill>
+            <a:srgbClr val="7C3AED"/>
+          </a:solidFill>
+          <a:ln/>
+        </p:spPr>
+      </p:sp>
+      <p:sp>
+        <p:nvSpPr>
+          <p:cNvPr id="17" name="Text 15"/>
+          <p:cNvSpPr/>
+          <p:nvPr/>
+        </p:nvSpPr>
+        <p:spPr>
+          <a:xfrm>
+            <a:off x="5943600" y="2267712"/>
+            <a:ext cx="502920" cy="411480"/>
+          </a:xfrm>
+          <a:prstGeom prst="rect">
+            <a:avLst/>
+          </a:prstGeom>
+          <a:noFill/>
+          <a:ln/>
+        </p:spPr>
+        <p:txBody>
+          <a:bodyPr wrap="square" lIns="0" tIns="0" rIns="0" bIns="0" rtlCol="0" anchor="ctr"/>
+          <a:lstStyle/>
+          <a:p>
+            <a:pPr algn="ctr" indent="0" marL="0">
+              <a:buNone/>
+            </a:pPr>
+            <a:r>
+              <a:rPr lang="en-US" sz="1600" b="1" dirty="0">
+                <a:solidFill>
+                  <a:srgbClr val="FFFFFF"/>
+                </a:solidFill>
+                <a:latin typeface="Calibri" pitchFamily="34" charset="0"/>
+                <a:ea typeface="Calibri" pitchFamily="34" charset="-122"/>
+                <a:cs typeface="Calibri" pitchFamily="34" charset="-120"/>
+              </a:rPr>
+              <a:t>3</a:t>
+            </a:r>
+            <a:endParaRPr lang="en-US" sz="1600" dirty="0"/>
+          </a:p>
+        </p:txBody>
+      </p:sp>
+      <p:sp>
+        <p:nvSpPr>
+          <p:cNvPr id="18" name="Text 16"/>
+          <p:cNvSpPr/>
+          <p:nvPr/>
+        </p:nvSpPr>
+        <p:spPr>
+          <a:xfrm>
+            <a:off x="5303520" y="2880360"/>
+            <a:ext cx="1874520" cy="365760"/>
+          </a:xfrm>
+          <a:prstGeom prst="rect">
+            <a:avLst/>
+          </a:prstGeom>
+          <a:noFill/>
+          <a:ln/>
+        </p:spPr>
+        <p:txBody>
+          <a:bodyPr wrap="square" lIns="0" tIns="0" rIns="0" bIns="0" rtlCol="0" anchor="ctr"/>
+          <a:lstStyle/>
+          <a:p>
+            <a:pPr algn="ctr" indent="0" marL="0">
+              <a:buNone/>
+            </a:pPr>
+            <a:r>
+              <a:rPr lang="en-US" sz="1600" b="1" dirty="0">
+                <a:solidFill>
+                  <a:srgbClr val="F8FAFC"/>
+                </a:solidFill>
+                <a:latin typeface="Calibri" pitchFamily="34" charset="0"/>
+                <a:ea typeface="Calibri" pitchFamily="34" charset="-122"/>
+                <a:cs typeface="Calibri" pitchFamily="34" charset="-120"/>
+              </a:rPr>
+              <a:t>Lock</a:t>
+            </a:r>
+            <a:endParaRPr lang="en-US" sz="1600" dirty="0"/>
+          </a:p>
+        </p:txBody>
+      </p:sp>
+      <p:sp>
+        <p:nvSpPr>
+          <p:cNvPr id="19" name="Text 17"/>
+          <p:cNvSpPr/>
+          <p:nvPr/>
+        </p:nvSpPr>
+        <p:spPr>
+          <a:xfrm>
+            <a:off x="5303520" y="3337560"/>
+            <a:ext cx="1874520" cy="1097280"/>
+          </a:xfrm>
+          <a:prstGeom prst="rect">
+            <a:avLst/>
+          </a:prstGeom>
+          <a:noFill/>
+          <a:ln/>
+        </p:spPr>
+        <p:txBody>
+          <a:bodyPr wrap="square" lIns="0" tIns="0" rIns="0" bIns="0" rtlCol="0" anchor="ctr"/>
+          <a:lstStyle/>
+          <a:p>
+            <a:pPr algn="ctr" indent="0" marL="0">
+              <a:buNone/>
+            </a:pPr>
+            <a:r>
+              <a:rPr lang="en-US" sz="1200" dirty="0">
+                <a:solidFill>
+                  <a:srgbClr val="94A3B8"/>
+                </a:solidFill>
+                <a:latin typeface="Calibri" pitchFamily="34" charset="0"/>
+                <a:ea typeface="Calibri" pitchFamily="34" charset="-122"/>
+                <a:cs typeface="Calibri" pitchFamily="34" charset="-120"/>
+              </a:rPr>
+              <a:t>BoardmanEscrow</a:t>
+            </a:r>
+            <a:endParaRPr lang="en-US" sz="1200" dirty="0"/>
+          </a:p>
+          <a:p>
+            <a:pPr algn="ctr" indent="0" marL="0">
+              <a:buNone/>
+            </a:pPr>
+            <a:r>
+              <a:rPr lang="en-US" sz="1200" dirty="0">
+                <a:solidFill>
+                  <a:srgbClr val="94A3B8"/>
+                </a:solidFill>
+                <a:latin typeface="Calibri" pitchFamily="34" charset="0"/>
+                <a:ea typeface="Calibri" pitchFamily="34" charset="-122"/>
+                <a:cs typeface="Calibri" pitchFamily="34" charset="-120"/>
+              </a:rPr>
+              <a:t>dual-lock skill</a:t>
+            </a:r>
+            <a:endParaRPr lang="en-US" sz="1200" dirty="0"/>
+          </a:p>
+          <a:p>
+            <a:pPr algn="ctr" indent="0" marL="0">
+              <a:buNone/>
+            </a:pPr>
+            <a:r>
+              <a:rPr lang="en-US" sz="1200" dirty="0">
+                <a:solidFill>
+                  <a:srgbClr val="94A3B8"/>
+                </a:solidFill>
+                <a:latin typeface="Calibri" pitchFamily="34" charset="0"/>
+                <a:ea typeface="Calibri" pitchFamily="34" charset="-122"/>
+                <a:cs typeface="Calibri" pitchFamily="34" charset="-120"/>
+              </a:rPr>
+              <a:t>USDC on Arc</a:t>
+            </a:r>
+            <a:endParaRPr lang="en-US" sz="1200" dirty="0"/>
+          </a:p>
+        </p:txBody>
+      </p:sp>
+      <p:sp>
+        <p:nvSpPr>
+          <p:cNvPr id="20" name="Shape 18"/>
+          <p:cNvSpPr/>
+          <p:nvPr/>
+        </p:nvSpPr>
+        <p:spPr>
+          <a:xfrm>
+            <a:off x="7498080" y="1965960"/>
+            <a:ext cx="2148840" cy="2743200"/>
+          </a:xfrm>
+          <a:prstGeom prst="rect">
+            <a:avLst/>
+          </a:prstGeom>
+          <a:solidFill>
+            <a:srgbClr val="151C2C"/>
+          </a:solidFill>
+          <a:ln/>
+          <a:effectLst>
+            <a:outerShdw sx="100000" sy="100000" kx="0" ky="0" algn="bl" rotWithShape="0" blurRad="228600" dist="50800" dir="8100000">
+              <a:srgbClr val="000000">
+                <a:alpha val="35000"/>
+              </a:srgbClr>
+            </a:outerShdw>
+          </a:effectLst>
+        </p:spPr>
+      </p:sp>
+      <p:sp>
+        <p:nvSpPr>
+          <p:cNvPr id="21" name="Shape 19"/>
+          <p:cNvSpPr/>
+          <p:nvPr/>
+        </p:nvSpPr>
+        <p:spPr>
+          <a:xfrm>
+            <a:off x="8275320" y="2194560"/>
+            <a:ext cx="502920" cy="502920"/>
+          </a:xfrm>
+          <a:prstGeom prst="ellipse">
+            <a:avLst/>
+          </a:prstGeom>
+          <a:solidFill>
+            <a:srgbClr val="7C3AED"/>
+          </a:solidFill>
+          <a:ln/>
+        </p:spPr>
       </p:sp>
       <p:sp>
         <p:nvSpPr>
@@ -9217,65 +9078,381 @@
         </p:nvSpPr>
         <p:spPr>
           <a:xfrm>
-            <a:off x="4023360" y="4480560"/>
-            <a:ext cx="1645920" cy="365760"/>
-          </a:xfrm>
-          <a:prstGeom prst="rect">
-            <a:avLst/>
-          </a:prstGeom>
-          <a:noFill/>
-          <a:ln/>
-        </p:spPr>
-        <p:txBody>
-          <a:bodyPr wrap="square" lIns="0" tIns="0" rIns="0" bIns="0" rtlCol="0" anchor="ctr"/>
-          <a:lstStyle/>
-          <a:p>
-            <a:pPr indent="0" marL="0">
-              <a:buNone/>
-            </a:pPr>
-            <a:r>
-              <a:rPr lang="en-US" sz="1500" b="1" dirty="0">
+            <a:off x="8275320" y="2267712"/>
+            <a:ext cx="502920" cy="411480"/>
+          </a:xfrm>
+          <a:prstGeom prst="rect">
+            <a:avLst/>
+          </a:prstGeom>
+          <a:noFill/>
+          <a:ln/>
+        </p:spPr>
+        <p:txBody>
+          <a:bodyPr wrap="square" lIns="0" tIns="0" rIns="0" bIns="0" rtlCol="0" anchor="ctr"/>
+          <a:lstStyle/>
+          <a:p>
+            <a:pPr algn="ctr" indent="0" marL="0">
+              <a:buNone/>
+            </a:pPr>
+            <a:r>
+              <a:rPr lang="en-US" sz="1600" b="1" dirty="0">
+                <a:solidFill>
+                  <a:srgbClr val="FFFFFF"/>
+                </a:solidFill>
+                <a:latin typeface="Calibri" pitchFamily="34" charset="0"/>
+                <a:ea typeface="Calibri" pitchFamily="34" charset="-122"/>
+                <a:cs typeface="Calibri" pitchFamily="34" charset="-120"/>
+              </a:rPr>
+              <a:t>4</a:t>
+            </a:r>
+            <a:endParaRPr lang="en-US" sz="1600" dirty="0"/>
+          </a:p>
+        </p:txBody>
+      </p:sp>
+      <p:sp>
+        <p:nvSpPr>
+          <p:cNvPr id="23" name="Text 21"/>
+          <p:cNvSpPr/>
+          <p:nvPr/>
+        </p:nvSpPr>
+        <p:spPr>
+          <a:xfrm>
+            <a:off x="7635240" y="2880360"/>
+            <a:ext cx="1874520" cy="365760"/>
+          </a:xfrm>
+          <a:prstGeom prst="rect">
+            <a:avLst/>
+          </a:prstGeom>
+          <a:noFill/>
+          <a:ln/>
+        </p:spPr>
+        <p:txBody>
+          <a:bodyPr wrap="square" lIns="0" tIns="0" rIns="0" bIns="0" rtlCol="0" anchor="ctr"/>
+          <a:lstStyle/>
+          <a:p>
+            <a:pPr algn="ctr" indent="0" marL="0">
+              <a:buNone/>
+            </a:pPr>
+            <a:r>
+              <a:rPr lang="en-US" sz="1600" b="1" dirty="0">
+                <a:solidFill>
+                  <a:srgbClr val="F8FAFC"/>
+                </a:solidFill>
+                <a:latin typeface="Calibri" pitchFamily="34" charset="0"/>
+                <a:ea typeface="Calibri" pitchFamily="34" charset="-122"/>
+                <a:cs typeface="Calibri" pitchFamily="34" charset="-120"/>
+              </a:rPr>
+              <a:t>Play</a:t>
+            </a:r>
+            <a:endParaRPr lang="en-US" sz="1600" dirty="0"/>
+          </a:p>
+        </p:txBody>
+      </p:sp>
+      <p:sp>
+        <p:nvSpPr>
+          <p:cNvPr id="24" name="Text 22"/>
+          <p:cNvSpPr/>
+          <p:nvPr/>
+        </p:nvSpPr>
+        <p:spPr>
+          <a:xfrm>
+            <a:off x="7635240" y="3337560"/>
+            <a:ext cx="1874520" cy="1097280"/>
+          </a:xfrm>
+          <a:prstGeom prst="rect">
+            <a:avLst/>
+          </a:prstGeom>
+          <a:noFill/>
+          <a:ln/>
+        </p:spPr>
+        <p:txBody>
+          <a:bodyPr wrap="square" lIns="0" tIns="0" rIns="0" bIns="0" rtlCol="0" anchor="ctr"/>
+          <a:lstStyle/>
+          <a:p>
+            <a:pPr algn="ctr" indent="0" marL="0">
+              <a:buNone/>
+            </a:pPr>
+            <a:r>
+              <a:rPr lang="en-US" sz="1200" dirty="0">
+                <a:solidFill>
+                  <a:srgbClr val="94A3B8"/>
+                </a:solidFill>
+                <a:latin typeface="Calibri" pitchFamily="34" charset="0"/>
+                <a:ea typeface="Calibri" pitchFamily="34" charset="-122"/>
+                <a:cs typeface="Calibri" pitchFamily="34" charset="-120"/>
+              </a:rPr>
+              <a:t>Human skill or</a:t>
+            </a:r>
+            <a:endParaRPr lang="en-US" sz="1200" dirty="0"/>
+          </a:p>
+          <a:p>
+            <a:pPr algn="ctr" indent="0" marL="0">
+              <a:buNone/>
+            </a:pPr>
+            <a:r>
+              <a:rPr lang="en-US" sz="1200" dirty="0">
+                <a:solidFill>
+                  <a:srgbClr val="94A3B8"/>
+                </a:solidFill>
+                <a:latin typeface="Calibri" pitchFamily="34" charset="0"/>
+                <a:ea typeface="Calibri" pitchFamily="34" charset="-122"/>
+                <a:cs typeface="Calibri" pitchFamily="34" charset="-120"/>
+              </a:rPr>
+              <a:t>autonomous</a:t>
+            </a:r>
+            <a:endParaRPr lang="en-US" sz="1200" dirty="0"/>
+          </a:p>
+          <a:p>
+            <a:pPr algn="ctr" indent="0" marL="0">
+              <a:buNone/>
+            </a:pPr>
+            <a:r>
+              <a:rPr lang="en-US" sz="1200" dirty="0">
+                <a:solidFill>
+                  <a:srgbClr val="94A3B8"/>
+                </a:solidFill>
+                <a:latin typeface="Calibri" pitchFamily="34" charset="0"/>
+                <a:ea typeface="Calibri" pitchFamily="34" charset="-122"/>
+                <a:cs typeface="Calibri" pitchFamily="34" charset="-120"/>
+              </a:rPr>
+              <a:t>agent match</a:t>
+            </a:r>
+            <a:endParaRPr lang="en-US" sz="1200" dirty="0"/>
+          </a:p>
+        </p:txBody>
+      </p:sp>
+      <p:sp>
+        <p:nvSpPr>
+          <p:cNvPr id="25" name="Shape 23"/>
+          <p:cNvSpPr/>
+          <p:nvPr/>
+        </p:nvSpPr>
+        <p:spPr>
+          <a:xfrm>
+            <a:off x="9829800" y="1965960"/>
+            <a:ext cx="2148840" cy="2743200"/>
+          </a:xfrm>
+          <a:prstGeom prst="rect">
+            <a:avLst/>
+          </a:prstGeom>
+          <a:solidFill>
+            <a:srgbClr val="151C2C"/>
+          </a:solidFill>
+          <a:ln/>
+          <a:effectLst>
+            <a:outerShdw sx="100000" sy="100000" kx="0" ky="0" algn="bl" rotWithShape="0" blurRad="228600" dist="50800" dir="8100000">
+              <a:srgbClr val="000000">
+                <a:alpha val="35000"/>
+              </a:srgbClr>
+            </a:outerShdw>
+          </a:effectLst>
+        </p:spPr>
+      </p:sp>
+      <p:sp>
+        <p:nvSpPr>
+          <p:cNvPr id="26" name="Shape 24"/>
+          <p:cNvSpPr/>
+          <p:nvPr/>
+        </p:nvSpPr>
+        <p:spPr>
+          <a:xfrm>
+            <a:off x="10607040" y="2194560"/>
+            <a:ext cx="502920" cy="502920"/>
+          </a:xfrm>
+          <a:prstGeom prst="ellipse">
+            <a:avLst/>
+          </a:prstGeom>
+          <a:solidFill>
+            <a:srgbClr val="7C3AED"/>
+          </a:solidFill>
+          <a:ln/>
+        </p:spPr>
+      </p:sp>
+      <p:sp>
+        <p:nvSpPr>
+          <p:cNvPr id="27" name="Text 25"/>
+          <p:cNvSpPr/>
+          <p:nvPr/>
+        </p:nvSpPr>
+        <p:spPr>
+          <a:xfrm>
+            <a:off x="10607040" y="2267712"/>
+            <a:ext cx="502920" cy="411480"/>
+          </a:xfrm>
+          <a:prstGeom prst="rect">
+            <a:avLst/>
+          </a:prstGeom>
+          <a:noFill/>
+          <a:ln/>
+        </p:spPr>
+        <p:txBody>
+          <a:bodyPr wrap="square" lIns="0" tIns="0" rIns="0" bIns="0" rtlCol="0" anchor="ctr"/>
+          <a:lstStyle/>
+          <a:p>
+            <a:pPr algn="ctr" indent="0" marL="0">
+              <a:buNone/>
+            </a:pPr>
+            <a:r>
+              <a:rPr lang="en-US" sz="1600" b="1" dirty="0">
+                <a:solidFill>
+                  <a:srgbClr val="FFFFFF"/>
+                </a:solidFill>
+                <a:latin typeface="Calibri" pitchFamily="34" charset="0"/>
+                <a:ea typeface="Calibri" pitchFamily="34" charset="-122"/>
+                <a:cs typeface="Calibri" pitchFamily="34" charset="-120"/>
+              </a:rPr>
+              <a:t>5</a:t>
+            </a:r>
+            <a:endParaRPr lang="en-US" sz="1600" dirty="0"/>
+          </a:p>
+        </p:txBody>
+      </p:sp>
+      <p:sp>
+        <p:nvSpPr>
+          <p:cNvPr id="28" name="Text 26"/>
+          <p:cNvSpPr/>
+          <p:nvPr/>
+        </p:nvSpPr>
+        <p:spPr>
+          <a:xfrm>
+            <a:off x="9966960" y="2880360"/>
+            <a:ext cx="1874520" cy="365760"/>
+          </a:xfrm>
+          <a:prstGeom prst="rect">
+            <a:avLst/>
+          </a:prstGeom>
+          <a:noFill/>
+          <a:ln/>
+        </p:spPr>
+        <p:txBody>
+          <a:bodyPr wrap="square" lIns="0" tIns="0" rIns="0" bIns="0" rtlCol="0" anchor="ctr"/>
+          <a:lstStyle/>
+          <a:p>
+            <a:pPr algn="ctr" indent="0" marL="0">
+              <a:buNone/>
+            </a:pPr>
+            <a:r>
+              <a:rPr lang="en-US" sz="1600" b="1" dirty="0">
+                <a:solidFill>
+                  <a:srgbClr val="F8FAFC"/>
+                </a:solidFill>
+                <a:latin typeface="Calibri" pitchFamily="34" charset="0"/>
+                <a:ea typeface="Calibri" pitchFamily="34" charset="-122"/>
+                <a:cs typeface="Calibri" pitchFamily="34" charset="-120"/>
+              </a:rPr>
+              <a:t>Settle</a:t>
+            </a:r>
+            <a:endParaRPr lang="en-US" sz="1600" dirty="0"/>
+          </a:p>
+        </p:txBody>
+      </p:sp>
+      <p:sp>
+        <p:nvSpPr>
+          <p:cNvPr id="29" name="Text 27"/>
+          <p:cNvSpPr/>
+          <p:nvPr/>
+        </p:nvSpPr>
+        <p:spPr>
+          <a:xfrm>
+            <a:off x="9966960" y="3337560"/>
+            <a:ext cx="1874520" cy="1097280"/>
+          </a:xfrm>
+          <a:prstGeom prst="rect">
+            <a:avLst/>
+          </a:prstGeom>
+          <a:noFill/>
+          <a:ln/>
+        </p:spPr>
+        <p:txBody>
+          <a:bodyPr wrap="square" lIns="0" tIns="0" rIns="0" bIns="0" rtlCol="0" anchor="ctr"/>
+          <a:lstStyle/>
+          <a:p>
+            <a:pPr algn="ctr" indent="0" marL="0">
+              <a:buNone/>
+            </a:pPr>
+            <a:r>
+              <a:rPr lang="en-US" sz="1200" dirty="0">
+                <a:solidFill>
+                  <a:srgbClr val="94A3B8"/>
+                </a:solidFill>
+                <a:latin typeface="Calibri" pitchFamily="34" charset="0"/>
+                <a:ea typeface="Calibri" pitchFamily="34" charset="-122"/>
+                <a:cs typeface="Calibri" pitchFamily="34" charset="-120"/>
+              </a:rPr>
+              <a:t>Proof / outcome</a:t>
+            </a:r>
+            <a:endParaRPr lang="en-US" sz="1200" dirty="0"/>
+          </a:p>
+          <a:p>
+            <a:pPr algn="ctr" indent="0" marL="0">
+              <a:buNone/>
+            </a:pPr>
+            <a:r>
+              <a:rPr lang="en-US" sz="1200" dirty="0">
+                <a:solidFill>
+                  <a:srgbClr val="94A3B8"/>
+                </a:solidFill>
+                <a:latin typeface="Calibri" pitchFamily="34" charset="0"/>
+                <a:ea typeface="Calibri" pitchFamily="34" charset="-122"/>
+                <a:cs typeface="Calibri" pitchFamily="34" charset="-120"/>
+              </a:rPr>
+              <a:t>fees · payout</a:t>
+            </a:r>
+            <a:endParaRPr lang="en-US" sz="1200" dirty="0"/>
+          </a:p>
+          <a:p>
+            <a:pPr algn="ctr" indent="0" marL="0">
+              <a:buNone/>
+            </a:pPr>
+            <a:r>
+              <a:rPr lang="en-US" sz="1200" dirty="0">
+                <a:solidFill>
+                  <a:srgbClr val="94A3B8"/>
+                </a:solidFill>
+                <a:latin typeface="Calibri" pitchFamily="34" charset="0"/>
+                <a:ea typeface="Calibri" pitchFamily="34" charset="-122"/>
+                <a:cs typeface="Calibri" pitchFamily="34" charset="-120"/>
+              </a:rPr>
+              <a:t>run it back</a:t>
+            </a:r>
+            <a:endParaRPr lang="en-US" sz="1200" dirty="0"/>
+          </a:p>
+        </p:txBody>
+      </p:sp>
+      <p:sp>
+        <p:nvSpPr>
+          <p:cNvPr id="30" name="Text 28"/>
+          <p:cNvSpPr/>
+          <p:nvPr/>
+        </p:nvSpPr>
+        <p:spPr>
+          <a:xfrm>
+            <a:off x="640080" y="5029200"/>
+            <a:ext cx="10972800" cy="365760"/>
+          </a:xfrm>
+          <a:prstGeom prst="rect">
+            <a:avLst/>
+          </a:prstGeom>
+          <a:noFill/>
+          <a:ln/>
+        </p:spPr>
+        <p:txBody>
+          <a:bodyPr wrap="square" lIns="0" tIns="0" rIns="0" bIns="0" rtlCol="0" anchor="ctr"/>
+          <a:lstStyle/>
+          <a:p>
+            <a:pPr indent="0" marL="0">
+              <a:buNone/>
+            </a:pPr>
+            <a:r>
+              <a:rPr lang="en-US" sz="1300" i="1" dirty="0">
                 <a:solidFill>
                   <a:srgbClr val="A78BFA"/>
                 </a:solidFill>
-              </a:rPr>
-              <a:t>Policy</a:t>
-            </a:r>
-            <a:endParaRPr lang="en-US" sz="1500" dirty="0"/>
-          </a:p>
-        </p:txBody>
-      </p:sp>
-      <p:sp>
-        <p:nvSpPr>
-          <p:cNvPr id="23" name="Text 21"/>
-          <p:cNvSpPr/>
-          <p:nvPr/>
-        </p:nvSpPr>
-        <p:spPr>
-          <a:xfrm>
-            <a:off x="5943600" y="4480560"/>
-            <a:ext cx="5303520" cy="365760"/>
-          </a:xfrm>
-          <a:prstGeom prst="rect">
-            <a:avLst/>
-          </a:prstGeom>
-          <a:noFill/>
-          <a:ln/>
-        </p:spPr>
-        <p:txBody>
-          <a:bodyPr wrap="square" lIns="0" tIns="0" rIns="0" bIns="0" rtlCol="0" anchor="ctr"/>
-          <a:lstStyle/>
-          <a:p>
-            <a:pPr indent="0" marL="0">
-              <a:buNone/>
-            </a:pPr>
-            <a:r>
-              <a:rPr lang="en-US" sz="1300" dirty="0">
-                <a:solidFill>
-                  <a:srgbClr val="94A3B8"/>
-                </a:solidFill>
-              </a:rPr>
-              <a:t>Default ~40% of net skill profit to LPs; residual to bankroll</a:t>
+                <a:latin typeface="Calibri" pitchFamily="34" charset="0"/>
+                <a:ea typeface="Calibri" pitchFamily="34" charset="-122"/>
+                <a:cs typeface="Calibri" pitchFamily="34" charset="-120"/>
+              </a:rPr>
+              <a:t>Hard rule: skill escrow ≠ spectator pot. Same match. Separate ledgers. One outcome.</a:t>
             </a:r>
             <a:endParaRPr lang="en-US" sz="1300" dirty="0"/>
           </a:p>
@@ -9283,46 +9460,7 @@
       </p:sp>
       <p:sp>
         <p:nvSpPr>
-          <p:cNvPr id="24" name="Text 22"/>
-          <p:cNvSpPr/>
-          <p:nvPr/>
-        </p:nvSpPr>
-        <p:spPr>
-          <a:xfrm>
-            <a:off x="640080" y="5212080"/>
-            <a:ext cx="10972800" cy="365760"/>
-          </a:xfrm>
-          <a:prstGeom prst="rect">
-            <a:avLst/>
-          </a:prstGeom>
-          <a:noFill/>
-          <a:ln/>
-        </p:spPr>
-        <p:txBody>
-          <a:bodyPr wrap="square" lIns="0" tIns="0" rIns="0" bIns="0" rtlCol="0" anchor="ctr"/>
-          <a:lstStyle/>
-          <a:p>
-            <a:pPr indent="0" marL="0">
-              <a:buNone/>
-            </a:pPr>
-            <a:r>
-              <a:rPr lang="en-US" sz="1300" i="1" dirty="0">
-                <a:solidFill>
-                  <a:srgbClr val="64748B"/>
-                </a:solidFill>
-                <a:latin typeface="Calibri" pitchFamily="34" charset="0"/>
-                <a:ea typeface="Calibri" pitchFamily="34" charset="-122"/>
-                <a:cs typeface="Calibri" pitchFamily="34" charset="-120"/>
-              </a:rPr>
-              <a:t>Design intent: thin enough for bettors and agents to return; thick enough to fund infrastructure.</a:t>
-            </a:r>
-            <a:endParaRPr lang="en-US" sz="1300" dirty="0"/>
-          </a:p>
-        </p:txBody>
-      </p:sp>
-      <p:sp>
-        <p:nvSpPr>
-          <p:cNvPr id="25" name="Text 23"/>
+          <p:cNvPr id="31" name="Text 29"/>
           <p:cNvSpPr/>
           <p:nvPr/>
         </p:nvSpPr>
@@ -9361,14 +9499,14 @@
       </p:sp>
       <p:sp>
         <p:nvSpPr>
-          <p:cNvPr id="26" name="Text 24"/>
-          <p:cNvSpPr/>
-          <p:nvPr/>
-        </p:nvSpPr>
-        <p:spPr>
-          <a:xfrm>
-            <a:off x="4754880" y="6492240"/>
-            <a:ext cx="2743200" cy="228600"/>
+          <p:cNvPr id="32" name="Text 30"/>
+          <p:cNvSpPr/>
+          <p:nvPr/>
+        </p:nvSpPr>
+        <p:spPr>
+          <a:xfrm>
+            <a:off x="4114800" y="6492240"/>
+            <a:ext cx="4114800" cy="228600"/>
           </a:xfrm>
           <a:prstGeom prst="rect">
             <a:avLst/>
@@ -9392,7 +9530,7 @@
                 <a:ea typeface="Calibri" pitchFamily="34" charset="-122"/>
                 <a:cs typeface="Calibri" pitchFamily="34" charset="-120"/>
               </a:rPr>
-              <a:t>CONFIDENTIAL</a:t>
+              <a:t>sideQuest  ·  Encode Arc</a:t>
             </a:r>
             <a:endParaRPr lang="en-US" sz="1000" dirty="0"/>
           </a:p>
@@ -9400,7 +9538,7 @@
       </p:sp>
       <p:sp>
         <p:nvSpPr>
-          <p:cNvPr id="27" name="Text 25"/>
+          <p:cNvPr id="33" name="Text 31"/>
           <p:cNvSpPr/>
           <p:nvPr/>
         </p:nvSpPr>
@@ -9502,7 +9640,7 @@
                 <a:ea typeface="Calibri" pitchFamily="34" charset="-122"/>
                 <a:cs typeface="Calibri" pitchFamily="34" charset="-120"/>
               </a:rPr>
-              <a:t>WHY ARC</a:t>
+              <a:t>ECONOMICS</a:t>
             </a:r>
             <a:endParaRPr lang="en-US" sz="1100" dirty="0"/>
           </a:p>
@@ -9533,7 +9671,7 @@
               <a:buNone/>
             </a:pPr>
             <a:r>
-              <a:rPr lang="en-US" sz="3200" b="1" dirty="0">
+              <a:rPr lang="en-US" sz="3000" b="1" dirty="0">
                 <a:solidFill>
                   <a:srgbClr val="F8FAFC"/>
                 </a:solidFill>
@@ -9541,9 +9679,9 @@
                 <a:ea typeface="Calibri" pitchFamily="34" charset="-122"/>
                 <a:cs typeface="Calibri" pitchFamily="34" charset="-120"/>
               </a:rPr>
-              <a:t>Stablecoin settlement is the product.</a:t>
-            </a:r>
-            <a:endParaRPr lang="en-US" sz="3200" dirty="0"/>
+              <a:t>Transparent take across roles.</a:t>
+            </a:r>
+            <a:endParaRPr lang="en-US" sz="3000" dirty="0"/>
           </a:p>
         </p:txBody>
       </p:sp>
@@ -9556,7 +9694,263 @@
         <p:spPr>
           <a:xfrm>
             <a:off x="640080" y="1371600"/>
-            <a:ext cx="10972800" cy="960120"/>
+            <a:ext cx="10972800" cy="457200"/>
+          </a:xfrm>
+          <a:prstGeom prst="rect">
+            <a:avLst/>
+          </a:prstGeom>
+          <a:solidFill>
+            <a:srgbClr val="111827"/>
+          </a:solidFill>
+          <a:ln/>
+        </p:spPr>
+      </p:sp>
+      <p:sp>
+        <p:nvSpPr>
+          <p:cNvPr id="5" name="Text 3"/>
+          <p:cNvSpPr/>
+          <p:nvPr/>
+        </p:nvSpPr>
+        <p:spPr>
+          <a:xfrm>
+            <a:off x="914400" y="1444752"/>
+            <a:ext cx="3200400" cy="320040"/>
+          </a:xfrm>
+          <a:prstGeom prst="rect">
+            <a:avLst/>
+          </a:prstGeom>
+          <a:noFill/>
+          <a:ln/>
+        </p:spPr>
+        <p:txBody>
+          <a:bodyPr wrap="square" lIns="0" tIns="0" rIns="0" bIns="0" rtlCol="0" anchor="ctr"/>
+          <a:lstStyle/>
+          <a:p>
+            <a:pPr indent="0" marL="0">
+              <a:buNone/>
+            </a:pPr>
+            <a:r>
+              <a:rPr lang="en-US" sz="1100" b="1" dirty="0">
+                <a:solidFill>
+                  <a:srgbClr val="64748B"/>
+                </a:solidFill>
+              </a:rPr>
+              <a:t>RAIL</a:t>
+            </a:r>
+            <a:endParaRPr lang="en-US" sz="1100" dirty="0"/>
+          </a:p>
+        </p:txBody>
+      </p:sp>
+      <p:sp>
+        <p:nvSpPr>
+          <p:cNvPr id="6" name="Text 4"/>
+          <p:cNvSpPr/>
+          <p:nvPr/>
+        </p:nvSpPr>
+        <p:spPr>
+          <a:xfrm>
+            <a:off x="4206240" y="1444752"/>
+            <a:ext cx="1645920" cy="320040"/>
+          </a:xfrm>
+          <a:prstGeom prst="rect">
+            <a:avLst/>
+          </a:prstGeom>
+          <a:noFill/>
+          <a:ln/>
+        </p:spPr>
+        <p:txBody>
+          <a:bodyPr wrap="square" lIns="0" tIns="0" rIns="0" bIns="0" rtlCol="0" anchor="ctr"/>
+          <a:lstStyle/>
+          <a:p>
+            <a:pPr indent="0" marL="0">
+              <a:buNone/>
+            </a:pPr>
+            <a:r>
+              <a:rPr lang="en-US" sz="1100" b="1" dirty="0">
+                <a:solidFill>
+                  <a:srgbClr val="64748B"/>
+                </a:solidFill>
+              </a:rPr>
+              <a:t>RATE</a:t>
+            </a:r>
+            <a:endParaRPr lang="en-US" sz="1100" dirty="0"/>
+          </a:p>
+        </p:txBody>
+      </p:sp>
+      <p:sp>
+        <p:nvSpPr>
+          <p:cNvPr id="7" name="Text 5"/>
+          <p:cNvSpPr/>
+          <p:nvPr/>
+        </p:nvSpPr>
+        <p:spPr>
+          <a:xfrm>
+            <a:off x="6035040" y="1444752"/>
+            <a:ext cx="5303520" cy="320040"/>
+          </a:xfrm>
+          <a:prstGeom prst="rect">
+            <a:avLst/>
+          </a:prstGeom>
+          <a:noFill/>
+          <a:ln/>
+        </p:spPr>
+        <p:txBody>
+          <a:bodyPr wrap="square" lIns="0" tIns="0" rIns="0" bIns="0" rtlCol="0" anchor="ctr"/>
+          <a:lstStyle/>
+          <a:p>
+            <a:pPr indent="0" marL="0">
+              <a:buNone/>
+            </a:pPr>
+            <a:r>
+              <a:rPr lang="en-US" sz="1100" b="1" dirty="0">
+                <a:solidFill>
+                  <a:srgbClr val="64748B"/>
+                </a:solidFill>
+              </a:rPr>
+              <a:t>NOTES</a:t>
+            </a:r>
+            <a:endParaRPr lang="en-US" sz="1100" dirty="0"/>
+          </a:p>
+        </p:txBody>
+      </p:sp>
+      <p:sp>
+        <p:nvSpPr>
+          <p:cNvPr id="8" name="Shape 6"/>
+          <p:cNvSpPr/>
+          <p:nvPr/>
+        </p:nvSpPr>
+        <p:spPr>
+          <a:xfrm>
+            <a:off x="640080" y="1920240"/>
+            <a:ext cx="10972800" cy="731520"/>
+          </a:xfrm>
+          <a:prstGeom prst="rect">
+            <a:avLst/>
+          </a:prstGeom>
+          <a:solidFill>
+            <a:srgbClr val="111827"/>
+          </a:solidFill>
+          <a:ln/>
+        </p:spPr>
+      </p:sp>
+      <p:sp>
+        <p:nvSpPr>
+          <p:cNvPr id="9" name="Text 7"/>
+          <p:cNvSpPr/>
+          <p:nvPr/>
+        </p:nvSpPr>
+        <p:spPr>
+          <a:xfrm>
+            <a:off x="914400" y="2121408"/>
+            <a:ext cx="3200400" cy="365760"/>
+          </a:xfrm>
+          <a:prstGeom prst="rect">
+            <a:avLst/>
+          </a:prstGeom>
+          <a:noFill/>
+          <a:ln/>
+        </p:spPr>
+        <p:txBody>
+          <a:bodyPr wrap="square" lIns="0" tIns="0" rIns="0" bIns="0" rtlCol="0" anchor="ctr"/>
+          <a:lstStyle/>
+          <a:p>
+            <a:pPr indent="0" marL="0">
+              <a:buNone/>
+            </a:pPr>
+            <a:r>
+              <a:rPr lang="en-US" sz="1500" b="1" dirty="0">
+                <a:solidFill>
+                  <a:srgbClr val="F8FAFC"/>
+                </a:solidFill>
+              </a:rPr>
+              <a:t>Skill escrow (platform)</a:t>
+            </a:r>
+            <a:endParaRPr lang="en-US" sz="1500" dirty="0"/>
+          </a:p>
+        </p:txBody>
+      </p:sp>
+      <p:sp>
+        <p:nvSpPr>
+          <p:cNvPr id="10" name="Text 8"/>
+          <p:cNvSpPr/>
+          <p:nvPr/>
+        </p:nvSpPr>
+        <p:spPr>
+          <a:xfrm>
+            <a:off x="4206240" y="2121408"/>
+            <a:ext cx="1645920" cy="365760"/>
+          </a:xfrm>
+          <a:prstGeom prst="rect">
+            <a:avLst/>
+          </a:prstGeom>
+          <a:noFill/>
+          <a:ln/>
+        </p:spPr>
+        <p:txBody>
+          <a:bodyPr wrap="square" lIns="0" tIns="0" rIns="0" bIns="0" rtlCol="0" anchor="ctr"/>
+          <a:lstStyle/>
+          <a:p>
+            <a:pPr indent="0" marL="0">
+              <a:buNone/>
+            </a:pPr>
+            <a:r>
+              <a:rPr lang="en-US" sz="1500" b="1" dirty="0">
+                <a:solidFill>
+                  <a:srgbClr val="A78BFA"/>
+                </a:solidFill>
+              </a:rPr>
+              <a:t>3%</a:t>
+            </a:r>
+            <a:endParaRPr lang="en-US" sz="1500" dirty="0"/>
+          </a:p>
+        </p:txBody>
+      </p:sp>
+      <p:sp>
+        <p:nvSpPr>
+          <p:cNvPr id="11" name="Text 9"/>
+          <p:cNvSpPr/>
+          <p:nvPr/>
+        </p:nvSpPr>
+        <p:spPr>
+          <a:xfrm>
+            <a:off x="6035040" y="2121408"/>
+            <a:ext cx="5303520" cy="365760"/>
+          </a:xfrm>
+          <a:prstGeom prst="rect">
+            <a:avLst/>
+          </a:prstGeom>
+          <a:noFill/>
+          <a:ln/>
+        </p:spPr>
+        <p:txBody>
+          <a:bodyPr wrap="square" lIns="0" tIns="0" rIns="0" bIns="0" rtlCol="0" anchor="ctr"/>
+          <a:lstStyle/>
+          <a:p>
+            <a:pPr indent="0" marL="0">
+              <a:buNone/>
+            </a:pPr>
+            <a:r>
+              <a:rPr lang="en-US" sz="1300" dirty="0">
+                <a:solidFill>
+                  <a:srgbClr val="94A3B8"/>
+                </a:solidFill>
+              </a:rPr>
+              <a:t>Aligned with BoardmanEscrow dual-lock pot</a:t>
+            </a:r>
+            <a:endParaRPr lang="en-US" sz="1300" dirty="0"/>
+          </a:p>
+        </p:txBody>
+      </p:sp>
+      <p:sp>
+        <p:nvSpPr>
+          <p:cNvPr id="12" name="Shape 10"/>
+          <p:cNvSpPr/>
+          <p:nvPr/>
+        </p:nvSpPr>
+        <p:spPr>
+          <a:xfrm>
+            <a:off x="640080" y="2743200"/>
+            <a:ext cx="10972800" cy="731520"/>
           </a:xfrm>
           <a:prstGeom prst="rect">
             <a:avLst/>
@@ -9565,84 +9959,218 @@
             <a:srgbClr val="151C2C"/>
           </a:solidFill>
           <a:ln/>
-          <a:effectLst>
-            <a:outerShdw sx="100000" sy="100000" kx="0" ky="0" algn="bl" rotWithShape="0" blurRad="228600" dist="50800" dir="8100000">
-              <a:srgbClr val="000000">
-                <a:alpha val="35000"/>
-              </a:srgbClr>
-            </a:outerShdw>
-          </a:effectLst>
-        </p:spPr>
-      </p:sp>
-      <p:sp>
-        <p:nvSpPr>
-          <p:cNvPr id="5" name="Shape 3"/>
-          <p:cNvSpPr/>
-          <p:nvPr/>
-        </p:nvSpPr>
-        <p:spPr>
-          <a:xfrm>
-            <a:off x="640080" y="1371600"/>
-            <a:ext cx="109728" cy="960120"/>
+        </p:spPr>
+      </p:sp>
+      <p:sp>
+        <p:nvSpPr>
+          <p:cNvPr id="13" name="Text 11"/>
+          <p:cNvSpPr/>
+          <p:nvPr/>
+        </p:nvSpPr>
+        <p:spPr>
+          <a:xfrm>
+            <a:off x="914400" y="2944368"/>
+            <a:ext cx="3200400" cy="365760"/>
+          </a:xfrm>
+          <a:prstGeom prst="rect">
+            <a:avLst/>
+          </a:prstGeom>
+          <a:noFill/>
+          <a:ln/>
+        </p:spPr>
+        <p:txBody>
+          <a:bodyPr wrap="square" lIns="0" tIns="0" rIns="0" bIns="0" rtlCol="0" anchor="ctr"/>
+          <a:lstStyle/>
+          <a:p>
+            <a:pPr indent="0" marL="0">
+              <a:buNone/>
+            </a:pPr>
+            <a:r>
+              <a:rPr lang="en-US" sz="1500" b="1" dirty="0">
+                <a:solidFill>
+                  <a:srgbClr val="F8FAFC"/>
+                </a:solidFill>
+              </a:rPr>
+              <a:t>Creator skill fee</a:t>
+            </a:r>
+            <a:endParaRPr lang="en-US" sz="1500" dirty="0"/>
+          </a:p>
+        </p:txBody>
+      </p:sp>
+      <p:sp>
+        <p:nvSpPr>
+          <p:cNvPr id="14" name="Text 12"/>
+          <p:cNvSpPr/>
+          <p:nvPr/>
+        </p:nvSpPr>
+        <p:spPr>
+          <a:xfrm>
+            <a:off x="4206240" y="2944368"/>
+            <a:ext cx="1645920" cy="365760"/>
+          </a:xfrm>
+          <a:prstGeom prst="rect">
+            <a:avLst/>
+          </a:prstGeom>
+          <a:noFill/>
+          <a:ln/>
+        </p:spPr>
+        <p:txBody>
+          <a:bodyPr wrap="square" lIns="0" tIns="0" rIns="0" bIns="0" rtlCol="0" anchor="ctr"/>
+          <a:lstStyle/>
+          <a:p>
+            <a:pPr indent="0" marL="0">
+              <a:buNone/>
+            </a:pPr>
+            <a:r>
+              <a:rPr lang="en-US" sz="1500" b="1" dirty="0">
+                <a:solidFill>
+                  <a:srgbClr val="A78BFA"/>
+                </a:solidFill>
+              </a:rPr>
+              <a:t>3–10%</a:t>
+            </a:r>
+            <a:endParaRPr lang="en-US" sz="1500" dirty="0"/>
+          </a:p>
+        </p:txBody>
+      </p:sp>
+      <p:sp>
+        <p:nvSpPr>
+          <p:cNvPr id="15" name="Text 13"/>
+          <p:cNvSpPr/>
+          <p:nvPr/>
+        </p:nvSpPr>
+        <p:spPr>
+          <a:xfrm>
+            <a:off x="6035040" y="2944368"/>
+            <a:ext cx="5303520" cy="365760"/>
+          </a:xfrm>
+          <a:prstGeom prst="rect">
+            <a:avLst/>
+          </a:prstGeom>
+          <a:noFill/>
+          <a:ln/>
+        </p:spPr>
+        <p:txBody>
+          <a:bodyPr wrap="square" lIns="0" tIns="0" rIns="0" bIns="0" rtlCol="0" anchor="ctr"/>
+          <a:lstStyle/>
+          <a:p>
+            <a:pPr indent="0" marL="0">
+              <a:buNone/>
+            </a:pPr>
+            <a:r>
+              <a:rPr lang="en-US" sz="1300" dirty="0">
+                <a:solidFill>
+                  <a:srgbClr val="94A3B8"/>
+                </a:solidFill>
+              </a:rPr>
+              <a:t>Of winner gross; set at agent deploy; capped</a:t>
+            </a:r>
+            <a:endParaRPr lang="en-US" sz="1300" dirty="0"/>
+          </a:p>
+        </p:txBody>
+      </p:sp>
+      <p:sp>
+        <p:nvSpPr>
+          <p:cNvPr id="16" name="Shape 14"/>
+          <p:cNvSpPr/>
+          <p:nvPr/>
+        </p:nvSpPr>
+        <p:spPr>
+          <a:xfrm>
+            <a:off x="640080" y="3566160"/>
+            <a:ext cx="10972800" cy="731520"/>
           </a:xfrm>
           <a:prstGeom prst="rect">
             <a:avLst/>
           </a:prstGeom>
           <a:solidFill>
-            <a:srgbClr val="7C3AED"/>
+            <a:srgbClr val="111827"/>
           </a:solidFill>
           <a:ln/>
         </p:spPr>
       </p:sp>
       <p:sp>
         <p:nvSpPr>
-          <p:cNvPr id="6" name="Text 4"/>
-          <p:cNvSpPr/>
-          <p:nvPr/>
-        </p:nvSpPr>
-        <p:spPr>
-          <a:xfrm>
-            <a:off x="1051560" y="1508760"/>
-            <a:ext cx="10241280" cy="320040"/>
-          </a:xfrm>
-          <a:prstGeom prst="rect">
-            <a:avLst/>
-          </a:prstGeom>
-          <a:noFill/>
-          <a:ln/>
-        </p:spPr>
-        <p:txBody>
-          <a:bodyPr wrap="square" lIns="0" tIns="0" rIns="0" bIns="0" rtlCol="0" anchor="ctr"/>
-          <a:lstStyle/>
-          <a:p>
-            <a:pPr indent="0" marL="0">
-              <a:buNone/>
-            </a:pPr>
-            <a:r>
-              <a:rPr lang="en-US" sz="1600" b="1" dirty="0">
+          <p:cNvPr id="17" name="Text 15"/>
+          <p:cNvSpPr/>
+          <p:nvPr/>
+        </p:nvSpPr>
+        <p:spPr>
+          <a:xfrm>
+            <a:off x="914400" y="3767328"/>
+            <a:ext cx="3200400" cy="365760"/>
+          </a:xfrm>
+          <a:prstGeom prst="rect">
+            <a:avLst/>
+          </a:prstGeom>
+          <a:noFill/>
+          <a:ln/>
+        </p:spPr>
+        <p:txBody>
+          <a:bodyPr wrap="square" lIns="0" tIns="0" rIns="0" bIns="0" rtlCol="0" anchor="ctr"/>
+          <a:lstStyle/>
+          <a:p>
+            <a:pPr indent="0" marL="0">
+              <a:buNone/>
+            </a:pPr>
+            <a:r>
+              <a:rPr lang="en-US" sz="1500" b="1" dirty="0">
                 <a:solidFill>
                   <a:srgbClr val="F8FAFC"/>
                 </a:solidFill>
-                <a:latin typeface="Calibri" pitchFamily="34" charset="0"/>
-                <a:ea typeface="Calibri" pitchFamily="34" charset="-122"/>
-                <a:cs typeface="Calibri" pitchFamily="34" charset="-120"/>
-              </a:rPr>
-              <a:t>USDC as unit of account</a:t>
-            </a:r>
-            <a:endParaRPr lang="en-US" sz="1600" dirty="0"/>
-          </a:p>
-        </p:txBody>
-      </p:sp>
-      <p:sp>
-        <p:nvSpPr>
-          <p:cNvPr id="7" name="Text 5"/>
-          <p:cNvSpPr/>
-          <p:nvPr/>
-        </p:nvSpPr>
-        <p:spPr>
-          <a:xfrm>
-            <a:off x="1051560" y="1874520"/>
-            <a:ext cx="10241280" cy="320040"/>
+              </a:rPr>
+              <a:t>Spectator pot</a:t>
+            </a:r>
+            <a:endParaRPr lang="en-US" sz="1500" dirty="0"/>
+          </a:p>
+        </p:txBody>
+      </p:sp>
+      <p:sp>
+        <p:nvSpPr>
+          <p:cNvPr id="18" name="Text 16"/>
+          <p:cNvSpPr/>
+          <p:nvPr/>
+        </p:nvSpPr>
+        <p:spPr>
+          <a:xfrm>
+            <a:off x="4206240" y="3767328"/>
+            <a:ext cx="1645920" cy="365760"/>
+          </a:xfrm>
+          <a:prstGeom prst="rect">
+            <a:avLst/>
+          </a:prstGeom>
+          <a:noFill/>
+          <a:ln/>
+        </p:spPr>
+        <p:txBody>
+          <a:bodyPr wrap="square" lIns="0" tIns="0" rIns="0" bIns="0" rtlCol="0" anchor="ctr"/>
+          <a:lstStyle/>
+          <a:p>
+            <a:pPr indent="0" marL="0">
+              <a:buNone/>
+            </a:pPr>
+            <a:r>
+              <a:rPr lang="en-US" sz="1500" b="1" dirty="0">
+                <a:solidFill>
+                  <a:srgbClr val="A78BFA"/>
+                </a:solidFill>
+              </a:rPr>
+              <a:t>~5%</a:t>
+            </a:r>
+            <a:endParaRPr lang="en-US" sz="1500" dirty="0"/>
+          </a:p>
+        </p:txBody>
+      </p:sp>
+      <p:sp>
+        <p:nvSpPr>
+          <p:cNvPr id="19" name="Text 17"/>
+          <p:cNvSpPr/>
+          <p:nvPr/>
+        </p:nvSpPr>
+        <p:spPr>
+          <a:xfrm>
+            <a:off x="6035040" y="3767328"/>
+            <a:ext cx="5303520" cy="365760"/>
           </a:xfrm>
           <a:prstGeom prst="rect">
             <a:avLst/>
@@ -9662,11 +10190,8 @@
                 <a:solidFill>
                   <a:srgbClr val="94A3B8"/>
                 </a:solidFill>
-                <a:latin typeface="Calibri" pitchFamily="34" charset="0"/>
-                <a:ea typeface="Calibri" pitchFamily="34" charset="-122"/>
-                <a:cs typeface="Calibri" pitchFamily="34" charset="-120"/>
-              </a:rPr>
-              <a:t>Stakes, seeds, fees, and pots are all stable value—matching how skill markets already price risk.</a:t>
+              </a:rPr>
+              <a:t>Side book: platform + creator pool</a:t>
             </a:r>
             <a:endParaRPr lang="en-US" sz="1300" dirty="0"/>
           </a:p>
@@ -9674,14 +10199,14 @@
       </p:sp>
       <p:sp>
         <p:nvSpPr>
-          <p:cNvPr id="8" name="Shape 6"/>
-          <p:cNvSpPr/>
-          <p:nvPr/>
-        </p:nvSpPr>
-        <p:spPr>
-          <a:xfrm>
-            <a:off x="640080" y="2468880"/>
-            <a:ext cx="10972800" cy="960120"/>
+          <p:cNvPr id="20" name="Shape 18"/>
+          <p:cNvSpPr/>
+          <p:nvPr/>
+        </p:nvSpPr>
+        <p:spPr>
+          <a:xfrm>
+            <a:off x="640080" y="4389120"/>
+            <a:ext cx="10972800" cy="731520"/>
           </a:xfrm>
           <a:prstGeom prst="rect">
             <a:avLst/>
@@ -9690,84 +10215,90 @@
             <a:srgbClr val="151C2C"/>
           </a:solidFill>
           <a:ln/>
-          <a:effectLst>
-            <a:outerShdw sx="100000" sy="100000" kx="0" ky="0" algn="bl" rotWithShape="0" blurRad="228600" dist="50800" dir="8100000">
-              <a:srgbClr val="000000">
-                <a:alpha val="35000"/>
-              </a:srgbClr>
-            </a:outerShdw>
-          </a:effectLst>
-        </p:spPr>
-      </p:sp>
-      <p:sp>
-        <p:nvSpPr>
-          <p:cNvPr id="9" name="Shape 7"/>
-          <p:cNvSpPr/>
-          <p:nvPr/>
-        </p:nvSpPr>
-        <p:spPr>
-          <a:xfrm>
-            <a:off x="640080" y="2468880"/>
-            <a:ext cx="109728" cy="960120"/>
-          </a:xfrm>
-          <a:prstGeom prst="rect">
-            <a:avLst/>
-          </a:prstGeom>
-          <a:solidFill>
-            <a:srgbClr val="7C3AED"/>
-          </a:solidFill>
-          <a:ln/>
-        </p:spPr>
-      </p:sp>
-      <p:sp>
-        <p:nvSpPr>
-          <p:cNvPr id="10" name="Text 8"/>
-          <p:cNvSpPr/>
-          <p:nvPr/>
-        </p:nvSpPr>
-        <p:spPr>
-          <a:xfrm>
-            <a:off x="1051560" y="2606040"/>
-            <a:ext cx="10241280" cy="320040"/>
-          </a:xfrm>
-          <a:prstGeom prst="rect">
-            <a:avLst/>
-          </a:prstGeom>
-          <a:noFill/>
-          <a:ln/>
-        </p:spPr>
-        <p:txBody>
-          <a:bodyPr wrap="square" lIns="0" tIns="0" rIns="0" bIns="0" rtlCol="0" anchor="ctr"/>
-          <a:lstStyle/>
-          <a:p>
-            <a:pPr indent="0" marL="0">
-              <a:buNone/>
-            </a:pPr>
-            <a:r>
-              <a:rPr lang="en-US" sz="1600" b="1" dirty="0">
+        </p:spPr>
+      </p:sp>
+      <p:sp>
+        <p:nvSpPr>
+          <p:cNvPr id="21" name="Text 19"/>
+          <p:cNvSpPr/>
+          <p:nvPr/>
+        </p:nvSpPr>
+        <p:spPr>
+          <a:xfrm>
+            <a:off x="914400" y="4590288"/>
+            <a:ext cx="3200400" cy="365760"/>
+          </a:xfrm>
+          <a:prstGeom prst="rect">
+            <a:avLst/>
+          </a:prstGeom>
+          <a:noFill/>
+          <a:ln/>
+        </p:spPr>
+        <p:txBody>
+          <a:bodyPr wrap="square" lIns="0" tIns="0" rIns="0" bIns="0" rtlCol="0" anchor="ctr"/>
+          <a:lstStyle/>
+          <a:p>
+            <a:pPr indent="0" marL="0">
+              <a:buNone/>
+            </a:pPr>
+            <a:r>
+              <a:rPr lang="en-US" sz="1500" b="1" dirty="0">
                 <a:solidFill>
                   <a:srgbClr val="F8FAFC"/>
                 </a:solidFill>
-                <a:latin typeface="Calibri" pitchFamily="34" charset="0"/>
-                <a:ea typeface="Calibri" pitchFamily="34" charset="-122"/>
-                <a:cs typeface="Calibri" pitchFamily="34" charset="-120"/>
-              </a:rPr>
-              <a:t>Gas UX for real users</a:t>
-            </a:r>
-            <a:endParaRPr lang="en-US" sz="1600" dirty="0"/>
-          </a:p>
-        </p:txBody>
-      </p:sp>
-      <p:sp>
-        <p:nvSpPr>
-          <p:cNvPr id="11" name="Text 9"/>
-          <p:cNvSpPr/>
-          <p:nvPr/>
-        </p:nvSpPr>
-        <p:spPr>
-          <a:xfrm>
-            <a:off x="1051560" y="2971800"/>
-            <a:ext cx="10241280" cy="320040"/>
+              </a:rPr>
+              <a:t>LP share</a:t>
+            </a:r>
+            <a:endParaRPr lang="en-US" sz="1500" dirty="0"/>
+          </a:p>
+        </p:txBody>
+      </p:sp>
+      <p:sp>
+        <p:nvSpPr>
+          <p:cNvPr id="22" name="Text 20"/>
+          <p:cNvSpPr/>
+          <p:nvPr/>
+        </p:nvSpPr>
+        <p:spPr>
+          <a:xfrm>
+            <a:off x="4206240" y="4590288"/>
+            <a:ext cx="1645920" cy="365760"/>
+          </a:xfrm>
+          <a:prstGeom prst="rect">
+            <a:avLst/>
+          </a:prstGeom>
+          <a:noFill/>
+          <a:ln/>
+        </p:spPr>
+        <p:txBody>
+          <a:bodyPr wrap="square" lIns="0" tIns="0" rIns="0" bIns="0" rtlCol="0" anchor="ctr"/>
+          <a:lstStyle/>
+          <a:p>
+            <a:pPr indent="0" marL="0">
+              <a:buNone/>
+            </a:pPr>
+            <a:r>
+              <a:rPr lang="en-US" sz="1500" b="1" dirty="0">
+                <a:solidFill>
+                  <a:srgbClr val="A78BFA"/>
+                </a:solidFill>
+              </a:rPr>
+              <a:t>Policy</a:t>
+            </a:r>
+            <a:endParaRPr lang="en-US" sz="1500" dirty="0"/>
+          </a:p>
+        </p:txBody>
+      </p:sp>
+      <p:sp>
+        <p:nvSpPr>
+          <p:cNvPr id="23" name="Text 21"/>
+          <p:cNvSpPr/>
+          <p:nvPr/>
+        </p:nvSpPr>
+        <p:spPr>
+          <a:xfrm>
+            <a:off x="6035040" y="4590288"/>
+            <a:ext cx="5303520" cy="365760"/>
           </a:xfrm>
           <a:prstGeom prst="rect">
             <a:avLst/>
@@ -9787,11 +10318,8 @@
                 <a:solidFill>
                   <a:srgbClr val="94A3B8"/>
                 </a:solidFill>
-                <a:latin typeface="Calibri" pitchFamily="34" charset="0"/>
-                <a:ea typeface="Calibri" pitchFamily="34" charset="-122"/>
-                <a:cs typeface="Calibri" pitchFamily="34" charset="-120"/>
-              </a:rPr>
-              <a:t>USDC-native settlement narrative removes the “find test ETH first” drop-off that kills consumer crypto.</a:t>
+              </a:rPr>
+              <a:t>Share of net skill profit for bankroll backers</a:t>
             </a:r>
             <a:endParaRPr lang="en-US" sz="1300" dirty="0"/>
           </a:p>
@@ -9799,257 +10327,7 @@
       </p:sp>
       <p:sp>
         <p:nvSpPr>
-          <p:cNvPr id="12" name="Shape 10"/>
-          <p:cNvSpPr/>
-          <p:nvPr/>
-        </p:nvSpPr>
-        <p:spPr>
-          <a:xfrm>
-            <a:off x="640080" y="3566160"/>
-            <a:ext cx="10972800" cy="960120"/>
-          </a:xfrm>
-          <a:prstGeom prst="rect">
-            <a:avLst/>
-          </a:prstGeom>
-          <a:solidFill>
-            <a:srgbClr val="151C2C"/>
-          </a:solidFill>
-          <a:ln/>
-          <a:effectLst>
-            <a:outerShdw sx="100000" sy="100000" kx="0" ky="0" algn="bl" rotWithShape="0" blurRad="228600" dist="50800" dir="8100000">
-              <a:srgbClr val="000000">
-                <a:alpha val="35000"/>
-              </a:srgbClr>
-            </a:outerShdw>
-          </a:effectLst>
-        </p:spPr>
-      </p:sp>
-      <p:sp>
-        <p:nvSpPr>
-          <p:cNvPr id="13" name="Shape 11"/>
-          <p:cNvSpPr/>
-          <p:nvPr/>
-        </p:nvSpPr>
-        <p:spPr>
-          <a:xfrm>
-            <a:off x="640080" y="3566160"/>
-            <a:ext cx="109728" cy="960120"/>
-          </a:xfrm>
-          <a:prstGeom prst="rect">
-            <a:avLst/>
-          </a:prstGeom>
-          <a:solidFill>
-            <a:srgbClr val="7C3AED"/>
-          </a:solidFill>
-          <a:ln/>
-        </p:spPr>
-      </p:sp>
-      <p:sp>
-        <p:nvSpPr>
-          <p:cNvPr id="14" name="Text 12"/>
-          <p:cNvSpPr/>
-          <p:nvPr/>
-        </p:nvSpPr>
-        <p:spPr>
-          <a:xfrm>
-            <a:off x="1051560" y="3703320"/>
-            <a:ext cx="10241280" cy="320040"/>
-          </a:xfrm>
-          <a:prstGeom prst="rect">
-            <a:avLst/>
-          </a:prstGeom>
-          <a:noFill/>
-          <a:ln/>
-        </p:spPr>
-        <p:txBody>
-          <a:bodyPr wrap="square" lIns="0" tIns="0" rIns="0" bIns="0" rtlCol="0" anchor="ctr"/>
-          <a:lstStyle/>
-          <a:p>
-            <a:pPr indent="0" marL="0">
-              <a:buNone/>
-            </a:pPr>
-            <a:r>
-              <a:rPr lang="en-US" sz="1600" b="1" dirty="0">
-                <a:solidFill>
-                  <a:srgbClr val="F8FAFC"/>
-                </a:solidFill>
-                <a:latin typeface="Calibri" pitchFamily="34" charset="0"/>
-                <a:ea typeface="Calibri" pitchFamily="34" charset="-122"/>
-                <a:cs typeface="Calibri" pitchFamily="34" charset="-120"/>
-              </a:rPr>
-              <a:t>High-frequency, small ticket</a:t>
-            </a:r>
-            <a:endParaRPr lang="en-US" sz="1600" dirty="0"/>
-          </a:p>
-        </p:txBody>
-      </p:sp>
-      <p:sp>
-        <p:nvSpPr>
-          <p:cNvPr id="15" name="Text 13"/>
-          <p:cNvSpPr/>
-          <p:nvPr/>
-        </p:nvSpPr>
-        <p:spPr>
-          <a:xfrm>
-            <a:off x="1051560" y="4069080"/>
-            <a:ext cx="10241280" cy="320040"/>
-          </a:xfrm>
-          <a:prstGeom prst="rect">
-            <a:avLst/>
-          </a:prstGeom>
-          <a:noFill/>
-          <a:ln/>
-        </p:spPr>
-        <p:txBody>
-          <a:bodyPr wrap="square" lIns="0" tIns="0" rIns="0" bIns="0" rtlCol="0" anchor="ctr"/>
-          <a:lstStyle/>
-          <a:p>
-            <a:pPr indent="0" marL="0">
-              <a:buNone/>
-            </a:pPr>
-            <a:r>
-              <a:rPr lang="en-US" sz="1300" dirty="0">
-                <a:solidFill>
-                  <a:srgbClr val="94A3B8"/>
-                </a:solidFill>
-                <a:latin typeface="Calibri" pitchFamily="34" charset="0"/>
-                <a:ea typeface="Calibri" pitchFamily="34" charset="-122"/>
-                <a:cs typeface="Calibri" pitchFamily="34" charset="-120"/>
-              </a:rPr>
-              <a:t>Agent loops and casual 1v1s need cheap, predictable settlement—not casino-scale gas variance.</a:t>
-            </a:r>
-            <a:endParaRPr lang="en-US" sz="1300" dirty="0"/>
-          </a:p>
-        </p:txBody>
-      </p:sp>
-      <p:sp>
-        <p:nvSpPr>
-          <p:cNvPr id="16" name="Shape 14"/>
-          <p:cNvSpPr/>
-          <p:nvPr/>
-        </p:nvSpPr>
-        <p:spPr>
-          <a:xfrm>
-            <a:off x="640080" y="4663440"/>
-            <a:ext cx="10972800" cy="960120"/>
-          </a:xfrm>
-          <a:prstGeom prst="rect">
-            <a:avLst/>
-          </a:prstGeom>
-          <a:solidFill>
-            <a:srgbClr val="151C2C"/>
-          </a:solidFill>
-          <a:ln/>
-          <a:effectLst>
-            <a:outerShdw sx="100000" sy="100000" kx="0" ky="0" algn="bl" rotWithShape="0" blurRad="228600" dist="50800" dir="8100000">
-              <a:srgbClr val="000000">
-                <a:alpha val="35000"/>
-              </a:srgbClr>
-            </a:outerShdw>
-          </a:effectLst>
-        </p:spPr>
-      </p:sp>
-      <p:sp>
-        <p:nvSpPr>
-          <p:cNvPr id="17" name="Shape 15"/>
-          <p:cNvSpPr/>
-          <p:nvPr/>
-        </p:nvSpPr>
-        <p:spPr>
-          <a:xfrm>
-            <a:off x="640080" y="4663440"/>
-            <a:ext cx="109728" cy="960120"/>
-          </a:xfrm>
-          <a:prstGeom prst="rect">
-            <a:avLst/>
-          </a:prstGeom>
-          <a:solidFill>
-            <a:srgbClr val="7C3AED"/>
-          </a:solidFill>
-          <a:ln/>
-        </p:spPr>
-      </p:sp>
-      <p:sp>
-        <p:nvSpPr>
-          <p:cNvPr id="18" name="Text 16"/>
-          <p:cNvSpPr/>
-          <p:nvPr/>
-        </p:nvSpPr>
-        <p:spPr>
-          <a:xfrm>
-            <a:off x="1051560" y="4800600"/>
-            <a:ext cx="10241280" cy="320040"/>
-          </a:xfrm>
-          <a:prstGeom prst="rect">
-            <a:avLst/>
-          </a:prstGeom>
-          <a:noFill/>
-          <a:ln/>
-        </p:spPr>
-        <p:txBody>
-          <a:bodyPr wrap="square" lIns="0" tIns="0" rIns="0" bIns="0" rtlCol="0" anchor="ctr"/>
-          <a:lstStyle/>
-          <a:p>
-            <a:pPr indent="0" marL="0">
-              <a:buNone/>
-            </a:pPr>
-            <a:r>
-              <a:rPr lang="en-US" sz="1600" b="1" dirty="0">
-                <a:solidFill>
-                  <a:srgbClr val="F8FAFC"/>
-                </a:solidFill>
-                <a:latin typeface="Calibri" pitchFamily="34" charset="0"/>
-                <a:ea typeface="Calibri" pitchFamily="34" charset="-122"/>
-                <a:cs typeface="Calibri" pitchFamily="34" charset="-120"/>
-              </a:rPr>
-              <a:t>Programmable policy</a:t>
-            </a:r>
-            <a:endParaRPr lang="en-US" sz="1600" dirty="0"/>
-          </a:p>
-        </p:txBody>
-      </p:sp>
-      <p:sp>
-        <p:nvSpPr>
-          <p:cNvPr id="19" name="Text 17"/>
-          <p:cNvSpPr/>
-          <p:nvPr/>
-        </p:nvSpPr>
-        <p:spPr>
-          <a:xfrm>
-            <a:off x="1051560" y="5166360"/>
-            <a:ext cx="10241280" cy="320040"/>
-          </a:xfrm>
-          <a:prstGeom prst="rect">
-            <a:avLst/>
-          </a:prstGeom>
-          <a:noFill/>
-          <a:ln/>
-        </p:spPr>
-        <p:txBody>
-          <a:bodyPr wrap="square" lIns="0" tIns="0" rIns="0" bIns="0" rtlCol="0" anchor="ctr"/>
-          <a:lstStyle/>
-          <a:p>
-            <a:pPr indent="0" marL="0">
-              <a:buNone/>
-            </a:pPr>
-            <a:r>
-              <a:rPr lang="en-US" sz="1300" dirty="0">
-                <a:solidFill>
-                  <a:srgbClr val="94A3B8"/>
-                </a:solidFill>
-                <a:latin typeface="Calibri" pitchFamily="34" charset="0"/>
-                <a:ea typeface="Calibri" pitchFamily="34" charset="-122"/>
-                <a:cs typeface="Calibri" pitchFamily="34" charset="-120"/>
-              </a:rPr>
-              <a:t>Escrow, free capital, seed bps, pot caps, and creator fees are code—not social convention.</a:t>
-            </a:r>
-            <a:endParaRPr lang="en-US" sz="1300" dirty="0"/>
-          </a:p>
-        </p:txBody>
-      </p:sp>
-      <p:sp>
-        <p:nvSpPr>
-          <p:cNvPr id="20" name="Text 18"/>
+          <p:cNvPr id="24" name="Text 22"/>
           <p:cNvSpPr/>
           <p:nvPr/>
         </p:nvSpPr>
@@ -10088,14 +10366,14 @@
       </p:sp>
       <p:sp>
         <p:nvSpPr>
-          <p:cNvPr id="21" name="Text 19"/>
-          <p:cNvSpPr/>
-          <p:nvPr/>
-        </p:nvSpPr>
-        <p:spPr>
-          <a:xfrm>
-            <a:off x="4754880" y="6492240"/>
-            <a:ext cx="2743200" cy="228600"/>
+          <p:cNvPr id="25" name="Text 23"/>
+          <p:cNvSpPr/>
+          <p:nvPr/>
+        </p:nvSpPr>
+        <p:spPr>
+          <a:xfrm>
+            <a:off x="4114800" y="6492240"/>
+            <a:ext cx="4114800" cy="228600"/>
           </a:xfrm>
           <a:prstGeom prst="rect">
             <a:avLst/>
@@ -10119,7 +10397,7 @@
                 <a:ea typeface="Calibri" pitchFamily="34" charset="-122"/>
                 <a:cs typeface="Calibri" pitchFamily="34" charset="-120"/>
               </a:rPr>
-              <a:t>CONFIDENTIAL</a:t>
+              <a:t>sideQuest  ·  Encode Arc</a:t>
             </a:r>
             <a:endParaRPr lang="en-US" sz="1000" dirty="0"/>
           </a:p>
@@ -10127,7 +10405,7 @@
       </p:sp>
       <p:sp>
         <p:nvSpPr>
-          <p:cNvPr id="22" name="Text 20"/>
+          <p:cNvPr id="26" name="Text 24"/>
           <p:cNvSpPr/>
           <p:nvPr/>
         </p:nvSpPr>
@@ -10229,7 +10507,7 @@
                 <a:ea typeface="Calibri" pitchFamily="34" charset="-122"/>
                 <a:cs typeface="Calibri" pitchFamily="34" charset="-120"/>
               </a:rPr>
-              <a:t>MARKET</a:t>
+              <a:t>WHY ARC</a:t>
             </a:r>
             <a:endParaRPr lang="en-US" sz="1100" dirty="0"/>
           </a:p>
@@ -10260,7 +10538,7 @@
               <a:buNone/>
             </a:pPr>
             <a:r>
-              <a:rPr lang="en-US" sz="3200" b="1" dirty="0">
+              <a:rPr lang="en-US" sz="3000" b="1" dirty="0">
                 <a:solidFill>
                   <a:srgbClr val="F8FAFC"/>
                 </a:solidFill>
@@ -10268,9 +10546,9 @@
                 <a:ea typeface="Calibri" pitchFamily="34" charset="-122"/>
                 <a:cs typeface="Calibri" pitchFamily="34" charset="-120"/>
               </a:rPr>
-              <a:t>Where skill capital already lives.</a:t>
-            </a:r>
-            <a:endParaRPr lang="en-US" sz="3200" dirty="0"/>
+              <a:t>Stablecoin settlement is the product.</a:t>
+            </a:r>
+            <a:endParaRPr lang="en-US" sz="3000" dirty="0"/>
           </a:p>
         </p:txBody>
       </p:sp>
@@ -10282,8 +10560,8 @@
         </p:nvSpPr>
         <p:spPr>
           <a:xfrm>
-            <a:off x="640080" y="1417320"/>
-            <a:ext cx="3611880" cy="4114800"/>
+            <a:off x="640080" y="1325880"/>
+            <a:ext cx="10972800" cy="960120"/>
           </a:xfrm>
           <a:prstGeom prst="rect">
             <a:avLst/>
@@ -10303,42 +10581,23 @@
       </p:sp>
       <p:sp>
         <p:nvSpPr>
-          <p:cNvPr id="5" name="Text 3"/>
-          <p:cNvSpPr/>
-          <p:nvPr/>
-        </p:nvSpPr>
-        <p:spPr>
-          <a:xfrm>
-            <a:off x="914400" y="1691640"/>
-            <a:ext cx="3063240" cy="274320"/>
-          </a:xfrm>
-          <a:prstGeom prst="rect">
-            <a:avLst/>
-          </a:prstGeom>
-          <a:noFill/>
-          <a:ln/>
-        </p:spPr>
-        <p:txBody>
-          <a:bodyPr wrap="square" lIns="0" tIns="0" rIns="0" bIns="0" rtlCol="0" anchor="ctr"/>
-          <a:lstStyle/>
-          <a:p>
-            <a:pPr indent="0" marL="0">
-              <a:buNone/>
-            </a:pPr>
-            <a:r>
-              <a:rPr lang="en-US" sz="1100" b="1" spc="150" kern="0" dirty="0">
-                <a:solidFill>
-                  <a:srgbClr val="A78BFA"/>
-                </a:solidFill>
-                <a:latin typeface="Calibri" pitchFamily="34" charset="0"/>
-                <a:ea typeface="Calibri" pitchFamily="34" charset="-122"/>
-                <a:cs typeface="Calibri" pitchFamily="34" charset="-120"/>
-              </a:rPr>
-              <a:t>PRIMARY</a:t>
-            </a:r>
-            <a:endParaRPr lang="en-US" sz="1100" dirty="0"/>
-          </a:p>
-        </p:txBody>
+          <p:cNvPr id="5" name="Shape 3"/>
+          <p:cNvSpPr/>
+          <p:nvPr/>
+        </p:nvSpPr>
+        <p:spPr>
+          <a:xfrm>
+            <a:off x="640080" y="1325880"/>
+            <a:ext cx="109728" cy="960120"/>
+          </a:xfrm>
+          <a:prstGeom prst="rect">
+            <a:avLst/>
+          </a:prstGeom>
+          <a:solidFill>
+            <a:srgbClr val="7C3AED"/>
+          </a:solidFill>
+          <a:ln/>
+        </p:spPr>
       </p:sp>
       <p:sp>
         <p:nvSpPr>
@@ -10348,24 +10607,24 @@
         </p:nvSpPr>
         <p:spPr>
           <a:xfrm>
-            <a:off x="914400" y="2148840"/>
-            <a:ext cx="3063240" cy="640080"/>
-          </a:xfrm>
-          <a:prstGeom prst="rect">
-            <a:avLst/>
-          </a:prstGeom>
-          <a:noFill/>
-          <a:ln/>
-        </p:spPr>
-        <p:txBody>
-          <a:bodyPr wrap="square" lIns="0" tIns="0" rIns="0" bIns="0" rtlCol="0" anchor="ctr"/>
-          <a:lstStyle/>
-          <a:p>
-            <a:pPr indent="0" marL="0">
-              <a:buNone/>
-            </a:pPr>
-            <a:r>
-              <a:rPr lang="en-US" sz="2200" b="1" dirty="0">
+            <a:off x="1051560" y="1463040"/>
+            <a:ext cx="10241280" cy="320040"/>
+          </a:xfrm>
+          <a:prstGeom prst="rect">
+            <a:avLst/>
+          </a:prstGeom>
+          <a:noFill/>
+          <a:ln/>
+        </p:spPr>
+        <p:txBody>
+          <a:bodyPr wrap="square" lIns="0" tIns="0" rIns="0" bIns="0" rtlCol="0" anchor="ctr"/>
+          <a:lstStyle/>
+          <a:p>
+            <a:pPr indent="0" marL="0">
+              <a:buNone/>
+            </a:pPr>
+            <a:r>
+              <a:rPr lang="en-US" sz="1600" b="1" dirty="0">
                 <a:solidFill>
                   <a:srgbClr val="F8FAFC"/>
                 </a:solidFill>
@@ -10373,9 +10632,9 @@
                 <a:ea typeface="Calibri" pitchFamily="34" charset="-122"/>
                 <a:cs typeface="Calibri" pitchFamily="34" charset="-120"/>
               </a:rPr>
-              <a:t>Skill gaming</a:t>
-            </a:r>
-            <a:endParaRPr lang="en-US" sz="2200" dirty="0"/>
+              <a:t>USDC as unit of account</a:t>
+            </a:r>
+            <a:endParaRPr lang="en-US" sz="1600" dirty="0"/>
           </a:p>
         </p:txBody>
       </p:sp>
@@ -10387,24 +10646,24 @@
         </p:nvSpPr>
         <p:spPr>
           <a:xfrm>
-            <a:off x="914400" y="3017520"/>
-            <a:ext cx="3063240" cy="2103120"/>
-          </a:xfrm>
-          <a:prstGeom prst="rect">
-            <a:avLst/>
-          </a:prstGeom>
-          <a:noFill/>
-          <a:ln/>
-        </p:spPr>
-        <p:txBody>
-          <a:bodyPr wrap="square" lIns="0" tIns="0" rIns="0" bIns="0" rtlCol="0" anchor="ctr"/>
-          <a:lstStyle/>
-          <a:p>
-            <a:pPr indent="0" marL="0">
-              <a:buNone/>
-            </a:pPr>
-            <a:r>
-              <a:rPr lang="en-US" sz="1400" dirty="0">
+            <a:off x="1051560" y="1828800"/>
+            <a:ext cx="10241280" cy="320040"/>
+          </a:xfrm>
+          <a:prstGeom prst="rect">
+            <a:avLst/>
+          </a:prstGeom>
+          <a:noFill/>
+          <a:ln/>
+        </p:spPr>
+        <p:txBody>
+          <a:bodyPr wrap="square" lIns="0" tIns="0" rIns="0" bIns="0" rtlCol="0" anchor="ctr"/>
+          <a:lstStyle/>
+          <a:p>
+            <a:pPr indent="0" marL="0">
+              <a:buNone/>
+            </a:pPr>
+            <a:r>
+              <a:rPr lang="en-US" sz="1300" dirty="0">
                 <a:solidFill>
                   <a:srgbClr val="94A3B8"/>
                 </a:solidFill>
@@ -10412,9 +10671,9 @@
                 <a:ea typeface="Calibri" pitchFamily="34" charset="-122"/>
                 <a:cs typeface="Calibri" pitchFamily="34" charset="-120"/>
               </a:rPr>
-              <a:t>Console &amp; mobile 1v1s, local tournaments, game centers—especially emerging markets where cash stakes are common but rails are not.</a:t>
-            </a:r>
-            <a:endParaRPr lang="en-US" sz="1400" dirty="0"/>
+              <a:t>Stakes, seeds, fees, pots — stable value matching how skill markets already price risk.</a:t>
+            </a:r>
+            <a:endParaRPr lang="en-US" sz="1300" dirty="0"/>
           </a:p>
         </p:txBody>
       </p:sp>
@@ -10426,8 +10685,8 @@
         </p:nvSpPr>
         <p:spPr>
           <a:xfrm>
-            <a:off x="4434840" y="1417320"/>
-            <a:ext cx="3611880" cy="4114800"/>
+            <a:off x="640080" y="2423160"/>
+            <a:ext cx="10972800" cy="960120"/>
           </a:xfrm>
           <a:prstGeom prst="rect">
             <a:avLst/>
@@ -10447,42 +10706,23 @@
       </p:sp>
       <p:sp>
         <p:nvSpPr>
-          <p:cNvPr id="9" name="Text 7"/>
-          <p:cNvSpPr/>
-          <p:nvPr/>
-        </p:nvSpPr>
-        <p:spPr>
-          <a:xfrm>
-            <a:off x="4709160" y="1691640"/>
-            <a:ext cx="3063240" cy="274320"/>
-          </a:xfrm>
-          <a:prstGeom prst="rect">
-            <a:avLst/>
-          </a:prstGeom>
-          <a:noFill/>
-          <a:ln/>
-        </p:spPr>
-        <p:txBody>
-          <a:bodyPr wrap="square" lIns="0" tIns="0" rIns="0" bIns="0" rtlCol="0" anchor="ctr"/>
-          <a:lstStyle/>
-          <a:p>
-            <a:pPr indent="0" marL="0">
-              <a:buNone/>
-            </a:pPr>
-            <a:r>
-              <a:rPr lang="en-US" sz="1100" b="1" spc="150" kern="0" dirty="0">
-                <a:solidFill>
-                  <a:srgbClr val="A78BFA"/>
-                </a:solidFill>
-                <a:latin typeface="Calibri" pitchFamily="34" charset="0"/>
-                <a:ea typeface="Calibri" pitchFamily="34" charset="-122"/>
-                <a:cs typeface="Calibri" pitchFamily="34" charset="-120"/>
-              </a:rPr>
-              <a:t>EXPANSION</a:t>
-            </a:r>
-            <a:endParaRPr lang="en-US" sz="1100" dirty="0"/>
-          </a:p>
-        </p:txBody>
+          <p:cNvPr id="9" name="Shape 7"/>
+          <p:cNvSpPr/>
+          <p:nvPr/>
+        </p:nvSpPr>
+        <p:spPr>
+          <a:xfrm>
+            <a:off x="640080" y="2423160"/>
+            <a:ext cx="109728" cy="960120"/>
+          </a:xfrm>
+          <a:prstGeom prst="rect">
+            <a:avLst/>
+          </a:prstGeom>
+          <a:solidFill>
+            <a:srgbClr val="7C3AED"/>
+          </a:solidFill>
+          <a:ln/>
+        </p:spPr>
       </p:sp>
       <p:sp>
         <p:nvSpPr>
@@ -10492,24 +10732,24 @@
         </p:nvSpPr>
         <p:spPr>
           <a:xfrm>
-            <a:off x="4709160" y="2148840"/>
-            <a:ext cx="3063240" cy="640080"/>
-          </a:xfrm>
-          <a:prstGeom prst="rect">
-            <a:avLst/>
-          </a:prstGeom>
-          <a:noFill/>
-          <a:ln/>
-        </p:spPr>
-        <p:txBody>
-          <a:bodyPr wrap="square" lIns="0" tIns="0" rIns="0" bIns="0" rtlCol="0" anchor="ctr"/>
-          <a:lstStyle/>
-          <a:p>
-            <a:pPr indent="0" marL="0">
-              <a:buNone/>
-            </a:pPr>
-            <a:r>
-              <a:rPr lang="en-US" sz="2200" b="1" dirty="0">
+            <a:off x="1051560" y="2560320"/>
+            <a:ext cx="10241280" cy="320040"/>
+          </a:xfrm>
+          <a:prstGeom prst="rect">
+            <a:avLst/>
+          </a:prstGeom>
+          <a:noFill/>
+          <a:ln/>
+        </p:spPr>
+        <p:txBody>
+          <a:bodyPr wrap="square" lIns="0" tIns="0" rIns="0" bIns="0" rtlCol="0" anchor="ctr"/>
+          <a:lstStyle/>
+          <a:p>
+            <a:pPr indent="0" marL="0">
+              <a:buNone/>
+            </a:pPr>
+            <a:r>
+              <a:rPr lang="en-US" sz="1600" b="1" dirty="0">
                 <a:solidFill>
                   <a:srgbClr val="F8FAFC"/>
                 </a:solidFill>
@@ -10517,9 +10757,9 @@
                 <a:ea typeface="Calibri" pitchFamily="34" charset="-122"/>
                 <a:cs typeface="Calibri" pitchFamily="34" charset="-120"/>
               </a:rPr>
-              <a:t>Agent economies</a:t>
-            </a:r>
-            <a:endParaRPr lang="en-US" sz="2200" dirty="0"/>
+              <a:t>Consumer + agent UX</a:t>
+            </a:r>
+            <a:endParaRPr lang="en-US" sz="1600" dirty="0"/>
           </a:p>
         </p:txBody>
       </p:sp>
@@ -10531,24 +10771,24 @@
         </p:nvSpPr>
         <p:spPr>
           <a:xfrm>
-            <a:off x="4709160" y="3017520"/>
-            <a:ext cx="3063240" cy="2103120"/>
-          </a:xfrm>
-          <a:prstGeom prst="rect">
-            <a:avLst/>
-          </a:prstGeom>
-          <a:noFill/>
-          <a:ln/>
-        </p:spPr>
-        <p:txBody>
-          <a:bodyPr wrap="square" lIns="0" tIns="0" rIns="0" bIns="0" rtlCol="0" anchor="ctr"/>
-          <a:lstStyle/>
-          <a:p>
-            <a:pPr indent="0" marL="0">
-              <a:buNone/>
-            </a:pPr>
-            <a:r>
-              <a:rPr lang="en-US" sz="1400" dirty="0">
+            <a:off x="1051560" y="2926080"/>
+            <a:ext cx="10241280" cy="320040"/>
+          </a:xfrm>
+          <a:prstGeom prst="rect">
+            <a:avLst/>
+          </a:prstGeom>
+          <a:noFill/>
+          <a:ln/>
+        </p:spPr>
+        <p:txBody>
+          <a:bodyPr wrap="square" lIns="0" tIns="0" rIns="0" bIns="0" rtlCol="0" anchor="ctr"/>
+          <a:lstStyle/>
+          <a:p>
+            <a:pPr indent="0" marL="0">
+              <a:buNone/>
+            </a:pPr>
+            <a:r>
+              <a:rPr lang="en-US" sz="1300" dirty="0">
                 <a:solidFill>
                   <a:srgbClr val="94A3B8"/>
                 </a:solidFill>
@@ -10556,9 +10796,9 @@
                 <a:ea typeface="Calibri" pitchFamily="34" charset="-122"/>
                 <a:cs typeface="Calibri" pitchFamily="34" charset="-120"/>
               </a:rPr>
-              <a:t>Autonomous competitors need wallets, matchmaking, and fee markets. Chess is the reference game; the stack is game-agnostic.</a:t>
-            </a:r>
-            <a:endParaRPr lang="en-US" sz="1400" dirty="0"/>
+              <a:t>No “find gas ETH first” drop-off. Telegram humans and autonomous loops need predictable settlement.</a:t>
+            </a:r>
+            <a:endParaRPr lang="en-US" sz="1300" dirty="0"/>
           </a:p>
         </p:txBody>
       </p:sp>
@@ -10570,8 +10810,8 @@
         </p:nvSpPr>
         <p:spPr>
           <a:xfrm>
-            <a:off x="8229600" y="1417320"/>
-            <a:ext cx="3611880" cy="4114800"/>
+            <a:off x="640080" y="3520440"/>
+            <a:ext cx="10972800" cy="960120"/>
           </a:xfrm>
           <a:prstGeom prst="rect">
             <a:avLst/>
@@ -10591,42 +10831,23 @@
       </p:sp>
       <p:sp>
         <p:nvSpPr>
-          <p:cNvPr id="13" name="Text 11"/>
-          <p:cNvSpPr/>
-          <p:nvPr/>
-        </p:nvSpPr>
-        <p:spPr>
-          <a:xfrm>
-            <a:off x="8503920" y="1691640"/>
-            <a:ext cx="3063240" cy="274320"/>
-          </a:xfrm>
-          <a:prstGeom prst="rect">
-            <a:avLst/>
-          </a:prstGeom>
-          <a:noFill/>
-          <a:ln/>
-        </p:spPr>
-        <p:txBody>
-          <a:bodyPr wrap="square" lIns="0" tIns="0" rIns="0" bIns="0" rtlCol="0" anchor="ctr"/>
-          <a:lstStyle/>
-          <a:p>
-            <a:pPr indent="0" marL="0">
-              <a:buNone/>
-            </a:pPr>
-            <a:r>
-              <a:rPr lang="en-US" sz="1100" b="1" spc="150" kern="0" dirty="0">
-                <a:solidFill>
-                  <a:srgbClr val="A78BFA"/>
-                </a:solidFill>
-                <a:latin typeface="Calibri" pitchFamily="34" charset="0"/>
-                <a:ea typeface="Calibri" pitchFamily="34" charset="-122"/>
-                <a:cs typeface="Calibri" pitchFamily="34" charset="-120"/>
-              </a:rPr>
-              <a:t>OVERLAY</a:t>
-            </a:r>
-            <a:endParaRPr lang="en-US" sz="1100" dirty="0"/>
-          </a:p>
-        </p:txBody>
+          <p:cNvPr id="13" name="Shape 11"/>
+          <p:cNvSpPr/>
+          <p:nvPr/>
+        </p:nvSpPr>
+        <p:spPr>
+          <a:xfrm>
+            <a:off x="640080" y="3520440"/>
+            <a:ext cx="109728" cy="960120"/>
+          </a:xfrm>
+          <a:prstGeom prst="rect">
+            <a:avLst/>
+          </a:prstGeom>
+          <a:solidFill>
+            <a:srgbClr val="7C3AED"/>
+          </a:solidFill>
+          <a:ln/>
+        </p:spPr>
       </p:sp>
       <p:sp>
         <p:nvSpPr>
@@ -10636,24 +10857,24 @@
         </p:nvSpPr>
         <p:spPr>
           <a:xfrm>
-            <a:off x="8503920" y="2148840"/>
-            <a:ext cx="3063240" cy="640080"/>
-          </a:xfrm>
-          <a:prstGeom prst="rect">
-            <a:avLst/>
-          </a:prstGeom>
-          <a:noFill/>
-          <a:ln/>
-        </p:spPr>
-        <p:txBody>
-          <a:bodyPr wrap="square" lIns="0" tIns="0" rIns="0" bIns="0" rtlCol="0" anchor="ctr"/>
-          <a:lstStyle/>
-          <a:p>
-            <a:pPr indent="0" marL="0">
-              <a:buNone/>
-            </a:pPr>
-            <a:r>
-              <a:rPr lang="en-US" sz="2200" b="1" dirty="0">
+            <a:off x="1051560" y="3657600"/>
+            <a:ext cx="10241280" cy="320040"/>
+          </a:xfrm>
+          <a:prstGeom prst="rect">
+            <a:avLst/>
+          </a:prstGeom>
+          <a:noFill/>
+          <a:ln/>
+        </p:spPr>
+        <p:txBody>
+          <a:bodyPr wrap="square" lIns="0" tIns="0" rIns="0" bIns="0" rtlCol="0" anchor="ctr"/>
+          <a:lstStyle/>
+          <a:p>
+            <a:pPr indent="0" marL="0">
+              <a:buNone/>
+            </a:pPr>
+            <a:r>
+              <a:rPr lang="en-US" sz="1600" b="1" dirty="0">
                 <a:solidFill>
                   <a:srgbClr val="F8FAFC"/>
                 </a:solidFill>
@@ -10661,9 +10882,9 @@
                 <a:ea typeface="Calibri" pitchFamily="34" charset="-122"/>
                 <a:cs typeface="Calibri" pitchFamily="34" charset="-120"/>
               </a:rPr>
-              <a:t>Spectator markets</a:t>
-            </a:r>
-            <a:endParaRPr lang="en-US" sz="2200" dirty="0"/>
+              <a:t>Programmable policy</a:t>
+            </a:r>
+            <a:endParaRPr lang="en-US" sz="1600" dirty="0"/>
           </a:p>
         </p:txBody>
       </p:sp>
@@ -10675,24 +10896,24 @@
         </p:nvSpPr>
         <p:spPr>
           <a:xfrm>
-            <a:off x="8503920" y="3017520"/>
-            <a:ext cx="3063240" cy="2103120"/>
-          </a:xfrm>
-          <a:prstGeom prst="rect">
-            <a:avLst/>
-          </a:prstGeom>
-          <a:noFill/>
-          <a:ln/>
-        </p:spPr>
-        <p:txBody>
-          <a:bodyPr wrap="square" lIns="0" tIns="0" rIns="0" bIns="0" rtlCol="0" anchor="ctr"/>
-          <a:lstStyle/>
-          <a:p>
-            <a:pPr indent="0" marL="0">
-              <a:buNone/>
-            </a:pPr>
-            <a:r>
-              <a:rPr lang="en-US" sz="1400" dirty="0">
+            <a:off x="1051560" y="4023360"/>
+            <a:ext cx="10241280" cy="320040"/>
+          </a:xfrm>
+          <a:prstGeom prst="rect">
+            <a:avLst/>
+          </a:prstGeom>
+          <a:noFill/>
+          <a:ln/>
+        </p:spPr>
+        <p:txBody>
+          <a:bodyPr wrap="square" lIns="0" tIns="0" rIns="0" bIns="0" rtlCol="0" anchor="ctr"/>
+          <a:lstStyle/>
+          <a:p>
+            <a:pPr indent="0" marL="0">
+              <a:buNone/>
+            </a:pPr>
+            <a:r>
+              <a:rPr lang="en-US" sz="1300" dirty="0">
                 <a:solidFill>
                   <a:srgbClr val="94A3B8"/>
                 </a:solidFill>
@@ -10700,15 +10921,140 @@
                 <a:ea typeface="Calibri" pitchFamily="34" charset="-122"/>
                 <a:cs typeface="Calibri" pitchFamily="34" charset="-120"/>
               </a:rPr>
-              <a:t>Side liquidity on finite outcomes—prediction without replacing the skill escrow that defines the contest.</a:t>
-            </a:r>
-            <a:endParaRPr lang="en-US" sz="1400" dirty="0"/>
-          </a:p>
-        </p:txBody>
-      </p:sp>
-      <p:sp>
-        <p:nvSpPr>
-          <p:cNvPr id="16" name="Text 14"/>
+              <a:t>Escrow, free capital, seed bps, pot caps, creator fees are code — not group-chat convention.</a:t>
+            </a:r>
+            <a:endParaRPr lang="en-US" sz="1300" dirty="0"/>
+          </a:p>
+        </p:txBody>
+      </p:sp>
+      <p:sp>
+        <p:nvSpPr>
+          <p:cNvPr id="16" name="Shape 14"/>
+          <p:cNvSpPr/>
+          <p:nvPr/>
+        </p:nvSpPr>
+        <p:spPr>
+          <a:xfrm>
+            <a:off x="640080" y="4617720"/>
+            <a:ext cx="10972800" cy="960120"/>
+          </a:xfrm>
+          <a:prstGeom prst="rect">
+            <a:avLst/>
+          </a:prstGeom>
+          <a:solidFill>
+            <a:srgbClr val="151C2C"/>
+          </a:solidFill>
+          <a:ln/>
+          <a:effectLst>
+            <a:outerShdw sx="100000" sy="100000" kx="0" ky="0" algn="bl" rotWithShape="0" blurRad="228600" dist="50800" dir="8100000">
+              <a:srgbClr val="000000">
+                <a:alpha val="35000"/>
+              </a:srgbClr>
+            </a:outerShdw>
+          </a:effectLst>
+        </p:spPr>
+      </p:sp>
+      <p:sp>
+        <p:nvSpPr>
+          <p:cNvPr id="17" name="Shape 15"/>
+          <p:cNvSpPr/>
+          <p:nvPr/>
+        </p:nvSpPr>
+        <p:spPr>
+          <a:xfrm>
+            <a:off x="640080" y="4617720"/>
+            <a:ext cx="109728" cy="960120"/>
+          </a:xfrm>
+          <a:prstGeom prst="rect">
+            <a:avLst/>
+          </a:prstGeom>
+          <a:solidFill>
+            <a:srgbClr val="7C3AED"/>
+          </a:solidFill>
+          <a:ln/>
+        </p:spPr>
+      </p:sp>
+      <p:sp>
+        <p:nvSpPr>
+          <p:cNvPr id="18" name="Text 16"/>
+          <p:cNvSpPr/>
+          <p:nvPr/>
+        </p:nvSpPr>
+        <p:spPr>
+          <a:xfrm>
+            <a:off x="1051560" y="4754880"/>
+            <a:ext cx="10241280" cy="320040"/>
+          </a:xfrm>
+          <a:prstGeom prst="rect">
+            <a:avLst/>
+          </a:prstGeom>
+          <a:noFill/>
+          <a:ln/>
+        </p:spPr>
+        <p:txBody>
+          <a:bodyPr wrap="square" lIns="0" tIns="0" rIns="0" bIns="0" rtlCol="0" anchor="ctr"/>
+          <a:lstStyle/>
+          <a:p>
+            <a:pPr indent="0" marL="0">
+              <a:buNone/>
+            </a:pPr>
+            <a:r>
+              <a:rPr lang="en-US" sz="1600" b="1" dirty="0">
+                <a:solidFill>
+                  <a:srgbClr val="F8FAFC"/>
+                </a:solidFill>
+                <a:latin typeface="Calibri" pitchFamily="34" charset="0"/>
+                <a:ea typeface="Calibri" pitchFamily="34" charset="-122"/>
+                <a:cs typeface="Calibri" pitchFamily="34" charset="-120"/>
+              </a:rPr>
+              <a:t>One chain story</a:t>
+            </a:r>
+            <a:endParaRPr lang="en-US" sz="1600" dirty="0"/>
+          </a:p>
+        </p:txBody>
+      </p:sp>
+      <p:sp>
+        <p:nvSpPr>
+          <p:cNvPr id="19" name="Text 17"/>
+          <p:cNvSpPr/>
+          <p:nvPr/>
+        </p:nvSpPr>
+        <p:spPr>
+          <a:xfrm>
+            <a:off x="1051560" y="5120640"/>
+            <a:ext cx="10241280" cy="320040"/>
+          </a:xfrm>
+          <a:prstGeom prst="rect">
+            <a:avLst/>
+          </a:prstGeom>
+          <a:noFill/>
+          <a:ln/>
+        </p:spPr>
+        <p:txBody>
+          <a:bodyPr wrap="square" lIns="0" tIns="0" rIns="0" bIns="0" rtlCol="0" anchor="ctr"/>
+          <a:lstStyle/>
+          <a:p>
+            <a:pPr indent="0" marL="0">
+              <a:buNone/>
+            </a:pPr>
+            <a:r>
+              <a:rPr lang="en-US" sz="1300" dirty="0">
+                <a:solidFill>
+                  <a:srgbClr val="94A3B8"/>
+                </a:solidFill>
+                <a:latin typeface="Calibri" pitchFamily="34" charset="0"/>
+                <a:ea typeface="Calibri" pitchFamily="34" charset="-122"/>
+                <a:cs typeface="Calibri" pitchFamily="34" charset="-120"/>
+              </a:rPr>
+              <a:t>Humans and agents share the dual-lock primitive on Arc testnet today; mainnet path is clear.</a:t>
+            </a:r>
+            <a:endParaRPr lang="en-US" sz="1300" dirty="0"/>
+          </a:p>
+        </p:txBody>
+      </p:sp>
+      <p:sp>
+        <p:nvSpPr>
+          <p:cNvPr id="20" name="Text 18"/>
           <p:cNvSpPr/>
           <p:nvPr/>
         </p:nvSpPr>
@@ -10747,14 +11093,14 @@
       </p:sp>
       <p:sp>
         <p:nvSpPr>
-          <p:cNvPr id="17" name="Text 15"/>
-          <p:cNvSpPr/>
-          <p:nvPr/>
-        </p:nvSpPr>
-        <p:spPr>
-          <a:xfrm>
-            <a:off x="4754880" y="6492240"/>
-            <a:ext cx="2743200" cy="228600"/>
+          <p:cNvPr id="21" name="Text 19"/>
+          <p:cNvSpPr/>
+          <p:nvPr/>
+        </p:nvSpPr>
+        <p:spPr>
+          <a:xfrm>
+            <a:off x="4114800" y="6492240"/>
+            <a:ext cx="4114800" cy="228600"/>
           </a:xfrm>
           <a:prstGeom prst="rect">
             <a:avLst/>
@@ -10778,7 +11124,7 @@
                 <a:ea typeface="Calibri" pitchFamily="34" charset="-122"/>
                 <a:cs typeface="Calibri" pitchFamily="34" charset="-120"/>
               </a:rPr>
-              <a:t>CONFIDENTIAL</a:t>
+              <a:t>sideQuest  ·  Encode Arc</a:t>
             </a:r>
             <a:endParaRPr lang="en-US" sz="1000" dirty="0"/>
           </a:p>
@@ -10786,7 +11132,7 @@
       </p:sp>
       <p:sp>
         <p:nvSpPr>
-          <p:cNvPr id="18" name="Text 16"/>
+          <p:cNvPr id="22" name="Text 20"/>
           <p:cNvSpPr/>
           <p:nvPr/>
         </p:nvSpPr>
